--- a/docs/SHIC-Cost-Estimator-User-Manual.pptx
+++ b/docs/SHIC-Cost-Estimator-User-Manual.pptx
@@ -25,9 +25,10 @@
     <p:sldId id="273" r:id="rId19"/>
     <p:sldId id="274" r:id="rId20"/>
     <p:sldId id="275" r:id="rId21"/>
+    <p:sldId id="276" r:id="rId22"/>
   </p:sldIdLst>
   <p:notesMasterIdLst>
-    <p:notesMasterId r:id="rId22"/>
+    <p:notesMasterId r:id="rId23"/>
   </p:notesMasterIdLst>
   <p:sldSz cx="12192000" cy="6858000"/>
   <p:notesSz cx="6858000" cy="12192000"/>
@@ -609,7 +610,7 @@
           <a:p>
             <a:r>
               <a:rPr lang="en-US" dirty="0"/>
-              <a:t>The Days column exists on Tools only — equipment is often hired by the day. Materials and PPE are one-off purchases.</a:t>
+              <a:t>This is the step people forget, and it is the one that changes the price. Consolidate before you generate the CE. The uplift is not an error — it is the cost of having the crew on site for the whole job.</a:t>
             </a:r>
             <a:endParaRPr lang="en-US" dirty="0"/>
           </a:p>
@@ -697,7 +698,7 @@
           <a:p>
             <a:r>
               <a:rPr lang="en-US" dirty="0"/>
-              <a:t>The category headings change slightly by CE type — Supply jobs use Allowance instead of Accommodation.</a:t>
+              <a:t>The Days column exists on Tools only — equipment is often hired by the day. Materials and PPE are one-off purchases.</a:t>
             </a:r>
             <a:endParaRPr lang="en-US" dirty="0"/>
           </a:p>
@@ -785,7 +786,7 @@
           <a:p>
             <a:r>
               <a:rPr lang="en-US" dirty="0"/>
-              <a:t>The margin is saved with the CE. Until recently it was silently discarded on save — if you reopen an old CE and the selling price line is missing, that is why.</a:t>
+              <a:t>The category headings change slightly by CE type — Supply jobs use Allowance instead of Accommodation.</a:t>
             </a:r>
             <a:endParaRPr lang="en-US" dirty="0"/>
           </a:p>
@@ -873,7 +874,7 @@
           <a:p>
             <a:r>
               <a:rPr lang="en-US" dirty="0"/>
-              <a:t>Make clear that Check CE is advisory, not a lock. The only hard blocks are the four listed at the bottom.</a:t>
+              <a:t>The margin is saved with the CE. Until recently it was silently discarded on save — if you reopen an old CE and the selling price line is missing, that is why.</a:t>
             </a:r>
             <a:endParaRPr lang="en-US" dirty="0"/>
           </a:p>
@@ -961,7 +962,7 @@
           <a:p>
             <a:r>
               <a:rPr lang="en-US" dirty="0"/>
-              <a:t>Draft vs Save is the distinction people get wrong. A draft is private and unfinished; a saved CE is the record the team sees.</a:t>
+              <a:t>Make clear that Check CE is advisory, not a lock. The only hard blocks are the four listed at the bottom.</a:t>
             </a:r>
             <a:endParaRPr lang="en-US" dirty="0"/>
           </a:p>
@@ -1049,7 +1050,7 @@
           <a:p>
             <a:r>
               <a:rPr lang="en-US" dirty="0"/>
-              <a:t>Generate CE is the deliverable. Everything before it exists to make this page right.</a:t>
+              <a:t>Draft vs Save is the distinction people get wrong. A draft is private and unfinished; a saved CE is the record the team sees.</a:t>
             </a:r>
             <a:endParaRPr lang="en-US" dirty="0"/>
           </a:p>
@@ -1137,7 +1138,7 @@
           <a:p>
             <a:r>
               <a:rPr lang="en-US" dirty="0"/>
-              <a:t>Monitoring is the register the whole team reads. Keeping status and remarks current is what makes it worth having.</a:t>
+              <a:t>Generate CE is the deliverable. Everything before it exists to make this page right.</a:t>
             </a:r>
             <a:endParaRPr lang="en-US" dirty="0"/>
           </a:p>
@@ -1225,7 +1226,7 @@
           <a:p>
             <a:r>
               <a:rPr lang="en-US" dirty="0"/>
-              <a:t>Reassure people. The most common support call is someone who saved offline and thinks their work is gone.</a:t>
+              <a:t>Monitoring is the register the whole team reads. Keeping status and remarks current is what makes it worth having.</a:t>
             </a:r>
             <a:endParaRPr lang="en-US" dirty="0"/>
           </a:p>
@@ -1313,7 +1314,7 @@
           <a:p>
             <a:r>
               <a:rPr lang="en-US" dirty="0"/>
-              <a:t>The middle one matters most: a permission refusal is not a session problem, and signing in again just wastes time.</a:t>
+              <a:t>Reassure people. The most common support call is someone who saved offline and thinks their work is gone.</a:t>
             </a:r>
             <a:endParaRPr lang="en-US" dirty="0"/>
           </a:p>
@@ -1401,7 +1402,7 @@
           <a:p>
             <a:r>
               <a:rPr lang="en-US" dirty="0"/>
-              <a:t>Whoever maintains rates should own the Masterlist. Estimators should be picking from it, not typing over it.</a:t>
+              <a:t>The middle one matters most: a permission refusal is not a session problem, and signing in again just wastes time.</a:t>
             </a:r>
             <a:endParaRPr lang="en-US" dirty="0"/>
           </a:p>
@@ -1577,7 +1578,7 @@
           <a:p>
             <a:r>
               <a:rPr lang="en-US" dirty="0"/>
-              <a:t>Close by pointing people at Check CE. It answers most "why is this number wrong" questions without a support call.</a:t>
+              <a:t>Whoever maintains rates should own the Masterlist. Estimators should be picking from it, not typing over it.</a:t>
             </a:r>
             <a:endParaRPr lang="en-US" dirty="0"/>
           </a:p>
@@ -1601,6 +1602,94 @@
             <a:fld id="{F7021451-1387-4CA6-816F-3879F97B5CBC}" type="slidenum">
               <a:rPr lang="en-US"/>
               <a:t>20</a:t>
+            </a:fld>
+            <a:endParaRPr lang="en-US"/>
+          </a:p>
+        </p:txBody>
+      </p:sp>
+    </p:spTree>
+    <p:extLst>
+      <p:ext uri="{BB962C8B-B14F-4D97-AF65-F5344CB8AC3E}">
+        <p14:creationId xmlns:p14="http://schemas.microsoft.com/office/powerpoint/2010/main" val="1024086991"/>
+      </p:ext>
+    </p:extLst>
+  </p:cSld>
+  <p:clrMapOvr>
+    <a:masterClrMapping/>
+  </p:clrMapOvr>
+</p:notes>
+</file>
+
+<file path=ppt/notesSlides/notesSlide21.xml><?xml version="1.0" encoding="utf-8"?>
+<p:notes xmlns:a="http://schemas.openxmlformats.org/drawingml/2006/main" xmlns:r="http://schemas.openxmlformats.org/officeDocument/2006/relationships" xmlns:p="http://schemas.openxmlformats.org/presentationml/2006/main">
+  <p:cSld>
+    <p:spTree>
+      <p:nvGrpSpPr>
+        <p:cNvPr id="1" name=""/>
+        <p:cNvGrpSpPr/>
+        <p:nvPr/>
+      </p:nvGrpSpPr>
+      <p:grpSpPr>
+        <a:xfrm>
+          <a:off x="0" y="0"/>
+          <a:ext cx="0" cy="0"/>
+          <a:chOff x="0" y="0"/>
+          <a:chExt cx="0" cy="0"/>
+        </a:xfrm>
+      </p:grpSpPr>
+      <p:sp>
+        <p:nvSpPr>
+          <p:cNvPr id="2" name="Slide Image Placeholder 1"/>
+          <p:cNvSpPr>
+            <a:spLocks noGrp="1" noRot="1" noChangeAspect="1"/>
+          </p:cNvSpPr>
+          <p:nvPr>
+            <p:ph type="sldImg"/>
+          </p:nvPr>
+        </p:nvSpPr>
+        <p:spPr/>
+      </p:sp>
+      <p:sp>
+        <p:nvSpPr>
+          <p:cNvPr id="3" name="Notes Placeholder 2"/>
+          <p:cNvSpPr>
+            <a:spLocks noGrp="1"/>
+          </p:cNvSpPr>
+          <p:nvPr>
+            <p:ph type="body" idx="1"/>
+          </p:nvPr>
+        </p:nvSpPr>
+        <p:spPr/>
+        <p:txBody>
+          <a:bodyPr/>
+          <a:lstStyle/>
+          <a:p>
+            <a:r>
+              <a:rPr lang="en-US" dirty="0"/>
+              <a:t>Close by pointing people at Check CE. It answers most "why is this number wrong" questions without a support call.</a:t>
+            </a:r>
+            <a:endParaRPr lang="en-US" dirty="0"/>
+          </a:p>
+        </p:txBody>
+      </p:sp>
+      <p:sp>
+        <p:nvSpPr>
+          <p:cNvPr id="4" name="Slide Number Placeholder 3"/>
+          <p:cNvSpPr>
+            <a:spLocks noGrp="1"/>
+          </p:cNvSpPr>
+          <p:nvPr>
+            <p:ph type="sldNum" sz="quarter" idx="10"/>
+          </p:nvPr>
+        </p:nvSpPr>
+        <p:spPr/>
+        <p:txBody>
+          <a:bodyPr/>
+          <a:lstStyle/>
+          <a:p>
+            <a:fld id="{F7021451-1387-4CA6-816F-3879F97B5CBC}" type="slidenum">
+              <a:rPr lang="en-US"/>
+              <a:t>21</a:t>
             </a:fld>
             <a:endParaRPr lang="en-US"/>
           </a:p>
@@ -3124,6 +3213,1773 @@
                 <a:ea typeface="Arial" pitchFamily="34" charset="-122"/>
                 <a:cs typeface="Arial" pitchFamily="34" charset="-120"/>
               </a:rPr>
+              <a:t>STEP 4 · CONSOLIDATE</a:t>
+            </a:r>
+            <a:endParaRPr lang="en-US" sz="1100" dirty="0"/>
+          </a:p>
+        </p:txBody>
+      </p:sp>
+      <p:sp>
+        <p:nvSpPr>
+          <p:cNvPr id="3" name="Text 1"/>
+          <p:cNvSpPr/>
+          <p:nvPr/>
+        </p:nvSpPr>
+        <p:spPr>
+          <a:xfrm>
+            <a:off x="566928" y="694944"/>
+            <a:ext cx="11055096" cy="566928"/>
+          </a:xfrm>
+          <a:prstGeom prst="rect">
+            <a:avLst/>
+          </a:prstGeom>
+          <a:noFill/>
+          <a:ln/>
+        </p:spPr>
+        <p:txBody>
+          <a:bodyPr wrap="square" lIns="0" tIns="0" rIns="0" bIns="0" rtlCol="0" anchor="ctr"/>
+          <a:lstStyle/>
+          <a:p>
+            <a:pPr indent="0" marL="0">
+              <a:buNone/>
+            </a:pPr>
+            <a:r>
+              <a:rPr lang="en-US" sz="3200" b="1" dirty="0">
+                <a:solidFill>
+                  <a:srgbClr val="E6EDF3"/>
+                </a:solidFill>
+                <a:latin typeface="Arial" pitchFamily="34" charset="0"/>
+                <a:ea typeface="Arial" pitchFamily="34" charset="-122"/>
+                <a:cs typeface="Arial" pitchFamily="34" charset="-120"/>
+              </a:rPr>
+              <a:t>One crew, several tasks</a:t>
+            </a:r>
+            <a:endParaRPr lang="en-US" sz="3200" dirty="0"/>
+          </a:p>
+        </p:txBody>
+      </p:sp>
+      <p:sp>
+        <p:nvSpPr>
+          <p:cNvPr id="4" name="Text 2"/>
+          <p:cNvSpPr/>
+          <p:nvPr/>
+        </p:nvSpPr>
+        <p:spPr>
+          <a:xfrm>
+            <a:off x="566928" y="1298448"/>
+            <a:ext cx="10972800" cy="365760"/>
+          </a:xfrm>
+          <a:prstGeom prst="rect">
+            <a:avLst/>
+          </a:prstGeom>
+          <a:noFill/>
+          <a:ln/>
+        </p:spPr>
+        <p:txBody>
+          <a:bodyPr wrap="square" lIns="0" tIns="0" rIns="0" bIns="0" rtlCol="0" anchor="t"/>
+          <a:lstStyle/>
+          <a:p>
+            <a:pPr algn="l" indent="0" marL="0">
+              <a:lnSpc>
+                <a:spcPts val="2000"/>
+              </a:lnSpc>
+              <a:buNone/>
+            </a:pPr>
+            <a:r>
+              <a:rPr lang="en-US" sz="1400" dirty="0">
+                <a:solidFill>
+                  <a:srgbClr val="9AA4AF"/>
+                </a:solidFill>
+                <a:latin typeface="Calibri" pitchFamily="34" charset="0"/>
+                <a:ea typeface="Calibri" pitchFamily="34" charset="-122"/>
+                <a:cs typeface="Calibri" pitchFamily="34" charset="-120"/>
+              </a:rPr>
+              <a:t>The same electrician appears under every task that needs one. Combine them into the crew you actually mobilise.</a:t>
+            </a:r>
+            <a:endParaRPr lang="en-US" sz="1400" dirty="0"/>
+          </a:p>
+        </p:txBody>
+      </p:sp>
+      <p:sp>
+        <p:nvSpPr>
+          <p:cNvPr id="5" name="Text 3"/>
+          <p:cNvSpPr/>
+          <p:nvPr/>
+        </p:nvSpPr>
+        <p:spPr>
+          <a:xfrm>
+            <a:off x="566928" y="1911096"/>
+            <a:ext cx="2743200" cy="256032"/>
+          </a:xfrm>
+          <a:prstGeom prst="rect">
+            <a:avLst/>
+          </a:prstGeom>
+          <a:noFill/>
+          <a:ln/>
+        </p:spPr>
+        <p:txBody>
+          <a:bodyPr wrap="square" lIns="0" tIns="0" rIns="0" bIns="0" rtlCol="0" anchor="ctr"/>
+          <a:lstStyle/>
+          <a:p>
+            <a:pPr algn="l" indent="0" marL="0">
+              <a:buNone/>
+            </a:pPr>
+            <a:endParaRPr lang="en-US" sz="850" dirty="0"/>
+          </a:p>
+        </p:txBody>
+      </p:sp>
+      <p:sp>
+        <p:nvSpPr>
+          <p:cNvPr id="6" name="Text 4"/>
+          <p:cNvSpPr/>
+          <p:nvPr/>
+        </p:nvSpPr>
+        <p:spPr>
+          <a:xfrm>
+            <a:off x="3310128" y="1911096"/>
+            <a:ext cx="1143000" cy="256032"/>
+          </a:xfrm>
+          <a:prstGeom prst="rect">
+            <a:avLst/>
+          </a:prstGeom>
+          <a:noFill/>
+          <a:ln/>
+        </p:spPr>
+        <p:txBody>
+          <a:bodyPr wrap="square" lIns="0" tIns="0" rIns="0" bIns="0" rtlCol="0" anchor="ctr"/>
+          <a:lstStyle/>
+          <a:p>
+            <a:pPr algn="ctr" indent="0" marL="0">
+              <a:buNone/>
+            </a:pPr>
+            <a:r>
+              <a:rPr lang="en-US" sz="850" b="1" spc="100" kern="0" dirty="0">
+                <a:solidFill>
+                  <a:srgbClr val="9AA4AF"/>
+                </a:solidFill>
+                <a:latin typeface="Calibri" pitchFamily="34" charset="0"/>
+                <a:ea typeface="Calibri" pitchFamily="34" charset="-122"/>
+                <a:cs typeface="Calibri" pitchFamily="34" charset="-120"/>
+              </a:rPr>
+              <a:t>PAX</a:t>
+            </a:r>
+            <a:endParaRPr lang="en-US" sz="850" dirty="0"/>
+          </a:p>
+        </p:txBody>
+      </p:sp>
+      <p:sp>
+        <p:nvSpPr>
+          <p:cNvPr id="7" name="Text 5"/>
+          <p:cNvSpPr/>
+          <p:nvPr/>
+        </p:nvSpPr>
+        <p:spPr>
+          <a:xfrm>
+            <a:off x="4453128" y="1911096"/>
+            <a:ext cx="1143000" cy="256032"/>
+          </a:xfrm>
+          <a:prstGeom prst="rect">
+            <a:avLst/>
+          </a:prstGeom>
+          <a:noFill/>
+          <a:ln/>
+        </p:spPr>
+        <p:txBody>
+          <a:bodyPr wrap="square" lIns="0" tIns="0" rIns="0" bIns="0" rtlCol="0" anchor="ctr"/>
+          <a:lstStyle/>
+          <a:p>
+            <a:pPr algn="ctr" indent="0" marL="0">
+              <a:buNone/>
+            </a:pPr>
+            <a:r>
+              <a:rPr lang="en-US" sz="850" b="1" spc="100" kern="0" dirty="0">
+                <a:solidFill>
+                  <a:srgbClr val="9AA4AF"/>
+                </a:solidFill>
+                <a:latin typeface="Calibri" pitchFamily="34" charset="0"/>
+                <a:ea typeface="Calibri" pitchFamily="34" charset="-122"/>
+                <a:cs typeface="Calibri" pitchFamily="34" charset="-120"/>
+              </a:rPr>
+              <a:t>DAYS</a:t>
+            </a:r>
+            <a:endParaRPr lang="en-US" sz="850" dirty="0"/>
+          </a:p>
+        </p:txBody>
+      </p:sp>
+      <p:sp>
+        <p:nvSpPr>
+          <p:cNvPr id="8" name="Text 6"/>
+          <p:cNvSpPr/>
+          <p:nvPr/>
+        </p:nvSpPr>
+        <p:spPr>
+          <a:xfrm>
+            <a:off x="5596128" y="1911096"/>
+            <a:ext cx="1828800" cy="256032"/>
+          </a:xfrm>
+          <a:prstGeom prst="rect">
+            <a:avLst/>
+          </a:prstGeom>
+          <a:noFill/>
+          <a:ln/>
+        </p:spPr>
+        <p:txBody>
+          <a:bodyPr wrap="square" lIns="0" tIns="0" rIns="0" bIns="0" rtlCol="0" anchor="ctr"/>
+          <a:lstStyle/>
+          <a:p>
+            <a:pPr algn="r" indent="0" marL="0">
+              <a:buNone/>
+            </a:pPr>
+            <a:r>
+              <a:rPr lang="en-US" sz="850" b="1" spc="100" kern="0" dirty="0">
+                <a:solidFill>
+                  <a:srgbClr val="9AA4AF"/>
+                </a:solidFill>
+                <a:latin typeface="Calibri" pitchFamily="34" charset="0"/>
+                <a:ea typeface="Calibri" pitchFamily="34" charset="-122"/>
+                <a:cs typeface="Calibri" pitchFamily="34" charset="-120"/>
+              </a:rPr>
+              <a:t>COST</a:t>
+            </a:r>
+            <a:endParaRPr lang="en-US" sz="850" dirty="0"/>
+          </a:p>
+        </p:txBody>
+      </p:sp>
+      <p:sp>
+        <p:nvSpPr>
+          <p:cNvPr id="9" name="Shape 7"/>
+          <p:cNvSpPr/>
+          <p:nvPr/>
+        </p:nvSpPr>
+        <p:spPr>
+          <a:xfrm>
+            <a:off x="566928" y="2185416"/>
+            <a:ext cx="6858000" cy="347472"/>
+          </a:xfrm>
+          <a:prstGeom prst="rect">
+            <a:avLst/>
+          </a:prstGeom>
+          <a:solidFill>
+            <a:srgbClr val="1C2128"/>
+          </a:solidFill>
+          <a:ln w="6350">
+            <a:solidFill>
+              <a:srgbClr val="30363D"/>
+            </a:solidFill>
+            <a:prstDash val="solid"/>
+          </a:ln>
+        </p:spPr>
+      </p:sp>
+      <p:sp>
+        <p:nvSpPr>
+          <p:cNvPr id="10" name="Text 8"/>
+          <p:cNvSpPr/>
+          <p:nvPr/>
+        </p:nvSpPr>
+        <p:spPr>
+          <a:xfrm>
+            <a:off x="621792" y="2185416"/>
+            <a:ext cx="2633472" cy="347472"/>
+          </a:xfrm>
+          <a:prstGeom prst="rect">
+            <a:avLst/>
+          </a:prstGeom>
+          <a:noFill/>
+          <a:ln/>
+        </p:spPr>
+        <p:txBody>
+          <a:bodyPr wrap="square" lIns="0" tIns="0" rIns="0" bIns="0" rtlCol="0" anchor="ctr"/>
+          <a:lstStyle/>
+          <a:p>
+            <a:pPr algn="l" indent="0" marL="0">
+              <a:buNone/>
+            </a:pPr>
+            <a:r>
+              <a:rPr lang="en-US" sz="1050" dirty="0">
+                <a:solidFill>
+                  <a:srgbClr val="E6EDF3"/>
+                </a:solidFill>
+                <a:latin typeface="Calibri" pitchFamily="34" charset="0"/>
+                <a:ea typeface="Calibri" pitchFamily="34" charset="-122"/>
+                <a:cs typeface="Calibri" pitchFamily="34" charset="-120"/>
+              </a:rPr>
+              <a:t>Task 1  Cut and prep</a:t>
+            </a:r>
+            <a:endParaRPr lang="en-US" sz="1050" dirty="0"/>
+          </a:p>
+        </p:txBody>
+      </p:sp>
+      <p:sp>
+        <p:nvSpPr>
+          <p:cNvPr id="11" name="Text 9"/>
+          <p:cNvSpPr/>
+          <p:nvPr/>
+        </p:nvSpPr>
+        <p:spPr>
+          <a:xfrm>
+            <a:off x="3364992" y="2185416"/>
+            <a:ext cx="1033272" cy="347472"/>
+          </a:xfrm>
+          <a:prstGeom prst="rect">
+            <a:avLst/>
+          </a:prstGeom>
+          <a:noFill/>
+          <a:ln/>
+        </p:spPr>
+        <p:txBody>
+          <a:bodyPr wrap="square" lIns="0" tIns="0" rIns="0" bIns="0" rtlCol="0" anchor="ctr"/>
+          <a:lstStyle/>
+          <a:p>
+            <a:pPr algn="ctr" indent="0" marL="0">
+              <a:buNone/>
+            </a:pPr>
+            <a:r>
+              <a:rPr lang="en-US" sz="1050" dirty="0">
+                <a:solidFill>
+                  <a:srgbClr val="E6EDF3"/>
+                </a:solidFill>
+                <a:latin typeface="Calibri" pitchFamily="34" charset="0"/>
+                <a:ea typeface="Calibri" pitchFamily="34" charset="-122"/>
+                <a:cs typeface="Calibri" pitchFamily="34" charset="-120"/>
+              </a:rPr>
+              <a:t>1</a:t>
+            </a:r>
+            <a:endParaRPr lang="en-US" sz="1050" dirty="0"/>
+          </a:p>
+        </p:txBody>
+      </p:sp>
+      <p:sp>
+        <p:nvSpPr>
+          <p:cNvPr id="12" name="Text 10"/>
+          <p:cNvSpPr/>
+          <p:nvPr/>
+        </p:nvSpPr>
+        <p:spPr>
+          <a:xfrm>
+            <a:off x="4507992" y="2185416"/>
+            <a:ext cx="1033272" cy="347472"/>
+          </a:xfrm>
+          <a:prstGeom prst="rect">
+            <a:avLst/>
+          </a:prstGeom>
+          <a:noFill/>
+          <a:ln/>
+        </p:spPr>
+        <p:txBody>
+          <a:bodyPr wrap="square" lIns="0" tIns="0" rIns="0" bIns="0" rtlCol="0" anchor="ctr"/>
+          <a:lstStyle/>
+          <a:p>
+            <a:pPr algn="ctr" indent="0" marL="0">
+              <a:buNone/>
+            </a:pPr>
+            <a:r>
+              <a:rPr lang="en-US" sz="1050" dirty="0">
+                <a:solidFill>
+                  <a:srgbClr val="E6EDF3"/>
+                </a:solidFill>
+                <a:latin typeface="Calibri" pitchFamily="34" charset="0"/>
+                <a:ea typeface="Calibri" pitchFamily="34" charset="-122"/>
+                <a:cs typeface="Calibri" pitchFamily="34" charset="-120"/>
+              </a:rPr>
+              <a:t>2</a:t>
+            </a:r>
+            <a:endParaRPr lang="en-US" sz="1050" dirty="0"/>
+          </a:p>
+        </p:txBody>
+      </p:sp>
+      <p:sp>
+        <p:nvSpPr>
+          <p:cNvPr id="13" name="Text 11"/>
+          <p:cNvSpPr/>
+          <p:nvPr/>
+        </p:nvSpPr>
+        <p:spPr>
+          <a:xfrm>
+            <a:off x="5650992" y="2185416"/>
+            <a:ext cx="1719072" cy="347472"/>
+          </a:xfrm>
+          <a:prstGeom prst="rect">
+            <a:avLst/>
+          </a:prstGeom>
+          <a:noFill/>
+          <a:ln/>
+        </p:spPr>
+        <p:txBody>
+          <a:bodyPr wrap="square" lIns="0" tIns="0" rIns="0" bIns="0" rtlCol="0" anchor="ctr"/>
+          <a:lstStyle/>
+          <a:p>
+            <a:pPr algn="r" indent="0" marL="0">
+              <a:buNone/>
+            </a:pPr>
+            <a:r>
+              <a:rPr lang="en-US" sz="1050" dirty="0">
+                <a:solidFill>
+                  <a:srgbClr val="E6EDF3"/>
+                </a:solidFill>
+                <a:latin typeface="Calibri" pitchFamily="34" charset="0"/>
+                <a:ea typeface="Calibri" pitchFamily="34" charset="-122"/>
+                <a:cs typeface="Calibri" pitchFamily="34" charset="-120"/>
+              </a:rPr>
+              <a:t>₱1,700</a:t>
+            </a:r>
+            <a:endParaRPr lang="en-US" sz="1050" dirty="0"/>
+          </a:p>
+        </p:txBody>
+      </p:sp>
+      <p:sp>
+        <p:nvSpPr>
+          <p:cNvPr id="14" name="Shape 12"/>
+          <p:cNvSpPr/>
+          <p:nvPr/>
+        </p:nvSpPr>
+        <p:spPr>
+          <a:xfrm>
+            <a:off x="566928" y="2532888"/>
+            <a:ext cx="6858000" cy="347472"/>
+          </a:xfrm>
+          <a:prstGeom prst="rect">
+            <a:avLst/>
+          </a:prstGeom>
+          <a:solidFill>
+            <a:srgbClr val="161B22"/>
+          </a:solidFill>
+          <a:ln w="6350">
+            <a:solidFill>
+              <a:srgbClr val="30363D"/>
+            </a:solidFill>
+            <a:prstDash val="solid"/>
+          </a:ln>
+        </p:spPr>
+      </p:sp>
+      <p:sp>
+        <p:nvSpPr>
+          <p:cNvPr id="15" name="Text 13"/>
+          <p:cNvSpPr/>
+          <p:nvPr/>
+        </p:nvSpPr>
+        <p:spPr>
+          <a:xfrm>
+            <a:off x="621792" y="2532888"/>
+            <a:ext cx="2633472" cy="347472"/>
+          </a:xfrm>
+          <a:prstGeom prst="rect">
+            <a:avLst/>
+          </a:prstGeom>
+          <a:noFill/>
+          <a:ln/>
+        </p:spPr>
+        <p:txBody>
+          <a:bodyPr wrap="square" lIns="0" tIns="0" rIns="0" bIns="0" rtlCol="0" anchor="ctr"/>
+          <a:lstStyle/>
+          <a:p>
+            <a:pPr algn="l" indent="0" marL="0">
+              <a:buNone/>
+            </a:pPr>
+            <a:r>
+              <a:rPr lang="en-US" sz="1050" dirty="0">
+                <a:solidFill>
+                  <a:srgbClr val="E6EDF3"/>
+                </a:solidFill>
+                <a:latin typeface="Calibri" pitchFamily="34" charset="0"/>
+                <a:ea typeface="Calibri" pitchFamily="34" charset="-122"/>
+                <a:cs typeface="Calibri" pitchFamily="34" charset="-120"/>
+              </a:rPr>
+              <a:t>Task 2  Final machining</a:t>
+            </a:r>
+            <a:endParaRPr lang="en-US" sz="1050" dirty="0"/>
+          </a:p>
+        </p:txBody>
+      </p:sp>
+      <p:sp>
+        <p:nvSpPr>
+          <p:cNvPr id="16" name="Text 14"/>
+          <p:cNvSpPr/>
+          <p:nvPr/>
+        </p:nvSpPr>
+        <p:spPr>
+          <a:xfrm>
+            <a:off x="3364992" y="2532888"/>
+            <a:ext cx="1033272" cy="347472"/>
+          </a:xfrm>
+          <a:prstGeom prst="rect">
+            <a:avLst/>
+          </a:prstGeom>
+          <a:noFill/>
+          <a:ln/>
+        </p:spPr>
+        <p:txBody>
+          <a:bodyPr wrap="square" lIns="0" tIns="0" rIns="0" bIns="0" rtlCol="0" anchor="ctr"/>
+          <a:lstStyle/>
+          <a:p>
+            <a:pPr algn="ctr" indent="0" marL="0">
+              <a:buNone/>
+            </a:pPr>
+            <a:r>
+              <a:rPr lang="en-US" sz="1050" dirty="0">
+                <a:solidFill>
+                  <a:srgbClr val="E6EDF3"/>
+                </a:solidFill>
+                <a:latin typeface="Calibri" pitchFamily="34" charset="0"/>
+                <a:ea typeface="Calibri" pitchFamily="34" charset="-122"/>
+                <a:cs typeface="Calibri" pitchFamily="34" charset="-120"/>
+              </a:rPr>
+              <a:t>3</a:t>
+            </a:r>
+            <a:endParaRPr lang="en-US" sz="1050" dirty="0"/>
+          </a:p>
+        </p:txBody>
+      </p:sp>
+      <p:sp>
+        <p:nvSpPr>
+          <p:cNvPr id="17" name="Text 15"/>
+          <p:cNvSpPr/>
+          <p:nvPr/>
+        </p:nvSpPr>
+        <p:spPr>
+          <a:xfrm>
+            <a:off x="4507992" y="2532888"/>
+            <a:ext cx="1033272" cy="347472"/>
+          </a:xfrm>
+          <a:prstGeom prst="rect">
+            <a:avLst/>
+          </a:prstGeom>
+          <a:noFill/>
+          <a:ln/>
+        </p:spPr>
+        <p:txBody>
+          <a:bodyPr wrap="square" lIns="0" tIns="0" rIns="0" bIns="0" rtlCol="0" anchor="ctr"/>
+          <a:lstStyle/>
+          <a:p>
+            <a:pPr algn="ctr" indent="0" marL="0">
+              <a:buNone/>
+            </a:pPr>
+            <a:r>
+              <a:rPr lang="en-US" sz="1050" dirty="0">
+                <a:solidFill>
+                  <a:srgbClr val="E6EDF3"/>
+                </a:solidFill>
+                <a:latin typeface="Calibri" pitchFamily="34" charset="0"/>
+                <a:ea typeface="Calibri" pitchFamily="34" charset="-122"/>
+                <a:cs typeface="Calibri" pitchFamily="34" charset="-120"/>
+              </a:rPr>
+              <a:t>5</a:t>
+            </a:r>
+            <a:endParaRPr lang="en-US" sz="1050" dirty="0"/>
+          </a:p>
+        </p:txBody>
+      </p:sp>
+      <p:sp>
+        <p:nvSpPr>
+          <p:cNvPr id="18" name="Text 16"/>
+          <p:cNvSpPr/>
+          <p:nvPr/>
+        </p:nvSpPr>
+        <p:spPr>
+          <a:xfrm>
+            <a:off x="5650992" y="2532888"/>
+            <a:ext cx="1719072" cy="347472"/>
+          </a:xfrm>
+          <a:prstGeom prst="rect">
+            <a:avLst/>
+          </a:prstGeom>
+          <a:noFill/>
+          <a:ln/>
+        </p:spPr>
+        <p:txBody>
+          <a:bodyPr wrap="square" lIns="0" tIns="0" rIns="0" bIns="0" rtlCol="0" anchor="ctr"/>
+          <a:lstStyle/>
+          <a:p>
+            <a:pPr algn="r" indent="0" marL="0">
+              <a:buNone/>
+            </a:pPr>
+            <a:r>
+              <a:rPr lang="en-US" sz="1050" dirty="0">
+                <a:solidFill>
+                  <a:srgbClr val="E6EDF3"/>
+                </a:solidFill>
+                <a:latin typeface="Calibri" pitchFamily="34" charset="0"/>
+                <a:ea typeface="Calibri" pitchFamily="34" charset="-122"/>
+                <a:cs typeface="Calibri" pitchFamily="34" charset="-120"/>
+              </a:rPr>
+              <a:t>₱12,750</a:t>
+            </a:r>
+            <a:endParaRPr lang="en-US" sz="1050" dirty="0"/>
+          </a:p>
+        </p:txBody>
+      </p:sp>
+      <p:sp>
+        <p:nvSpPr>
+          <p:cNvPr id="19" name="Shape 17"/>
+          <p:cNvSpPr/>
+          <p:nvPr/>
+        </p:nvSpPr>
+        <p:spPr>
+          <a:xfrm>
+            <a:off x="566928" y="2880360"/>
+            <a:ext cx="6858000" cy="347472"/>
+          </a:xfrm>
+          <a:prstGeom prst="rect">
+            <a:avLst/>
+          </a:prstGeom>
+          <a:solidFill>
+            <a:srgbClr val="1C2128"/>
+          </a:solidFill>
+          <a:ln w="6350">
+            <a:solidFill>
+              <a:srgbClr val="30363D"/>
+            </a:solidFill>
+            <a:prstDash val="solid"/>
+          </a:ln>
+        </p:spPr>
+      </p:sp>
+      <p:sp>
+        <p:nvSpPr>
+          <p:cNvPr id="20" name="Text 18"/>
+          <p:cNvSpPr/>
+          <p:nvPr/>
+        </p:nvSpPr>
+        <p:spPr>
+          <a:xfrm>
+            <a:off x="621792" y="2880360"/>
+            <a:ext cx="2633472" cy="347472"/>
+          </a:xfrm>
+          <a:prstGeom prst="rect">
+            <a:avLst/>
+          </a:prstGeom>
+          <a:noFill/>
+          <a:ln/>
+        </p:spPr>
+        <p:txBody>
+          <a:bodyPr wrap="square" lIns="0" tIns="0" rIns="0" bIns="0" rtlCol="0" anchor="ctr"/>
+          <a:lstStyle/>
+          <a:p>
+            <a:pPr algn="l" indent="0" marL="0">
+              <a:buNone/>
+            </a:pPr>
+            <a:r>
+              <a:rPr lang="en-US" sz="1050" dirty="0">
+                <a:solidFill>
+                  <a:srgbClr val="9AA4AF"/>
+                </a:solidFill>
+                <a:latin typeface="Calibri" pitchFamily="34" charset="0"/>
+                <a:ea typeface="Calibri" pitchFamily="34" charset="-122"/>
+                <a:cs typeface="Calibri" pitchFamily="34" charset="-120"/>
+              </a:rPr>
+              <a:t>Rows added up</a:t>
+            </a:r>
+            <a:endParaRPr lang="en-US" sz="1050" dirty="0"/>
+          </a:p>
+        </p:txBody>
+      </p:sp>
+      <p:sp>
+        <p:nvSpPr>
+          <p:cNvPr id="21" name="Text 19"/>
+          <p:cNvSpPr/>
+          <p:nvPr/>
+        </p:nvSpPr>
+        <p:spPr>
+          <a:xfrm>
+            <a:off x="3364992" y="2880360"/>
+            <a:ext cx="1033272" cy="347472"/>
+          </a:xfrm>
+          <a:prstGeom prst="rect">
+            <a:avLst/>
+          </a:prstGeom>
+          <a:noFill/>
+          <a:ln/>
+        </p:spPr>
+        <p:txBody>
+          <a:bodyPr wrap="square" lIns="0" tIns="0" rIns="0" bIns="0" rtlCol="0" anchor="ctr"/>
+          <a:lstStyle/>
+          <a:p>
+            <a:pPr algn="ctr" indent="0" marL="0">
+              <a:buNone/>
+            </a:pPr>
+            <a:endParaRPr lang="en-US" sz="1050" dirty="0"/>
+          </a:p>
+        </p:txBody>
+      </p:sp>
+      <p:sp>
+        <p:nvSpPr>
+          <p:cNvPr id="22" name="Text 20"/>
+          <p:cNvSpPr/>
+          <p:nvPr/>
+        </p:nvSpPr>
+        <p:spPr>
+          <a:xfrm>
+            <a:off x="4507992" y="2880360"/>
+            <a:ext cx="1033272" cy="347472"/>
+          </a:xfrm>
+          <a:prstGeom prst="rect">
+            <a:avLst/>
+          </a:prstGeom>
+          <a:noFill/>
+          <a:ln/>
+        </p:spPr>
+        <p:txBody>
+          <a:bodyPr wrap="square" lIns="0" tIns="0" rIns="0" bIns="0" rtlCol="0" anchor="ctr"/>
+          <a:lstStyle/>
+          <a:p>
+            <a:pPr algn="ctr" indent="0" marL="0">
+              <a:buNone/>
+            </a:pPr>
+            <a:endParaRPr lang="en-US" sz="1050" dirty="0"/>
+          </a:p>
+        </p:txBody>
+      </p:sp>
+      <p:sp>
+        <p:nvSpPr>
+          <p:cNvPr id="23" name="Text 21"/>
+          <p:cNvSpPr/>
+          <p:nvPr/>
+        </p:nvSpPr>
+        <p:spPr>
+          <a:xfrm>
+            <a:off x="5650992" y="2880360"/>
+            <a:ext cx="1719072" cy="347472"/>
+          </a:xfrm>
+          <a:prstGeom prst="rect">
+            <a:avLst/>
+          </a:prstGeom>
+          <a:noFill/>
+          <a:ln/>
+        </p:spPr>
+        <p:txBody>
+          <a:bodyPr wrap="square" lIns="0" tIns="0" rIns="0" bIns="0" rtlCol="0" anchor="ctr"/>
+          <a:lstStyle/>
+          <a:p>
+            <a:pPr algn="r" indent="0" marL="0">
+              <a:buNone/>
+            </a:pPr>
+            <a:r>
+              <a:rPr lang="en-US" sz="1050" dirty="0">
+                <a:solidFill>
+                  <a:srgbClr val="9AA4AF"/>
+                </a:solidFill>
+                <a:latin typeface="Calibri" pitchFamily="34" charset="0"/>
+                <a:ea typeface="Calibri" pitchFamily="34" charset="-122"/>
+                <a:cs typeface="Calibri" pitchFamily="34" charset="-120"/>
+              </a:rPr>
+              <a:t>₱14,450</a:t>
+            </a:r>
+            <a:endParaRPr lang="en-US" sz="1050" dirty="0"/>
+          </a:p>
+        </p:txBody>
+      </p:sp>
+      <p:sp>
+        <p:nvSpPr>
+          <p:cNvPr id="24" name="Shape 22"/>
+          <p:cNvSpPr/>
+          <p:nvPr/>
+        </p:nvSpPr>
+        <p:spPr>
+          <a:xfrm>
+            <a:off x="566928" y="3227832"/>
+            <a:ext cx="6858000" cy="347472"/>
+          </a:xfrm>
+          <a:prstGeom prst="rect">
+            <a:avLst/>
+          </a:prstGeom>
+          <a:solidFill>
+            <a:srgbClr val="161B22"/>
+          </a:solidFill>
+          <a:ln w="6350">
+            <a:solidFill>
+              <a:srgbClr val="30363D"/>
+            </a:solidFill>
+            <a:prstDash val="solid"/>
+          </a:ln>
+        </p:spPr>
+      </p:sp>
+      <p:sp>
+        <p:nvSpPr>
+          <p:cNvPr id="25" name="Text 23"/>
+          <p:cNvSpPr/>
+          <p:nvPr/>
+        </p:nvSpPr>
+        <p:spPr>
+          <a:xfrm>
+            <a:off x="621792" y="3227832"/>
+            <a:ext cx="2633472" cy="347472"/>
+          </a:xfrm>
+          <a:prstGeom prst="rect">
+            <a:avLst/>
+          </a:prstGeom>
+          <a:noFill/>
+          <a:ln/>
+        </p:spPr>
+        <p:txBody>
+          <a:bodyPr wrap="square" lIns="0" tIns="0" rIns="0" bIns="0" rtlCol="0" anchor="ctr"/>
+          <a:lstStyle/>
+          <a:p>
+            <a:pPr algn="l" indent="0" marL="0">
+              <a:buNone/>
+            </a:pPr>
+            <a:r>
+              <a:rPr lang="en-US" sz="1050" b="1" dirty="0">
+                <a:solidFill>
+                  <a:srgbClr val="F0A429"/>
+                </a:solidFill>
+                <a:latin typeface="Calibri" pitchFamily="34" charset="0"/>
+                <a:ea typeface="Calibri" pitchFamily="34" charset="-122"/>
+                <a:cs typeface="Calibri" pitchFamily="34" charset="-120"/>
+              </a:rPr>
+              <a:t>CONSOLIDATED CREW</a:t>
+            </a:r>
+            <a:endParaRPr lang="en-US" sz="1050" dirty="0"/>
+          </a:p>
+        </p:txBody>
+      </p:sp>
+      <p:sp>
+        <p:nvSpPr>
+          <p:cNvPr id="26" name="Text 24"/>
+          <p:cNvSpPr/>
+          <p:nvPr/>
+        </p:nvSpPr>
+        <p:spPr>
+          <a:xfrm>
+            <a:off x="3364992" y="3227832"/>
+            <a:ext cx="1033272" cy="347472"/>
+          </a:xfrm>
+          <a:prstGeom prst="rect">
+            <a:avLst/>
+          </a:prstGeom>
+          <a:noFill/>
+          <a:ln/>
+        </p:spPr>
+        <p:txBody>
+          <a:bodyPr wrap="square" lIns="0" tIns="0" rIns="0" bIns="0" rtlCol="0" anchor="ctr"/>
+          <a:lstStyle/>
+          <a:p>
+            <a:pPr algn="ctr" indent="0" marL="0">
+              <a:buNone/>
+            </a:pPr>
+            <a:r>
+              <a:rPr lang="en-US" sz="1050" b="1" dirty="0">
+                <a:solidFill>
+                  <a:srgbClr val="F0A429"/>
+                </a:solidFill>
+                <a:latin typeface="Calibri" pitchFamily="34" charset="0"/>
+                <a:ea typeface="Calibri" pitchFamily="34" charset="-122"/>
+                <a:cs typeface="Calibri" pitchFamily="34" charset="-120"/>
+              </a:rPr>
+              <a:t>3</a:t>
+            </a:r>
+            <a:endParaRPr lang="en-US" sz="1050" dirty="0"/>
+          </a:p>
+        </p:txBody>
+      </p:sp>
+      <p:sp>
+        <p:nvSpPr>
+          <p:cNvPr id="27" name="Text 25"/>
+          <p:cNvSpPr/>
+          <p:nvPr/>
+        </p:nvSpPr>
+        <p:spPr>
+          <a:xfrm>
+            <a:off x="4507992" y="3227832"/>
+            <a:ext cx="1033272" cy="347472"/>
+          </a:xfrm>
+          <a:prstGeom prst="rect">
+            <a:avLst/>
+          </a:prstGeom>
+          <a:noFill/>
+          <a:ln/>
+        </p:spPr>
+        <p:txBody>
+          <a:bodyPr wrap="square" lIns="0" tIns="0" rIns="0" bIns="0" rtlCol="0" anchor="ctr"/>
+          <a:lstStyle/>
+          <a:p>
+            <a:pPr algn="ctr" indent="0" marL="0">
+              <a:buNone/>
+            </a:pPr>
+            <a:r>
+              <a:rPr lang="en-US" sz="1050" b="1" dirty="0">
+                <a:solidFill>
+                  <a:srgbClr val="F0A429"/>
+                </a:solidFill>
+                <a:latin typeface="Calibri" pitchFamily="34" charset="0"/>
+                <a:ea typeface="Calibri" pitchFamily="34" charset="-122"/>
+                <a:cs typeface="Calibri" pitchFamily="34" charset="-120"/>
+              </a:rPr>
+              <a:t>7</a:t>
+            </a:r>
+            <a:endParaRPr lang="en-US" sz="1050" dirty="0"/>
+          </a:p>
+        </p:txBody>
+      </p:sp>
+      <p:sp>
+        <p:nvSpPr>
+          <p:cNvPr id="28" name="Text 26"/>
+          <p:cNvSpPr/>
+          <p:nvPr/>
+        </p:nvSpPr>
+        <p:spPr>
+          <a:xfrm>
+            <a:off x="5650992" y="3227832"/>
+            <a:ext cx="1719072" cy="347472"/>
+          </a:xfrm>
+          <a:prstGeom prst="rect">
+            <a:avLst/>
+          </a:prstGeom>
+          <a:noFill/>
+          <a:ln/>
+        </p:spPr>
+        <p:txBody>
+          <a:bodyPr wrap="square" lIns="0" tIns="0" rIns="0" bIns="0" rtlCol="0" anchor="ctr"/>
+          <a:lstStyle/>
+          <a:p>
+            <a:pPr algn="r" indent="0" marL="0">
+              <a:buNone/>
+            </a:pPr>
+            <a:r>
+              <a:rPr lang="en-US" sz="1050" b="1" dirty="0">
+                <a:solidFill>
+                  <a:srgbClr val="F0A429"/>
+                </a:solidFill>
+                <a:latin typeface="Calibri" pitchFamily="34" charset="0"/>
+                <a:ea typeface="Calibri" pitchFamily="34" charset="-122"/>
+                <a:cs typeface="Calibri" pitchFamily="34" charset="-120"/>
+              </a:rPr>
+              <a:t>₱17,850</a:t>
+            </a:r>
+            <a:endParaRPr lang="en-US" sz="1050" dirty="0"/>
+          </a:p>
+        </p:txBody>
+      </p:sp>
+      <p:sp>
+        <p:nvSpPr>
+          <p:cNvPr id="29" name="Shape 27"/>
+          <p:cNvSpPr/>
+          <p:nvPr/>
+        </p:nvSpPr>
+        <p:spPr>
+          <a:xfrm>
+            <a:off x="566928" y="3849624"/>
+            <a:ext cx="6858000" cy="1371600"/>
+          </a:xfrm>
+          <a:prstGeom prst="roundRect">
+            <a:avLst>
+              <a:gd name="adj" fmla="val 5333"/>
+            </a:avLst>
+          </a:prstGeom>
+          <a:solidFill>
+            <a:srgbClr val="2A1F0B"/>
+          </a:solidFill>
+          <a:ln w="12700">
+            <a:solidFill>
+              <a:srgbClr val="5C4813"/>
+            </a:solidFill>
+            <a:prstDash val="solid"/>
+          </a:ln>
+          <a:effectLst>
+            <a:outerShdw sx="100000" sy="100000" kx="0" ky="0" algn="bl" rotWithShape="0" blurRad="152400" dist="38100" dir="5400000">
+              <a:srgbClr val="000000">
+                <a:alpha val="45000"/>
+              </a:srgbClr>
+            </a:outerShdw>
+          </a:effectLst>
+        </p:spPr>
+      </p:sp>
+      <p:sp>
+        <p:nvSpPr>
+          <p:cNvPr id="30" name="Text 28"/>
+          <p:cNvSpPr/>
+          <p:nvPr/>
+        </p:nvSpPr>
+        <p:spPr>
+          <a:xfrm>
+            <a:off x="822960" y="4014216"/>
+            <a:ext cx="6309360" cy="292608"/>
+          </a:xfrm>
+          <a:prstGeom prst="rect">
+            <a:avLst/>
+          </a:prstGeom>
+          <a:noFill/>
+          <a:ln/>
+        </p:spPr>
+        <p:txBody>
+          <a:bodyPr wrap="square" lIns="0" tIns="0" rIns="0" bIns="0" rtlCol="0" anchor="ctr"/>
+          <a:lstStyle/>
+          <a:p>
+            <a:pPr indent="0" marL="0">
+              <a:buNone/>
+            </a:pPr>
+            <a:r>
+              <a:rPr lang="en-US" sz="1450" b="1" dirty="0">
+                <a:solidFill>
+                  <a:srgbClr val="F0A429"/>
+                </a:solidFill>
+                <a:latin typeface="Arial" pitchFamily="34" charset="0"/>
+                <a:ea typeface="Arial" pitchFamily="34" charset="-122"/>
+                <a:cs typeface="Arial" pitchFamily="34" charset="-120"/>
+              </a:rPr>
+              <a:t>The largest PAX, for the total days</a:t>
+            </a:r>
+            <a:endParaRPr lang="en-US" sz="1450" dirty="0"/>
+          </a:p>
+        </p:txBody>
+      </p:sp>
+      <p:sp>
+        <p:nvSpPr>
+          <p:cNvPr id="31" name="Text 29"/>
+          <p:cNvSpPr/>
+          <p:nvPr/>
+        </p:nvSpPr>
+        <p:spPr>
+          <a:xfrm>
+            <a:off x="822960" y="4361688"/>
+            <a:ext cx="6309360" cy="777240"/>
+          </a:xfrm>
+          <a:prstGeom prst="rect">
+            <a:avLst/>
+          </a:prstGeom>
+          <a:noFill/>
+          <a:ln/>
+        </p:spPr>
+        <p:txBody>
+          <a:bodyPr wrap="square" lIns="0" tIns="0" rIns="0" bIns="0" rtlCol="0" anchor="t"/>
+          <a:lstStyle/>
+          <a:p>
+            <a:pPr algn="l" indent="0" marL="0">
+              <a:lnSpc>
+                <a:spcPts val="1600"/>
+              </a:lnSpc>
+              <a:buNone/>
+            </a:pPr>
+            <a:r>
+              <a:rPr lang="en-US" sz="1200" dirty="0">
+                <a:solidFill>
+                  <a:srgbClr val="E6EDF3"/>
+                </a:solidFill>
+                <a:latin typeface="Calibri" pitchFamily="34" charset="0"/>
+                <a:ea typeface="Calibri" pitchFamily="34" charset="-122"/>
+                <a:cs typeface="Calibri" pitchFamily="34" charset="-120"/>
+              </a:rPr>
+              <a:t>You mobilise 3 electricians for the whole 7 days and pay them whether or not task 1 needs all three. That is why consolidating COSTS MORE than adding the rows up — and why the higher figure is the right one.</a:t>
+            </a:r>
+            <a:endParaRPr lang="en-US" sz="1200" dirty="0"/>
+          </a:p>
+        </p:txBody>
+      </p:sp>
+      <p:sp>
+        <p:nvSpPr>
+          <p:cNvPr id="32" name="Shape 30"/>
+          <p:cNvSpPr/>
+          <p:nvPr/>
+        </p:nvSpPr>
+        <p:spPr>
+          <a:xfrm>
+            <a:off x="7635240" y="1911096"/>
+            <a:ext cx="3977640" cy="1078992"/>
+          </a:xfrm>
+          <a:prstGeom prst="roundRect">
+            <a:avLst>
+              <a:gd name="adj" fmla="val 6780"/>
+            </a:avLst>
+          </a:prstGeom>
+          <a:solidFill>
+            <a:srgbClr val="161B22"/>
+          </a:solidFill>
+          <a:ln w="12700">
+            <a:solidFill>
+              <a:srgbClr val="30363D"/>
+            </a:solidFill>
+            <a:prstDash val="solid"/>
+          </a:ln>
+          <a:effectLst>
+            <a:outerShdw sx="100000" sy="100000" kx="0" ky="0" algn="bl" rotWithShape="0" blurRad="152400" dist="38100" dir="5400000">
+              <a:srgbClr val="000000">
+                <a:alpha val="45000"/>
+              </a:srgbClr>
+            </a:outerShdw>
+          </a:effectLst>
+        </p:spPr>
+      </p:sp>
+      <p:sp>
+        <p:nvSpPr>
+          <p:cNvPr id="33" name="Text 31"/>
+          <p:cNvSpPr/>
+          <p:nvPr/>
+        </p:nvSpPr>
+        <p:spPr>
+          <a:xfrm>
+            <a:off x="7863840" y="2029968"/>
+            <a:ext cx="3566160" cy="274320"/>
+          </a:xfrm>
+          <a:prstGeom prst="rect">
+            <a:avLst/>
+          </a:prstGeom>
+          <a:noFill/>
+          <a:ln/>
+        </p:spPr>
+        <p:txBody>
+          <a:bodyPr wrap="square" lIns="0" tIns="0" rIns="0" bIns="0" rtlCol="0" anchor="ctr"/>
+          <a:lstStyle/>
+          <a:p>
+            <a:pPr indent="0" marL="0">
+              <a:buNone/>
+            </a:pPr>
+            <a:r>
+              <a:rPr lang="en-US" sz="1300" b="1" dirty="0">
+                <a:solidFill>
+                  <a:srgbClr val="F0A429"/>
+                </a:solidFill>
+                <a:latin typeface="Arial" pitchFamily="34" charset="0"/>
+                <a:ea typeface="Arial" pitchFamily="34" charset="-122"/>
+                <a:cs typeface="Arial" pitchFamily="34" charset="-120"/>
+              </a:rPr>
+              <a:t>⇊ Consolidate crew</a:t>
+            </a:r>
+            <a:endParaRPr lang="en-US" sz="1300" dirty="0"/>
+          </a:p>
+        </p:txBody>
+      </p:sp>
+      <p:sp>
+        <p:nvSpPr>
+          <p:cNvPr id="34" name="Text 32"/>
+          <p:cNvSpPr/>
+          <p:nvPr/>
+        </p:nvSpPr>
+        <p:spPr>
+          <a:xfrm>
+            <a:off x="7863840" y="2322576"/>
+            <a:ext cx="3566160" cy="603504"/>
+          </a:xfrm>
+          <a:prstGeom prst="rect">
+            <a:avLst/>
+          </a:prstGeom>
+          <a:noFill/>
+          <a:ln/>
+        </p:spPr>
+        <p:txBody>
+          <a:bodyPr wrap="square" lIns="0" tIns="0" rIns="0" bIns="0" rtlCol="0" anchor="ctr"/>
+          <a:lstStyle/>
+          <a:p>
+            <a:pPr indent="0" marL="0">
+              <a:lnSpc>
+                <a:spcPts val="1350"/>
+              </a:lnSpc>
+              <a:buNone/>
+            </a:pPr>
+            <a:r>
+              <a:rPr lang="en-US" sz="1050" dirty="0">
+                <a:solidFill>
+                  <a:srgbClr val="9AA4AF"/>
+                </a:solidFill>
+                <a:latin typeface="Calibri" pitchFamily="34" charset="0"/>
+                <a:ea typeface="Calibri" pitchFamily="34" charset="-122"/>
+                <a:cs typeface="Calibri" pitchFamily="34" charset="-120"/>
+              </a:rPr>
+              <a:t>On the Manpower tab, under each shift. It shows the arithmetic and warns that the cost will rise before it changes anything.</a:t>
+            </a:r>
+            <a:endParaRPr lang="en-US" sz="1050" dirty="0"/>
+          </a:p>
+        </p:txBody>
+      </p:sp>
+      <p:sp>
+        <p:nvSpPr>
+          <p:cNvPr id="35" name="Shape 33"/>
+          <p:cNvSpPr/>
+          <p:nvPr/>
+        </p:nvSpPr>
+        <p:spPr>
+          <a:xfrm>
+            <a:off x="7635240" y="3118104"/>
+            <a:ext cx="3977640" cy="1078992"/>
+          </a:xfrm>
+          <a:prstGeom prst="roundRect">
+            <a:avLst>
+              <a:gd name="adj" fmla="val 6780"/>
+            </a:avLst>
+          </a:prstGeom>
+          <a:solidFill>
+            <a:srgbClr val="161B22"/>
+          </a:solidFill>
+          <a:ln w="12700">
+            <a:solidFill>
+              <a:srgbClr val="30363D"/>
+            </a:solidFill>
+            <a:prstDash val="solid"/>
+          </a:ln>
+          <a:effectLst>
+            <a:outerShdw sx="100000" sy="100000" kx="0" ky="0" algn="bl" rotWithShape="0" blurRad="152400" dist="38100" dir="5400000">
+              <a:srgbClr val="000000">
+                <a:alpha val="45000"/>
+              </a:srgbClr>
+            </a:outerShdw>
+          </a:effectLst>
+        </p:spPr>
+      </p:sp>
+      <p:sp>
+        <p:nvSpPr>
+          <p:cNvPr id="36" name="Text 34"/>
+          <p:cNvSpPr/>
+          <p:nvPr/>
+        </p:nvSpPr>
+        <p:spPr>
+          <a:xfrm>
+            <a:off x="7863840" y="3236976"/>
+            <a:ext cx="3566160" cy="274320"/>
+          </a:xfrm>
+          <a:prstGeom prst="rect">
+            <a:avLst/>
+          </a:prstGeom>
+          <a:noFill/>
+          <a:ln/>
+        </p:spPr>
+        <p:txBody>
+          <a:bodyPr wrap="square" lIns="0" tIns="0" rIns="0" bIns="0" rtlCol="0" anchor="ctr"/>
+          <a:lstStyle/>
+          <a:p>
+            <a:pPr indent="0" marL="0">
+              <a:buNone/>
+            </a:pPr>
+            <a:r>
+              <a:rPr lang="en-US" sz="1300" b="1" dirty="0">
+                <a:solidFill>
+                  <a:srgbClr val="58A6FF"/>
+                </a:solidFill>
+                <a:latin typeface="Arial" pitchFamily="34" charset="0"/>
+                <a:ea typeface="Arial" pitchFamily="34" charset="-122"/>
+                <a:cs typeface="Arial" pitchFamily="34" charset="-120"/>
+              </a:rPr>
+              <a:t>Tools &amp; Equipment</a:t>
+            </a:r>
+            <a:endParaRPr lang="en-US" sz="1300" dirty="0"/>
+          </a:p>
+        </p:txBody>
+      </p:sp>
+      <p:sp>
+        <p:nvSpPr>
+          <p:cNvPr id="37" name="Text 35"/>
+          <p:cNvSpPr/>
+          <p:nvPr/>
+        </p:nvSpPr>
+        <p:spPr>
+          <a:xfrm>
+            <a:off x="7863840" y="3529584"/>
+            <a:ext cx="3566160" cy="603504"/>
+          </a:xfrm>
+          <a:prstGeom prst="rect">
+            <a:avLst/>
+          </a:prstGeom>
+          <a:noFill/>
+          <a:ln/>
+        </p:spPr>
+        <p:txBody>
+          <a:bodyPr wrap="square" lIns="0" tIns="0" rIns="0" bIns="0" rtlCol="0" anchor="ctr"/>
+          <a:lstStyle/>
+          <a:p>
+            <a:pPr indent="0" marL="0">
+              <a:lnSpc>
+                <a:spcPts val="1350"/>
+              </a:lnSpc>
+              <a:buNone/>
+            </a:pPr>
+            <a:r>
+              <a:rPr lang="en-US" sz="1050" dirty="0">
+                <a:solidFill>
+                  <a:srgbClr val="9AA4AF"/>
+                </a:solidFill>
+                <a:latin typeface="Calibri" pitchFamily="34" charset="0"/>
+                <a:ea typeface="Calibri" pitchFamily="34" charset="-122"/>
+                <a:cs typeface="Calibri" pitchFamily="34" charset="-120"/>
+              </a:rPr>
+              <a:t>Same rule — one compressor covers both tasks. Use ⇊ Combine on that tab.</a:t>
+            </a:r>
+            <a:endParaRPr lang="en-US" sz="1050" dirty="0"/>
+          </a:p>
+        </p:txBody>
+      </p:sp>
+      <p:sp>
+        <p:nvSpPr>
+          <p:cNvPr id="38" name="Shape 36"/>
+          <p:cNvSpPr/>
+          <p:nvPr/>
+        </p:nvSpPr>
+        <p:spPr>
+          <a:xfrm>
+            <a:off x="7635240" y="4325112"/>
+            <a:ext cx="3977640" cy="1078992"/>
+          </a:xfrm>
+          <a:prstGeom prst="roundRect">
+            <a:avLst>
+              <a:gd name="adj" fmla="val 6780"/>
+            </a:avLst>
+          </a:prstGeom>
+          <a:solidFill>
+            <a:srgbClr val="161B22"/>
+          </a:solidFill>
+          <a:ln w="12700">
+            <a:solidFill>
+              <a:srgbClr val="30363D"/>
+            </a:solidFill>
+            <a:prstDash val="solid"/>
+          </a:ln>
+          <a:effectLst>
+            <a:outerShdw sx="100000" sy="100000" kx="0" ky="0" algn="bl" rotWithShape="0" blurRad="152400" dist="38100" dir="5400000">
+              <a:srgbClr val="000000">
+                <a:alpha val="45000"/>
+              </a:srgbClr>
+            </a:outerShdw>
+          </a:effectLst>
+        </p:spPr>
+      </p:sp>
+      <p:sp>
+        <p:nvSpPr>
+          <p:cNvPr id="39" name="Text 37"/>
+          <p:cNvSpPr/>
+          <p:nvPr/>
+        </p:nvSpPr>
+        <p:spPr>
+          <a:xfrm>
+            <a:off x="7863840" y="4443984"/>
+            <a:ext cx="3566160" cy="274320"/>
+          </a:xfrm>
+          <a:prstGeom prst="rect">
+            <a:avLst/>
+          </a:prstGeom>
+          <a:noFill/>
+          <a:ln/>
+        </p:spPr>
+        <p:txBody>
+          <a:bodyPr wrap="square" lIns="0" tIns="0" rIns="0" bIns="0" rtlCol="0" anchor="ctr"/>
+          <a:lstStyle/>
+          <a:p>
+            <a:pPr indent="0" marL="0">
+              <a:buNone/>
+            </a:pPr>
+            <a:r>
+              <a:rPr lang="en-US" sz="1300" b="1" dirty="0">
+                <a:solidFill>
+                  <a:srgbClr val="3FB950"/>
+                </a:solidFill>
+                <a:latin typeface="Arial" pitchFamily="34" charset="0"/>
+                <a:ea typeface="Arial" pitchFamily="34" charset="-122"/>
+                <a:cs typeface="Arial" pitchFamily="34" charset="-120"/>
+              </a:rPr>
+              <a:t>Materials · PPE · Misc.</a:t>
+            </a:r>
+            <a:endParaRPr lang="en-US" sz="1300" dirty="0"/>
+          </a:p>
+        </p:txBody>
+      </p:sp>
+      <p:sp>
+        <p:nvSpPr>
+          <p:cNvPr id="40" name="Text 38"/>
+          <p:cNvSpPr/>
+          <p:nvPr/>
+        </p:nvSpPr>
+        <p:spPr>
+          <a:xfrm>
+            <a:off x="7863840" y="4736592"/>
+            <a:ext cx="3566160" cy="603504"/>
+          </a:xfrm>
+          <a:prstGeom prst="rect">
+            <a:avLst/>
+          </a:prstGeom>
+          <a:noFill/>
+          <a:ln/>
+        </p:spPr>
+        <p:txBody>
+          <a:bodyPr wrap="square" lIns="0" tIns="0" rIns="0" bIns="0" rtlCol="0" anchor="ctr"/>
+          <a:lstStyle/>
+          <a:p>
+            <a:pPr indent="0" marL="0">
+              <a:lnSpc>
+                <a:spcPts val="1350"/>
+              </a:lnSpc>
+              <a:buNone/>
+            </a:pPr>
+            <a:r>
+              <a:rPr lang="en-US" sz="1050" dirty="0">
+                <a:solidFill>
+                  <a:srgbClr val="9AA4AF"/>
+                </a:solidFill>
+                <a:latin typeface="Calibri" pitchFamily="34" charset="0"/>
+                <a:ea typeface="Calibri" pitchFamily="34" charset="-122"/>
+                <a:cs typeface="Calibri" pitchFamily="34" charset="-120"/>
+              </a:rPr>
+              <a:t>The opposite: consumables are used up, so 5 L + 8 L = 13 L and the total does not change.</a:t>
+            </a:r>
+            <a:endParaRPr lang="en-US" sz="1050" dirty="0"/>
+          </a:p>
+        </p:txBody>
+      </p:sp>
+      <p:sp>
+        <p:nvSpPr>
+          <p:cNvPr id="41" name="Shape 39"/>
+          <p:cNvSpPr/>
+          <p:nvPr/>
+        </p:nvSpPr>
+        <p:spPr>
+          <a:xfrm>
+            <a:off x="7635240" y="5522976"/>
+            <a:ext cx="3977640" cy="868680"/>
+          </a:xfrm>
+          <a:prstGeom prst="roundRect">
+            <a:avLst>
+              <a:gd name="adj" fmla="val 8421"/>
+            </a:avLst>
+          </a:prstGeom>
+          <a:solidFill>
+            <a:srgbClr val="161B22"/>
+          </a:solidFill>
+          <a:ln w="12700">
+            <a:solidFill>
+              <a:srgbClr val="30363D"/>
+            </a:solidFill>
+            <a:prstDash val="solid"/>
+          </a:ln>
+          <a:effectLst>
+            <a:outerShdw sx="100000" sy="100000" kx="0" ky="0" algn="bl" rotWithShape="0" blurRad="152400" dist="38100" dir="5400000">
+              <a:srgbClr val="000000">
+                <a:alpha val="45000"/>
+              </a:srgbClr>
+            </a:outerShdw>
+          </a:effectLst>
+        </p:spPr>
+      </p:sp>
+      <p:sp>
+        <p:nvSpPr>
+          <p:cNvPr id="42" name="Text 40"/>
+          <p:cNvSpPr/>
+          <p:nvPr/>
+        </p:nvSpPr>
+        <p:spPr>
+          <a:xfrm>
+            <a:off x="7863840" y="5632704"/>
+            <a:ext cx="3566160" cy="274320"/>
+          </a:xfrm>
+          <a:prstGeom prst="rect">
+            <a:avLst/>
+          </a:prstGeom>
+          <a:noFill/>
+          <a:ln/>
+        </p:spPr>
+        <p:txBody>
+          <a:bodyPr wrap="square" lIns="0" tIns="0" rIns="0" bIns="0" rtlCol="0" anchor="ctr"/>
+          <a:lstStyle/>
+          <a:p>
+            <a:pPr indent="0" marL="0">
+              <a:buNone/>
+            </a:pPr>
+            <a:r>
+              <a:rPr lang="en-US" sz="1300" b="1" dirty="0">
+                <a:solidFill>
+                  <a:srgbClr val="E6EDF3"/>
+                </a:solidFill>
+                <a:latin typeface="Arial" pitchFamily="34" charset="0"/>
+                <a:ea typeface="Arial" pitchFamily="34" charset="-122"/>
+                <a:cs typeface="Arial" pitchFamily="34" charset="-120"/>
+              </a:rPr>
+              <a:t>Your tasks keep their costs</a:t>
+            </a:r>
+            <a:endParaRPr lang="en-US" sz="1300" dirty="0"/>
+          </a:p>
+        </p:txBody>
+      </p:sp>
+      <p:sp>
+        <p:nvSpPr>
+          <p:cNvPr id="43" name="Text 41"/>
+          <p:cNvSpPr/>
+          <p:nvPr/>
+        </p:nvSpPr>
+        <p:spPr>
+          <a:xfrm>
+            <a:off x="7863840" y="5925312"/>
+            <a:ext cx="3566160" cy="411480"/>
+          </a:xfrm>
+          <a:prstGeom prst="rect">
+            <a:avLst/>
+          </a:prstGeom>
+          <a:noFill/>
+          <a:ln/>
+        </p:spPr>
+        <p:txBody>
+          <a:bodyPr wrap="square" lIns="0" tIns="0" rIns="0" bIns="0" rtlCol="0" anchor="ctr"/>
+          <a:lstStyle/>
+          <a:p>
+            <a:pPr indent="0" marL="0">
+              <a:lnSpc>
+                <a:spcPts val="1350"/>
+              </a:lnSpc>
+              <a:buNone/>
+            </a:pPr>
+            <a:r>
+              <a:rPr lang="en-US" sz="1050" dirty="0">
+                <a:solidFill>
+                  <a:srgbClr val="9AA4AF"/>
+                </a:solidFill>
+                <a:latin typeface="Calibri" pitchFamily="34" charset="0"/>
+                <a:ea typeface="Calibri" pitchFamily="34" charset="-122"/>
+                <a:cs typeface="Calibri" pitchFamily="34" charset="-120"/>
+              </a:rPr>
+              <a:t>A consolidated row still appears under every task it serves, split in proportion.</a:t>
+            </a:r>
+            <a:endParaRPr lang="en-US" sz="1050" dirty="0"/>
+          </a:p>
+        </p:txBody>
+      </p:sp>
+      <p:sp>
+        <p:nvSpPr>
+          <p:cNvPr id="44" name="Shape 42"/>
+          <p:cNvSpPr/>
+          <p:nvPr/>
+        </p:nvSpPr>
+        <p:spPr>
+          <a:xfrm>
+            <a:off x="566928" y="5312664"/>
+            <a:ext cx="6858000" cy="896112"/>
+          </a:xfrm>
+          <a:prstGeom prst="roundRect">
+            <a:avLst>
+              <a:gd name="adj" fmla="val 8163"/>
+            </a:avLst>
+          </a:prstGeom>
+          <a:solidFill>
+            <a:srgbClr val="161B22"/>
+          </a:solidFill>
+          <a:ln w="12700">
+            <a:solidFill>
+              <a:srgbClr val="30363D"/>
+            </a:solidFill>
+            <a:prstDash val="solid"/>
+          </a:ln>
+          <a:effectLst>
+            <a:outerShdw sx="100000" sy="100000" kx="0" ky="0" algn="bl" rotWithShape="0" blurRad="152400" dist="38100" dir="5400000">
+              <a:srgbClr val="000000">
+                <a:alpha val="45000"/>
+              </a:srgbClr>
+            </a:outerShdw>
+          </a:effectLst>
+        </p:spPr>
+      </p:sp>
+      <p:sp>
+        <p:nvSpPr>
+          <p:cNvPr id="45" name="Text 43"/>
+          <p:cNvSpPr/>
+          <p:nvPr/>
+        </p:nvSpPr>
+        <p:spPr>
+          <a:xfrm>
+            <a:off x="822960" y="5440680"/>
+            <a:ext cx="6309360" cy="274320"/>
+          </a:xfrm>
+          <a:prstGeom prst="rect">
+            <a:avLst/>
+          </a:prstGeom>
+          <a:noFill/>
+          <a:ln/>
+        </p:spPr>
+        <p:txBody>
+          <a:bodyPr wrap="square" lIns="0" tIns="0" rIns="0" bIns="0" rtlCol="0" anchor="ctr"/>
+          <a:lstStyle/>
+          <a:p>
+            <a:pPr indent="0" marL="0">
+              <a:buNone/>
+            </a:pPr>
+            <a:r>
+              <a:rPr lang="en-US" sz="1350" b="1" dirty="0">
+                <a:solidFill>
+                  <a:srgbClr val="E6EDF3"/>
+                </a:solidFill>
+                <a:latin typeface="Arial" pitchFamily="34" charset="0"/>
+                <a:ea typeface="Arial" pitchFamily="34" charset="-122"/>
+                <a:cs typeface="Arial" pitchFamily="34" charset="-120"/>
+              </a:rPr>
+              <a:t>Do it once, at the end</a:t>
+            </a:r>
+            <a:endParaRPr lang="en-US" sz="1350" dirty="0"/>
+          </a:p>
+        </p:txBody>
+      </p:sp>
+      <p:sp>
+        <p:nvSpPr>
+          <p:cNvPr id="46" name="Text 44"/>
+          <p:cNvSpPr/>
+          <p:nvPr/>
+        </p:nvSpPr>
+        <p:spPr>
+          <a:xfrm>
+            <a:off x="822960" y="5733288"/>
+            <a:ext cx="6309360" cy="457200"/>
+          </a:xfrm>
+          <a:prstGeom prst="rect">
+            <a:avLst/>
+          </a:prstGeom>
+          <a:noFill/>
+          <a:ln/>
+        </p:spPr>
+        <p:txBody>
+          <a:bodyPr wrap="square" lIns="0" tIns="0" rIns="0" bIns="0" rtlCol="0" anchor="t"/>
+          <a:lstStyle/>
+          <a:p>
+            <a:pPr algn="l" indent="0" marL="0">
+              <a:lnSpc>
+                <a:spcPts val="1400"/>
+              </a:lnSpc>
+              <a:buNone/>
+            </a:pPr>
+            <a:r>
+              <a:rPr lang="en-US" sz="1100" dirty="0">
+                <a:solidFill>
+                  <a:srgbClr val="9AA4AF"/>
+                </a:solidFill>
+                <a:latin typeface="Calibri" pitchFamily="34" charset="0"/>
+                <a:ea typeface="Calibri" pitchFamily="34" charset="-122"/>
+                <a:cs typeface="Calibri" pitchFamily="34" charset="-120"/>
+              </a:rPr>
+              <a:t>Plan per task in SOW Breakdown first, then consolidate just before you generate the CE. The printed form shows whatever rows exist when you press Generate.</a:t>
+            </a:r>
+            <a:endParaRPr lang="en-US" sz="1100" dirty="0"/>
+          </a:p>
+        </p:txBody>
+      </p:sp>
+      <p:sp>
+        <p:nvSpPr>
+          <p:cNvPr id="47" name="Text 45"/>
+          <p:cNvSpPr/>
+          <p:nvPr/>
+        </p:nvSpPr>
+        <p:spPr>
+          <a:xfrm>
+            <a:off x="566928" y="6437376"/>
+            <a:ext cx="5486400" cy="237744"/>
+          </a:xfrm>
+          <a:prstGeom prst="rect">
+            <a:avLst/>
+          </a:prstGeom>
+          <a:noFill/>
+          <a:ln/>
+        </p:spPr>
+        <p:txBody>
+          <a:bodyPr wrap="square" lIns="0" tIns="0" rIns="0" bIns="0" rtlCol="0" anchor="ctr"/>
+          <a:lstStyle/>
+          <a:p>
+            <a:pPr indent="0" marL="0">
+              <a:buNone/>
+            </a:pPr>
+            <a:r>
+              <a:rPr lang="en-US" sz="900" dirty="0">
+                <a:solidFill>
+                  <a:srgbClr val="6E7681"/>
+                </a:solidFill>
+                <a:latin typeface="Calibri" pitchFamily="34" charset="0"/>
+                <a:ea typeface="Calibri" pitchFamily="34" charset="-122"/>
+                <a:cs typeface="Calibri" pitchFamily="34" charset="-120"/>
+              </a:rPr>
+              <a:t>SHIC Cost Estimator — End-User Manual</a:t>
+            </a:r>
+            <a:endParaRPr lang="en-US" sz="900" dirty="0"/>
+          </a:p>
+        </p:txBody>
+      </p:sp>
+      <p:sp>
+        <p:nvSpPr>
+          <p:cNvPr id="48" name="Text 46"/>
+          <p:cNvSpPr/>
+          <p:nvPr/>
+        </p:nvSpPr>
+        <p:spPr>
+          <a:xfrm>
+            <a:off x="10981944" y="6437376"/>
+            <a:ext cx="640080" cy="237744"/>
+          </a:xfrm>
+          <a:prstGeom prst="rect">
+            <a:avLst/>
+          </a:prstGeom>
+          <a:noFill/>
+          <a:ln/>
+        </p:spPr>
+        <p:txBody>
+          <a:bodyPr wrap="square" lIns="0" tIns="0" rIns="0" bIns="0" rtlCol="0" anchor="ctr"/>
+          <a:lstStyle/>
+          <a:p>
+            <a:pPr algn="r" indent="0" marL="0">
+              <a:buNone/>
+            </a:pPr>
+            <a:r>
+              <a:rPr lang="en-US" sz="900" dirty="0">
+                <a:solidFill>
+                  <a:srgbClr val="6E7681"/>
+                </a:solidFill>
+                <a:latin typeface="Calibri" pitchFamily="34" charset="0"/>
+                <a:ea typeface="Calibri" pitchFamily="34" charset="-122"/>
+                <a:cs typeface="Calibri" pitchFamily="34" charset="-120"/>
+              </a:rPr>
+              <a:t>10</a:t>
+            </a:r>
+            <a:endParaRPr lang="en-US" sz="900" dirty="0"/>
+          </a:p>
+        </p:txBody>
+      </p:sp>
+    </p:spTree>
+  </p:cSld>
+  <p:clrMapOvr>
+    <a:masterClrMapping/>
+  </p:clrMapOvr>
+</p:sld>
+</file>
+
+<file path=ppt/slides/slide11.xml><?xml version="1.0" encoding="utf-8"?>
+<p:sld xmlns:a="http://schemas.openxmlformats.org/drawingml/2006/main" xmlns:r="http://schemas.openxmlformats.org/officeDocument/2006/relationships" xmlns:p="http://schemas.openxmlformats.org/presentationml/2006/main">
+  <p:cSld name="Slide 11">
+    <p:bg>
+      <p:bgPr>
+        <a:solidFill>
+          <a:srgbClr val="161B22"/>
+        </a:solidFill>
+      </p:bgPr>
+    </p:bg>
+    <p:spTree>
+      <p:nvGrpSpPr>
+        <p:cNvPr id="1" name=""/>
+        <p:cNvGrpSpPr/>
+        <p:nvPr/>
+      </p:nvGrpSpPr>
+      <p:grpSpPr>
+        <a:xfrm>
+          <a:off x="0" y="0"/>
+          <a:ext cx="0" cy="0"/>
+          <a:chOff x="0" y="0"/>
+          <a:chExt cx="0" cy="0"/>
+        </a:xfrm>
+      </p:grpSpPr>
+      <p:sp>
+        <p:nvSpPr>
+          <p:cNvPr id="2" name="Text 0"/>
+          <p:cNvSpPr/>
+          <p:nvPr/>
+        </p:nvSpPr>
+        <p:spPr>
+          <a:xfrm>
+            <a:off x="566928" y="384048"/>
+            <a:ext cx="8229600" cy="256032"/>
+          </a:xfrm>
+          <a:prstGeom prst="rect">
+            <a:avLst/>
+          </a:prstGeom>
+          <a:noFill/>
+          <a:ln/>
+        </p:spPr>
+        <p:txBody>
+          <a:bodyPr wrap="square" lIns="0" tIns="0" rIns="0" bIns="0" rtlCol="0" anchor="ctr"/>
+          <a:lstStyle/>
+          <a:p>
+            <a:pPr indent="0" marL="0">
+              <a:buNone/>
+            </a:pPr>
+            <a:r>
+              <a:rPr lang="en-US" sz="1100" b="1" spc="200" kern="0" dirty="0">
+                <a:solidFill>
+                  <a:srgbClr val="F0A429"/>
+                </a:solidFill>
+                <a:latin typeface="Arial" pitchFamily="34" charset="0"/>
+                <a:ea typeface="Arial" pitchFamily="34" charset="-122"/>
+                <a:cs typeface="Arial" pitchFamily="34" charset="-120"/>
+              </a:rPr>
               <a:t>STEP 5 · TOOLS · MATERIALS · PPE</a:t>
             </a:r>
             <a:endParaRPr lang="en-US" sz="1100" dirty="0"/>
@@ -4216,7 +6072,7 @@
                 <a:ea typeface="Arial" pitchFamily="34" charset="-122"/>
                 <a:cs typeface="Arial" pitchFamily="34" charset="-120"/>
               </a:rPr>
-              <a:t>📥 Import XLS</a:t>
+              <a:t>⇊ Combine</a:t>
             </a:r>
             <a:endParaRPr lang="en-US" sz="1350" dirty="0"/>
           </a:p>
@@ -4258,7 +6114,7 @@
                 <a:ea typeface="Calibri" pitchFamily="34" charset="-122"/>
                 <a:cs typeface="Calibri" pitchFamily="34" charset="-120"/>
               </a:rPr>
-              <a:t>Bulk-load rows from a spreadsheet: Description, Qty, UOM, Unit Cost.</a:t>
+              <a:t>Equipment: largest quantity any task needs, for the total days. Consumables: quantities simply add.</a:t>
             </a:r>
             <a:endParaRPr lang="en-US" sz="1100" dirty="0"/>
           </a:p>
@@ -4451,7 +6307,7 @@
                 <a:ea typeface="Calibri" pitchFamily="34" charset="-122"/>
                 <a:cs typeface="Calibri" pitchFamily="34" charset="-120"/>
               </a:rPr>
-              <a:t>10</a:t>
+              <a:t>11</a:t>
             </a:r>
             <a:endParaRPr lang="en-US" sz="900" dirty="0"/>
           </a:p>
@@ -4465,9 +6321,9 @@
 </p:sld>
 </file>
 
-<file path=ppt/slides/slide11.xml><?xml version="1.0" encoding="utf-8"?>
+<file path=ppt/slides/slide12.xml><?xml version="1.0" encoding="utf-8"?>
 <p:sld xmlns:a="http://schemas.openxmlformats.org/drawingml/2006/main" xmlns:r="http://schemas.openxmlformats.org/officeDocument/2006/relationships" xmlns:p="http://schemas.openxmlformats.org/presentationml/2006/main">
-  <p:cSld name="Slide 11">
+  <p:cSld name="Slide 12">
     <p:bg>
       <p:bgPr>
         <a:solidFill>
@@ -5849,7 +7705,7 @@
                 <a:ea typeface="Calibri" pitchFamily="34" charset="-122"/>
                 <a:cs typeface="Calibri" pitchFamily="34" charset="-120"/>
               </a:rPr>
-              <a:t>11</a:t>
+              <a:t>12</a:t>
             </a:r>
             <a:endParaRPr lang="en-US" sz="900" dirty="0"/>
           </a:p>
@@ -5863,9 +7719,9 @@
 </p:sld>
 </file>
 
-<file path=ppt/slides/slide12.xml><?xml version="1.0" encoding="utf-8"?>
+<file path=ppt/slides/slide13.xml><?xml version="1.0" encoding="utf-8"?>
 <p:sld xmlns:a="http://schemas.openxmlformats.org/drawingml/2006/main" xmlns:r="http://schemas.openxmlformats.org/officeDocument/2006/relationships" xmlns:p="http://schemas.openxmlformats.org/presentationml/2006/main">
-  <p:cSld name="Slide 12">
+  <p:cSld name="Slide 13">
     <p:bg>
       <p:bgPr>
         <a:solidFill>
@@ -7661,7 +9517,7 @@
           <a:ln/>
         </p:spPr>
         <p:txBody>
-          <a:bodyPr wrap="square" lIns="0" tIns="0" rIns="0" bIns="0" rtlCol="0" anchor="ctr"/>
+          <a:bodyPr wrap="square" lIns="0" tIns="0" rIns="0" bIns="0" rtlCol="0" anchor="t"/>
           <a:lstStyle/>
           <a:p>
             <a:pPr marL="342900" indent="-342900">
@@ -7809,7 +9665,7 @@
                 <a:ea typeface="Calibri" pitchFamily="34" charset="-122"/>
                 <a:cs typeface="Calibri" pitchFamily="34" charset="-120"/>
               </a:rPr>
-              <a:t>12</a:t>
+              <a:t>13</a:t>
             </a:r>
             <a:endParaRPr lang="en-US" sz="900" dirty="0"/>
           </a:p>
@@ -7823,9 +9679,9 @@
 </p:sld>
 </file>
 
-<file path=ppt/slides/slide13.xml><?xml version="1.0" encoding="utf-8"?>
+<file path=ppt/slides/slide14.xml><?xml version="1.0" encoding="utf-8"?>
 <p:sld xmlns:a="http://schemas.openxmlformats.org/drawingml/2006/main" xmlns:r="http://schemas.openxmlformats.org/officeDocument/2006/relationships" xmlns:p="http://schemas.openxmlformats.org/presentationml/2006/main">
-  <p:cSld name="Slide 13">
+  <p:cSld name="Slide 14">
     <p:bg>
       <p:bgPr>
         <a:solidFill>
@@ -8058,7 +9914,7 @@
           <a:ln/>
         </p:spPr>
         <p:txBody>
-          <a:bodyPr wrap="square" lIns="0" tIns="0" rIns="0" bIns="0" rtlCol="0" anchor="ctr"/>
+          <a:bodyPr wrap="square" lIns="0" tIns="0" rIns="0" bIns="0" rtlCol="0" anchor="t"/>
           <a:lstStyle/>
           <a:p>
             <a:pPr marL="342900" indent="-342900">
@@ -8249,7 +10105,7 @@
           <a:ln/>
         </p:spPr>
         <p:txBody>
-          <a:bodyPr wrap="square" lIns="0" tIns="0" rIns="0" bIns="0" rtlCol="0" anchor="ctr"/>
+          <a:bodyPr wrap="square" lIns="0" tIns="0" rIns="0" bIns="0" rtlCol="0" anchor="t"/>
           <a:lstStyle/>
           <a:p>
             <a:pPr marL="342900" indent="-342900">
@@ -8536,7 +10392,7 @@
                 <a:ea typeface="Calibri" pitchFamily="34" charset="-122"/>
                 <a:cs typeface="Calibri" pitchFamily="34" charset="-120"/>
               </a:rPr>
-              <a:t>13</a:t>
+              <a:t>14</a:t>
             </a:r>
             <a:endParaRPr lang="en-US" sz="900" dirty="0"/>
           </a:p>
@@ -8550,9 +10406,9 @@
 </p:sld>
 </file>
 
-<file path=ppt/slides/slide14.xml><?xml version="1.0" encoding="utf-8"?>
+<file path=ppt/slides/slide15.xml><?xml version="1.0" encoding="utf-8"?>
 <p:sld xmlns:a="http://schemas.openxmlformats.org/drawingml/2006/main" xmlns:r="http://schemas.openxmlformats.org/officeDocument/2006/relationships" xmlns:p="http://schemas.openxmlformats.org/presentationml/2006/main">
-  <p:cSld name="Slide 14">
+  <p:cSld name="Slide 15">
     <p:bg>
       <p:bgPr>
         <a:solidFill>
@@ -9742,7 +11598,7 @@
                 <a:ea typeface="Calibri" pitchFamily="34" charset="-122"/>
                 <a:cs typeface="Calibri" pitchFamily="34" charset="-120"/>
               </a:rPr>
-              <a:t>14</a:t>
+              <a:t>15</a:t>
             </a:r>
             <a:endParaRPr lang="en-US" sz="900" dirty="0"/>
           </a:p>
@@ -9756,9 +11612,9 @@
 </p:sld>
 </file>
 
-<file path=ppt/slides/slide15.xml><?xml version="1.0" encoding="utf-8"?>
+<file path=ppt/slides/slide16.xml><?xml version="1.0" encoding="utf-8"?>
 <p:sld xmlns:a="http://schemas.openxmlformats.org/drawingml/2006/main" xmlns:r="http://schemas.openxmlformats.org/officeDocument/2006/relationships" xmlns:p="http://schemas.openxmlformats.org/presentationml/2006/main">
-  <p:cSld name="Slide 15">
+  <p:cSld name="Slide 16">
     <p:bg>
       <p:bgPr>
         <a:solidFill>
@@ -10040,7 +11896,7 @@
                 <a:ea typeface="Arial" pitchFamily="34" charset="-122"/>
                 <a:cs typeface="Arial" pitchFamily="34" charset="-120"/>
               </a:rPr>
-              <a:t>Export CE</a:t>
+              <a:t>Export Detailed</a:t>
             </a:r>
             <a:endParaRPr lang="en-US" sz="1500" dirty="0"/>
           </a:p>
@@ -10082,7 +11938,7 @@
                 <a:ea typeface="Calibri" pitchFamily="34" charset="-122"/>
                 <a:cs typeface="Calibri" pitchFamily="34" charset="-120"/>
               </a:rPr>
-              <a:t>Writes an Excel workbook of the same estimate — one sheet per section, for anyone who needs the figures rather than the form.</a:t>
+              <a:t>On the Summary tab. Writes the SAME document as an Excel workbook — one sheet per printed page, same headings, same columns. Figures come through as numbers, so you can total a column.</a:t>
             </a:r>
             <a:endParaRPr lang="en-US" sz="1150" dirty="0"/>
           </a:p>
@@ -10294,7 +12150,7 @@
           <a:ln/>
         </p:spPr>
         <p:txBody>
-          <a:bodyPr wrap="square" lIns="0" tIns="0" rIns="0" bIns="0" rtlCol="0" anchor="ctr"/>
+          <a:bodyPr wrap="square" lIns="0" tIns="0" rIns="0" bIns="0" rtlCol="0" anchor="t"/>
           <a:lstStyle/>
           <a:p>
             <a:pPr marL="342900" indent="-342900">
@@ -10466,7 +12322,7 @@
                 <a:ea typeface="Calibri" pitchFamily="34" charset="-122"/>
                 <a:cs typeface="Calibri" pitchFamily="34" charset="-120"/>
               </a:rPr>
-              <a:t>15</a:t>
+              <a:t>16</a:t>
             </a:r>
             <a:endParaRPr lang="en-US" sz="900" dirty="0"/>
           </a:p>
@@ -10480,9 +12336,9 @@
 </p:sld>
 </file>
 
-<file path=ppt/slides/slide16.xml><?xml version="1.0" encoding="utf-8"?>
+<file path=ppt/slides/slide17.xml><?xml version="1.0" encoding="utf-8"?>
 <p:sld xmlns:a="http://schemas.openxmlformats.org/drawingml/2006/main" xmlns:r="http://schemas.openxmlformats.org/officeDocument/2006/relationships" xmlns:p="http://schemas.openxmlformats.org/presentationml/2006/main">
-  <p:cSld name="Slide 16">
+  <p:cSld name="Slide 17">
     <p:bg>
       <p:bgPr>
         <a:solidFill>
@@ -12125,7 +13981,7 @@
                 <a:ea typeface="Calibri" pitchFamily="34" charset="-122"/>
                 <a:cs typeface="Calibri" pitchFamily="34" charset="-120"/>
               </a:rPr>
-              <a:t>16</a:t>
+              <a:t>17</a:t>
             </a:r>
             <a:endParaRPr lang="en-US" sz="900" dirty="0"/>
           </a:p>
@@ -12139,9 +13995,9 @@
 </p:sld>
 </file>
 
-<file path=ppt/slides/slide17.xml><?xml version="1.0" encoding="utf-8"?>
+<file path=ppt/slides/slide18.xml><?xml version="1.0" encoding="utf-8"?>
 <p:sld xmlns:a="http://schemas.openxmlformats.org/drawingml/2006/main" xmlns:r="http://schemas.openxmlformats.org/officeDocument/2006/relationships" xmlns:p="http://schemas.openxmlformats.org/presentationml/2006/main">
-  <p:cSld name="Slide 17">
+  <p:cSld name="Slide 18">
     <p:bg>
       <p:bgPr>
         <a:solidFill>
@@ -13007,7 +14863,7 @@
                 <a:ea typeface="Calibri" pitchFamily="34" charset="-122"/>
                 <a:cs typeface="Calibri" pitchFamily="34" charset="-120"/>
               </a:rPr>
-              <a:t>17</a:t>
+              <a:t>18</a:t>
             </a:r>
             <a:endParaRPr lang="en-US" sz="900" dirty="0"/>
           </a:p>
@@ -13021,9 +14877,9 @@
 </p:sld>
 </file>
 
-<file path=ppt/slides/slide18.xml><?xml version="1.0" encoding="utf-8"?>
+<file path=ppt/slides/slide19.xml><?xml version="1.0" encoding="utf-8"?>
 <p:sld xmlns:a="http://schemas.openxmlformats.org/drawingml/2006/main" xmlns:r="http://schemas.openxmlformats.org/officeDocument/2006/relationships" xmlns:p="http://schemas.openxmlformats.org/presentationml/2006/main">
-  <p:cSld name="Slide 18">
+  <p:cSld name="Slide 19">
     <p:bg>
       <p:bgPr>
         <a:solidFill>
@@ -14075,618 +15931,6 @@
       <p:sp>
         <p:nvSpPr>
           <p:cNvPr id="30" name="Text 28"/>
-          <p:cNvSpPr/>
-          <p:nvPr/>
-        </p:nvSpPr>
-        <p:spPr>
-          <a:xfrm>
-            <a:off x="10981944" y="6437376"/>
-            <a:ext cx="640080" cy="237744"/>
-          </a:xfrm>
-          <a:prstGeom prst="rect">
-            <a:avLst/>
-          </a:prstGeom>
-          <a:noFill/>
-          <a:ln/>
-        </p:spPr>
-        <p:txBody>
-          <a:bodyPr wrap="square" lIns="0" tIns="0" rIns="0" bIns="0" rtlCol="0" anchor="ctr"/>
-          <a:lstStyle/>
-          <a:p>
-            <a:pPr algn="r" indent="0" marL="0">
-              <a:buNone/>
-            </a:pPr>
-            <a:r>
-              <a:rPr lang="en-US" sz="900" dirty="0">
-                <a:solidFill>
-                  <a:srgbClr val="6E7681"/>
-                </a:solidFill>
-                <a:latin typeface="Calibri" pitchFamily="34" charset="0"/>
-                <a:ea typeface="Calibri" pitchFamily="34" charset="-122"/>
-                <a:cs typeface="Calibri" pitchFamily="34" charset="-120"/>
-              </a:rPr>
-              <a:t>18</a:t>
-            </a:r>
-            <a:endParaRPr lang="en-US" sz="900" dirty="0"/>
-          </a:p>
-        </p:txBody>
-      </p:sp>
-    </p:spTree>
-  </p:cSld>
-  <p:clrMapOvr>
-    <a:masterClrMapping/>
-  </p:clrMapOvr>
-</p:sld>
-</file>
-
-<file path=ppt/slides/slide19.xml><?xml version="1.0" encoding="utf-8"?>
-<p:sld xmlns:a="http://schemas.openxmlformats.org/drawingml/2006/main" xmlns:r="http://schemas.openxmlformats.org/officeDocument/2006/relationships" xmlns:p="http://schemas.openxmlformats.org/presentationml/2006/main">
-  <p:cSld name="Slide 19">
-    <p:bg>
-      <p:bgPr>
-        <a:solidFill>
-          <a:srgbClr val="0D1117"/>
-        </a:solidFill>
-      </p:bgPr>
-    </p:bg>
-    <p:spTree>
-      <p:nvGrpSpPr>
-        <p:cNvPr id="1" name=""/>
-        <p:cNvGrpSpPr/>
-        <p:nvPr/>
-      </p:nvGrpSpPr>
-      <p:grpSpPr>
-        <a:xfrm>
-          <a:off x="0" y="0"/>
-          <a:ext cx="0" cy="0"/>
-          <a:chOff x="0" y="0"/>
-          <a:chExt cx="0" cy="0"/>
-        </a:xfrm>
-      </p:grpSpPr>
-      <p:sp>
-        <p:nvSpPr>
-          <p:cNvPr id="2" name="Text 0"/>
-          <p:cNvSpPr/>
-          <p:nvPr/>
-        </p:nvSpPr>
-        <p:spPr>
-          <a:xfrm>
-            <a:off x="566928" y="384048"/>
-            <a:ext cx="8229600" cy="256032"/>
-          </a:xfrm>
-          <a:prstGeom prst="rect">
-            <a:avLst/>
-          </a:prstGeom>
-          <a:noFill/>
-          <a:ln/>
-        </p:spPr>
-        <p:txBody>
-          <a:bodyPr wrap="square" lIns="0" tIns="0" rIns="0" bIns="0" rtlCol="0" anchor="ctr"/>
-          <a:lstStyle/>
-          <a:p>
-            <a:pPr indent="0" marL="0">
-              <a:buNone/>
-            </a:pPr>
-            <a:r>
-              <a:rPr lang="en-US" sz="1100" b="1" spc="200" kern="0" dirty="0">
-                <a:solidFill>
-                  <a:srgbClr val="F0A429"/>
-                </a:solidFill>
-                <a:latin typeface="Arial" pitchFamily="34" charset="0"/>
-                <a:ea typeface="Arial" pitchFamily="34" charset="-122"/>
-                <a:cs typeface="Arial" pitchFamily="34" charset="-120"/>
-              </a:rPr>
-              <a:t>SCOPE LIBRARY · MASTERLIST</a:t>
-            </a:r>
-            <a:endParaRPr lang="en-US" sz="1100" dirty="0"/>
-          </a:p>
-        </p:txBody>
-      </p:sp>
-      <p:sp>
-        <p:nvSpPr>
-          <p:cNvPr id="3" name="Text 1"/>
-          <p:cNvSpPr/>
-          <p:nvPr/>
-        </p:nvSpPr>
-        <p:spPr>
-          <a:xfrm>
-            <a:off x="566928" y="694944"/>
-            <a:ext cx="11055096" cy="566928"/>
-          </a:xfrm>
-          <a:prstGeom prst="rect">
-            <a:avLst/>
-          </a:prstGeom>
-          <a:noFill/>
-          <a:ln/>
-        </p:spPr>
-        <p:txBody>
-          <a:bodyPr wrap="square" lIns="0" tIns="0" rIns="0" bIns="0" rtlCol="0" anchor="ctr"/>
-          <a:lstStyle/>
-          <a:p>
-            <a:pPr indent="0" marL="0">
-              <a:buNone/>
-            </a:pPr>
-            <a:r>
-              <a:rPr lang="en-US" sz="3200" b="1" dirty="0">
-                <a:solidFill>
-                  <a:srgbClr val="E6EDF3"/>
-                </a:solidFill>
-                <a:latin typeface="Arial" pitchFamily="34" charset="0"/>
-                <a:ea typeface="Arial" pitchFamily="34" charset="-122"/>
-                <a:cs typeface="Arial" pitchFamily="34" charset="-120"/>
-              </a:rPr>
-              <a:t>Keeping the shared lists right</a:t>
-            </a:r>
-            <a:endParaRPr lang="en-US" sz="3200" dirty="0"/>
-          </a:p>
-        </p:txBody>
-      </p:sp>
-      <p:sp>
-        <p:nvSpPr>
-          <p:cNvPr id="4" name="Text 2"/>
-          <p:cNvSpPr/>
-          <p:nvPr/>
-        </p:nvSpPr>
-        <p:spPr>
-          <a:xfrm>
-            <a:off x="566928" y="1298448"/>
-            <a:ext cx="10972800" cy="365760"/>
-          </a:xfrm>
-          <a:prstGeom prst="rect">
-            <a:avLst/>
-          </a:prstGeom>
-          <a:noFill/>
-          <a:ln/>
-        </p:spPr>
-        <p:txBody>
-          <a:bodyPr wrap="square" lIns="0" tIns="0" rIns="0" bIns="0" rtlCol="0" anchor="t"/>
-          <a:lstStyle/>
-          <a:p>
-            <a:pPr algn="l" indent="0" marL="0">
-              <a:lnSpc>
-                <a:spcPts val="2000"/>
-              </a:lnSpc>
-              <a:buNone/>
-            </a:pPr>
-            <a:r>
-              <a:rPr lang="en-US" sz="1400" dirty="0">
-                <a:solidFill>
-                  <a:srgbClr val="9AA4AF"/>
-                </a:solidFill>
-                <a:latin typeface="Calibri" pitchFamily="34" charset="0"/>
-                <a:ea typeface="Calibri" pitchFamily="34" charset="-122"/>
-                <a:cs typeface="Calibri" pitchFamily="34" charset="-120"/>
-              </a:rPr>
-              <a:t>These two lists are shared by everyone. A change here changes what every estimator sees next time.</a:t>
-            </a:r>
-            <a:endParaRPr lang="en-US" sz="1400" dirty="0"/>
-          </a:p>
-        </p:txBody>
-      </p:sp>
-      <p:sp>
-        <p:nvSpPr>
-          <p:cNvPr id="5" name="Shape 3"/>
-          <p:cNvSpPr/>
-          <p:nvPr/>
-        </p:nvSpPr>
-        <p:spPr>
-          <a:xfrm>
-            <a:off x="566928" y="1911096"/>
-            <a:ext cx="5532120" cy="3566160"/>
-          </a:xfrm>
-          <a:prstGeom prst="roundRect">
-            <a:avLst>
-              <a:gd name="adj" fmla="val 2051"/>
-            </a:avLst>
-          </a:prstGeom>
-          <a:solidFill>
-            <a:srgbClr val="1C2128"/>
-          </a:solidFill>
-          <a:ln w="12700">
-            <a:solidFill>
-              <a:srgbClr val="30363D"/>
-            </a:solidFill>
-            <a:prstDash val="solid"/>
-          </a:ln>
-          <a:effectLst>
-            <a:outerShdw sx="100000" sy="100000" kx="0" ky="0" algn="bl" rotWithShape="0" blurRad="152400" dist="38100" dir="5400000">
-              <a:srgbClr val="000000">
-                <a:alpha val="45000"/>
-              </a:srgbClr>
-            </a:outerShdw>
-          </a:effectLst>
-        </p:spPr>
-      </p:sp>
-      <p:sp>
-        <p:nvSpPr>
-          <p:cNvPr id="6" name="Text 4"/>
-          <p:cNvSpPr/>
-          <p:nvPr/>
-        </p:nvSpPr>
-        <p:spPr>
-          <a:xfrm>
-            <a:off x="841248" y="2121408"/>
-            <a:ext cx="4937760" cy="329184"/>
-          </a:xfrm>
-          <a:prstGeom prst="rect">
-            <a:avLst/>
-          </a:prstGeom>
-          <a:noFill/>
-          <a:ln/>
-        </p:spPr>
-        <p:txBody>
-          <a:bodyPr wrap="square" lIns="0" tIns="0" rIns="0" bIns="0" rtlCol="0" anchor="ctr"/>
-          <a:lstStyle/>
-          <a:p>
-            <a:pPr indent="0" marL="0">
-              <a:buNone/>
-            </a:pPr>
-            <a:r>
-              <a:rPr lang="en-US" sz="1700" b="1" dirty="0">
-                <a:solidFill>
-                  <a:srgbClr val="A78BFA"/>
-                </a:solidFill>
-                <a:latin typeface="Arial" pitchFamily="34" charset="0"/>
-                <a:ea typeface="Arial" pitchFamily="34" charset="-122"/>
-                <a:cs typeface="Arial" pitchFamily="34" charset="-120"/>
-              </a:rPr>
-              <a:t>Scope Library</a:t>
-            </a:r>
-            <a:endParaRPr lang="en-US" sz="1700" dirty="0"/>
-          </a:p>
-        </p:txBody>
-      </p:sp>
-      <p:sp>
-        <p:nvSpPr>
-          <p:cNvPr id="7" name="Text 5"/>
-          <p:cNvSpPr/>
-          <p:nvPr/>
-        </p:nvSpPr>
-        <p:spPr>
-          <a:xfrm>
-            <a:off x="841248" y="2578608"/>
-            <a:ext cx="4983480" cy="2651760"/>
-          </a:xfrm>
-          <a:prstGeom prst="rect">
-            <a:avLst/>
-          </a:prstGeom>
-          <a:noFill/>
-          <a:ln/>
-        </p:spPr>
-        <p:txBody>
-          <a:bodyPr wrap="square" lIns="0" tIns="0" rIns="0" bIns="0" rtlCol="0" anchor="ctr"/>
-          <a:lstStyle/>
-          <a:p>
-            <a:pPr marL="342900" indent="-342900">
-              <a:lnSpc>
-                <a:spcPts val="1600"/>
-              </a:lnSpc>
-              <a:spcAft>
-                <a:spcPts val="900"/>
-              </a:spcAft>
-              <a:buSzPct val="100000"/>
-              <a:buChar char="●"/>
-            </a:pPr>
-            <a:r>
-              <a:rPr lang="en-US" sz="1200" dirty="0">
-                <a:solidFill>
-                  <a:srgbClr val="E6EDF3"/>
-                </a:solidFill>
-                <a:latin typeface="Calibri" pitchFamily="34" charset="0"/>
-                <a:ea typeface="Calibri" pitchFamily="34" charset="-122"/>
-                <a:cs typeface="Calibri" pitchFamily="34" charset="-120"/>
-              </a:rPr>
-              <a:t>One card per standard service. Click Edit to open it where it sits</a:t>
-            </a:r>
-            <a:endParaRPr lang="en-US" sz="1200" dirty="0"/>
-          </a:p>
-          <a:p>
-            <a:pPr marL="342900" indent="-342900">
-              <a:lnSpc>
-                <a:spcPts val="1600"/>
-              </a:lnSpc>
-              <a:spcAft>
-                <a:spcPts val="900"/>
-              </a:spcAft>
-              <a:buSzPct val="100000"/>
-              <a:buChar char="●"/>
-            </a:pPr>
-            <a:r>
-              <a:rPr lang="en-US" sz="1200" dirty="0">
-                <a:solidFill>
-                  <a:srgbClr val="E6EDF3"/>
-                </a:solidFill>
-                <a:latin typeface="Calibri" pitchFamily="34" charset="0"/>
-                <a:ea typeface="Calibri" pitchFamily="34" charset="-122"/>
-                <a:cs typeface="Calibri" pitchFamily="34" charset="-120"/>
-              </a:rPr>
-              <a:t>A new service is added at the top, already open</a:t>
-            </a:r>
-            <a:endParaRPr lang="en-US" sz="1200" dirty="0"/>
-          </a:p>
-          <a:p>
-            <a:pPr marL="342900" indent="-342900">
-              <a:lnSpc>
-                <a:spcPts val="1600"/>
-              </a:lnSpc>
-              <a:spcAft>
-                <a:spcPts val="900"/>
-              </a:spcAft>
-              <a:buSzPct val="100000"/>
-              <a:buChar char="●"/>
-            </a:pPr>
-            <a:r>
-              <a:rPr lang="en-US" sz="1200" dirty="0">
-                <a:solidFill>
-                  <a:srgbClr val="E6EDF3"/>
-                </a:solidFill>
-                <a:latin typeface="Calibri" pitchFamily="34" charset="0"/>
-                <a:ea typeface="Calibri" pitchFamily="34" charset="-122"/>
-                <a:cs typeface="Calibri" pitchFamily="34" charset="-120"/>
-              </a:rPr>
-              <a:t>Resources belong to a scope step, so applying the service files them against the right task</a:t>
-            </a:r>
-            <a:endParaRPr lang="en-US" sz="1200" dirty="0"/>
-          </a:p>
-          <a:p>
-            <a:pPr marL="342900" indent="-342900">
-              <a:lnSpc>
-                <a:spcPts val="1600"/>
-              </a:lnSpc>
-              <a:spcAft>
-                <a:spcPts val="900"/>
-              </a:spcAft>
-              <a:buSzPct val="100000"/>
-              <a:buChar char="●"/>
-            </a:pPr>
-            <a:r>
-              <a:rPr lang="en-US" sz="1200" dirty="0">
-                <a:solidFill>
-                  <a:srgbClr val="E6EDF3"/>
-                </a:solidFill>
-                <a:latin typeface="Calibri" pitchFamily="34" charset="0"/>
-                <a:ea typeface="Calibri" pitchFamily="34" charset="-122"/>
-                <a:cs typeface="Calibri" pitchFamily="34" charset="-120"/>
-              </a:rPr>
-              <a:t>Leave a manpower row's Days blank if that role is on site for the whole project; enter a number if it is only needed for its step</a:t>
-            </a:r>
-            <a:endParaRPr lang="en-US" sz="1200" dirty="0"/>
-          </a:p>
-        </p:txBody>
-      </p:sp>
-      <p:sp>
-        <p:nvSpPr>
-          <p:cNvPr id="8" name="Shape 6"/>
-          <p:cNvSpPr/>
-          <p:nvPr/>
-        </p:nvSpPr>
-        <p:spPr>
-          <a:xfrm>
-            <a:off x="6400800" y="1911096"/>
-            <a:ext cx="5221224" cy="3566160"/>
-          </a:xfrm>
-          <a:prstGeom prst="roundRect">
-            <a:avLst>
-              <a:gd name="adj" fmla="val 2051"/>
-            </a:avLst>
-          </a:prstGeom>
-          <a:solidFill>
-            <a:srgbClr val="1C2128"/>
-          </a:solidFill>
-          <a:ln w="12700">
-            <a:solidFill>
-              <a:srgbClr val="30363D"/>
-            </a:solidFill>
-            <a:prstDash val="solid"/>
-          </a:ln>
-          <a:effectLst>
-            <a:outerShdw sx="100000" sy="100000" kx="0" ky="0" algn="bl" rotWithShape="0" blurRad="152400" dist="38100" dir="5400000">
-              <a:srgbClr val="000000">
-                <a:alpha val="45000"/>
-              </a:srgbClr>
-            </a:outerShdw>
-          </a:effectLst>
-        </p:spPr>
-      </p:sp>
-      <p:sp>
-        <p:nvSpPr>
-          <p:cNvPr id="9" name="Text 7"/>
-          <p:cNvSpPr/>
-          <p:nvPr/>
-        </p:nvSpPr>
-        <p:spPr>
-          <a:xfrm>
-            <a:off x="6675120" y="2121408"/>
-            <a:ext cx="4663440" cy="329184"/>
-          </a:xfrm>
-          <a:prstGeom prst="rect">
-            <a:avLst/>
-          </a:prstGeom>
-          <a:noFill/>
-          <a:ln/>
-        </p:spPr>
-        <p:txBody>
-          <a:bodyPr wrap="square" lIns="0" tIns="0" rIns="0" bIns="0" rtlCol="0" anchor="ctr"/>
-          <a:lstStyle/>
-          <a:p>
-            <a:pPr indent="0" marL="0">
-              <a:buNone/>
-            </a:pPr>
-            <a:r>
-              <a:rPr lang="en-US" sz="1700" b="1" dirty="0">
-                <a:solidFill>
-                  <a:srgbClr val="F0A429"/>
-                </a:solidFill>
-                <a:latin typeface="Arial" pitchFamily="34" charset="0"/>
-                <a:ea typeface="Arial" pitchFamily="34" charset="-122"/>
-                <a:cs typeface="Arial" pitchFamily="34" charset="-120"/>
-              </a:rPr>
-              <a:t>Masterlist</a:t>
-            </a:r>
-            <a:endParaRPr lang="en-US" sz="1700" dirty="0"/>
-          </a:p>
-        </p:txBody>
-      </p:sp>
-      <p:sp>
-        <p:nvSpPr>
-          <p:cNvPr id="10" name="Text 8"/>
-          <p:cNvSpPr/>
-          <p:nvPr/>
-        </p:nvSpPr>
-        <p:spPr>
-          <a:xfrm>
-            <a:off x="6675120" y="2578608"/>
-            <a:ext cx="4709160" cy="2651760"/>
-          </a:xfrm>
-          <a:prstGeom prst="rect">
-            <a:avLst/>
-          </a:prstGeom>
-          <a:noFill/>
-          <a:ln/>
-        </p:spPr>
-        <p:txBody>
-          <a:bodyPr wrap="square" lIns="0" tIns="0" rIns="0" bIns="0" rtlCol="0" anchor="ctr"/>
-          <a:lstStyle/>
-          <a:p>
-            <a:pPr marL="342900" indent="-342900">
-              <a:lnSpc>
-                <a:spcPts val="1600"/>
-              </a:lnSpc>
-              <a:spcAft>
-                <a:spcPts val="900"/>
-              </a:spcAft>
-              <a:buSzPct val="100000"/>
-              <a:buChar char="●"/>
-            </a:pPr>
-            <a:r>
-              <a:rPr lang="en-US" sz="1200" dirty="0">
-                <a:solidFill>
-                  <a:srgbClr val="E6EDF3"/>
-                </a:solidFill>
-                <a:latin typeface="Calibri" pitchFamily="34" charset="0"/>
-                <a:ea typeface="Calibri" pitchFamily="34" charset="-122"/>
-                <a:cs typeface="Calibri" pitchFamily="34" charset="-120"/>
-              </a:rPr>
-              <a:t>The single source of rates for manpower, tools, materials and PPE</a:t>
-            </a:r>
-            <a:endParaRPr lang="en-US" sz="1200" dirty="0"/>
-          </a:p>
-          <a:p>
-            <a:pPr marL="342900" indent="-342900">
-              <a:lnSpc>
-                <a:spcPts val="1600"/>
-              </a:lnSpc>
-              <a:spcAft>
-                <a:spcPts val="900"/>
-              </a:spcAft>
-              <a:buSzPct val="100000"/>
-              <a:buChar char="●"/>
-            </a:pPr>
-            <a:r>
-              <a:rPr lang="en-US" sz="1200" dirty="0">
-                <a:solidFill>
-                  <a:srgbClr val="E6EDF3"/>
-                </a:solidFill>
-                <a:latin typeface="Calibri" pitchFamily="34" charset="0"/>
-                <a:ea typeface="Calibri" pitchFamily="34" charset="-122"/>
-                <a:cs typeface="Calibri" pitchFamily="34" charset="-120"/>
-              </a:rPr>
-              <a:t>Every rate you pick in a CE comes from here</a:t>
-            </a:r>
-            <a:endParaRPr lang="en-US" sz="1200" dirty="0"/>
-          </a:p>
-          <a:p>
-            <a:pPr marL="342900" indent="-342900">
-              <a:lnSpc>
-                <a:spcPts val="1600"/>
-              </a:lnSpc>
-              <a:spcAft>
-                <a:spcPts val="900"/>
-              </a:spcAft>
-              <a:buSzPct val="100000"/>
-              <a:buChar char="●"/>
-            </a:pPr>
-            <a:r>
-              <a:rPr lang="en-US" sz="1200" dirty="0">
-                <a:solidFill>
-                  <a:srgbClr val="E6EDF3"/>
-                </a:solidFill>
-                <a:latin typeface="Calibri" pitchFamily="34" charset="0"/>
-                <a:ea typeface="Calibri" pitchFamily="34" charset="-122"/>
-                <a:cs typeface="Calibri" pitchFamily="34" charset="-120"/>
-              </a:rPr>
-              <a:t>Update a rate once and use ↺ Sync Rates on an older CE to bring it up to date</a:t>
-            </a:r>
-            <a:endParaRPr lang="en-US" sz="1200" dirty="0"/>
-          </a:p>
-          <a:p>
-            <a:pPr marL="342900" indent="-342900">
-              <a:lnSpc>
-                <a:spcPts val="1600"/>
-              </a:lnSpc>
-              <a:spcAft>
-                <a:spcPts val="900"/>
-              </a:spcAft>
-              <a:buSzPct val="100000"/>
-              <a:buChar char="●"/>
-            </a:pPr>
-            <a:r>
-              <a:rPr lang="en-US" sz="1200" dirty="0">
-                <a:solidFill>
-                  <a:srgbClr val="E6EDF3"/>
-                </a:solidFill>
-                <a:latin typeface="Calibri" pitchFamily="34" charset="0"/>
-                <a:ea typeface="Calibri" pitchFamily="34" charset="-122"/>
-                <a:cs typeface="Calibri" pitchFamily="34" charset="-120"/>
-              </a:rPr>
-              <a:t>Changing a rate does not alter CEs already saved</a:t>
-            </a:r>
-            <a:endParaRPr lang="en-US" sz="1200" dirty="0"/>
-          </a:p>
-        </p:txBody>
-      </p:sp>
-      <p:sp>
-        <p:nvSpPr>
-          <p:cNvPr id="11" name="Text 9"/>
-          <p:cNvSpPr/>
-          <p:nvPr/>
-        </p:nvSpPr>
-        <p:spPr>
-          <a:xfrm>
-            <a:off x="566928" y="6437376"/>
-            <a:ext cx="5486400" cy="237744"/>
-          </a:xfrm>
-          <a:prstGeom prst="rect">
-            <a:avLst/>
-          </a:prstGeom>
-          <a:noFill/>
-          <a:ln/>
-        </p:spPr>
-        <p:txBody>
-          <a:bodyPr wrap="square" lIns="0" tIns="0" rIns="0" bIns="0" rtlCol="0" anchor="ctr"/>
-          <a:lstStyle/>
-          <a:p>
-            <a:pPr indent="0" marL="0">
-              <a:buNone/>
-            </a:pPr>
-            <a:r>
-              <a:rPr lang="en-US" sz="900" dirty="0">
-                <a:solidFill>
-                  <a:srgbClr val="6E7681"/>
-                </a:solidFill>
-                <a:latin typeface="Calibri" pitchFamily="34" charset="0"/>
-                <a:ea typeface="Calibri" pitchFamily="34" charset="-122"/>
-                <a:cs typeface="Calibri" pitchFamily="34" charset="-120"/>
-              </a:rPr>
-              <a:t>SHIC Cost Estimator — End-User Manual</a:t>
-            </a:r>
-            <a:endParaRPr lang="en-US" sz="900" dirty="0"/>
-          </a:p>
-        </p:txBody>
-      </p:sp>
-      <p:sp>
-        <p:nvSpPr>
-          <p:cNvPr id="12" name="Text 10"/>
           <p:cNvSpPr/>
           <p:nvPr/>
         </p:nvSpPr>
@@ -14924,7 +16168,7 @@
           <a:ln/>
         </p:spPr>
         <p:txBody>
-          <a:bodyPr wrap="square" lIns="0" tIns="0" rIns="0" bIns="0" rtlCol="0" anchor="ctr"/>
+          <a:bodyPr wrap="square" lIns="0" tIns="0" rIns="0" bIns="0" rtlCol="0" anchor="t"/>
           <a:lstStyle/>
           <a:p>
             <a:pPr marL="342900" indent="-342900">
@@ -15575,6 +16819,618 @@
 <file path=ppt/slides/slide20.xml><?xml version="1.0" encoding="utf-8"?>
 <p:sld xmlns:a="http://schemas.openxmlformats.org/drawingml/2006/main" xmlns:r="http://schemas.openxmlformats.org/officeDocument/2006/relationships" xmlns:p="http://schemas.openxmlformats.org/presentationml/2006/main">
   <p:cSld name="Slide 20">
+    <p:bg>
+      <p:bgPr>
+        <a:solidFill>
+          <a:srgbClr val="0D1117"/>
+        </a:solidFill>
+      </p:bgPr>
+    </p:bg>
+    <p:spTree>
+      <p:nvGrpSpPr>
+        <p:cNvPr id="1" name=""/>
+        <p:cNvGrpSpPr/>
+        <p:nvPr/>
+      </p:nvGrpSpPr>
+      <p:grpSpPr>
+        <a:xfrm>
+          <a:off x="0" y="0"/>
+          <a:ext cx="0" cy="0"/>
+          <a:chOff x="0" y="0"/>
+          <a:chExt cx="0" cy="0"/>
+        </a:xfrm>
+      </p:grpSpPr>
+      <p:sp>
+        <p:nvSpPr>
+          <p:cNvPr id="2" name="Text 0"/>
+          <p:cNvSpPr/>
+          <p:nvPr/>
+        </p:nvSpPr>
+        <p:spPr>
+          <a:xfrm>
+            <a:off x="566928" y="384048"/>
+            <a:ext cx="8229600" cy="256032"/>
+          </a:xfrm>
+          <a:prstGeom prst="rect">
+            <a:avLst/>
+          </a:prstGeom>
+          <a:noFill/>
+          <a:ln/>
+        </p:spPr>
+        <p:txBody>
+          <a:bodyPr wrap="square" lIns="0" tIns="0" rIns="0" bIns="0" rtlCol="0" anchor="ctr"/>
+          <a:lstStyle/>
+          <a:p>
+            <a:pPr indent="0" marL="0">
+              <a:buNone/>
+            </a:pPr>
+            <a:r>
+              <a:rPr lang="en-US" sz="1100" b="1" spc="200" kern="0" dirty="0">
+                <a:solidFill>
+                  <a:srgbClr val="F0A429"/>
+                </a:solidFill>
+                <a:latin typeface="Arial" pitchFamily="34" charset="0"/>
+                <a:ea typeface="Arial" pitchFamily="34" charset="-122"/>
+                <a:cs typeface="Arial" pitchFamily="34" charset="-120"/>
+              </a:rPr>
+              <a:t>SCOPE LIBRARY · MASTERLIST</a:t>
+            </a:r>
+            <a:endParaRPr lang="en-US" sz="1100" dirty="0"/>
+          </a:p>
+        </p:txBody>
+      </p:sp>
+      <p:sp>
+        <p:nvSpPr>
+          <p:cNvPr id="3" name="Text 1"/>
+          <p:cNvSpPr/>
+          <p:nvPr/>
+        </p:nvSpPr>
+        <p:spPr>
+          <a:xfrm>
+            <a:off x="566928" y="694944"/>
+            <a:ext cx="11055096" cy="566928"/>
+          </a:xfrm>
+          <a:prstGeom prst="rect">
+            <a:avLst/>
+          </a:prstGeom>
+          <a:noFill/>
+          <a:ln/>
+        </p:spPr>
+        <p:txBody>
+          <a:bodyPr wrap="square" lIns="0" tIns="0" rIns="0" bIns="0" rtlCol="0" anchor="ctr"/>
+          <a:lstStyle/>
+          <a:p>
+            <a:pPr indent="0" marL="0">
+              <a:buNone/>
+            </a:pPr>
+            <a:r>
+              <a:rPr lang="en-US" sz="3200" b="1" dirty="0">
+                <a:solidFill>
+                  <a:srgbClr val="E6EDF3"/>
+                </a:solidFill>
+                <a:latin typeface="Arial" pitchFamily="34" charset="0"/>
+                <a:ea typeface="Arial" pitchFamily="34" charset="-122"/>
+                <a:cs typeface="Arial" pitchFamily="34" charset="-120"/>
+              </a:rPr>
+              <a:t>Keeping the shared lists right</a:t>
+            </a:r>
+            <a:endParaRPr lang="en-US" sz="3200" dirty="0"/>
+          </a:p>
+        </p:txBody>
+      </p:sp>
+      <p:sp>
+        <p:nvSpPr>
+          <p:cNvPr id="4" name="Text 2"/>
+          <p:cNvSpPr/>
+          <p:nvPr/>
+        </p:nvSpPr>
+        <p:spPr>
+          <a:xfrm>
+            <a:off x="566928" y="1298448"/>
+            <a:ext cx="10972800" cy="365760"/>
+          </a:xfrm>
+          <a:prstGeom prst="rect">
+            <a:avLst/>
+          </a:prstGeom>
+          <a:noFill/>
+          <a:ln/>
+        </p:spPr>
+        <p:txBody>
+          <a:bodyPr wrap="square" lIns="0" tIns="0" rIns="0" bIns="0" rtlCol="0" anchor="t"/>
+          <a:lstStyle/>
+          <a:p>
+            <a:pPr algn="l" indent="0" marL="0">
+              <a:lnSpc>
+                <a:spcPts val="2000"/>
+              </a:lnSpc>
+              <a:buNone/>
+            </a:pPr>
+            <a:r>
+              <a:rPr lang="en-US" sz="1400" dirty="0">
+                <a:solidFill>
+                  <a:srgbClr val="9AA4AF"/>
+                </a:solidFill>
+                <a:latin typeface="Calibri" pitchFamily="34" charset="0"/>
+                <a:ea typeface="Calibri" pitchFamily="34" charset="-122"/>
+                <a:cs typeface="Calibri" pitchFamily="34" charset="-120"/>
+              </a:rPr>
+              <a:t>These two lists are shared by everyone. A change here changes what every estimator sees next time.</a:t>
+            </a:r>
+            <a:endParaRPr lang="en-US" sz="1400" dirty="0"/>
+          </a:p>
+        </p:txBody>
+      </p:sp>
+      <p:sp>
+        <p:nvSpPr>
+          <p:cNvPr id="5" name="Shape 3"/>
+          <p:cNvSpPr/>
+          <p:nvPr/>
+        </p:nvSpPr>
+        <p:spPr>
+          <a:xfrm>
+            <a:off x="566928" y="1911096"/>
+            <a:ext cx="5532120" cy="3566160"/>
+          </a:xfrm>
+          <a:prstGeom prst="roundRect">
+            <a:avLst>
+              <a:gd name="adj" fmla="val 2051"/>
+            </a:avLst>
+          </a:prstGeom>
+          <a:solidFill>
+            <a:srgbClr val="1C2128"/>
+          </a:solidFill>
+          <a:ln w="12700">
+            <a:solidFill>
+              <a:srgbClr val="30363D"/>
+            </a:solidFill>
+            <a:prstDash val="solid"/>
+          </a:ln>
+          <a:effectLst>
+            <a:outerShdw sx="100000" sy="100000" kx="0" ky="0" algn="bl" rotWithShape="0" blurRad="152400" dist="38100" dir="5400000">
+              <a:srgbClr val="000000">
+                <a:alpha val="45000"/>
+              </a:srgbClr>
+            </a:outerShdw>
+          </a:effectLst>
+        </p:spPr>
+      </p:sp>
+      <p:sp>
+        <p:nvSpPr>
+          <p:cNvPr id="6" name="Text 4"/>
+          <p:cNvSpPr/>
+          <p:nvPr/>
+        </p:nvSpPr>
+        <p:spPr>
+          <a:xfrm>
+            <a:off x="841248" y="2121408"/>
+            <a:ext cx="4937760" cy="329184"/>
+          </a:xfrm>
+          <a:prstGeom prst="rect">
+            <a:avLst/>
+          </a:prstGeom>
+          <a:noFill/>
+          <a:ln/>
+        </p:spPr>
+        <p:txBody>
+          <a:bodyPr wrap="square" lIns="0" tIns="0" rIns="0" bIns="0" rtlCol="0" anchor="ctr"/>
+          <a:lstStyle/>
+          <a:p>
+            <a:pPr indent="0" marL="0">
+              <a:buNone/>
+            </a:pPr>
+            <a:r>
+              <a:rPr lang="en-US" sz="1700" b="1" dirty="0">
+                <a:solidFill>
+                  <a:srgbClr val="A78BFA"/>
+                </a:solidFill>
+                <a:latin typeface="Arial" pitchFamily="34" charset="0"/>
+                <a:ea typeface="Arial" pitchFamily="34" charset="-122"/>
+                <a:cs typeface="Arial" pitchFamily="34" charset="-120"/>
+              </a:rPr>
+              <a:t>Scope Library</a:t>
+            </a:r>
+            <a:endParaRPr lang="en-US" sz="1700" dirty="0"/>
+          </a:p>
+        </p:txBody>
+      </p:sp>
+      <p:sp>
+        <p:nvSpPr>
+          <p:cNvPr id="7" name="Text 5"/>
+          <p:cNvSpPr/>
+          <p:nvPr/>
+        </p:nvSpPr>
+        <p:spPr>
+          <a:xfrm>
+            <a:off x="841248" y="2578608"/>
+            <a:ext cx="4983480" cy="2651760"/>
+          </a:xfrm>
+          <a:prstGeom prst="rect">
+            <a:avLst/>
+          </a:prstGeom>
+          <a:noFill/>
+          <a:ln/>
+        </p:spPr>
+        <p:txBody>
+          <a:bodyPr wrap="square" lIns="0" tIns="0" rIns="0" bIns="0" rtlCol="0" anchor="t"/>
+          <a:lstStyle/>
+          <a:p>
+            <a:pPr marL="342900" indent="-342900">
+              <a:lnSpc>
+                <a:spcPts val="1600"/>
+              </a:lnSpc>
+              <a:spcAft>
+                <a:spcPts val="900"/>
+              </a:spcAft>
+              <a:buSzPct val="100000"/>
+              <a:buChar char="●"/>
+            </a:pPr>
+            <a:r>
+              <a:rPr lang="en-US" sz="1200" dirty="0">
+                <a:solidFill>
+                  <a:srgbClr val="E6EDF3"/>
+                </a:solidFill>
+                <a:latin typeface="Calibri" pitchFamily="34" charset="0"/>
+                <a:ea typeface="Calibri" pitchFamily="34" charset="-122"/>
+                <a:cs typeface="Calibri" pitchFamily="34" charset="-120"/>
+              </a:rPr>
+              <a:t>One card per standard service. Click Edit to open it where it sits</a:t>
+            </a:r>
+            <a:endParaRPr lang="en-US" sz="1200" dirty="0"/>
+          </a:p>
+          <a:p>
+            <a:pPr marL="342900" indent="-342900">
+              <a:lnSpc>
+                <a:spcPts val="1600"/>
+              </a:lnSpc>
+              <a:spcAft>
+                <a:spcPts val="900"/>
+              </a:spcAft>
+              <a:buSzPct val="100000"/>
+              <a:buChar char="●"/>
+            </a:pPr>
+            <a:r>
+              <a:rPr lang="en-US" sz="1200" dirty="0">
+                <a:solidFill>
+                  <a:srgbClr val="E6EDF3"/>
+                </a:solidFill>
+                <a:latin typeface="Calibri" pitchFamily="34" charset="0"/>
+                <a:ea typeface="Calibri" pitchFamily="34" charset="-122"/>
+                <a:cs typeface="Calibri" pitchFamily="34" charset="-120"/>
+              </a:rPr>
+              <a:t>A new service is added at the top, already open</a:t>
+            </a:r>
+            <a:endParaRPr lang="en-US" sz="1200" dirty="0"/>
+          </a:p>
+          <a:p>
+            <a:pPr marL="342900" indent="-342900">
+              <a:lnSpc>
+                <a:spcPts val="1600"/>
+              </a:lnSpc>
+              <a:spcAft>
+                <a:spcPts val="900"/>
+              </a:spcAft>
+              <a:buSzPct val="100000"/>
+              <a:buChar char="●"/>
+            </a:pPr>
+            <a:r>
+              <a:rPr lang="en-US" sz="1200" dirty="0">
+                <a:solidFill>
+                  <a:srgbClr val="E6EDF3"/>
+                </a:solidFill>
+                <a:latin typeface="Calibri" pitchFamily="34" charset="0"/>
+                <a:ea typeface="Calibri" pitchFamily="34" charset="-122"/>
+                <a:cs typeface="Calibri" pitchFamily="34" charset="-120"/>
+              </a:rPr>
+              <a:t>Resources belong to a scope step, so applying the service files them against the right task</a:t>
+            </a:r>
+            <a:endParaRPr lang="en-US" sz="1200" dirty="0"/>
+          </a:p>
+          <a:p>
+            <a:pPr marL="342900" indent="-342900">
+              <a:lnSpc>
+                <a:spcPts val="1600"/>
+              </a:lnSpc>
+              <a:spcAft>
+                <a:spcPts val="900"/>
+              </a:spcAft>
+              <a:buSzPct val="100000"/>
+              <a:buChar char="●"/>
+            </a:pPr>
+            <a:r>
+              <a:rPr lang="en-US" sz="1200" dirty="0">
+                <a:solidFill>
+                  <a:srgbClr val="E6EDF3"/>
+                </a:solidFill>
+                <a:latin typeface="Calibri" pitchFamily="34" charset="0"/>
+                <a:ea typeface="Calibri" pitchFamily="34" charset="-122"/>
+                <a:cs typeface="Calibri" pitchFamily="34" charset="-120"/>
+              </a:rPr>
+              <a:t>Leave a manpower row's Days blank if that role is on site for the whole project; enter a number if it is only needed for its step</a:t>
+            </a:r>
+            <a:endParaRPr lang="en-US" sz="1200" dirty="0"/>
+          </a:p>
+        </p:txBody>
+      </p:sp>
+      <p:sp>
+        <p:nvSpPr>
+          <p:cNvPr id="8" name="Shape 6"/>
+          <p:cNvSpPr/>
+          <p:nvPr/>
+        </p:nvSpPr>
+        <p:spPr>
+          <a:xfrm>
+            <a:off x="6400800" y="1911096"/>
+            <a:ext cx="5221224" cy="3566160"/>
+          </a:xfrm>
+          <a:prstGeom prst="roundRect">
+            <a:avLst>
+              <a:gd name="adj" fmla="val 2051"/>
+            </a:avLst>
+          </a:prstGeom>
+          <a:solidFill>
+            <a:srgbClr val="1C2128"/>
+          </a:solidFill>
+          <a:ln w="12700">
+            <a:solidFill>
+              <a:srgbClr val="30363D"/>
+            </a:solidFill>
+            <a:prstDash val="solid"/>
+          </a:ln>
+          <a:effectLst>
+            <a:outerShdw sx="100000" sy="100000" kx="0" ky="0" algn="bl" rotWithShape="0" blurRad="152400" dist="38100" dir="5400000">
+              <a:srgbClr val="000000">
+                <a:alpha val="45000"/>
+              </a:srgbClr>
+            </a:outerShdw>
+          </a:effectLst>
+        </p:spPr>
+      </p:sp>
+      <p:sp>
+        <p:nvSpPr>
+          <p:cNvPr id="9" name="Text 7"/>
+          <p:cNvSpPr/>
+          <p:nvPr/>
+        </p:nvSpPr>
+        <p:spPr>
+          <a:xfrm>
+            <a:off x="6675120" y="2121408"/>
+            <a:ext cx="4663440" cy="329184"/>
+          </a:xfrm>
+          <a:prstGeom prst="rect">
+            <a:avLst/>
+          </a:prstGeom>
+          <a:noFill/>
+          <a:ln/>
+        </p:spPr>
+        <p:txBody>
+          <a:bodyPr wrap="square" lIns="0" tIns="0" rIns="0" bIns="0" rtlCol="0" anchor="ctr"/>
+          <a:lstStyle/>
+          <a:p>
+            <a:pPr indent="0" marL="0">
+              <a:buNone/>
+            </a:pPr>
+            <a:r>
+              <a:rPr lang="en-US" sz="1700" b="1" dirty="0">
+                <a:solidFill>
+                  <a:srgbClr val="F0A429"/>
+                </a:solidFill>
+                <a:latin typeface="Arial" pitchFamily="34" charset="0"/>
+                <a:ea typeface="Arial" pitchFamily="34" charset="-122"/>
+                <a:cs typeface="Arial" pitchFamily="34" charset="-120"/>
+              </a:rPr>
+              <a:t>Masterlist</a:t>
+            </a:r>
+            <a:endParaRPr lang="en-US" sz="1700" dirty="0"/>
+          </a:p>
+        </p:txBody>
+      </p:sp>
+      <p:sp>
+        <p:nvSpPr>
+          <p:cNvPr id="10" name="Text 8"/>
+          <p:cNvSpPr/>
+          <p:nvPr/>
+        </p:nvSpPr>
+        <p:spPr>
+          <a:xfrm>
+            <a:off x="6675120" y="2578608"/>
+            <a:ext cx="4709160" cy="2651760"/>
+          </a:xfrm>
+          <a:prstGeom prst="rect">
+            <a:avLst/>
+          </a:prstGeom>
+          <a:noFill/>
+          <a:ln/>
+        </p:spPr>
+        <p:txBody>
+          <a:bodyPr wrap="square" lIns="0" tIns="0" rIns="0" bIns="0" rtlCol="0" anchor="t"/>
+          <a:lstStyle/>
+          <a:p>
+            <a:pPr marL="342900" indent="-342900">
+              <a:lnSpc>
+                <a:spcPts val="1600"/>
+              </a:lnSpc>
+              <a:spcAft>
+                <a:spcPts val="900"/>
+              </a:spcAft>
+              <a:buSzPct val="100000"/>
+              <a:buChar char="●"/>
+            </a:pPr>
+            <a:r>
+              <a:rPr lang="en-US" sz="1200" dirty="0">
+                <a:solidFill>
+                  <a:srgbClr val="E6EDF3"/>
+                </a:solidFill>
+                <a:latin typeface="Calibri" pitchFamily="34" charset="0"/>
+                <a:ea typeface="Calibri" pitchFamily="34" charset="-122"/>
+                <a:cs typeface="Calibri" pitchFamily="34" charset="-120"/>
+              </a:rPr>
+              <a:t>The single source of rates for manpower, tools, materials and PPE</a:t>
+            </a:r>
+            <a:endParaRPr lang="en-US" sz="1200" dirty="0"/>
+          </a:p>
+          <a:p>
+            <a:pPr marL="342900" indent="-342900">
+              <a:lnSpc>
+                <a:spcPts val="1600"/>
+              </a:lnSpc>
+              <a:spcAft>
+                <a:spcPts val="900"/>
+              </a:spcAft>
+              <a:buSzPct val="100000"/>
+              <a:buChar char="●"/>
+            </a:pPr>
+            <a:r>
+              <a:rPr lang="en-US" sz="1200" dirty="0">
+                <a:solidFill>
+                  <a:srgbClr val="E6EDF3"/>
+                </a:solidFill>
+                <a:latin typeface="Calibri" pitchFamily="34" charset="0"/>
+                <a:ea typeface="Calibri" pitchFamily="34" charset="-122"/>
+                <a:cs typeface="Calibri" pitchFamily="34" charset="-120"/>
+              </a:rPr>
+              <a:t>Every rate you pick in a CE comes from here</a:t>
+            </a:r>
+            <a:endParaRPr lang="en-US" sz="1200" dirty="0"/>
+          </a:p>
+          <a:p>
+            <a:pPr marL="342900" indent="-342900">
+              <a:lnSpc>
+                <a:spcPts val="1600"/>
+              </a:lnSpc>
+              <a:spcAft>
+                <a:spcPts val="900"/>
+              </a:spcAft>
+              <a:buSzPct val="100000"/>
+              <a:buChar char="●"/>
+            </a:pPr>
+            <a:r>
+              <a:rPr lang="en-US" sz="1200" dirty="0">
+                <a:solidFill>
+                  <a:srgbClr val="E6EDF3"/>
+                </a:solidFill>
+                <a:latin typeface="Calibri" pitchFamily="34" charset="0"/>
+                <a:ea typeface="Calibri" pitchFamily="34" charset="-122"/>
+                <a:cs typeface="Calibri" pitchFamily="34" charset="-120"/>
+              </a:rPr>
+              <a:t>Update a rate once and use ↺ Sync Rates on an older CE to bring it up to date</a:t>
+            </a:r>
+            <a:endParaRPr lang="en-US" sz="1200" dirty="0"/>
+          </a:p>
+          <a:p>
+            <a:pPr marL="342900" indent="-342900">
+              <a:lnSpc>
+                <a:spcPts val="1600"/>
+              </a:lnSpc>
+              <a:spcAft>
+                <a:spcPts val="900"/>
+              </a:spcAft>
+              <a:buSzPct val="100000"/>
+              <a:buChar char="●"/>
+            </a:pPr>
+            <a:r>
+              <a:rPr lang="en-US" sz="1200" dirty="0">
+                <a:solidFill>
+                  <a:srgbClr val="E6EDF3"/>
+                </a:solidFill>
+                <a:latin typeface="Calibri" pitchFamily="34" charset="0"/>
+                <a:ea typeface="Calibri" pitchFamily="34" charset="-122"/>
+                <a:cs typeface="Calibri" pitchFamily="34" charset="-120"/>
+              </a:rPr>
+              <a:t>Changing a rate does not alter CEs already saved</a:t>
+            </a:r>
+            <a:endParaRPr lang="en-US" sz="1200" dirty="0"/>
+          </a:p>
+        </p:txBody>
+      </p:sp>
+      <p:sp>
+        <p:nvSpPr>
+          <p:cNvPr id="11" name="Text 9"/>
+          <p:cNvSpPr/>
+          <p:nvPr/>
+        </p:nvSpPr>
+        <p:spPr>
+          <a:xfrm>
+            <a:off x="566928" y="6437376"/>
+            <a:ext cx="5486400" cy="237744"/>
+          </a:xfrm>
+          <a:prstGeom prst="rect">
+            <a:avLst/>
+          </a:prstGeom>
+          <a:noFill/>
+          <a:ln/>
+        </p:spPr>
+        <p:txBody>
+          <a:bodyPr wrap="square" lIns="0" tIns="0" rIns="0" bIns="0" rtlCol="0" anchor="ctr"/>
+          <a:lstStyle/>
+          <a:p>
+            <a:pPr indent="0" marL="0">
+              <a:buNone/>
+            </a:pPr>
+            <a:r>
+              <a:rPr lang="en-US" sz="900" dirty="0">
+                <a:solidFill>
+                  <a:srgbClr val="6E7681"/>
+                </a:solidFill>
+                <a:latin typeface="Calibri" pitchFamily="34" charset="0"/>
+                <a:ea typeface="Calibri" pitchFamily="34" charset="-122"/>
+                <a:cs typeface="Calibri" pitchFamily="34" charset="-120"/>
+              </a:rPr>
+              <a:t>SHIC Cost Estimator — End-User Manual</a:t>
+            </a:r>
+            <a:endParaRPr lang="en-US" sz="900" dirty="0"/>
+          </a:p>
+        </p:txBody>
+      </p:sp>
+      <p:sp>
+        <p:nvSpPr>
+          <p:cNvPr id="12" name="Text 10"/>
+          <p:cNvSpPr/>
+          <p:nvPr/>
+        </p:nvSpPr>
+        <p:spPr>
+          <a:xfrm>
+            <a:off x="10981944" y="6437376"/>
+            <a:ext cx="640080" cy="237744"/>
+          </a:xfrm>
+          <a:prstGeom prst="rect">
+            <a:avLst/>
+          </a:prstGeom>
+          <a:noFill/>
+          <a:ln/>
+        </p:spPr>
+        <p:txBody>
+          <a:bodyPr wrap="square" lIns="0" tIns="0" rIns="0" bIns="0" rtlCol="0" anchor="ctr"/>
+          <a:lstStyle/>
+          <a:p>
+            <a:pPr algn="r" indent="0" marL="0">
+              <a:buNone/>
+            </a:pPr>
+            <a:r>
+              <a:rPr lang="en-US" sz="900" dirty="0">
+                <a:solidFill>
+                  <a:srgbClr val="6E7681"/>
+                </a:solidFill>
+                <a:latin typeface="Calibri" pitchFamily="34" charset="0"/>
+                <a:ea typeface="Calibri" pitchFamily="34" charset="-122"/>
+                <a:cs typeface="Calibri" pitchFamily="34" charset="-120"/>
+              </a:rPr>
+              <a:t>20</a:t>
+            </a:r>
+            <a:endParaRPr lang="en-US" sz="900" dirty="0"/>
+          </a:p>
+        </p:txBody>
+      </p:sp>
+    </p:spTree>
+  </p:cSld>
+  <p:clrMapOvr>
+    <a:masterClrMapping/>
+  </p:clrMapOvr>
+</p:sld>
+</file>
+
+<file path=ppt/slides/slide21.xml><?xml version="1.0" encoding="utf-8"?>
+<p:sld xmlns:a="http://schemas.openxmlformats.org/drawingml/2006/main" xmlns:r="http://schemas.openxmlformats.org/officeDocument/2006/relationships" xmlns:p="http://schemas.openxmlformats.org/presentationml/2006/main">
+  <p:cSld name="Slide 21">
     <p:bg>
       <p:bgPr>
         <a:solidFill>
@@ -15765,7 +17621,7 @@
           <a:ln/>
         </p:spPr>
         <p:txBody>
-          <a:bodyPr wrap="square" lIns="0" tIns="0" rIns="0" bIns="0" rtlCol="0" anchor="ctr"/>
+          <a:bodyPr wrap="square" lIns="0" tIns="0" rIns="0" bIns="0" rtlCol="0" anchor="t"/>
           <a:lstStyle/>
           <a:p>
             <a:pPr marL="342900" indent="-342900">
@@ -15860,6 +17716,30 @@
                 <a:cs typeface="Calibri" pitchFamily="34" charset="-120"/>
               </a:rPr>
               <a:t>A CE Number can only be used once</a:t>
+            </a:r>
+            <a:endParaRPr lang="en-US" sz="1150" dirty="0"/>
+          </a:p>
+          <a:p>
+            <a:pPr marL="342900" indent="-342900">
+              <a:lnSpc>
+                <a:spcPts val="1450"/>
+              </a:lnSpc>
+              <a:spcAft>
+                <a:spcPts val="500"/>
+              </a:spcAft>
+              <a:buSzPct val="100000"/>
+              <a:buChar char="●"/>
+            </a:pPr>
+            <a:r>
+              <a:rPr lang="en-US" sz="1150" dirty="0">
+                <a:solidFill>
+                  <a:srgbClr val="E6EDF3"/>
+                </a:solidFill>
+                <a:latin typeface="Calibri" pitchFamily="34" charset="0"/>
+                <a:ea typeface="Calibri" pitchFamily="34" charset="-122"/>
+                <a:cs typeface="Calibri" pitchFamily="34" charset="-120"/>
+              </a:rPr>
+              <a:t>Consolidate the crew before you generate</a:t>
             </a:r>
             <a:endParaRPr lang="en-US" sz="1150" dirty="0"/>
           </a:p>
@@ -16479,7 +18359,7 @@
                 <a:ea typeface="Calibri" pitchFamily="34" charset="-122"/>
                 <a:cs typeface="Calibri" pitchFamily="34" charset="-120"/>
               </a:rPr>
-              <a:t>20</a:t>
+              <a:t>21</a:t>
             </a:r>
             <a:endParaRPr lang="en-US" sz="900" dirty="0"/>
           </a:p>
@@ -19442,7 +21322,7 @@
           <a:ln/>
         </p:spPr>
         <p:txBody>
-          <a:bodyPr wrap="square" lIns="0" tIns="0" rIns="0" bIns="0" rtlCol="0" anchor="ctr"/>
+          <a:bodyPr wrap="square" lIns="0" tIns="0" rIns="0" bIns="0" rtlCol="0" anchor="t"/>
           <a:lstStyle/>
           <a:p>
             <a:pPr marL="342900" indent="-342900">
@@ -25089,7 +26969,7 @@
                 <a:ea typeface="Arial" pitchFamily="34" charset="-122"/>
                 <a:cs typeface="Arial" pitchFamily="34" charset="-120"/>
               </a:rPr>
-              <a:t>Breakdown note</a:t>
+              <a:t>Shared crew</a:t>
             </a:r>
             <a:endParaRPr lang="en-US" sz="1350" dirty="0"/>
           </a:p>
@@ -25131,7 +27011,7 @@
                 <a:ea typeface="Calibri" pitchFamily="34" charset="-122"/>
                 <a:cs typeface="Calibri" pitchFamily="34" charset="-120"/>
               </a:rPr>
-              <a:t>Explain how a task was costed. It prints with the CE notes, labelled "Scope 1.1".</a:t>
+              <a:t>After consolidating, one row serves several tasks, listed under each with its cost split in proportion.</a:t>
             </a:r>
             <a:endParaRPr lang="en-US" sz="1100" dirty="0"/>
           </a:p>
@@ -26894,7 +28774,7 @@
                 <a:ea typeface="Arial" pitchFamily="34" charset="-122"/>
                 <a:cs typeface="Arial" pitchFamily="34" charset="-120"/>
               </a:rPr>
-              <a:t>Adding a row</a:t>
+              <a:t>The Scope Task column</a:t>
             </a:r>
             <a:endParaRPr lang="en-US" sz="1400" dirty="0"/>
           </a:p>
@@ -26936,7 +28816,7 @@
                 <a:ea typeface="Calibri" pitchFamily="34" charset="-122"/>
                 <a:cs typeface="Calibri" pitchFamily="34" charset="-120"/>
               </a:rPr>
-              <a:t>+ Masterlist picks a role and brings its rate and per diem with it — always prefer that to typing. + Blank adds an empty row. Row Total here is pay plus overtime; benefits are added into the grand total on the Summary tab.</a:t>
+              <a:t>Every row shows which scope task it belongs to, so two rows for one role are explained rather than mysterious — they are different crews on different tasks. Change a row’s task here or in SOW Breakdown. Row Total is pay plus overtime; benefits land in the grand total.</a:t>
             </a:r>
             <a:endParaRPr lang="en-US" sz="1150" dirty="0"/>
           </a:p>

--- a/docs/SHIC-Cost-Estimator-User-Manual.pptx
+++ b/docs/SHIC-Cost-Estimator-User-Manual.pptx
@@ -16,6 +16,7 @@
     <p:sldId id="264" r:id="rId10"/>
     <p:sldId id="265" r:id="rId11"/>
     <p:sldId id="266" r:id="rId12"/>
+    <p:sldId id="277" r:id="rId28"/>
     <p:sldId id="267" r:id="rId13"/>
     <p:sldId id="268" r:id="rId14"/>
     <p:sldId id="269" r:id="rId15"/>
@@ -697,10 +698,8 @@
           <a:lstStyle/>
           <a:p>
             <a:r>
-              <a:rPr lang="en-US" dirty="0"/>
-              <a:t>The Days column exists on Tools only — equipment is often hired by the day. Materials and PPE are one-off purchases.</a:t>
-            </a:r>
-            <a:endParaRPr lang="en-US" dirty="0"/>
+              <a:t>Tools are the only bill with a tier. Materials and PPE are still qty x cost. Do not go into the tiers here -- the next slide is entirely about them.</a:t>
+            </a:r>
           </a:p>
         </p:txBody>
       </p:sp>
@@ -873,10 +872,8 @@
           <a:lstStyle/>
           <a:p>
             <a:r>
-              <a:rPr lang="en-US" dirty="0"/>
-              <a:t>The margin is saved with the CE. Until recently it was silently discarded on save — if you reopen an old CE and the selling price line is missing, that is why.</a:t>
-            </a:r>
-            <a:endParaRPr lang="en-US" dirty="0"/>
+              <a:t>The margin is saved with the CE. Signatories now arrive from the CE Defaults preset an admin sets in the Users tab, chosen by CE type and discipline, with the signed-in user already in Prepared By.</a:t>
+            </a:r>
           </a:p>
         </p:txBody>
       </p:sp>
@@ -1049,10 +1046,8 @@
           <a:lstStyle/>
           <a:p>
             <a:r>
-              <a:rPr lang="en-US" dirty="0"/>
-              <a:t>Draft vs Save is the distinction people get wrong. A draft is private and unfinished; a saved CE is the record the team sees.</a:t>
-            </a:r>
-            <a:endParaRPr lang="en-US" dirty="0"/>
+              <a:t>Draft versus Save is the distinction people get wrong -- but a draft is no longer invisible. It appears in Monitoring as open work, so the team can see it exists; it is simply still editable, and saving the CE clears it. Also flag the browser-only save message: if it appears, the CE has not reached SharePoint and nobody else can open it.</a:t>
+            </a:r>
           </a:p>
         </p:txBody>
       </p:sp>
@@ -1137,10 +1132,8 @@
           <a:lstStyle/>
           <a:p>
             <a:r>
-              <a:rPr lang="en-US" dirty="0"/>
-              <a:t>Generate CE is the deliverable. Everything before it exists to make this page right.</a:t>
-            </a:r>
-            <a:endParaRPr lang="en-US" dirty="0"/>
+              <a:t>Generate CE is the deliverable. Everything before it exists to make this page right. The Excel exports now carry the CE's own formatting, so sales can work with them directly.</a:t>
+            </a:r>
           </a:p>
         </p:txBody>
       </p:sp>
@@ -1225,10 +1218,8 @@
           <a:lstStyle/>
           <a:p>
             <a:r>
-              <a:rPr lang="en-US" dirty="0"/>
-              <a:t>Monitoring is the register the whole team reads. Keeping status and remarks current is what makes it worth having.</a:t>
-            </a:r>
-            <a:endParaRPr lang="en-US" dirty="0"/>
+              <a:t>Monitoring is the register the whole team reads. Two changes worth demonstrating: Status is now an action button that also shows who changed what and when, and the print actions produce a previous CE's documents in a new tab without disturbing the estimate you have open.</a:t>
+            </a:r>
           </a:p>
         </p:txBody>
       </p:sp>
@@ -1401,10 +1392,8 @@
           <a:lstStyle/>
           <a:p>
             <a:r>
-              <a:rPr lang="en-US" dirty="0"/>
-              <a:t>The middle one matters most: a permission refusal is not a session problem, and signing in again just wastes time.</a:t>
-            </a:r>
-            <a:endParaRPr lang="en-US" dirty="0"/>
+              <a:t>The middle one still matters most: a permission refusal is not a session problem, and signing in again just wastes time. Throttling is the opposite -- it clears on its own, so pressing the button again is the wrong response.</a:t>
+            </a:r>
           </a:p>
         </p:txBody>
       </p:sp>
@@ -1577,10 +1566,8 @@
           <a:lstStyle/>
           <a:p>
             <a:r>
-              <a:rPr lang="en-US" dirty="0"/>
-              <a:t>Whoever maintains rates should own the Masterlist. Estimators should be picking from it, not typing over it.</a:t>
-            </a:r>
-            <a:endParaRPr lang="en-US" dirty="0"/>
+              <a:t>Whoever maintains rates should own the Masterlist. For tools that now means the four figures behind the rate, not just the rate: unit price, service life, projects per year and maintenance. The calculator on each row works the tiers out from them, and the upload template carries them so the whole list can be maintained in Excel.</a:t>
+            </a:r>
           </a:p>
         </p:txBody>
       </p:sp>
@@ -1701,6 +1688,76 @@
         <p14:creationId xmlns:p14="http://schemas.microsoft.com/office/powerpoint/2010/main" val="1024086991"/>
       </p:ext>
     </p:extLst>
+  </p:cSld>
+  <p:clrMapOvr>
+    <a:masterClrMapping/>
+  </p:clrMapOvr>
+</p:notes>
+</file>
+
+<file path=ppt/notesSlides/notesSlide22.xml><?xml version="1.0" encoding="utf-8"?>
+<p:notes xmlns:a="http://schemas.openxmlformats.org/drawingml/2006/main" xmlns:p="http://schemas.openxmlformats.org/presentationml/2006/main" xmlns:r="http://schemas.openxmlformats.org/officeDocument/2006/relationships">
+  <p:cSld>
+    <p:spTree>
+      <p:nvGrpSpPr>
+        <p:cNvPr id="1" name=""/>
+        <p:cNvGrpSpPr/>
+        <p:nvPr/>
+      </p:nvGrpSpPr>
+      <p:grpSpPr>
+        <a:xfrm>
+          <a:off x="0" y="0"/>
+          <a:ext cx="0" cy="0"/>
+          <a:chOff x="0" y="0"/>
+          <a:chExt cx="0" cy="0"/>
+        </a:xfrm>
+      </p:grpSpPr>
+      <p:sp>
+        <p:nvSpPr>
+          <p:cNvPr id="2" name="Slide Image Placeholder 1"/>
+          <p:cNvSpPr>
+            <a:spLocks noGrp="1"/>
+          </p:cNvSpPr>
+          <p:nvPr>
+            <p:ph type="sldImg" idx="2"/>
+          </p:nvPr>
+        </p:nvSpPr>
+        <p:spPr/>
+      </p:sp>
+      <p:sp>
+        <p:nvSpPr>
+          <p:cNvPr id="3" name="Notes Placeholder 2"/>
+          <p:cNvSpPr>
+            <a:spLocks noGrp="1"/>
+          </p:cNvSpPr>
+          <p:nvPr>
+            <p:ph type="body" idx="3" sz="quarter"/>
+          </p:nvPr>
+        </p:nvSpPr>
+        <p:spPr/>
+        <p:txBody>
+          <a:bodyPr/>
+          <a:lstStyle/>
+          <a:p>
+            <a:r>
+              <a:t>The slide people will ask about. Land three things. One: nothing already quoted has moved -- a row with no tier is Tier 2, which is what the app has always done. Two: Tier 3 is the answer to losing small jobs on equipment cost, and the van example makes that concrete. Three: it is a discount, not a re-slicing -- it recovers about a sixth of annual ownership cost, so it is the wrong choice on a long shutdown. There is no minimum-hours floor, so a careless entry can price expensive kit at almost nothing; check the first few bids.</a:t>
+            </a:r>
+          </a:p>
+        </p:txBody>
+      </p:sp>
+      <p:sp>
+        <p:nvSpPr>
+          <p:cNvPr id="4" name="Slide Number Placeholder 3"/>
+          <p:cNvSpPr>
+            <a:spLocks noGrp="1"/>
+          </p:cNvSpPr>
+          <p:nvPr>
+            <p:ph type="sldNum" idx="5" sz="quarter"/>
+          </p:nvPr>
+        </p:nvSpPr>
+        <p:spPr/>
+      </p:sp>
+    </p:spTree>
   </p:cSld>
   <p:clrMapOvr>
     <a:masterClrMapping/>
@@ -5539,7 +5596,7 @@
                 <a:ea typeface="Calibri" pitchFamily="34" charset="-122"/>
                 <a:cs typeface="Calibri" pitchFamily="34" charset="-120"/>
               </a:rPr>
-              <a:t>Charged qty × days × unit cost. Leave Days at 1 for a one-off charge; set it for hired plant.</a:t>
+              <a:t>Charged on a tier: per project, per day, or per hour used. Tier 2 — per day — is the default and what every CE so far uses. Next slide.</a:t>
             </a:r>
             <a:endParaRPr lang="en-US" sz="1150" dirty="0"/>
           </a:p>
@@ -5999,7 +6056,7 @@
                 <a:ea typeface="Calibri" pitchFamily="34" charset="-122"/>
                 <a:cs typeface="Calibri" pitchFamily="34" charset="-120"/>
               </a:rPr>
-              <a:t>Updates every matching row to the current Masterlist rate. Use it on an older CE before requoting.</a:t>
+              <a:t>Re-prices every matching row from the Masterlist, tier figures included. Also on the Summary tab, where it covers the whole CE at once — tools, materials and PPE together.</a:t>
             </a:r>
             <a:endParaRPr lang="en-US" sz="1100" dirty="0"/>
           </a:p>
@@ -6322,6 +6379,1404 @@
 </file>
 
 <file path=ppt/slides/slide12.xml><?xml version="1.0" encoding="utf-8"?>
+<p:sld xmlns:a="http://schemas.openxmlformats.org/drawingml/2006/main" xmlns:r="http://schemas.openxmlformats.org/officeDocument/2006/relationships" xmlns:p="http://schemas.openxmlformats.org/presentationml/2006/main">
+  <p:cSld name="Slide 11">
+    <p:bg>
+      <p:bgPr>
+        <a:solidFill>
+          <a:srgbClr val="161B22"/>
+        </a:solidFill>
+      </p:bgPr>
+    </p:bg>
+    <p:spTree>
+      <p:nvGrpSpPr>
+        <p:cNvPr id="1" name=""/>
+        <p:cNvGrpSpPr/>
+        <p:nvPr/>
+      </p:nvGrpSpPr>
+      <p:grpSpPr>
+        <a:xfrm>
+          <a:off x="0" y="0"/>
+          <a:ext cx="0" cy="0"/>
+          <a:chOff x="0" y="0"/>
+          <a:chExt cx="0" cy="0"/>
+        </a:xfrm>
+      </p:grpSpPr>
+      <p:sp>
+        <p:nvSpPr>
+          <p:cNvPr id="2" name="Text 0"/>
+          <p:cNvSpPr/>
+          <p:nvPr/>
+        </p:nvSpPr>
+        <p:spPr>
+          <a:xfrm>
+            <a:off x="566928" y="384048"/>
+            <a:ext cx="8229600" cy="256032"/>
+          </a:xfrm>
+          <a:prstGeom prst="rect">
+            <a:avLst/>
+          </a:prstGeom>
+          <a:noFill/>
+          <a:ln/>
+        </p:spPr>
+        <p:txBody>
+          <a:bodyPr wrap="square" lIns="0" tIns="0" rIns="0" bIns="0" rtlCol="0" anchor="ctr"/>
+          <a:lstStyle/>
+          <a:p>
+            <a:pPr indent="0" marL="0">
+              <a:buNone/>
+            </a:pPr>
+            <a:r>
+              <a:rPr lang="en-US" sz="1100" b="1" spc="200" kern="0" dirty="0">
+                <a:solidFill>
+                  <a:srgbClr val="F0A429"/>
+                </a:solidFill>
+                <a:latin typeface="Arial" pitchFamily="34" charset="0"/>
+                <a:ea typeface="Arial" pitchFamily="34" charset="-122"/>
+                <a:cs typeface="Arial" pitchFamily="34" charset="-120"/>
+              </a:rPr>
+              <a:t>STEP 5 · TIER PRICING</a:t>
+            </a:r>
+            <a:endParaRPr lang="en-US" sz="1100" dirty="0"/>
+          </a:p>
+        </p:txBody>
+      </p:sp>
+      <p:sp>
+        <p:nvSpPr>
+          <p:cNvPr id="3" name="Text 1"/>
+          <p:cNvSpPr/>
+          <p:nvPr/>
+        </p:nvSpPr>
+        <p:spPr>
+          <a:xfrm>
+            <a:off x="566928" y="694944"/>
+            <a:ext cx="11055096" cy="566928"/>
+          </a:xfrm>
+          <a:prstGeom prst="rect">
+            <a:avLst/>
+          </a:prstGeom>
+          <a:noFill/>
+          <a:ln/>
+        </p:spPr>
+        <p:txBody>
+          <a:bodyPr wrap="square" lIns="0" tIns="0" rIns="0" bIns="0" rtlCol="0" anchor="ctr"/>
+          <a:lstStyle/>
+          <a:p>
+            <a:pPr indent="0" marL="0">
+              <a:buNone/>
+            </a:pPr>
+            <a:r>
+              <a:rPr lang="en-US" sz="3200" b="1" dirty="0">
+                <a:solidFill>
+                  <a:srgbClr val="E6EDF3"/>
+                </a:solidFill>
+                <a:latin typeface="Arial" pitchFamily="34" charset="0"/>
+                <a:ea typeface="Arial" pitchFamily="34" charset="-122"/>
+                <a:cs typeface="Arial" pitchFamily="34" charset="-120"/>
+              </a:rPr>
+              <a:t>Three ways to charge a tool</a:t>
+            </a:r>
+            <a:endParaRPr lang="en-US" sz="3200" dirty="0"/>
+          </a:p>
+        </p:txBody>
+      </p:sp>
+      <p:sp>
+        <p:nvSpPr>
+          <p:cNvPr id="4" name="Shape 2"/>
+          <p:cNvSpPr/>
+          <p:nvPr/>
+        </p:nvSpPr>
+        <p:spPr>
+          <a:xfrm>
+            <a:off x="566928" y="1362456"/>
+            <a:ext cx="11055096" cy="420624"/>
+          </a:xfrm>
+          <a:prstGeom prst="roundRect">
+            <a:avLst>
+              <a:gd name="adj" fmla="val 13043"/>
+            </a:avLst>
+          </a:prstGeom>
+          <a:solidFill>
+            <a:srgbClr val="161B22"/>
+          </a:solidFill>
+          <a:ln w="12700">
+            <a:solidFill>
+              <a:srgbClr val="30363D"/>
+            </a:solidFill>
+            <a:prstDash val="solid"/>
+          </a:ln>
+        </p:spPr>
+      </p:sp>
+      <p:sp>
+        <p:nvSpPr>
+          <p:cNvPr id="5" name="Text 3"/>
+          <p:cNvSpPr/>
+          <p:nvPr/>
+        </p:nvSpPr>
+        <p:spPr>
+          <a:xfrm>
+            <a:off x="566928" y="1408176"/>
+            <a:ext cx="1228344" cy="329184"/>
+          </a:xfrm>
+          <a:prstGeom prst="rect">
+            <a:avLst/>
+          </a:prstGeom>
+          <a:noFill/>
+          <a:ln/>
+        </p:spPr>
+        <p:txBody>
+          <a:bodyPr wrap="square" lIns="0" tIns="0" rIns="0" bIns="0" rtlCol="0" anchor="ctr"/>
+          <a:lstStyle/>
+          <a:p>
+            <a:pPr algn="ctr" indent="0" marL="0">
+              <a:buNone/>
+            </a:pPr>
+            <a:r>
+              <a:rPr lang="en-US" sz="900" dirty="0">
+                <a:solidFill>
+                  <a:srgbClr val="9AA4AF"/>
+                </a:solidFill>
+                <a:latin typeface="Calibri" pitchFamily="34" charset="0"/>
+                <a:ea typeface="Calibri" pitchFamily="34" charset="-122"/>
+                <a:cs typeface="Calibri" pitchFamily="34" charset="-120"/>
+              </a:rPr>
+              <a:t>Project Info</a:t>
+            </a:r>
+            <a:endParaRPr lang="en-US" sz="900" dirty="0"/>
+          </a:p>
+        </p:txBody>
+      </p:sp>
+      <p:sp>
+        <p:nvSpPr>
+          <p:cNvPr id="6" name="Text 4"/>
+          <p:cNvSpPr/>
+          <p:nvPr/>
+        </p:nvSpPr>
+        <p:spPr>
+          <a:xfrm>
+            <a:off x="1795272" y="1408176"/>
+            <a:ext cx="1228344" cy="329184"/>
+          </a:xfrm>
+          <a:prstGeom prst="rect">
+            <a:avLst/>
+          </a:prstGeom>
+          <a:noFill/>
+          <a:ln/>
+        </p:spPr>
+        <p:txBody>
+          <a:bodyPr wrap="square" lIns="0" tIns="0" rIns="0" bIns="0" rtlCol="0" anchor="ctr"/>
+          <a:lstStyle/>
+          <a:p>
+            <a:pPr algn="ctr" indent="0" marL="0">
+              <a:buNone/>
+            </a:pPr>
+            <a:r>
+              <a:rPr lang="en-US" sz="900" dirty="0">
+                <a:solidFill>
+                  <a:srgbClr val="9AA4AF"/>
+                </a:solidFill>
+                <a:latin typeface="Calibri" pitchFamily="34" charset="0"/>
+                <a:ea typeface="Calibri" pitchFamily="34" charset="-122"/>
+                <a:cs typeface="Calibri" pitchFamily="34" charset="-120"/>
+              </a:rPr>
+              <a:t>Scope of Work</a:t>
+            </a:r>
+            <a:endParaRPr lang="en-US" sz="900" dirty="0"/>
+          </a:p>
+        </p:txBody>
+      </p:sp>
+      <p:sp>
+        <p:nvSpPr>
+          <p:cNvPr id="7" name="Text 5"/>
+          <p:cNvSpPr/>
+          <p:nvPr/>
+        </p:nvSpPr>
+        <p:spPr>
+          <a:xfrm>
+            <a:off x="3023616" y="1408176"/>
+            <a:ext cx="1228344" cy="329184"/>
+          </a:xfrm>
+          <a:prstGeom prst="rect">
+            <a:avLst/>
+          </a:prstGeom>
+          <a:noFill/>
+          <a:ln/>
+        </p:spPr>
+        <p:txBody>
+          <a:bodyPr wrap="square" lIns="0" tIns="0" rIns="0" bIns="0" rtlCol="0" anchor="ctr"/>
+          <a:lstStyle/>
+          <a:p>
+            <a:pPr algn="ctr" indent="0" marL="0">
+              <a:buNone/>
+            </a:pPr>
+            <a:r>
+              <a:rPr lang="en-US" sz="900" dirty="0">
+                <a:solidFill>
+                  <a:srgbClr val="9AA4AF"/>
+                </a:solidFill>
+                <a:latin typeface="Calibri" pitchFamily="34" charset="0"/>
+                <a:ea typeface="Calibri" pitchFamily="34" charset="-122"/>
+                <a:cs typeface="Calibri" pitchFamily="34" charset="-120"/>
+              </a:rPr>
+              <a:t>SOW Breakdown</a:t>
+            </a:r>
+            <a:endParaRPr lang="en-US" sz="900" dirty="0"/>
+          </a:p>
+        </p:txBody>
+      </p:sp>
+      <p:sp>
+        <p:nvSpPr>
+          <p:cNvPr id="8" name="Text 6"/>
+          <p:cNvSpPr/>
+          <p:nvPr/>
+        </p:nvSpPr>
+        <p:spPr>
+          <a:xfrm>
+            <a:off x="4251960" y="1408176"/>
+            <a:ext cx="1228344" cy="329184"/>
+          </a:xfrm>
+          <a:prstGeom prst="rect">
+            <a:avLst/>
+          </a:prstGeom>
+          <a:noFill/>
+          <a:ln/>
+        </p:spPr>
+        <p:txBody>
+          <a:bodyPr wrap="square" lIns="0" tIns="0" rIns="0" bIns="0" rtlCol="0" anchor="ctr"/>
+          <a:lstStyle/>
+          <a:p>
+            <a:pPr algn="ctr" indent="0" marL="0">
+              <a:buNone/>
+            </a:pPr>
+            <a:r>
+              <a:rPr lang="en-US" sz="900" dirty="0">
+                <a:solidFill>
+                  <a:srgbClr val="9AA4AF"/>
+                </a:solidFill>
+                <a:latin typeface="Calibri" pitchFamily="34" charset="0"/>
+                <a:ea typeface="Calibri" pitchFamily="34" charset="-122"/>
+                <a:cs typeface="Calibri" pitchFamily="34" charset="-120"/>
+              </a:rPr>
+              <a:t>Manpower</a:t>
+            </a:r>
+            <a:endParaRPr lang="en-US" sz="900" dirty="0"/>
+          </a:p>
+        </p:txBody>
+      </p:sp>
+      <p:sp>
+        <p:nvSpPr>
+          <p:cNvPr id="9" name="Shape 7"/>
+          <p:cNvSpPr/>
+          <p:nvPr/>
+        </p:nvSpPr>
+        <p:spPr>
+          <a:xfrm>
+            <a:off x="5507736" y="1408176"/>
+            <a:ext cx="1173480" cy="329184"/>
+          </a:xfrm>
+          <a:prstGeom prst="roundRect">
+            <a:avLst>
+              <a:gd name="adj" fmla="val 13889"/>
+            </a:avLst>
+          </a:prstGeom>
+          <a:solidFill>
+            <a:srgbClr val="F0A429"/>
+          </a:solidFill>
+          <a:ln w="12700">
+            <a:solidFill>
+              <a:srgbClr val="F0A429"/>
+            </a:solidFill>
+            <a:prstDash val="solid"/>
+          </a:ln>
+        </p:spPr>
+      </p:sp>
+      <p:sp>
+        <p:nvSpPr>
+          <p:cNvPr id="10" name="Text 8"/>
+          <p:cNvSpPr/>
+          <p:nvPr/>
+        </p:nvSpPr>
+        <p:spPr>
+          <a:xfrm>
+            <a:off x="5480304" y="1408176"/>
+            <a:ext cx="1228344" cy="329184"/>
+          </a:xfrm>
+          <a:prstGeom prst="rect">
+            <a:avLst/>
+          </a:prstGeom>
+          <a:noFill/>
+          <a:ln/>
+        </p:spPr>
+        <p:txBody>
+          <a:bodyPr wrap="square" lIns="0" tIns="0" rIns="0" bIns="0" rtlCol="0" anchor="ctr"/>
+          <a:lstStyle/>
+          <a:p>
+            <a:pPr algn="ctr" indent="0" marL="0">
+              <a:buNone/>
+            </a:pPr>
+            <a:r>
+              <a:rPr lang="en-US" sz="900" b="1" dirty="0">
+                <a:solidFill>
+                  <a:srgbClr val="000000"/>
+                </a:solidFill>
+                <a:latin typeface="Calibri" pitchFamily="34" charset="0"/>
+                <a:ea typeface="Calibri" pitchFamily="34" charset="-122"/>
+                <a:cs typeface="Calibri" pitchFamily="34" charset="-120"/>
+              </a:rPr>
+              <a:t>Tools</a:t>
+            </a:r>
+            <a:endParaRPr lang="en-US" sz="900" dirty="0"/>
+          </a:p>
+        </p:txBody>
+      </p:sp>
+      <p:sp>
+        <p:nvSpPr>
+          <p:cNvPr id="11" name="Text 9"/>
+          <p:cNvSpPr/>
+          <p:nvPr/>
+        </p:nvSpPr>
+        <p:spPr>
+          <a:xfrm>
+            <a:off x="6708648" y="1408176"/>
+            <a:ext cx="1228344" cy="329184"/>
+          </a:xfrm>
+          <a:prstGeom prst="rect">
+            <a:avLst/>
+          </a:prstGeom>
+          <a:noFill/>
+          <a:ln/>
+        </p:spPr>
+        <p:txBody>
+          <a:bodyPr wrap="square" lIns="0" tIns="0" rIns="0" bIns="0" rtlCol="0" anchor="ctr"/>
+          <a:lstStyle/>
+          <a:p>
+            <a:pPr algn="ctr" indent="0" marL="0">
+              <a:buNone/>
+            </a:pPr>
+            <a:r>
+              <a:rPr lang="en-US" sz="900" dirty="0">
+                <a:solidFill>
+                  <a:srgbClr val="9AA4AF"/>
+                </a:solidFill>
+                <a:latin typeface="Calibri" pitchFamily="34" charset="0"/>
+                <a:ea typeface="Calibri" pitchFamily="34" charset="-122"/>
+                <a:cs typeface="Calibri" pitchFamily="34" charset="-120"/>
+              </a:rPr>
+              <a:t>Materials</a:t>
+            </a:r>
+            <a:endParaRPr lang="en-US" sz="900" dirty="0"/>
+          </a:p>
+        </p:txBody>
+      </p:sp>
+      <p:sp>
+        <p:nvSpPr>
+          <p:cNvPr id="12" name="Text 10"/>
+          <p:cNvSpPr/>
+          <p:nvPr/>
+        </p:nvSpPr>
+        <p:spPr>
+          <a:xfrm>
+            <a:off x="7936992" y="1408176"/>
+            <a:ext cx="1228344" cy="329184"/>
+          </a:xfrm>
+          <a:prstGeom prst="rect">
+            <a:avLst/>
+          </a:prstGeom>
+          <a:noFill/>
+          <a:ln/>
+        </p:spPr>
+        <p:txBody>
+          <a:bodyPr wrap="square" lIns="0" tIns="0" rIns="0" bIns="0" rtlCol="0" anchor="ctr"/>
+          <a:lstStyle/>
+          <a:p>
+            <a:pPr algn="ctr" indent="0" marL="0">
+              <a:buNone/>
+            </a:pPr>
+            <a:r>
+              <a:rPr lang="en-US" sz="900" dirty="0">
+                <a:solidFill>
+                  <a:srgbClr val="9AA4AF"/>
+                </a:solidFill>
+                <a:latin typeface="Calibri" pitchFamily="34" charset="0"/>
+                <a:ea typeface="Calibri" pitchFamily="34" charset="-122"/>
+                <a:cs typeface="Calibri" pitchFamily="34" charset="-120"/>
+              </a:rPr>
+              <a:t>PPE</a:t>
+            </a:r>
+            <a:endParaRPr lang="en-US" sz="900" dirty="0"/>
+          </a:p>
+        </p:txBody>
+      </p:sp>
+      <p:sp>
+        <p:nvSpPr>
+          <p:cNvPr id="13" name="Text 11"/>
+          <p:cNvSpPr/>
+          <p:nvPr/>
+        </p:nvSpPr>
+        <p:spPr>
+          <a:xfrm>
+            <a:off x="9165336" y="1408176"/>
+            <a:ext cx="1228344" cy="329184"/>
+          </a:xfrm>
+          <a:prstGeom prst="rect">
+            <a:avLst/>
+          </a:prstGeom>
+          <a:noFill/>
+          <a:ln/>
+        </p:spPr>
+        <p:txBody>
+          <a:bodyPr wrap="square" lIns="0" tIns="0" rIns="0" bIns="0" rtlCol="0" anchor="ctr"/>
+          <a:lstStyle/>
+          <a:p>
+            <a:pPr algn="ctr" indent="0" marL="0">
+              <a:buNone/>
+            </a:pPr>
+            <a:r>
+              <a:rPr lang="en-US" sz="900" dirty="0">
+                <a:solidFill>
+                  <a:srgbClr val="9AA4AF"/>
+                </a:solidFill>
+                <a:latin typeface="Calibri" pitchFamily="34" charset="0"/>
+                <a:ea typeface="Calibri" pitchFamily="34" charset="-122"/>
+                <a:cs typeface="Calibri" pitchFamily="34" charset="-120"/>
+              </a:rPr>
+              <a:t>Misc.</a:t>
+            </a:r>
+            <a:endParaRPr lang="en-US" sz="900" dirty="0"/>
+          </a:p>
+        </p:txBody>
+      </p:sp>
+      <p:sp>
+        <p:nvSpPr>
+          <p:cNvPr id="14" name="Text 12"/>
+          <p:cNvSpPr/>
+          <p:nvPr/>
+        </p:nvSpPr>
+        <p:spPr>
+          <a:xfrm>
+            <a:off x="10393680" y="1408176"/>
+            <a:ext cx="1228344" cy="329184"/>
+          </a:xfrm>
+          <a:prstGeom prst="rect">
+            <a:avLst/>
+          </a:prstGeom>
+          <a:noFill/>
+          <a:ln/>
+        </p:spPr>
+        <p:txBody>
+          <a:bodyPr wrap="square" lIns="0" tIns="0" rIns="0" bIns="0" rtlCol="0" anchor="ctr"/>
+          <a:lstStyle/>
+          <a:p>
+            <a:pPr algn="ctr" indent="0" marL="0">
+              <a:buNone/>
+            </a:pPr>
+            <a:r>
+              <a:rPr lang="en-US" sz="900" dirty="0">
+                <a:solidFill>
+                  <a:srgbClr val="9AA4AF"/>
+                </a:solidFill>
+                <a:latin typeface="Calibri" pitchFamily="34" charset="0"/>
+                <a:ea typeface="Calibri" pitchFamily="34" charset="-122"/>
+                <a:cs typeface="Calibri" pitchFamily="34" charset="-120"/>
+              </a:rPr>
+              <a:t>Summary</a:t>
+            </a:r>
+            <a:endParaRPr lang="en-US" sz="900" dirty="0"/>
+          </a:p>
+        </p:txBody>
+      </p:sp>
+      <p:sp>
+        <p:nvSpPr>
+          <p:cNvPr id="15" name="Shape 13"/>
+          <p:cNvSpPr/>
+          <p:nvPr/>
+        </p:nvSpPr>
+        <p:spPr>
+          <a:xfrm>
+            <a:off x="566928" y="2002536"/>
+            <a:ext cx="3566160" cy="1463040"/>
+          </a:xfrm>
+          <a:prstGeom prst="roundRect">
+            <a:avLst>
+              <a:gd name="adj" fmla="val 5000"/>
+            </a:avLst>
+          </a:prstGeom>
+          <a:solidFill>
+            <a:srgbClr val="1C2128"/>
+          </a:solidFill>
+          <a:ln w="12700">
+            <a:solidFill>
+              <a:srgbClr val="30363D"/>
+            </a:solidFill>
+            <a:prstDash val="solid"/>
+          </a:ln>
+          <a:effectLst>
+            <a:outerShdw sx="100000" sy="100000" kx="0" ky="0" algn="bl" rotWithShape="0" blurRad="152400" dist="38100" dir="5400000">
+              <a:srgbClr val="000000">
+                <a:alpha val="45000"/>
+              </a:srgbClr>
+            </a:outerShdw>
+          </a:effectLst>
+        </p:spPr>
+      </p:sp>
+      <p:sp>
+        <p:nvSpPr>
+          <p:cNvPr id="16" name="Text 14"/>
+          <p:cNvSpPr/>
+          <p:nvPr/>
+        </p:nvSpPr>
+        <p:spPr>
+          <a:xfrm>
+            <a:off x="804672" y="2185416"/>
+            <a:ext cx="3108960" cy="310896"/>
+          </a:xfrm>
+          <a:prstGeom prst="rect">
+            <a:avLst/>
+          </a:prstGeom>
+          <a:noFill/>
+          <a:ln/>
+        </p:spPr>
+        <p:txBody>
+          <a:bodyPr wrap="square" lIns="0" tIns="0" rIns="0" bIns="0" rtlCol="0" anchor="ctr"/>
+          <a:lstStyle/>
+          <a:p>
+            <a:pPr indent="0" marL="0">
+              <a:buNone/>
+            </a:pPr>
+            <a:r>
+              <a:rPr lang="en-US" sz="1450" b="1" dirty="0">
+                <a:solidFill>
+                  <a:srgbClr val="F0A429"/>
+                </a:solidFill>
+                <a:latin typeface="Arial" pitchFamily="34" charset="0"/>
+                <a:ea typeface="Arial" pitchFamily="34" charset="-122"/>
+                <a:cs typeface="Arial" pitchFamily="34" charset="-120"/>
+              </a:rPr>
+              <a:t>Tier 1 · per project</a:t>
+            </a:r>
+            <a:endParaRPr lang="en-US" sz="1450" dirty="0"/>
+          </a:p>
+        </p:txBody>
+      </p:sp>
+      <p:sp>
+        <p:nvSpPr>
+          <p:cNvPr id="17" name="Text 15"/>
+          <p:cNvSpPr/>
+          <p:nvPr/>
+        </p:nvSpPr>
+        <p:spPr>
+          <a:xfrm>
+            <a:off x="804672" y="2542032"/>
+            <a:ext cx="3108960" cy="822960"/>
+          </a:xfrm>
+          <a:prstGeom prst="rect">
+            <a:avLst/>
+          </a:prstGeom>
+          <a:noFill/>
+          <a:ln/>
+        </p:spPr>
+        <p:txBody>
+          <a:bodyPr wrap="square" lIns="0" tIns="0" rIns="0" bIns="0" rtlCol="0" anchor="ctr"/>
+          <a:lstStyle/>
+          <a:p>
+            <a:pPr indent="0" marL="0">
+              <a:lnSpc>
+                <a:spcPts val="1500"/>
+              </a:lnSpc>
+              <a:buNone/>
+            </a:pPr>
+            <a:r>
+              <a:rPr lang="en-US" sz="1150" dirty="0">
+                <a:solidFill>
+                  <a:srgbClr val="9AA4AF"/>
+                </a:solidFill>
+                <a:latin typeface="Calibri" pitchFamily="34" charset="0"/>
+                <a:ea typeface="Calibri" pitchFamily="34" charset="-122"/>
+                <a:cs typeface="Calibri" pitchFamily="34" charset="-120"/>
+              </a:rPr>
+              <a:t>A flat share of what the tool costs to own for a year, whatever the duration. Two days and sixty days cost the same. Days and Hours grey out.</a:t>
+            </a:r>
+            <a:endParaRPr lang="en-US" sz="1150" dirty="0"/>
+          </a:p>
+        </p:txBody>
+      </p:sp>
+      <p:sp>
+        <p:nvSpPr>
+          <p:cNvPr id="18" name="Shape 16"/>
+          <p:cNvSpPr/>
+          <p:nvPr/>
+        </p:nvSpPr>
+        <p:spPr>
+          <a:xfrm>
+            <a:off x="4352544" y="2002536"/>
+            <a:ext cx="3566160" cy="1463040"/>
+          </a:xfrm>
+          <a:prstGeom prst="roundRect">
+            <a:avLst>
+              <a:gd name="adj" fmla="val 5000"/>
+            </a:avLst>
+          </a:prstGeom>
+          <a:solidFill>
+            <a:srgbClr val="1C2128"/>
+          </a:solidFill>
+          <a:ln w="12700">
+            <a:solidFill>
+              <a:srgbClr val="30363D"/>
+            </a:solidFill>
+            <a:prstDash val="solid"/>
+          </a:ln>
+          <a:effectLst>
+            <a:outerShdw sx="100000" sy="100000" kx="0" ky="0" algn="bl" rotWithShape="0" blurRad="152400" dist="38100" dir="5400000">
+              <a:srgbClr val="000000">
+                <a:alpha val="45000"/>
+              </a:srgbClr>
+            </a:outerShdw>
+          </a:effectLst>
+        </p:spPr>
+      </p:sp>
+      <p:sp>
+        <p:nvSpPr>
+          <p:cNvPr id="19" name="Text 17"/>
+          <p:cNvSpPr/>
+          <p:nvPr/>
+        </p:nvSpPr>
+        <p:spPr>
+          <a:xfrm>
+            <a:off x="4590288" y="2185416"/>
+            <a:ext cx="3108960" cy="310896"/>
+          </a:xfrm>
+          <a:prstGeom prst="rect">
+            <a:avLst/>
+          </a:prstGeom>
+          <a:noFill/>
+          <a:ln/>
+        </p:spPr>
+        <p:txBody>
+          <a:bodyPr wrap="square" lIns="0" tIns="0" rIns="0" bIns="0" rtlCol="0" anchor="ctr"/>
+          <a:lstStyle/>
+          <a:p>
+            <a:pPr indent="0" marL="0">
+              <a:buNone/>
+            </a:pPr>
+            <a:r>
+              <a:rPr lang="en-US" sz="1450" b="1" dirty="0">
+                <a:solidFill>
+                  <a:srgbClr val="58A6FF"/>
+                </a:solidFill>
+                <a:latin typeface="Arial" pitchFamily="34" charset="0"/>
+                <a:ea typeface="Arial" pitchFamily="34" charset="-122"/>
+                <a:cs typeface="Arial" pitchFamily="34" charset="-120"/>
+              </a:rPr>
+              <a:t>Tier 2 · per day  (default)</a:t>
+            </a:r>
+            <a:endParaRPr lang="en-US" sz="1450" dirty="0"/>
+          </a:p>
+        </p:txBody>
+      </p:sp>
+      <p:sp>
+        <p:nvSpPr>
+          <p:cNvPr id="20" name="Text 18"/>
+          <p:cNvSpPr/>
+          <p:nvPr/>
+        </p:nvSpPr>
+        <p:spPr>
+          <a:xfrm>
+            <a:off x="4590288" y="2542032"/>
+            <a:ext cx="3108960" cy="822960"/>
+          </a:xfrm>
+          <a:prstGeom prst="rect">
+            <a:avLst/>
+          </a:prstGeom>
+          <a:noFill/>
+          <a:ln/>
+        </p:spPr>
+        <p:txBody>
+          <a:bodyPr wrap="square" lIns="0" tIns="0" rIns="0" bIns="0" rtlCol="0" anchor="ctr"/>
+          <a:lstStyle/>
+          <a:p>
+            <a:pPr indent="0" marL="0">
+              <a:lnSpc>
+                <a:spcPts val="1500"/>
+              </a:lnSpc>
+              <a:buNone/>
+            </a:pPr>
+            <a:r>
+              <a:rPr lang="en-US" sz="1150" dirty="0">
+                <a:solidFill>
+                  <a:srgbClr val="9AA4AF"/>
+                </a:solidFill>
+                <a:latin typeface="Calibri" pitchFamily="34" charset="0"/>
+                <a:ea typeface="Calibri" pitchFamily="34" charset="-122"/>
+                <a:cs typeface="Calibri" pitchFamily="34" charset="-120"/>
+              </a:rPr>
+              <a:t>Qty × Days × the daily rate — exactly what the app has always done. A row that names no tier is Tier 2, so nothing already quoted has moved.</a:t>
+            </a:r>
+            <a:endParaRPr lang="en-US" sz="1150" dirty="0"/>
+          </a:p>
+        </p:txBody>
+      </p:sp>
+      <p:sp>
+        <p:nvSpPr>
+          <p:cNvPr id="21" name="Shape 19"/>
+          <p:cNvSpPr/>
+          <p:nvPr/>
+        </p:nvSpPr>
+        <p:spPr>
+          <a:xfrm>
+            <a:off x="8138160" y="2002536"/>
+            <a:ext cx="3566160" cy="1463040"/>
+          </a:xfrm>
+          <a:prstGeom prst="roundRect">
+            <a:avLst>
+              <a:gd name="adj" fmla="val 5000"/>
+            </a:avLst>
+          </a:prstGeom>
+          <a:solidFill>
+            <a:srgbClr val="1C2128"/>
+          </a:solidFill>
+          <a:ln w="12700">
+            <a:solidFill>
+              <a:srgbClr val="30363D"/>
+            </a:solidFill>
+            <a:prstDash val="solid"/>
+          </a:ln>
+          <a:effectLst>
+            <a:outerShdw sx="100000" sy="100000" kx="0" ky="0" algn="bl" rotWithShape="0" blurRad="152400" dist="38100" dir="5400000">
+              <a:srgbClr val="000000">
+                <a:alpha val="45000"/>
+              </a:srgbClr>
+            </a:outerShdw>
+          </a:effectLst>
+        </p:spPr>
+      </p:sp>
+      <p:sp>
+        <p:nvSpPr>
+          <p:cNvPr id="22" name="Text 20"/>
+          <p:cNvSpPr/>
+          <p:nvPr/>
+        </p:nvSpPr>
+        <p:spPr>
+          <a:xfrm>
+            <a:off x="8375904" y="2185416"/>
+            <a:ext cx="3108960" cy="310896"/>
+          </a:xfrm>
+          <a:prstGeom prst="rect">
+            <a:avLst/>
+          </a:prstGeom>
+          <a:noFill/>
+          <a:ln/>
+        </p:spPr>
+        <p:txBody>
+          <a:bodyPr wrap="square" lIns="0" tIns="0" rIns="0" bIns="0" rtlCol="0" anchor="ctr"/>
+          <a:lstStyle/>
+          <a:p>
+            <a:pPr indent="0" marL="0">
+              <a:buNone/>
+            </a:pPr>
+            <a:r>
+              <a:rPr lang="en-US" sz="1450" b="1" dirty="0">
+                <a:solidFill>
+                  <a:srgbClr val="3FB950"/>
+                </a:solidFill>
+                <a:latin typeface="Arial" pitchFamily="34" charset="0"/>
+                <a:ea typeface="Arial" pitchFamily="34" charset="-122"/>
+                <a:cs typeface="Arial" pitchFamily="34" charset="-120"/>
+              </a:rPr>
+              <a:t>Tier 3 · per hour used</a:t>
+            </a:r>
+            <a:endParaRPr lang="en-US" sz="1450" dirty="0"/>
+          </a:p>
+        </p:txBody>
+      </p:sp>
+      <p:sp>
+        <p:nvSpPr>
+          <p:cNvPr id="23" name="Text 21"/>
+          <p:cNvSpPr/>
+          <p:nvPr/>
+        </p:nvSpPr>
+        <p:spPr>
+          <a:xfrm>
+            <a:off x="8375904" y="2542032"/>
+            <a:ext cx="3108960" cy="822960"/>
+          </a:xfrm>
+          <a:prstGeom prst="rect">
+            <a:avLst/>
+          </a:prstGeom>
+          <a:noFill/>
+          <a:ln/>
+        </p:spPr>
+        <p:txBody>
+          <a:bodyPr wrap="square" lIns="0" tIns="0" rIns="0" bIns="0" rtlCol="0" anchor="ctr"/>
+          <a:lstStyle/>
+          <a:p>
+            <a:pPr indent="0" marL="0">
+              <a:lnSpc>
+                <a:spcPts val="1500"/>
+              </a:lnSpc>
+              <a:buNone/>
+            </a:pPr>
+            <a:r>
+              <a:rPr lang="en-US" sz="1150" dirty="0">
+                <a:solidFill>
+                  <a:srgbClr val="9AA4AF"/>
+                </a:solidFill>
+                <a:latin typeface="Calibri" pitchFamily="34" charset="0"/>
+                <a:ea typeface="Calibri" pitchFamily="34" charset="-122"/>
+                <a:cs typeface="Calibri" pitchFamily="34" charset="-120"/>
+              </a:rPr>
+              <a:t>Qty × Hours × the hourly rate. Type the hours the tool is really used. This is the tier for a short job on expensive equipment.</a:t>
+            </a:r>
+            <a:endParaRPr lang="en-US" sz="1150" dirty="0"/>
+          </a:p>
+        </p:txBody>
+      </p:sp>
+      <p:sp>
+        <p:nvSpPr>
+          <p:cNvPr id="24" name="Shape 22"/>
+          <p:cNvSpPr/>
+          <p:nvPr/>
+        </p:nvSpPr>
+        <p:spPr>
+          <a:xfrm>
+            <a:off x="566928" y="3648456"/>
+            <a:ext cx="5532120" cy="1042416"/>
+          </a:xfrm>
+          <a:prstGeom prst="roundRect">
+            <a:avLst>
+              <a:gd name="adj" fmla="val 7018"/>
+            </a:avLst>
+          </a:prstGeom>
+          <a:solidFill>
+            <a:srgbClr val="161B22"/>
+          </a:solidFill>
+          <a:ln w="12700">
+            <a:solidFill>
+              <a:srgbClr val="30363D"/>
+            </a:solidFill>
+            <a:prstDash val="solid"/>
+          </a:ln>
+          <a:effectLst>
+            <a:outerShdw sx="100000" sy="100000" kx="0" ky="0" algn="bl" rotWithShape="0" blurRad="152400" dist="38100" dir="5400000">
+              <a:srgbClr val="000000">
+                <a:alpha val="45000"/>
+              </a:srgbClr>
+            </a:outerShdw>
+          </a:effectLst>
+        </p:spPr>
+      </p:sp>
+      <p:sp>
+        <p:nvSpPr>
+          <p:cNvPr id="25" name="Text 23"/>
+          <p:cNvSpPr/>
+          <p:nvPr/>
+        </p:nvSpPr>
+        <p:spPr>
+          <a:xfrm>
+            <a:off x="804672" y="3767328"/>
+            <a:ext cx="5029200" cy="274320"/>
+          </a:xfrm>
+          <a:prstGeom prst="rect">
+            <a:avLst/>
+          </a:prstGeom>
+          <a:noFill/>
+          <a:ln/>
+        </p:spPr>
+        <p:txBody>
+          <a:bodyPr wrap="square" lIns="0" tIns="0" rIns="0" bIns="0" rtlCol="0" anchor="ctr"/>
+          <a:lstStyle/>
+          <a:p>
+            <a:pPr indent="0" marL="0">
+              <a:buNone/>
+            </a:pPr>
+            <a:r>
+              <a:rPr lang="en-US" sz="1350" b="1" dirty="0">
+                <a:solidFill>
+                  <a:srgbClr val="E6EDF3"/>
+                </a:solidFill>
+                <a:latin typeface="Arial" pitchFamily="34" charset="0"/>
+                <a:ea typeface="Arial" pitchFamily="34" charset="-122"/>
+                <a:cs typeface="Arial" pitchFamily="34" charset="-120"/>
+              </a:rPr>
+              <a:t>Why Tier 3 exists</a:t>
+            </a:r>
+            <a:endParaRPr lang="en-US" sz="1350" dirty="0"/>
+          </a:p>
+        </p:txBody>
+      </p:sp>
+      <p:sp>
+        <p:nvSpPr>
+          <p:cNvPr id="26" name="Text 24"/>
+          <p:cNvSpPr/>
+          <p:nvPr/>
+        </p:nvSpPr>
+        <p:spPr>
+          <a:xfrm>
+            <a:off x="804672" y="4069080"/>
+            <a:ext cx="5074920" cy="566928"/>
+          </a:xfrm>
+          <a:prstGeom prst="rect">
+            <a:avLst/>
+          </a:prstGeom>
+          <a:noFill/>
+          <a:ln/>
+        </p:spPr>
+        <p:txBody>
+          <a:bodyPr wrap="square" lIns="0" tIns="0" rIns="0" bIns="0" rtlCol="0" anchor="ctr"/>
+          <a:lstStyle/>
+          <a:p>
+            <a:pPr indent="0" marL="0">
+              <a:lnSpc>
+                <a:spcPts val="1400"/>
+              </a:lnSpc>
+              <a:buNone/>
+            </a:pPr>
+            <a:r>
+              <a:rPr lang="en-US" sz="1100" dirty="0">
+                <a:solidFill>
+                  <a:srgbClr val="9AA4AF"/>
+                </a:solidFill>
+                <a:latin typeface="Calibri" pitchFamily="34" charset="0"/>
+                <a:ea typeface="Calibri" pitchFamily="34" charset="-122"/>
+                <a:cs typeface="Calibri" pitchFamily="34" charset="-120"/>
+              </a:rPr>
+              <a:t>A high-value tool billed at a minimum day loses small jobs. A van on a 3-day job used 8 hours a day costs ₱1,479 on Tier 2 and ₱493 on Tier 3 — the same money, counted by the hour.</a:t>
+            </a:r>
+            <a:endParaRPr lang="en-US" sz="1100" dirty="0"/>
+          </a:p>
+        </p:txBody>
+      </p:sp>
+      <p:sp>
+        <p:nvSpPr>
+          <p:cNvPr id="27" name="Shape 25"/>
+          <p:cNvSpPr/>
+          <p:nvPr/>
+        </p:nvSpPr>
+        <p:spPr>
+          <a:xfrm>
+            <a:off x="6309360" y="3648456"/>
+            <a:ext cx="5532120" cy="1042416"/>
+          </a:xfrm>
+          <a:prstGeom prst="roundRect">
+            <a:avLst>
+              <a:gd name="adj" fmla="val 7018"/>
+            </a:avLst>
+          </a:prstGeom>
+          <a:solidFill>
+            <a:srgbClr val="161B22"/>
+          </a:solidFill>
+          <a:ln w="12700">
+            <a:solidFill>
+              <a:srgbClr val="30363D"/>
+            </a:solidFill>
+            <a:prstDash val="solid"/>
+          </a:ln>
+          <a:effectLst>
+            <a:outerShdw sx="100000" sy="100000" kx="0" ky="0" algn="bl" rotWithShape="0" blurRad="152400" dist="38100" dir="5400000">
+              <a:srgbClr val="000000">
+                <a:alpha val="45000"/>
+              </a:srgbClr>
+            </a:outerShdw>
+          </a:effectLst>
+        </p:spPr>
+      </p:sp>
+      <p:sp>
+        <p:nvSpPr>
+          <p:cNvPr id="28" name="Text 26"/>
+          <p:cNvSpPr/>
+          <p:nvPr/>
+        </p:nvSpPr>
+        <p:spPr>
+          <a:xfrm>
+            <a:off x="6547104" y="3767328"/>
+            <a:ext cx="5029200" cy="274320"/>
+          </a:xfrm>
+          <a:prstGeom prst="rect">
+            <a:avLst/>
+          </a:prstGeom>
+          <a:noFill/>
+          <a:ln/>
+        </p:spPr>
+        <p:txBody>
+          <a:bodyPr wrap="square" lIns="0" tIns="0" rIns="0" bIns="0" rtlCol="0" anchor="ctr"/>
+          <a:lstStyle/>
+          <a:p>
+            <a:pPr indent="0" marL="0">
+              <a:buNone/>
+            </a:pPr>
+            <a:r>
+              <a:rPr lang="en-US" sz="1350" b="1" dirty="0">
+                <a:solidFill>
+                  <a:srgbClr val="E6EDF3"/>
+                </a:solidFill>
+                <a:latin typeface="Arial" pitchFamily="34" charset="0"/>
+                <a:ea typeface="Arial" pitchFamily="34" charset="-122"/>
+                <a:cs typeface="Arial" pitchFamily="34" charset="-120"/>
+              </a:rPr>
+              <a:t>Setting the tier</a:t>
+            </a:r>
+            <a:endParaRPr lang="en-US" sz="1350" dirty="0"/>
+          </a:p>
+        </p:txBody>
+      </p:sp>
+      <p:sp>
+        <p:nvSpPr>
+          <p:cNvPr id="29" name="Text 27"/>
+          <p:cNvSpPr/>
+          <p:nvPr/>
+        </p:nvSpPr>
+        <p:spPr>
+          <a:xfrm>
+            <a:off x="6547104" y="4069080"/>
+            <a:ext cx="5074920" cy="566928"/>
+          </a:xfrm>
+          <a:prstGeom prst="rect">
+            <a:avLst/>
+          </a:prstGeom>
+          <a:noFill/>
+          <a:ln/>
+        </p:spPr>
+        <p:txBody>
+          <a:bodyPr wrap="square" lIns="0" tIns="0" rIns="0" bIns="0" rtlCol="0" anchor="ctr"/>
+          <a:lstStyle/>
+          <a:p>
+            <a:pPr indent="0" marL="0">
+              <a:lnSpc>
+                <a:spcPts val="1400"/>
+              </a:lnSpc>
+              <a:buNone/>
+            </a:pPr>
+            <a:r>
+              <a:rPr lang="en-US" sz="1100" dirty="0">
+                <a:solidFill>
+                  <a:srgbClr val="9AA4AF"/>
+                </a:solidFill>
+                <a:latin typeface="Calibri" pitchFamily="34" charset="0"/>
+                <a:ea typeface="Calibri" pitchFamily="34" charset="-122"/>
+                <a:cs typeface="Calibri" pitchFamily="34" charset="-120"/>
+              </a:rPr>
+              <a:t>Each row has a Tier box. The toolbar sets which tier NEW rows start on — rows already on the CE keep theirs. Days is live on Tier 2 only, Hours on Tier 3 only.</a:t>
+            </a:r>
+            <a:endParaRPr lang="en-US" sz="1100" dirty="0"/>
+          </a:p>
+        </p:txBody>
+      </p:sp>
+      <p:sp>
+        <p:nvSpPr>
+          <p:cNvPr id="30" name="Shape 28"/>
+          <p:cNvSpPr/>
+          <p:nvPr/>
+        </p:nvSpPr>
+        <p:spPr>
+          <a:xfrm>
+            <a:off x="566928" y="4818888"/>
+            <a:ext cx="5532120" cy="1042416"/>
+          </a:xfrm>
+          <a:prstGeom prst="roundRect">
+            <a:avLst>
+              <a:gd name="adj" fmla="val 7018"/>
+            </a:avLst>
+          </a:prstGeom>
+          <a:solidFill>
+            <a:srgbClr val="161B22"/>
+          </a:solidFill>
+          <a:ln w="12700">
+            <a:solidFill>
+              <a:srgbClr val="30363D"/>
+            </a:solidFill>
+            <a:prstDash val="solid"/>
+          </a:ln>
+          <a:effectLst>
+            <a:outerShdw sx="100000" sy="100000" kx="0" ky="0" algn="bl" rotWithShape="0" blurRad="152400" dist="38100" dir="5400000">
+              <a:srgbClr val="000000">
+                <a:alpha val="45000"/>
+              </a:srgbClr>
+            </a:outerShdw>
+          </a:effectLst>
+        </p:spPr>
+      </p:sp>
+      <p:sp>
+        <p:nvSpPr>
+          <p:cNvPr id="31" name="Text 29"/>
+          <p:cNvSpPr/>
+          <p:nvPr/>
+        </p:nvSpPr>
+        <p:spPr>
+          <a:xfrm>
+            <a:off x="804672" y="4937760"/>
+            <a:ext cx="5029200" cy="274320"/>
+          </a:xfrm>
+          <a:prstGeom prst="rect">
+            <a:avLst/>
+          </a:prstGeom>
+          <a:noFill/>
+          <a:ln/>
+        </p:spPr>
+        <p:txBody>
+          <a:bodyPr wrap="square" lIns="0" tIns="0" rIns="0" bIns="0" rtlCol="0" anchor="ctr"/>
+          <a:lstStyle/>
+          <a:p>
+            <a:pPr indent="0" marL="0">
+              <a:buNone/>
+            </a:pPr>
+            <a:r>
+              <a:rPr lang="en-US" sz="1350" b="1" dirty="0">
+                <a:solidFill>
+                  <a:srgbClr val="E6EDF3"/>
+                </a:solidFill>
+                <a:latin typeface="Arial" pitchFamily="34" charset="0"/>
+                <a:ea typeface="Arial" pitchFamily="34" charset="-122"/>
+                <a:cs typeface="Arial" pitchFamily="34" charset="-120"/>
+              </a:rPr>
+              <a:t>On the printed CE</a:t>
+            </a:r>
+            <a:endParaRPr lang="en-US" sz="1350" dirty="0"/>
+          </a:p>
+        </p:txBody>
+      </p:sp>
+      <p:sp>
+        <p:nvSpPr>
+          <p:cNvPr id="32" name="Text 30"/>
+          <p:cNvSpPr/>
+          <p:nvPr/>
+        </p:nvSpPr>
+        <p:spPr>
+          <a:xfrm>
+            <a:off x="804672" y="5239512"/>
+            <a:ext cx="5074920" cy="566928"/>
+          </a:xfrm>
+          <a:prstGeom prst="rect">
+            <a:avLst/>
+          </a:prstGeom>
+          <a:noFill/>
+          <a:ln/>
+        </p:spPr>
+        <p:txBody>
+          <a:bodyPr wrap="square" lIns="0" tIns="0" rIns="0" bIns="0" rtlCol="0" anchor="ctr"/>
+          <a:lstStyle/>
+          <a:p>
+            <a:pPr indent="0" marL="0">
+              <a:lnSpc>
+                <a:spcPts val="1400"/>
+              </a:lnSpc>
+              <a:buNone/>
+            </a:pPr>
+            <a:r>
+              <a:rPr lang="en-US" sz="1100" dirty="0">
+                <a:solidFill>
+                  <a:srgbClr val="9AA4AF"/>
+                </a:solidFill>
+                <a:latin typeface="Calibri" pitchFamily="34" charset="0"/>
+                <a:ea typeface="Calibri" pitchFamily="34" charset="-122"/>
+                <a:cs typeface="Calibri" pitchFamily="34" charset="-120"/>
+              </a:rPr>
+              <a:t>The DAYS column is now BASIS, and reads "per project", "5 days" or "24 hrs" — so the client can see what they are being charged for.</a:t>
+            </a:r>
+            <a:endParaRPr lang="en-US" sz="1100" dirty="0"/>
+          </a:p>
+        </p:txBody>
+      </p:sp>
+      <p:sp>
+        <p:nvSpPr>
+          <p:cNvPr id="33" name="Shape 31"/>
+          <p:cNvSpPr/>
+          <p:nvPr/>
+        </p:nvSpPr>
+        <p:spPr>
+          <a:xfrm>
+            <a:off x="6309360" y="4818888"/>
+            <a:ext cx="5532120" cy="1042416"/>
+          </a:xfrm>
+          <a:prstGeom prst="roundRect">
+            <a:avLst>
+              <a:gd name="adj" fmla="val 7018"/>
+            </a:avLst>
+          </a:prstGeom>
+          <a:solidFill>
+            <a:srgbClr val="161B22"/>
+          </a:solidFill>
+          <a:ln w="12700">
+            <a:solidFill>
+              <a:srgbClr val="30363D"/>
+            </a:solidFill>
+            <a:prstDash val="solid"/>
+          </a:ln>
+          <a:effectLst>
+            <a:outerShdw sx="100000" sy="100000" kx="0" ky="0" algn="bl" rotWithShape="0" blurRad="152400" dist="38100" dir="5400000">
+              <a:srgbClr val="000000">
+                <a:alpha val="45000"/>
+              </a:srgbClr>
+            </a:outerShdw>
+          </a:effectLst>
+        </p:spPr>
+      </p:sp>
+      <p:sp>
+        <p:nvSpPr>
+          <p:cNvPr id="34" name="Text 32"/>
+          <p:cNvSpPr/>
+          <p:nvPr/>
+        </p:nvSpPr>
+        <p:spPr>
+          <a:xfrm>
+            <a:off x="6547104" y="4937760"/>
+            <a:ext cx="5029200" cy="274320"/>
+          </a:xfrm>
+          <a:prstGeom prst="rect">
+            <a:avLst/>
+          </a:prstGeom>
+          <a:noFill/>
+          <a:ln/>
+        </p:spPr>
+        <p:txBody>
+          <a:bodyPr wrap="square" lIns="0" tIns="0" rIns="0" bIns="0" rtlCol="0" anchor="ctr"/>
+          <a:lstStyle/>
+          <a:p>
+            <a:pPr indent="0" marL="0">
+              <a:buNone/>
+            </a:pPr>
+            <a:r>
+              <a:rPr lang="en-US" sz="1350" b="1" dirty="0">
+                <a:solidFill>
+                  <a:srgbClr val="E6EDF3"/>
+                </a:solidFill>
+                <a:latin typeface="Arial" pitchFamily="34" charset="0"/>
+                <a:ea typeface="Arial" pitchFamily="34" charset="-122"/>
+                <a:cs typeface="Arial" pitchFamily="34" charset="-120"/>
+              </a:rPr>
+              <a:t>Judgement still required</a:t>
+            </a:r>
+            <a:endParaRPr lang="en-US" sz="1350" dirty="0"/>
+          </a:p>
+        </p:txBody>
+      </p:sp>
+      <p:sp>
+        <p:nvSpPr>
+          <p:cNvPr id="35" name="Text 33"/>
+          <p:cNvSpPr/>
+          <p:nvPr/>
+        </p:nvSpPr>
+        <p:spPr>
+          <a:xfrm>
+            <a:off x="6547104" y="5239512"/>
+            <a:ext cx="5074920" cy="566928"/>
+          </a:xfrm>
+          <a:prstGeom prst="rect">
+            <a:avLst/>
+          </a:prstGeom>
+          <a:noFill/>
+          <a:ln/>
+        </p:spPr>
+        <p:txBody>
+          <a:bodyPr wrap="square" lIns="0" tIns="0" rIns="0" bIns="0" rtlCol="0" anchor="ctr"/>
+          <a:lstStyle/>
+          <a:p>
+            <a:pPr indent="0" marL="0">
+              <a:lnSpc>
+                <a:spcPts val="1400"/>
+              </a:lnSpc>
+              <a:buNone/>
+            </a:pPr>
+            <a:r>
+              <a:rPr lang="en-US" sz="1100" dirty="0">
+                <a:solidFill>
+                  <a:srgbClr val="9AA4AF"/>
+                </a:solidFill>
+                <a:latin typeface="Calibri" pitchFamily="34" charset="0"/>
+                <a:ea typeface="Calibri" pitchFamily="34" charset="-122"/>
+                <a:cs typeface="Calibri" pitchFamily="34" charset="-120"/>
+              </a:rPr>
+              <a:t>Tier 3 recovers about a sixth of what a tool costs to own per year, against half on Tier 2. It is a deliberate discount to win small work. On a long shutdown, use Tier 2 or 1.</a:t>
+            </a:r>
+            <a:endParaRPr lang="en-US" sz="1100" dirty="0"/>
+          </a:p>
+        </p:txBody>
+      </p:sp>
+      <p:sp>
+        <p:nvSpPr>
+          <p:cNvPr id="36" name="Text 34"/>
+          <p:cNvSpPr/>
+          <p:nvPr/>
+        </p:nvSpPr>
+        <p:spPr>
+          <a:xfrm>
+            <a:off x="566928" y="6437376"/>
+            <a:ext cx="5486400" cy="237744"/>
+          </a:xfrm>
+          <a:prstGeom prst="rect">
+            <a:avLst/>
+          </a:prstGeom>
+          <a:noFill/>
+          <a:ln/>
+        </p:spPr>
+        <p:txBody>
+          <a:bodyPr wrap="square" lIns="0" tIns="0" rIns="0" bIns="0" rtlCol="0" anchor="ctr"/>
+          <a:lstStyle/>
+          <a:p>
+            <a:pPr indent="0" marL="0">
+              <a:buNone/>
+            </a:pPr>
+            <a:r>
+              <a:rPr lang="en-US" sz="900" dirty="0">
+                <a:solidFill>
+                  <a:srgbClr val="6E7681"/>
+                </a:solidFill>
+                <a:latin typeface="Calibri" pitchFamily="34" charset="0"/>
+                <a:ea typeface="Calibri" pitchFamily="34" charset="-122"/>
+                <a:cs typeface="Calibri" pitchFamily="34" charset="-120"/>
+              </a:rPr>
+              <a:t>SHIC Cost Estimator — End-User Manual</a:t>
+            </a:r>
+            <a:endParaRPr lang="en-US" sz="900" dirty="0"/>
+          </a:p>
+        </p:txBody>
+      </p:sp>
+      <p:sp>
+        <p:nvSpPr>
+          <p:cNvPr id="37" name="Text 35"/>
+          <p:cNvSpPr/>
+          <p:nvPr/>
+        </p:nvSpPr>
+        <p:spPr>
+          <a:xfrm>
+            <a:off x="10981944" y="6437376"/>
+            <a:ext cx="640080" cy="237744"/>
+          </a:xfrm>
+          <a:prstGeom prst="rect">
+            <a:avLst/>
+          </a:prstGeom>
+          <a:noFill/>
+          <a:ln/>
+        </p:spPr>
+        <p:txBody>
+          <a:bodyPr wrap="square" lIns="0" tIns="0" rIns="0" bIns="0" rtlCol="0" anchor="ctr"/>
+          <a:lstStyle/>
+          <a:p>
+            <a:pPr algn="r" indent="0" marL="0">
+              <a:buNone/>
+            </a:pPr>
+            <a:r>
+              <a:rPr lang="en-US" sz="900" dirty="0">
+                <a:solidFill>
+                  <a:srgbClr val="6E7681"/>
+                </a:solidFill>
+                <a:latin typeface="Calibri" pitchFamily="34" charset="0"/>
+                <a:ea typeface="Calibri" pitchFamily="34" charset="-122"/>
+                <a:cs typeface="Calibri" pitchFamily="34" charset="-120"/>
+              </a:rPr>
+              <a:t>12</a:t>
+            </a:r>
+            <a:endParaRPr lang="en-US" sz="900" dirty="0"/>
+          </a:p>
+        </p:txBody>
+      </p:sp>
+    </p:spTree>
+  </p:cSld>
+  <p:clrMapOvr>
+    <a:masterClrMapping/>
+  </p:clrMapOvr>
+</p:sld>
+</file>
+
+<file path=ppt/slides/slide13.xml><?xml version="1.0" encoding="utf-8"?>
 <p:sld xmlns:a="http://schemas.openxmlformats.org/drawingml/2006/main" xmlns:r="http://schemas.openxmlformats.org/officeDocument/2006/relationships" xmlns:p="http://schemas.openxmlformats.org/presentationml/2006/main">
   <p:cSld name="Slide 12">
     <p:bg>
@@ -7705,7 +9160,7 @@
                 <a:ea typeface="Calibri" pitchFamily="34" charset="-122"/>
                 <a:cs typeface="Calibri" pitchFamily="34" charset="-120"/>
               </a:rPr>
-              <a:t>12</a:t>
+              <a:t>13</a:t>
             </a:r>
             <a:endParaRPr lang="en-US" sz="900" dirty="0"/>
           </a:p>
@@ -7719,7 +9174,7 @@
 </p:sld>
 </file>
 
-<file path=ppt/slides/slide13.xml><?xml version="1.0" encoding="utf-8"?>
+<file path=ppt/slides/slide14.xml><?xml version="1.0" encoding="utf-8"?>
 <p:sld xmlns:a="http://schemas.openxmlformats.org/drawingml/2006/main" xmlns:r="http://schemas.openxmlformats.org/officeDocument/2006/relationships" xmlns:p="http://schemas.openxmlformats.org/presentationml/2006/main">
   <p:cSld name="Slide 13">
     <p:bg>
@@ -9381,7 +10836,7 @@
                 <a:ea typeface="Calibri" pitchFamily="34" charset="-122"/>
                 <a:cs typeface="Calibri" pitchFamily="34" charset="-120"/>
               </a:rPr>
-              <a:t>Prepared by, checked by, approved by. Sign on screen or leave blank to sign on paper.</a:t>
+              <a:t>Filled from the CE Defaults preset for this CE type and discipline, with your name already in Prepared By. Sign on screen or on paper.</a:t>
             </a:r>
             <a:endParaRPr lang="en-US" sz="1100" dirty="0"/>
           </a:p>
@@ -9587,7 +11042,7 @@
                 <a:ea typeface="Calibri" pitchFamily="34" charset="-122"/>
                 <a:cs typeface="Calibri" pitchFamily="34" charset="-120"/>
               </a:rPr>
-              <a:t>Mobilisation and demobilisation vehicles, for on-site jobs</a:t>
+              <a:t>↺ Sync Rates — re-price the whole CE from the Masterlist before requoting</a:t>
             </a:r>
             <a:endParaRPr lang="en-US" sz="1150" dirty="0"/>
           </a:p>
@@ -9665,7 +11120,7 @@
                 <a:ea typeface="Calibri" pitchFamily="34" charset="-122"/>
                 <a:cs typeface="Calibri" pitchFamily="34" charset="-120"/>
               </a:rPr>
-              <a:t>13</a:t>
+              <a:t>14</a:t>
             </a:r>
             <a:endParaRPr lang="en-US" sz="900" dirty="0"/>
           </a:p>
@@ -9679,7 +11134,7 @@
 </p:sld>
 </file>
 
-<file path=ppt/slides/slide14.xml><?xml version="1.0" encoding="utf-8"?>
+<file path=ppt/slides/slide15.xml><?xml version="1.0" encoding="utf-8"?>
 <p:sld xmlns:a="http://schemas.openxmlformats.org/drawingml/2006/main" xmlns:r="http://schemas.openxmlformats.org/officeDocument/2006/relationships" xmlns:p="http://schemas.openxmlformats.org/presentationml/2006/main">
   <p:cSld name="Slide 14">
     <p:bg>
@@ -10392,7 +11847,7 @@
                 <a:ea typeface="Calibri" pitchFamily="34" charset="-122"/>
                 <a:cs typeface="Calibri" pitchFamily="34" charset="-120"/>
               </a:rPr>
-              <a:t>14</a:t>
+              <a:t>15</a:t>
             </a:r>
             <a:endParaRPr lang="en-US" sz="900" dirty="0"/>
           </a:p>
@@ -10406,7 +11861,7 @@
 </p:sld>
 </file>
 
-<file path=ppt/slides/slide15.xml><?xml version="1.0" encoding="utf-8"?>
+<file path=ppt/slides/slide16.xml><?xml version="1.0" encoding="utf-8"?>
 <p:sld xmlns:a="http://schemas.openxmlformats.org/drawingml/2006/main" xmlns:r="http://schemas.openxmlformats.org/officeDocument/2006/relationships" xmlns:p="http://schemas.openxmlformats.org/presentationml/2006/main">
   <p:cSld name="Slide 15">
     <p:bg>
@@ -10825,7 +12280,7 @@
                 <a:ea typeface="Calibri" pitchFamily="34" charset="-122"/>
                 <a:cs typeface="Calibri" pitchFamily="34" charset="-120"/>
               </a:rPr>
-              <a:t>Parks unfinished work under your name. Drafts are not CEs — they do not appear in Monitoring.</a:t>
+              <a:t>Parks unfinished work and shares it with the team. A draft DOES show in CE Monitoring as open work, and can still be edited. Saving the CE clears it.</a:t>
             </a:r>
             <a:endParaRPr lang="en-US" sz="1150" dirty="0"/>
           </a:p>
@@ -11520,7 +12975,7 @@
                 <a:ea typeface="Calibri" pitchFamily="34" charset="-122"/>
                 <a:cs typeface="Calibri" pitchFamily="34" charset="-120"/>
               </a:rPr>
-              <a:t>Saving over an existing number is refused, and the app tells you when that CE was saved. Use Revise if you meant to supersede it, or pick a new number.</a:t>
+              <a:t>Saving over an existing number is refused, and the app says when that CE was saved. Use Revise to supersede it, or pick a new number. A save that reaches only this browser now says so — it is not filed until it reaches SharePoint.</a:t>
             </a:r>
             <a:endParaRPr lang="en-US" sz="1150" dirty="0"/>
           </a:p>
@@ -11598,7 +13053,7 @@
                 <a:ea typeface="Calibri" pitchFamily="34" charset="-122"/>
                 <a:cs typeface="Calibri" pitchFamily="34" charset="-120"/>
               </a:rPr>
-              <a:t>15</a:t>
+              <a:t>16</a:t>
             </a:r>
             <a:endParaRPr lang="en-US" sz="900" dirty="0"/>
           </a:p>
@@ -11612,7 +13067,7 @@
 </p:sld>
 </file>
 
-<file path=ppt/slides/slide16.xml><?xml version="1.0" encoding="utf-8"?>
+<file path=ppt/slides/slide17.xml><?xml version="1.0" encoding="utf-8"?>
 <p:sld xmlns:a="http://schemas.openxmlformats.org/drawingml/2006/main" xmlns:r="http://schemas.openxmlformats.org/officeDocument/2006/relationships" xmlns:p="http://schemas.openxmlformats.org/presentationml/2006/main">
   <p:cSld name="Slide 16">
     <p:bg>
@@ -11896,7 +13351,7 @@
                 <a:ea typeface="Arial" pitchFamily="34" charset="-122"/>
                 <a:cs typeface="Arial" pitchFamily="34" charset="-120"/>
               </a:rPr>
-              <a:t>Export Detailed</a:t>
+              <a:t>Export CE · Export Detailed</a:t>
             </a:r>
             <a:endParaRPr lang="en-US" sz="1500" dirty="0"/>
           </a:p>
@@ -11938,7 +13393,7 @@
                 <a:ea typeface="Calibri" pitchFamily="34" charset="-122"/>
                 <a:cs typeface="Calibri" pitchFamily="34" charset="-120"/>
               </a:rPr>
-              <a:t>On the Summary tab. Writes the SAME document as an Excel workbook — one sheet per printed page, same headings, same columns. Figures come through as numbers, so you can total a column.</a:t>
+              <a:t>Both write the SAME document as a formatted Excel workbook — one sheet per printed page, same headings and columns, with the black section bars and borders of the master CE. Figures arrive as numbers, so a column still totals.</a:t>
             </a:r>
             <a:endParaRPr lang="en-US" sz="1150" dirty="0"/>
           </a:p>
@@ -12244,7 +13699,7 @@
                 <a:ea typeface="Calibri" pitchFamily="34" charset="-122"/>
                 <a:cs typeface="Calibri" pitchFamily="34" charset="-120"/>
               </a:rPr>
-              <a:t>Rows priced at ₱0.00 are left out of the manpower table</a:t>
+              <a:t>Tools show BASIS — "per project", "5 days", "24 hrs" — in place of DAYS</a:t>
             </a:r>
             <a:endParaRPr lang="en-US" sz="1150" dirty="0"/>
           </a:p>
@@ -12322,7 +13777,7 @@
                 <a:ea typeface="Calibri" pitchFamily="34" charset="-122"/>
                 <a:cs typeface="Calibri" pitchFamily="34" charset="-120"/>
               </a:rPr>
-              <a:t>16</a:t>
+              <a:t>17</a:t>
             </a:r>
             <a:endParaRPr lang="en-US" sz="900" dirty="0"/>
           </a:p>
@@ -12336,7 +13791,7 @@
 </p:sld>
 </file>
 
-<file path=ppt/slides/slide17.xml><?xml version="1.0" encoding="utf-8"?>
+<file path=ppt/slides/slide18.xml><?xml version="1.0" encoding="utf-8"?>
 <p:sld xmlns:a="http://schemas.openxmlformats.org/drawingml/2006/main" xmlns:r="http://schemas.openxmlformats.org/officeDocument/2006/relationships" xmlns:p="http://schemas.openxmlformats.org/presentationml/2006/main">
   <p:cSld name="Slide 17">
     <p:bg>
@@ -13516,7 +14971,7 @@
                 <a:ea typeface="Arial" pitchFamily="34" charset="-122"/>
                 <a:cs typeface="Arial" pitchFamily="34" charset="-120"/>
               </a:rPr>
-              <a:t>Editable columns</a:t>
+              <a:t>Status · with history</a:t>
             </a:r>
             <a:endParaRPr lang="en-US" sz="1350" dirty="0"/>
           </a:p>
@@ -13558,7 +15013,7 @@
                 <a:ea typeface="Calibri" pitchFamily="34" charset="-122"/>
                 <a:cs typeface="Calibri" pitchFamily="34" charset="-120"/>
               </a:rPr>
-              <a:t>Customer, job title, dates, received by, status and remarks are yours to maintain. Click a cell and type.</a:t>
+              <a:t>Press Status on a row to change it and see the trail — every change, who made it and when. Customer, job title, dates, received by and remarks are edited in place.</a:t>
             </a:r>
             <a:endParaRPr lang="en-US" sz="1100" dirty="0"/>
           </a:p>
@@ -13673,7 +15128,7 @@
                 <a:ea typeface="Calibri" pitchFamily="34" charset="-122"/>
                 <a:cs typeface="Calibri" pitchFamily="34" charset="-120"/>
               </a:rPr>
-              <a:t>Days-left is calculated for you and turns red when a deadline passes.</a:t>
+              <a:t>Days-left is calculated and turns red when a deadline passes. The list opens newest first, by CE number — year, then sequence, then revision.</a:t>
             </a:r>
             <a:endParaRPr lang="en-US" sz="1100" dirty="0"/>
           </a:p>
@@ -13746,7 +15201,7 @@
                 <a:ea typeface="Arial" pitchFamily="34" charset="-122"/>
                 <a:cs typeface="Arial" pitchFamily="34" charset="-120"/>
               </a:rPr>
-              <a:t>Load · Clone · Revise</a:t>
+              <a:t>Load · 🖨 CE · ⬇ xlsx</a:t>
             </a:r>
             <a:endParaRPr lang="en-US" sz="1350" dirty="0"/>
           </a:p>
@@ -13788,7 +15243,7 @@
                 <a:ea typeface="Calibri" pitchFamily="34" charset="-122"/>
                 <a:cs typeface="Calibri" pitchFamily="34" charset="-120"/>
               </a:rPr>
-              <a:t>Open any CE straight from this list, or copy it as the starting point for a new one.</a:t>
+              <a:t>Open a CE, or print one. 🖨 CE and ⬇ xlsx produce its documents in a new tab, leaving the CE you are working on untouched. Clone and Revise copy it.</a:t>
             </a:r>
             <a:endParaRPr lang="en-US" sz="1100" dirty="0"/>
           </a:p>
@@ -13981,7 +15436,7 @@
                 <a:ea typeface="Calibri" pitchFamily="34" charset="-122"/>
                 <a:cs typeface="Calibri" pitchFamily="34" charset="-120"/>
               </a:rPr>
-              <a:t>17</a:t>
+              <a:t>18</a:t>
             </a:r>
             <a:endParaRPr lang="en-US" sz="900" dirty="0"/>
           </a:p>
@@ -13995,7 +15450,7 @@
 </p:sld>
 </file>
 
-<file path=ppt/slides/slide18.xml><?xml version="1.0" encoding="utf-8"?>
+<file path=ppt/slides/slide19.xml><?xml version="1.0" encoding="utf-8"?>
 <p:sld xmlns:a="http://schemas.openxmlformats.org/drawingml/2006/main" xmlns:r="http://schemas.openxmlformats.org/officeDocument/2006/relationships" xmlns:p="http://schemas.openxmlformats.org/presentationml/2006/main">
   <p:cSld name="Slide 18">
     <p:bg>
@@ -14833,1104 +16288,6 @@
       <p:sp>
         <p:nvSpPr>
           <p:cNvPr id="24" name="Text 22"/>
-          <p:cNvSpPr/>
-          <p:nvPr/>
-        </p:nvSpPr>
-        <p:spPr>
-          <a:xfrm>
-            <a:off x="10981944" y="6437376"/>
-            <a:ext cx="640080" cy="237744"/>
-          </a:xfrm>
-          <a:prstGeom prst="rect">
-            <a:avLst/>
-          </a:prstGeom>
-          <a:noFill/>
-          <a:ln/>
-        </p:spPr>
-        <p:txBody>
-          <a:bodyPr wrap="square" lIns="0" tIns="0" rIns="0" bIns="0" rtlCol="0" anchor="ctr"/>
-          <a:lstStyle/>
-          <a:p>
-            <a:pPr algn="r" indent="0" marL="0">
-              <a:buNone/>
-            </a:pPr>
-            <a:r>
-              <a:rPr lang="en-US" sz="900" dirty="0">
-                <a:solidFill>
-                  <a:srgbClr val="6E7681"/>
-                </a:solidFill>
-                <a:latin typeface="Calibri" pitchFamily="34" charset="0"/>
-                <a:ea typeface="Calibri" pitchFamily="34" charset="-122"/>
-                <a:cs typeface="Calibri" pitchFamily="34" charset="-120"/>
-              </a:rPr>
-              <a:t>18</a:t>
-            </a:r>
-            <a:endParaRPr lang="en-US" sz="900" dirty="0"/>
-          </a:p>
-        </p:txBody>
-      </p:sp>
-    </p:spTree>
-  </p:cSld>
-  <p:clrMapOvr>
-    <a:masterClrMapping/>
-  </p:clrMapOvr>
-</p:sld>
-</file>
-
-<file path=ppt/slides/slide19.xml><?xml version="1.0" encoding="utf-8"?>
-<p:sld xmlns:a="http://schemas.openxmlformats.org/drawingml/2006/main" xmlns:r="http://schemas.openxmlformats.org/officeDocument/2006/relationships" xmlns:p="http://schemas.openxmlformats.org/presentationml/2006/main">
-  <p:cSld name="Slide 19">
-    <p:bg>
-      <p:bgPr>
-        <a:solidFill>
-          <a:srgbClr val="161B22"/>
-        </a:solidFill>
-      </p:bgPr>
-    </p:bg>
-    <p:spTree>
-      <p:nvGrpSpPr>
-        <p:cNvPr id="1" name=""/>
-        <p:cNvGrpSpPr/>
-        <p:nvPr/>
-      </p:nvGrpSpPr>
-      <p:grpSpPr>
-        <a:xfrm>
-          <a:off x="0" y="0"/>
-          <a:ext cx="0" cy="0"/>
-          <a:chOff x="0" y="0"/>
-          <a:chExt cx="0" cy="0"/>
-        </a:xfrm>
-      </p:grpSpPr>
-      <p:sp>
-        <p:nvSpPr>
-          <p:cNvPr id="2" name="Text 0"/>
-          <p:cNvSpPr/>
-          <p:nvPr/>
-        </p:nvSpPr>
-        <p:spPr>
-          <a:xfrm>
-            <a:off x="566928" y="384048"/>
-            <a:ext cx="8229600" cy="256032"/>
-          </a:xfrm>
-          <a:prstGeom prst="rect">
-            <a:avLst/>
-          </a:prstGeom>
-          <a:noFill/>
-          <a:ln/>
-        </p:spPr>
-        <p:txBody>
-          <a:bodyPr wrap="square" lIns="0" tIns="0" rIns="0" bIns="0" rtlCol="0" anchor="ctr"/>
-          <a:lstStyle/>
-          <a:p>
-            <a:pPr indent="0" marL="0">
-              <a:buNone/>
-            </a:pPr>
-            <a:r>
-              <a:rPr lang="en-US" sz="1100" b="1" spc="200" kern="0" dirty="0">
-                <a:solidFill>
-                  <a:srgbClr val="F0A429"/>
-                </a:solidFill>
-                <a:latin typeface="Arial" pitchFamily="34" charset="0"/>
-                <a:ea typeface="Arial" pitchFamily="34" charset="-122"/>
-                <a:cs typeface="Arial" pitchFamily="34" charset="-120"/>
-              </a:rPr>
-              <a:t>TROUBLESHOOTING</a:t>
-            </a:r>
-            <a:endParaRPr lang="en-US" sz="1100" dirty="0"/>
-          </a:p>
-        </p:txBody>
-      </p:sp>
-      <p:sp>
-        <p:nvSpPr>
-          <p:cNvPr id="3" name="Text 1"/>
-          <p:cNvSpPr/>
-          <p:nvPr/>
-        </p:nvSpPr>
-        <p:spPr>
-          <a:xfrm>
-            <a:off x="566928" y="694944"/>
-            <a:ext cx="11055096" cy="566928"/>
-          </a:xfrm>
-          <a:prstGeom prst="rect">
-            <a:avLst/>
-          </a:prstGeom>
-          <a:noFill/>
-          <a:ln/>
-        </p:spPr>
-        <p:txBody>
-          <a:bodyPr wrap="square" lIns="0" tIns="0" rIns="0" bIns="0" rtlCol="0" anchor="ctr"/>
-          <a:lstStyle/>
-          <a:p>
-            <a:pPr indent="0" marL="0">
-              <a:buNone/>
-            </a:pPr>
-            <a:r>
-              <a:rPr lang="en-US" sz="3200" b="1" dirty="0">
-                <a:solidFill>
-                  <a:srgbClr val="E6EDF3"/>
-                </a:solidFill>
-                <a:latin typeface="Arial" pitchFamily="34" charset="0"/>
-                <a:ea typeface="Arial" pitchFamily="34" charset="-122"/>
-                <a:cs typeface="Arial" pitchFamily="34" charset="-120"/>
-              </a:rPr>
-              <a:t>Messages you may see</a:t>
-            </a:r>
-            <a:endParaRPr lang="en-US" sz="3200" dirty="0"/>
-          </a:p>
-        </p:txBody>
-      </p:sp>
-      <p:sp>
-        <p:nvSpPr>
-          <p:cNvPr id="4" name="Shape 2"/>
-          <p:cNvSpPr/>
-          <p:nvPr/>
-        </p:nvSpPr>
-        <p:spPr>
-          <a:xfrm>
-            <a:off x="566928" y="1408176"/>
-            <a:ext cx="11055096" cy="914400"/>
-          </a:xfrm>
-          <a:prstGeom prst="roundRect">
-            <a:avLst>
-              <a:gd name="adj" fmla="val 8000"/>
-            </a:avLst>
-          </a:prstGeom>
-          <a:solidFill>
-            <a:srgbClr val="161B22"/>
-          </a:solidFill>
-          <a:ln w="12700">
-            <a:solidFill>
-              <a:srgbClr val="30363D"/>
-            </a:solidFill>
-            <a:prstDash val="solid"/>
-          </a:ln>
-          <a:effectLst>
-            <a:outerShdw sx="100000" sy="100000" kx="0" ky="0" algn="bl" rotWithShape="0" blurRad="152400" dist="38100" dir="5400000">
-              <a:srgbClr val="000000">
-                <a:alpha val="45000"/>
-              </a:srgbClr>
-            </a:outerShdw>
-          </a:effectLst>
-        </p:spPr>
-      </p:sp>
-      <p:sp>
-        <p:nvSpPr>
-          <p:cNvPr id="5" name="Shape 3"/>
-          <p:cNvSpPr/>
-          <p:nvPr/>
-        </p:nvSpPr>
-        <p:spPr>
-          <a:xfrm>
-            <a:off x="822960" y="1700784"/>
-            <a:ext cx="310896" cy="310896"/>
-          </a:xfrm>
-          <a:prstGeom prst="ellipse">
-            <a:avLst/>
-          </a:prstGeom>
-          <a:solidFill>
-            <a:srgbClr val="F0A429"/>
-          </a:solidFill>
-          <a:ln w="12700">
-            <a:solidFill>
-              <a:srgbClr val="F0A429"/>
-            </a:solidFill>
-            <a:prstDash val="solid"/>
-          </a:ln>
-        </p:spPr>
-      </p:sp>
-      <p:sp>
-        <p:nvSpPr>
-          <p:cNvPr id="6" name="Text 4"/>
-          <p:cNvSpPr/>
-          <p:nvPr/>
-        </p:nvSpPr>
-        <p:spPr>
-          <a:xfrm>
-            <a:off x="1280160" y="1517904"/>
-            <a:ext cx="3840480" cy="310896"/>
-          </a:xfrm>
-          <a:prstGeom prst="rect">
-            <a:avLst/>
-          </a:prstGeom>
-          <a:noFill/>
-          <a:ln/>
-        </p:spPr>
-        <p:txBody>
-          <a:bodyPr wrap="square" lIns="0" tIns="0" rIns="0" bIns="0" rtlCol="0" anchor="ctr"/>
-          <a:lstStyle/>
-          <a:p>
-            <a:pPr indent="0" marL="0">
-              <a:buNone/>
-            </a:pPr>
-            <a:r>
-              <a:rPr lang="en-US" sz="1350" b="1" dirty="0">
-                <a:solidFill>
-                  <a:srgbClr val="F0A429"/>
-                </a:solidFill>
-                <a:latin typeface="Arial" pitchFamily="34" charset="0"/>
-                <a:ea typeface="Arial" pitchFamily="34" charset="-122"/>
-                <a:cs typeface="Arial" pitchFamily="34" charset="-120"/>
-              </a:rPr>
-              <a:t>SharePoint session expired</a:t>
-            </a:r>
-            <a:endParaRPr lang="en-US" sz="1350" dirty="0"/>
-          </a:p>
-        </p:txBody>
-      </p:sp>
-      <p:sp>
-        <p:nvSpPr>
-          <p:cNvPr id="7" name="Text 5"/>
-          <p:cNvSpPr/>
-          <p:nvPr/>
-        </p:nvSpPr>
-        <p:spPr>
-          <a:xfrm>
-            <a:off x="1280160" y="1847088"/>
-            <a:ext cx="4663440" cy="402336"/>
-          </a:xfrm>
-          <a:prstGeom prst="rect">
-            <a:avLst/>
-          </a:prstGeom>
-          <a:noFill/>
-          <a:ln/>
-        </p:spPr>
-        <p:txBody>
-          <a:bodyPr wrap="square" lIns="0" tIns="0" rIns="0" bIns="0" rtlCol="0" anchor="ctr"/>
-          <a:lstStyle/>
-          <a:p>
-            <a:pPr indent="0" marL="0">
-              <a:lnSpc>
-                <a:spcPts val="1400"/>
-              </a:lnSpc>
-              <a:buNone/>
-            </a:pPr>
-            <a:r>
-              <a:rPr lang="en-US" sz="1100" dirty="0">
-                <a:solidFill>
-                  <a:srgbClr val="9AA4AF"/>
-                </a:solidFill>
-                <a:latin typeface="Calibri" pitchFamily="34" charset="0"/>
-                <a:ea typeface="Calibri" pitchFamily="34" charset="-122"/>
-                <a:cs typeface="Calibri" pitchFamily="34" charset="-120"/>
-              </a:rPr>
-              <a:t>Your sign-in timed out. Work is kept on this device.</a:t>
-            </a:r>
-            <a:endParaRPr lang="en-US" sz="1100" dirty="0"/>
-          </a:p>
-        </p:txBody>
-      </p:sp>
-      <p:sp>
-        <p:nvSpPr>
-          <p:cNvPr id="8" name="Text 6"/>
-          <p:cNvSpPr/>
-          <p:nvPr/>
-        </p:nvSpPr>
-        <p:spPr>
-          <a:xfrm>
-            <a:off x="6236208" y="1517904"/>
-            <a:ext cx="5120640" cy="731520"/>
-          </a:xfrm>
-          <a:prstGeom prst="rect">
-            <a:avLst/>
-          </a:prstGeom>
-          <a:noFill/>
-          <a:ln/>
-        </p:spPr>
-        <p:txBody>
-          <a:bodyPr wrap="square" lIns="0" tIns="0" rIns="0" bIns="0" rtlCol="0" anchor="ctr"/>
-          <a:lstStyle/>
-          <a:p>
-            <a:pPr indent="0" marL="0">
-              <a:lnSpc>
-                <a:spcPts val="1500"/>
-              </a:lnSpc>
-              <a:buNone/>
-            </a:pPr>
-            <a:r>
-              <a:rPr lang="en-US" sz="1150" dirty="0">
-                <a:solidFill>
-                  <a:srgbClr val="E6EDF3"/>
-                </a:solidFill>
-                <a:latin typeface="Calibri" pitchFamily="34" charset="0"/>
-                <a:ea typeface="Calibri" pitchFamily="34" charset="-122"/>
-                <a:cs typeface="Calibri" pitchFamily="34" charset="-120"/>
-              </a:rPr>
-              <a:t>Press Sign in on the banner.</a:t>
-            </a:r>
-            <a:endParaRPr lang="en-US" sz="1150" dirty="0"/>
-          </a:p>
-        </p:txBody>
-      </p:sp>
-      <p:sp>
-        <p:nvSpPr>
-          <p:cNvPr id="9" name="Shape 7"/>
-          <p:cNvSpPr/>
-          <p:nvPr/>
-        </p:nvSpPr>
-        <p:spPr>
-          <a:xfrm>
-            <a:off x="566928" y="2450592"/>
-            <a:ext cx="11055096" cy="914400"/>
-          </a:xfrm>
-          <a:prstGeom prst="roundRect">
-            <a:avLst>
-              <a:gd name="adj" fmla="val 8000"/>
-            </a:avLst>
-          </a:prstGeom>
-          <a:solidFill>
-            <a:srgbClr val="161B22"/>
-          </a:solidFill>
-          <a:ln w="12700">
-            <a:solidFill>
-              <a:srgbClr val="30363D"/>
-            </a:solidFill>
-            <a:prstDash val="solid"/>
-          </a:ln>
-          <a:effectLst>
-            <a:outerShdw sx="100000" sy="100000" kx="0" ky="0" algn="bl" rotWithShape="0" blurRad="152400" dist="38100" dir="5400000">
-              <a:srgbClr val="000000">
-                <a:alpha val="45000"/>
-              </a:srgbClr>
-            </a:outerShdw>
-          </a:effectLst>
-        </p:spPr>
-      </p:sp>
-      <p:sp>
-        <p:nvSpPr>
-          <p:cNvPr id="10" name="Shape 8"/>
-          <p:cNvSpPr/>
-          <p:nvPr/>
-        </p:nvSpPr>
-        <p:spPr>
-          <a:xfrm>
-            <a:off x="822960" y="2743200"/>
-            <a:ext cx="310896" cy="310896"/>
-          </a:xfrm>
-          <a:prstGeom prst="ellipse">
-            <a:avLst/>
-          </a:prstGeom>
-          <a:solidFill>
-            <a:srgbClr val="F85149"/>
-          </a:solidFill>
-          <a:ln w="12700">
-            <a:solidFill>
-              <a:srgbClr val="F85149"/>
-            </a:solidFill>
-            <a:prstDash val="solid"/>
-          </a:ln>
-        </p:spPr>
-      </p:sp>
-      <p:sp>
-        <p:nvSpPr>
-          <p:cNvPr id="11" name="Text 9"/>
-          <p:cNvSpPr/>
-          <p:nvPr/>
-        </p:nvSpPr>
-        <p:spPr>
-          <a:xfrm>
-            <a:off x="1280160" y="2560320"/>
-            <a:ext cx="3840480" cy="310896"/>
-          </a:xfrm>
-          <a:prstGeom prst="rect">
-            <a:avLst/>
-          </a:prstGeom>
-          <a:noFill/>
-          <a:ln/>
-        </p:spPr>
-        <p:txBody>
-          <a:bodyPr wrap="square" lIns="0" tIns="0" rIns="0" bIns="0" rtlCol="0" anchor="ctr"/>
-          <a:lstStyle/>
-          <a:p>
-            <a:pPr indent="0" marL="0">
-              <a:buNone/>
-            </a:pPr>
-            <a:r>
-              <a:rPr lang="en-US" sz="1350" b="1" dirty="0">
-                <a:solidFill>
-                  <a:srgbClr val="F85149"/>
-                </a:solidFill>
-                <a:latin typeface="Arial" pitchFamily="34" charset="0"/>
-                <a:ea typeface="Arial" pitchFamily="34" charset="-122"/>
-                <a:cs typeface="Arial" pitchFamily="34" charset="-120"/>
-              </a:rPr>
-              <a:t>SharePoint denied access</a:t>
-            </a:r>
-            <a:endParaRPr lang="en-US" sz="1350" dirty="0"/>
-          </a:p>
-        </p:txBody>
-      </p:sp>
-      <p:sp>
-        <p:nvSpPr>
-          <p:cNvPr id="12" name="Text 10"/>
-          <p:cNvSpPr/>
-          <p:nvPr/>
-        </p:nvSpPr>
-        <p:spPr>
-          <a:xfrm>
-            <a:off x="1280160" y="2889504"/>
-            <a:ext cx="4663440" cy="402336"/>
-          </a:xfrm>
-          <a:prstGeom prst="rect">
-            <a:avLst/>
-          </a:prstGeom>
-          <a:noFill/>
-          <a:ln/>
-        </p:spPr>
-        <p:txBody>
-          <a:bodyPr wrap="square" lIns="0" tIns="0" rIns="0" bIns="0" rtlCol="0" anchor="ctr"/>
-          <a:lstStyle/>
-          <a:p>
-            <a:pPr indent="0" marL="0">
-              <a:lnSpc>
-                <a:spcPts val="1400"/>
-              </a:lnSpc>
-              <a:buNone/>
-            </a:pPr>
-            <a:r>
-              <a:rPr lang="en-US" sz="1100" dirty="0">
-                <a:solidFill>
-                  <a:srgbClr val="9AA4AF"/>
-                </a:solidFill>
-                <a:latin typeface="Calibri" pitchFamily="34" charset="0"/>
-                <a:ea typeface="Calibri" pitchFamily="34" charset="-122"/>
-                <a:cs typeface="Calibri" pitchFamily="34" charset="-120"/>
-              </a:rPr>
-              <a:t>Your account cannot use one of the lists, so changes are not reaching the team.</a:t>
-            </a:r>
-            <a:endParaRPr lang="en-US" sz="1100" dirty="0"/>
-          </a:p>
-        </p:txBody>
-      </p:sp>
-      <p:sp>
-        <p:nvSpPr>
-          <p:cNvPr id="13" name="Text 11"/>
-          <p:cNvSpPr/>
-          <p:nvPr/>
-        </p:nvSpPr>
-        <p:spPr>
-          <a:xfrm>
-            <a:off x="6236208" y="2560320"/>
-            <a:ext cx="5120640" cy="731520"/>
-          </a:xfrm>
-          <a:prstGeom prst="rect">
-            <a:avLst/>
-          </a:prstGeom>
-          <a:noFill/>
-          <a:ln/>
-        </p:spPr>
-        <p:txBody>
-          <a:bodyPr wrap="square" lIns="0" tIns="0" rIns="0" bIns="0" rtlCol="0" anchor="ctr"/>
-          <a:lstStyle/>
-          <a:p>
-            <a:pPr indent="0" marL="0">
-              <a:lnSpc>
-                <a:spcPts val="1500"/>
-              </a:lnSpc>
-              <a:buNone/>
-            </a:pPr>
-            <a:r>
-              <a:rPr lang="en-US" sz="1150" dirty="0">
-                <a:solidFill>
-                  <a:srgbClr val="E6EDF3"/>
-                </a:solidFill>
-                <a:latin typeface="Calibri" pitchFamily="34" charset="0"/>
-                <a:ea typeface="Calibri" pitchFamily="34" charset="-122"/>
-                <a:cs typeface="Calibri" pitchFamily="34" charset="-120"/>
-              </a:rPr>
-              <a:t>Signing in again will NOT help. Send the message to your admin — they must grant access.</a:t>
-            </a:r>
-            <a:endParaRPr lang="en-US" sz="1150" dirty="0"/>
-          </a:p>
-        </p:txBody>
-      </p:sp>
-      <p:sp>
-        <p:nvSpPr>
-          <p:cNvPr id="14" name="Shape 12"/>
-          <p:cNvSpPr/>
-          <p:nvPr/>
-        </p:nvSpPr>
-        <p:spPr>
-          <a:xfrm>
-            <a:off x="566928" y="3493008"/>
-            <a:ext cx="11055096" cy="914400"/>
-          </a:xfrm>
-          <a:prstGeom prst="roundRect">
-            <a:avLst>
-              <a:gd name="adj" fmla="val 8000"/>
-            </a:avLst>
-          </a:prstGeom>
-          <a:solidFill>
-            <a:srgbClr val="161B22"/>
-          </a:solidFill>
-          <a:ln w="12700">
-            <a:solidFill>
-              <a:srgbClr val="30363D"/>
-            </a:solidFill>
-            <a:prstDash val="solid"/>
-          </a:ln>
-          <a:effectLst>
-            <a:outerShdw sx="100000" sy="100000" kx="0" ky="0" algn="bl" rotWithShape="0" blurRad="152400" dist="38100" dir="5400000">
-              <a:srgbClr val="000000">
-                <a:alpha val="45000"/>
-              </a:srgbClr>
-            </a:outerShdw>
-          </a:effectLst>
-        </p:spPr>
-      </p:sp>
-      <p:sp>
-        <p:nvSpPr>
-          <p:cNvPr id="15" name="Shape 13"/>
-          <p:cNvSpPr/>
-          <p:nvPr/>
-        </p:nvSpPr>
-        <p:spPr>
-          <a:xfrm>
-            <a:off x="822960" y="3785616"/>
-            <a:ext cx="310896" cy="310896"/>
-          </a:xfrm>
-          <a:prstGeom prst="ellipse">
-            <a:avLst/>
-          </a:prstGeom>
-          <a:solidFill>
-            <a:srgbClr val="F85149"/>
-          </a:solidFill>
-          <a:ln w="12700">
-            <a:solidFill>
-              <a:srgbClr val="F85149"/>
-            </a:solidFill>
-            <a:prstDash val="solid"/>
-          </a:ln>
-        </p:spPr>
-      </p:sp>
-      <p:sp>
-        <p:nvSpPr>
-          <p:cNvPr id="16" name="Text 14"/>
-          <p:cNvSpPr/>
-          <p:nvPr/>
-        </p:nvSpPr>
-        <p:spPr>
-          <a:xfrm>
-            <a:off x="1280160" y="3602736"/>
-            <a:ext cx="3840480" cy="310896"/>
-          </a:xfrm>
-          <a:prstGeom prst="rect">
-            <a:avLst/>
-          </a:prstGeom>
-          <a:noFill/>
-          <a:ln/>
-        </p:spPr>
-        <p:txBody>
-          <a:bodyPr wrap="square" lIns="0" tIns="0" rIns="0" bIns="0" rtlCol="0" anchor="ctr"/>
-          <a:lstStyle/>
-          <a:p>
-            <a:pPr indent="0" marL="0">
-              <a:buNone/>
-            </a:pPr>
-            <a:r>
-              <a:rPr lang="en-US" sz="1350" b="1" dirty="0">
-                <a:solidFill>
-                  <a:srgbClr val="F85149"/>
-                </a:solidFill>
-                <a:latin typeface="Arial" pitchFamily="34" charset="0"/>
-                <a:ea typeface="Arial" pitchFamily="34" charset="-122"/>
-                <a:cs typeface="Arial" pitchFamily="34" charset="-120"/>
-              </a:rPr>
-              <a:t>⚠ Bulk upload mode</a:t>
-            </a:r>
-            <a:endParaRPr lang="en-US" sz="1350" dirty="0"/>
-          </a:p>
-        </p:txBody>
-      </p:sp>
-      <p:sp>
-        <p:nvSpPr>
-          <p:cNvPr id="17" name="Text 15"/>
-          <p:cNvSpPr/>
-          <p:nvPr/>
-        </p:nvSpPr>
-        <p:spPr>
-          <a:xfrm>
-            <a:off x="1280160" y="3931920"/>
-            <a:ext cx="4663440" cy="402336"/>
-          </a:xfrm>
-          <a:prstGeom prst="rect">
-            <a:avLst/>
-          </a:prstGeom>
-          <a:noFill/>
-          <a:ln/>
-        </p:spPr>
-        <p:txBody>
-          <a:bodyPr wrap="square" lIns="0" tIns="0" rIns="0" bIns="0" rtlCol="0" anchor="ctr"/>
-          <a:lstStyle/>
-          <a:p>
-            <a:pPr indent="0" marL="0">
-              <a:lnSpc>
-                <a:spcPts val="1400"/>
-              </a:lnSpc>
-              <a:buNone/>
-            </a:pPr>
-            <a:r>
-              <a:rPr lang="en-US" sz="1100" dirty="0">
-                <a:solidFill>
-                  <a:srgbClr val="9AA4AF"/>
-                </a:solidFill>
-                <a:latin typeface="Calibri" pitchFamily="34" charset="0"/>
-                <a:ea typeface="Calibri" pitchFamily="34" charset="-122"/>
-                <a:cs typeface="Calibri" pitchFamily="34" charset="-120"/>
-              </a:rPr>
-              <a:t>An admin switched off duplicate-number protection to load old CEs.</a:t>
-            </a:r>
-            <a:endParaRPr lang="en-US" sz="1100" dirty="0"/>
-          </a:p>
-        </p:txBody>
-      </p:sp>
-      <p:sp>
-        <p:nvSpPr>
-          <p:cNvPr id="18" name="Text 16"/>
-          <p:cNvSpPr/>
-          <p:nvPr/>
-        </p:nvSpPr>
-        <p:spPr>
-          <a:xfrm>
-            <a:off x="6236208" y="3602736"/>
-            <a:ext cx="5120640" cy="731520"/>
-          </a:xfrm>
-          <a:prstGeom prst="rect">
-            <a:avLst/>
-          </a:prstGeom>
-          <a:noFill/>
-          <a:ln/>
-        </p:spPr>
-        <p:txBody>
-          <a:bodyPr wrap="square" lIns="0" tIns="0" rIns="0" bIns="0" rtlCol="0" anchor="ctr"/>
-          <a:lstStyle/>
-          <a:p>
-            <a:pPr indent="0" marL="0">
-              <a:lnSpc>
-                <a:spcPts val="1500"/>
-              </a:lnSpc>
-              <a:buNone/>
-            </a:pPr>
-            <a:r>
-              <a:rPr lang="en-US" sz="1150" dirty="0">
-                <a:solidFill>
-                  <a:srgbClr val="E6EDF3"/>
-                </a:solidFill>
-                <a:latin typeface="Calibri" pitchFamily="34" charset="0"/>
-                <a:ea typeface="Calibri" pitchFamily="34" charset="-122"/>
-                <a:cs typeface="Calibri" pitchFamily="34" charset="-120"/>
-              </a:rPr>
-              <a:t>While it shows, saving an existing CE Number overwrites that CE. Take care.</a:t>
-            </a:r>
-            <a:endParaRPr lang="en-US" sz="1150" dirty="0"/>
-          </a:p>
-        </p:txBody>
-      </p:sp>
-      <p:sp>
-        <p:nvSpPr>
-          <p:cNvPr id="19" name="Shape 17"/>
-          <p:cNvSpPr/>
-          <p:nvPr/>
-        </p:nvSpPr>
-        <p:spPr>
-          <a:xfrm>
-            <a:off x="566928" y="4535424"/>
-            <a:ext cx="11055096" cy="914400"/>
-          </a:xfrm>
-          <a:prstGeom prst="roundRect">
-            <a:avLst>
-              <a:gd name="adj" fmla="val 8000"/>
-            </a:avLst>
-          </a:prstGeom>
-          <a:solidFill>
-            <a:srgbClr val="161B22"/>
-          </a:solidFill>
-          <a:ln w="12700">
-            <a:solidFill>
-              <a:srgbClr val="30363D"/>
-            </a:solidFill>
-            <a:prstDash val="solid"/>
-          </a:ln>
-          <a:effectLst>
-            <a:outerShdw sx="100000" sy="100000" kx="0" ky="0" algn="bl" rotWithShape="0" blurRad="152400" dist="38100" dir="5400000">
-              <a:srgbClr val="000000">
-                <a:alpha val="45000"/>
-              </a:srgbClr>
-            </a:outerShdw>
-          </a:effectLst>
-        </p:spPr>
-      </p:sp>
-      <p:sp>
-        <p:nvSpPr>
-          <p:cNvPr id="20" name="Shape 18"/>
-          <p:cNvSpPr/>
-          <p:nvPr/>
-        </p:nvSpPr>
-        <p:spPr>
-          <a:xfrm>
-            <a:off x="822960" y="4828032"/>
-            <a:ext cx="310896" cy="310896"/>
-          </a:xfrm>
-          <a:prstGeom prst="ellipse">
-            <a:avLst/>
-          </a:prstGeom>
-          <a:solidFill>
-            <a:srgbClr val="58A6FF"/>
-          </a:solidFill>
-          <a:ln w="12700">
-            <a:solidFill>
-              <a:srgbClr val="58A6FF"/>
-            </a:solidFill>
-            <a:prstDash val="solid"/>
-          </a:ln>
-        </p:spPr>
-      </p:sp>
-      <p:sp>
-        <p:nvSpPr>
-          <p:cNvPr id="21" name="Text 19"/>
-          <p:cNvSpPr/>
-          <p:nvPr/>
-        </p:nvSpPr>
-        <p:spPr>
-          <a:xfrm>
-            <a:off x="1280160" y="4645152"/>
-            <a:ext cx="3840480" cy="310896"/>
-          </a:xfrm>
-          <a:prstGeom prst="rect">
-            <a:avLst/>
-          </a:prstGeom>
-          <a:noFill/>
-          <a:ln/>
-        </p:spPr>
-        <p:txBody>
-          <a:bodyPr wrap="square" lIns="0" tIns="0" rIns="0" bIns="0" rtlCol="0" anchor="ctr"/>
-          <a:lstStyle/>
-          <a:p>
-            <a:pPr indent="0" marL="0">
-              <a:buNone/>
-            </a:pPr>
-            <a:r>
-              <a:rPr lang="en-US" sz="1350" b="1" dirty="0">
-                <a:solidFill>
-                  <a:srgbClr val="58A6FF"/>
-                </a:solidFill>
-                <a:latin typeface="Arial" pitchFamily="34" charset="0"/>
-                <a:ea typeface="Arial" pitchFamily="34" charset="-122"/>
-                <a:cs typeface="Arial" pitchFamily="34" charset="-120"/>
-              </a:rPr>
-              <a:t>⬇ Local draft found</a:t>
-            </a:r>
-            <a:endParaRPr lang="en-US" sz="1350" dirty="0"/>
-          </a:p>
-        </p:txBody>
-      </p:sp>
-      <p:sp>
-        <p:nvSpPr>
-          <p:cNvPr id="22" name="Text 20"/>
-          <p:cNvSpPr/>
-          <p:nvPr/>
-        </p:nvSpPr>
-        <p:spPr>
-          <a:xfrm>
-            <a:off x="1280160" y="4974336"/>
-            <a:ext cx="4663440" cy="402336"/>
-          </a:xfrm>
-          <a:prstGeom prst="rect">
-            <a:avLst/>
-          </a:prstGeom>
-          <a:noFill/>
-          <a:ln/>
-        </p:spPr>
-        <p:txBody>
-          <a:bodyPr wrap="square" lIns="0" tIns="0" rIns="0" bIns="0" rtlCol="0" anchor="ctr"/>
-          <a:lstStyle/>
-          <a:p>
-            <a:pPr indent="0" marL="0">
-              <a:lnSpc>
-                <a:spcPts val="1400"/>
-              </a:lnSpc>
-              <a:buNone/>
-            </a:pPr>
-            <a:r>
-              <a:rPr lang="en-US" sz="1100" dirty="0">
-                <a:solidFill>
-                  <a:srgbClr val="9AA4AF"/>
-                </a:solidFill>
-                <a:latin typeface="Calibri" pitchFamily="34" charset="0"/>
-                <a:ea typeface="Calibri" pitchFamily="34" charset="-122"/>
-                <a:cs typeface="Calibri" pitchFamily="34" charset="-120"/>
-              </a:rPr>
-              <a:t>The app kept a copy of unfinished work from last time.</a:t>
-            </a:r>
-            <a:endParaRPr lang="en-US" sz="1100" dirty="0"/>
-          </a:p>
-        </p:txBody>
-      </p:sp>
-      <p:sp>
-        <p:nvSpPr>
-          <p:cNvPr id="23" name="Text 21"/>
-          <p:cNvSpPr/>
-          <p:nvPr/>
-        </p:nvSpPr>
-        <p:spPr>
-          <a:xfrm>
-            <a:off x="6236208" y="4645152"/>
-            <a:ext cx="5120640" cy="731520"/>
-          </a:xfrm>
-          <a:prstGeom prst="rect">
-            <a:avLst/>
-          </a:prstGeom>
-          <a:noFill/>
-          <a:ln/>
-        </p:spPr>
-        <p:txBody>
-          <a:bodyPr wrap="square" lIns="0" tIns="0" rIns="0" bIns="0" rtlCol="0" anchor="ctr"/>
-          <a:lstStyle/>
-          <a:p>
-            <a:pPr indent="0" marL="0">
-              <a:lnSpc>
-                <a:spcPts val="1500"/>
-              </a:lnSpc>
-              <a:buNone/>
-            </a:pPr>
-            <a:r>
-              <a:rPr lang="en-US" sz="1150" dirty="0">
-                <a:solidFill>
-                  <a:srgbClr val="E6EDF3"/>
-                </a:solidFill>
-                <a:latin typeface="Calibri" pitchFamily="34" charset="0"/>
-                <a:ea typeface="Calibri" pitchFamily="34" charset="-122"/>
-                <a:cs typeface="Calibri" pitchFamily="34" charset="-120"/>
-              </a:rPr>
-              <a:t>Resume to carry on, or Dismiss to discard it.</a:t>
-            </a:r>
-            <a:endParaRPr lang="en-US" sz="1150" dirty="0"/>
-          </a:p>
-        </p:txBody>
-      </p:sp>
-      <p:sp>
-        <p:nvSpPr>
-          <p:cNvPr id="24" name="Shape 22"/>
-          <p:cNvSpPr/>
-          <p:nvPr/>
-        </p:nvSpPr>
-        <p:spPr>
-          <a:xfrm>
-            <a:off x="566928" y="5632704"/>
-            <a:ext cx="11055096" cy="914400"/>
-          </a:xfrm>
-          <a:prstGeom prst="roundRect">
-            <a:avLst>
-              <a:gd name="adj" fmla="val 8000"/>
-            </a:avLst>
-          </a:prstGeom>
-          <a:solidFill>
-            <a:srgbClr val="1C2128"/>
-          </a:solidFill>
-          <a:ln w="12700">
-            <a:solidFill>
-              <a:srgbClr val="30363D"/>
-            </a:solidFill>
-            <a:prstDash val="solid"/>
-          </a:ln>
-          <a:effectLst>
-            <a:outerShdw sx="100000" sy="100000" kx="0" ky="0" algn="bl" rotWithShape="0" blurRad="152400" dist="38100" dir="5400000">
-              <a:srgbClr val="000000">
-                <a:alpha val="45000"/>
-              </a:srgbClr>
-            </a:outerShdw>
-          </a:effectLst>
-        </p:spPr>
-      </p:sp>
-      <p:sp>
-        <p:nvSpPr>
-          <p:cNvPr id="25" name="Text 23"/>
-          <p:cNvSpPr/>
-          <p:nvPr/>
-        </p:nvSpPr>
-        <p:spPr>
-          <a:xfrm>
-            <a:off x="1280160" y="5742432"/>
-            <a:ext cx="3840480" cy="274320"/>
-          </a:xfrm>
-          <a:prstGeom prst="rect">
-            <a:avLst/>
-          </a:prstGeom>
-          <a:noFill/>
-          <a:ln/>
-        </p:spPr>
-        <p:txBody>
-          <a:bodyPr wrap="square" lIns="0" tIns="0" rIns="0" bIns="0" rtlCol="0" anchor="ctr"/>
-          <a:lstStyle/>
-          <a:p>
-            <a:pPr indent="0" marL="0">
-              <a:buNone/>
-            </a:pPr>
-            <a:r>
-              <a:rPr lang="en-US" sz="1350" b="1" dirty="0">
-                <a:solidFill>
-                  <a:srgbClr val="E6EDF3"/>
-                </a:solidFill>
-                <a:latin typeface="Arial" pitchFamily="34" charset="0"/>
-                <a:ea typeface="Arial" pitchFamily="34" charset="-122"/>
-                <a:cs typeface="Arial" pitchFamily="34" charset="-120"/>
-              </a:rPr>
-              <a:t>Toasts</a:t>
-            </a:r>
-            <a:endParaRPr lang="en-US" sz="1350" dirty="0"/>
-          </a:p>
-        </p:txBody>
-      </p:sp>
-      <p:sp>
-        <p:nvSpPr>
-          <p:cNvPr id="26" name="Shape 24"/>
-          <p:cNvSpPr/>
-          <p:nvPr/>
-        </p:nvSpPr>
-        <p:spPr>
-          <a:xfrm>
-            <a:off x="822960" y="5925312"/>
-            <a:ext cx="310896" cy="310896"/>
-          </a:xfrm>
-          <a:prstGeom prst="ellipse">
-            <a:avLst/>
-          </a:prstGeom>
-          <a:solidFill>
-            <a:srgbClr val="9AA4AF"/>
-          </a:solidFill>
-          <a:ln w="12700">
-            <a:solidFill>
-              <a:srgbClr val="9AA4AF"/>
-            </a:solidFill>
-            <a:prstDash val="solid"/>
-          </a:ln>
-        </p:spPr>
-      </p:sp>
-      <p:sp>
-        <p:nvSpPr>
-          <p:cNvPr id="27" name="Text 25"/>
-          <p:cNvSpPr/>
-          <p:nvPr/>
-        </p:nvSpPr>
-        <p:spPr>
-          <a:xfrm>
-            <a:off x="1280160" y="6053328"/>
-            <a:ext cx="4663440" cy="402336"/>
-          </a:xfrm>
-          <a:prstGeom prst="rect">
-            <a:avLst/>
-          </a:prstGeom>
-          <a:noFill/>
-          <a:ln/>
-        </p:spPr>
-        <p:txBody>
-          <a:bodyPr wrap="square" lIns="0" tIns="0" rIns="0" bIns="0" rtlCol="0" anchor="ctr"/>
-          <a:lstStyle/>
-          <a:p>
-            <a:pPr indent="0" marL="0">
-              <a:lnSpc>
-                <a:spcPts val="1400"/>
-              </a:lnSpc>
-              <a:buNone/>
-            </a:pPr>
-            <a:r>
-              <a:rPr lang="en-US" sz="1100" dirty="0">
-                <a:solidFill>
-                  <a:srgbClr val="9AA4AF"/>
-                </a:solidFill>
-                <a:latin typeface="Calibri" pitchFamily="34" charset="0"/>
-                <a:ea typeface="Calibri" pitchFamily="34" charset="-122"/>
-                <a:cs typeface="Calibri" pitchFamily="34" charset="-120"/>
-              </a:rPr>
-              <a:t>Brief pop-ups at the bottom of the screen.</a:t>
-            </a:r>
-            <a:endParaRPr lang="en-US" sz="1100" dirty="0"/>
-          </a:p>
-        </p:txBody>
-      </p:sp>
-      <p:sp>
-        <p:nvSpPr>
-          <p:cNvPr id="28" name="Text 26"/>
-          <p:cNvSpPr/>
-          <p:nvPr/>
-        </p:nvSpPr>
-        <p:spPr>
-          <a:xfrm>
-            <a:off x="6236208" y="5742432"/>
-            <a:ext cx="5120640" cy="731520"/>
-          </a:xfrm>
-          <a:prstGeom prst="rect">
-            <a:avLst/>
-          </a:prstGeom>
-          <a:noFill/>
-          <a:ln/>
-        </p:spPr>
-        <p:txBody>
-          <a:bodyPr wrap="square" lIns="0" tIns="0" rIns="0" bIns="0" rtlCol="0" anchor="ctr"/>
-          <a:lstStyle/>
-          <a:p>
-            <a:pPr indent="0" marL="0">
-              <a:lnSpc>
-                <a:spcPts val="1500"/>
-              </a:lnSpc>
-              <a:buNone/>
-            </a:pPr>
-            <a:r>
-              <a:rPr lang="en-US" sz="1150" dirty="0">
-                <a:solidFill>
-                  <a:srgbClr val="E6EDF3"/>
-                </a:solidFill>
-                <a:latin typeface="Calibri" pitchFamily="34" charset="0"/>
-                <a:ea typeface="Calibri" pitchFamily="34" charset="-122"/>
-                <a:cs typeface="Calibri" pitchFamily="34" charset="-120"/>
-              </a:rPr>
-              <a:t>They confirm a save or explain a refusal, then fade. If one disappears before you read it, the same information is on the Check CE panel or the banner.</a:t>
-            </a:r>
-            <a:endParaRPr lang="en-US" sz="1150" dirty="0"/>
-          </a:p>
-        </p:txBody>
-      </p:sp>
-      <p:sp>
-        <p:nvSpPr>
-          <p:cNvPr id="29" name="Text 27"/>
-          <p:cNvSpPr/>
-          <p:nvPr/>
-        </p:nvSpPr>
-        <p:spPr>
-          <a:xfrm>
-            <a:off x="566928" y="6437376"/>
-            <a:ext cx="5486400" cy="237744"/>
-          </a:xfrm>
-          <a:prstGeom prst="rect">
-            <a:avLst/>
-          </a:prstGeom>
-          <a:noFill/>
-          <a:ln/>
-        </p:spPr>
-        <p:txBody>
-          <a:bodyPr wrap="square" lIns="0" tIns="0" rIns="0" bIns="0" rtlCol="0" anchor="ctr"/>
-          <a:lstStyle/>
-          <a:p>
-            <a:pPr indent="0" marL="0">
-              <a:buNone/>
-            </a:pPr>
-            <a:r>
-              <a:rPr lang="en-US" sz="900" dirty="0">
-                <a:solidFill>
-                  <a:srgbClr val="6E7681"/>
-                </a:solidFill>
-                <a:latin typeface="Calibri" pitchFamily="34" charset="0"/>
-                <a:ea typeface="Calibri" pitchFamily="34" charset="-122"/>
-                <a:cs typeface="Calibri" pitchFamily="34" charset="-120"/>
-              </a:rPr>
-              <a:t>SHIC Cost Estimator — End-User Manual</a:t>
-            </a:r>
-            <a:endParaRPr lang="en-US" sz="900" dirty="0"/>
-          </a:p>
-        </p:txBody>
-      </p:sp>
-      <p:sp>
-        <p:nvSpPr>
-          <p:cNvPr id="30" name="Text 28"/>
           <p:cNvSpPr/>
           <p:nvPr/>
         </p:nvSpPr>
@@ -16818,6 +17175,1104 @@
 
 <file path=ppt/slides/slide20.xml><?xml version="1.0" encoding="utf-8"?>
 <p:sld xmlns:a="http://schemas.openxmlformats.org/drawingml/2006/main" xmlns:r="http://schemas.openxmlformats.org/officeDocument/2006/relationships" xmlns:p="http://schemas.openxmlformats.org/presentationml/2006/main">
+  <p:cSld name="Slide 19">
+    <p:bg>
+      <p:bgPr>
+        <a:solidFill>
+          <a:srgbClr val="161B22"/>
+        </a:solidFill>
+      </p:bgPr>
+    </p:bg>
+    <p:spTree>
+      <p:nvGrpSpPr>
+        <p:cNvPr id="1" name=""/>
+        <p:cNvGrpSpPr/>
+        <p:nvPr/>
+      </p:nvGrpSpPr>
+      <p:grpSpPr>
+        <a:xfrm>
+          <a:off x="0" y="0"/>
+          <a:ext cx="0" cy="0"/>
+          <a:chOff x="0" y="0"/>
+          <a:chExt cx="0" cy="0"/>
+        </a:xfrm>
+      </p:grpSpPr>
+      <p:sp>
+        <p:nvSpPr>
+          <p:cNvPr id="2" name="Text 0"/>
+          <p:cNvSpPr/>
+          <p:nvPr/>
+        </p:nvSpPr>
+        <p:spPr>
+          <a:xfrm>
+            <a:off x="566928" y="384048"/>
+            <a:ext cx="8229600" cy="256032"/>
+          </a:xfrm>
+          <a:prstGeom prst="rect">
+            <a:avLst/>
+          </a:prstGeom>
+          <a:noFill/>
+          <a:ln/>
+        </p:spPr>
+        <p:txBody>
+          <a:bodyPr wrap="square" lIns="0" tIns="0" rIns="0" bIns="0" rtlCol="0" anchor="ctr"/>
+          <a:lstStyle/>
+          <a:p>
+            <a:pPr indent="0" marL="0">
+              <a:buNone/>
+            </a:pPr>
+            <a:r>
+              <a:rPr lang="en-US" sz="1100" b="1" spc="200" kern="0" dirty="0">
+                <a:solidFill>
+                  <a:srgbClr val="F0A429"/>
+                </a:solidFill>
+                <a:latin typeface="Arial" pitchFamily="34" charset="0"/>
+                <a:ea typeface="Arial" pitchFamily="34" charset="-122"/>
+                <a:cs typeface="Arial" pitchFamily="34" charset="-120"/>
+              </a:rPr>
+              <a:t>TROUBLESHOOTING</a:t>
+            </a:r>
+            <a:endParaRPr lang="en-US" sz="1100" dirty="0"/>
+          </a:p>
+        </p:txBody>
+      </p:sp>
+      <p:sp>
+        <p:nvSpPr>
+          <p:cNvPr id="3" name="Text 1"/>
+          <p:cNvSpPr/>
+          <p:nvPr/>
+        </p:nvSpPr>
+        <p:spPr>
+          <a:xfrm>
+            <a:off x="566928" y="694944"/>
+            <a:ext cx="11055096" cy="566928"/>
+          </a:xfrm>
+          <a:prstGeom prst="rect">
+            <a:avLst/>
+          </a:prstGeom>
+          <a:noFill/>
+          <a:ln/>
+        </p:spPr>
+        <p:txBody>
+          <a:bodyPr wrap="square" lIns="0" tIns="0" rIns="0" bIns="0" rtlCol="0" anchor="ctr"/>
+          <a:lstStyle/>
+          <a:p>
+            <a:pPr indent="0" marL="0">
+              <a:buNone/>
+            </a:pPr>
+            <a:r>
+              <a:rPr lang="en-US" sz="3200" b="1" dirty="0">
+                <a:solidFill>
+                  <a:srgbClr val="E6EDF3"/>
+                </a:solidFill>
+                <a:latin typeface="Arial" pitchFamily="34" charset="0"/>
+                <a:ea typeface="Arial" pitchFamily="34" charset="-122"/>
+                <a:cs typeface="Arial" pitchFamily="34" charset="-120"/>
+              </a:rPr>
+              <a:t>Messages you may see</a:t>
+            </a:r>
+            <a:endParaRPr lang="en-US" sz="3200" dirty="0"/>
+          </a:p>
+        </p:txBody>
+      </p:sp>
+      <p:sp>
+        <p:nvSpPr>
+          <p:cNvPr id="4" name="Shape 2"/>
+          <p:cNvSpPr/>
+          <p:nvPr/>
+        </p:nvSpPr>
+        <p:spPr>
+          <a:xfrm>
+            <a:off x="566928" y="1408176"/>
+            <a:ext cx="11055096" cy="914400"/>
+          </a:xfrm>
+          <a:prstGeom prst="roundRect">
+            <a:avLst>
+              <a:gd name="adj" fmla="val 8000"/>
+            </a:avLst>
+          </a:prstGeom>
+          <a:solidFill>
+            <a:srgbClr val="161B22"/>
+          </a:solidFill>
+          <a:ln w="12700">
+            <a:solidFill>
+              <a:srgbClr val="30363D"/>
+            </a:solidFill>
+            <a:prstDash val="solid"/>
+          </a:ln>
+          <a:effectLst>
+            <a:outerShdw sx="100000" sy="100000" kx="0" ky="0" algn="bl" rotWithShape="0" blurRad="152400" dist="38100" dir="5400000">
+              <a:srgbClr val="000000">
+                <a:alpha val="45000"/>
+              </a:srgbClr>
+            </a:outerShdw>
+          </a:effectLst>
+        </p:spPr>
+      </p:sp>
+      <p:sp>
+        <p:nvSpPr>
+          <p:cNvPr id="5" name="Shape 3"/>
+          <p:cNvSpPr/>
+          <p:nvPr/>
+        </p:nvSpPr>
+        <p:spPr>
+          <a:xfrm>
+            <a:off x="822960" y="1700784"/>
+            <a:ext cx="310896" cy="310896"/>
+          </a:xfrm>
+          <a:prstGeom prst="ellipse">
+            <a:avLst/>
+          </a:prstGeom>
+          <a:solidFill>
+            <a:srgbClr val="F0A429"/>
+          </a:solidFill>
+          <a:ln w="12700">
+            <a:solidFill>
+              <a:srgbClr val="F0A429"/>
+            </a:solidFill>
+            <a:prstDash val="solid"/>
+          </a:ln>
+        </p:spPr>
+      </p:sp>
+      <p:sp>
+        <p:nvSpPr>
+          <p:cNvPr id="6" name="Text 4"/>
+          <p:cNvSpPr/>
+          <p:nvPr/>
+        </p:nvSpPr>
+        <p:spPr>
+          <a:xfrm>
+            <a:off x="1280160" y="1517904"/>
+            <a:ext cx="3840480" cy="310896"/>
+          </a:xfrm>
+          <a:prstGeom prst="rect">
+            <a:avLst/>
+          </a:prstGeom>
+          <a:noFill/>
+          <a:ln/>
+        </p:spPr>
+        <p:txBody>
+          <a:bodyPr wrap="square" lIns="0" tIns="0" rIns="0" bIns="0" rtlCol="0" anchor="ctr"/>
+          <a:lstStyle/>
+          <a:p>
+            <a:pPr indent="0" marL="0">
+              <a:buNone/>
+            </a:pPr>
+            <a:r>
+              <a:rPr lang="en-US" sz="1350" b="1" dirty="0">
+                <a:solidFill>
+                  <a:srgbClr val="F0A429"/>
+                </a:solidFill>
+                <a:latin typeface="Arial" pitchFamily="34" charset="0"/>
+                <a:ea typeface="Arial" pitchFamily="34" charset="-122"/>
+                <a:cs typeface="Arial" pitchFamily="34" charset="-120"/>
+              </a:rPr>
+              <a:t>SharePoint session expired</a:t>
+            </a:r>
+            <a:endParaRPr lang="en-US" sz="1350" dirty="0"/>
+          </a:p>
+        </p:txBody>
+      </p:sp>
+      <p:sp>
+        <p:nvSpPr>
+          <p:cNvPr id="7" name="Text 5"/>
+          <p:cNvSpPr/>
+          <p:nvPr/>
+        </p:nvSpPr>
+        <p:spPr>
+          <a:xfrm>
+            <a:off x="1280160" y="1847088"/>
+            <a:ext cx="4663440" cy="402336"/>
+          </a:xfrm>
+          <a:prstGeom prst="rect">
+            <a:avLst/>
+          </a:prstGeom>
+          <a:noFill/>
+          <a:ln/>
+        </p:spPr>
+        <p:txBody>
+          <a:bodyPr wrap="square" lIns="0" tIns="0" rIns="0" bIns="0" rtlCol="0" anchor="ctr"/>
+          <a:lstStyle/>
+          <a:p>
+            <a:pPr indent="0" marL="0">
+              <a:lnSpc>
+                <a:spcPts val="1400"/>
+              </a:lnSpc>
+              <a:buNone/>
+            </a:pPr>
+            <a:r>
+              <a:rPr lang="en-US" sz="1100" dirty="0">
+                <a:solidFill>
+                  <a:srgbClr val="9AA4AF"/>
+                </a:solidFill>
+                <a:latin typeface="Calibri" pitchFamily="34" charset="0"/>
+                <a:ea typeface="Calibri" pitchFamily="34" charset="-122"/>
+                <a:cs typeface="Calibri" pitchFamily="34" charset="-120"/>
+              </a:rPr>
+              <a:t>Your sign-in timed out. Work is kept on this device.</a:t>
+            </a:r>
+            <a:endParaRPr lang="en-US" sz="1100" dirty="0"/>
+          </a:p>
+        </p:txBody>
+      </p:sp>
+      <p:sp>
+        <p:nvSpPr>
+          <p:cNvPr id="8" name="Text 6"/>
+          <p:cNvSpPr/>
+          <p:nvPr/>
+        </p:nvSpPr>
+        <p:spPr>
+          <a:xfrm>
+            <a:off x="6236208" y="1517904"/>
+            <a:ext cx="5120640" cy="731520"/>
+          </a:xfrm>
+          <a:prstGeom prst="rect">
+            <a:avLst/>
+          </a:prstGeom>
+          <a:noFill/>
+          <a:ln/>
+        </p:spPr>
+        <p:txBody>
+          <a:bodyPr wrap="square" lIns="0" tIns="0" rIns="0" bIns="0" rtlCol="0" anchor="ctr"/>
+          <a:lstStyle/>
+          <a:p>
+            <a:pPr indent="0" marL="0">
+              <a:lnSpc>
+                <a:spcPts val="1500"/>
+              </a:lnSpc>
+              <a:buNone/>
+            </a:pPr>
+            <a:r>
+              <a:rPr lang="en-US" sz="1150" dirty="0">
+                <a:solidFill>
+                  <a:srgbClr val="E6EDF3"/>
+                </a:solidFill>
+                <a:latin typeface="Calibri" pitchFamily="34" charset="0"/>
+                <a:ea typeface="Calibri" pitchFamily="34" charset="-122"/>
+                <a:cs typeface="Calibri" pitchFamily="34" charset="-120"/>
+              </a:rPr>
+              <a:t>Press Sign in on the banner.</a:t>
+            </a:r>
+            <a:endParaRPr lang="en-US" sz="1150" dirty="0"/>
+          </a:p>
+        </p:txBody>
+      </p:sp>
+      <p:sp>
+        <p:nvSpPr>
+          <p:cNvPr id="9" name="Shape 7"/>
+          <p:cNvSpPr/>
+          <p:nvPr/>
+        </p:nvSpPr>
+        <p:spPr>
+          <a:xfrm>
+            <a:off x="566928" y="2450592"/>
+            <a:ext cx="11055096" cy="914400"/>
+          </a:xfrm>
+          <a:prstGeom prst="roundRect">
+            <a:avLst>
+              <a:gd name="adj" fmla="val 8000"/>
+            </a:avLst>
+          </a:prstGeom>
+          <a:solidFill>
+            <a:srgbClr val="161B22"/>
+          </a:solidFill>
+          <a:ln w="12700">
+            <a:solidFill>
+              <a:srgbClr val="30363D"/>
+            </a:solidFill>
+            <a:prstDash val="solid"/>
+          </a:ln>
+          <a:effectLst>
+            <a:outerShdw sx="100000" sy="100000" kx="0" ky="0" algn="bl" rotWithShape="0" blurRad="152400" dist="38100" dir="5400000">
+              <a:srgbClr val="000000">
+                <a:alpha val="45000"/>
+              </a:srgbClr>
+            </a:outerShdw>
+          </a:effectLst>
+        </p:spPr>
+      </p:sp>
+      <p:sp>
+        <p:nvSpPr>
+          <p:cNvPr id="10" name="Shape 8"/>
+          <p:cNvSpPr/>
+          <p:nvPr/>
+        </p:nvSpPr>
+        <p:spPr>
+          <a:xfrm>
+            <a:off x="822960" y="2743200"/>
+            <a:ext cx="310896" cy="310896"/>
+          </a:xfrm>
+          <a:prstGeom prst="ellipse">
+            <a:avLst/>
+          </a:prstGeom>
+          <a:solidFill>
+            <a:srgbClr val="F85149"/>
+          </a:solidFill>
+          <a:ln w="12700">
+            <a:solidFill>
+              <a:srgbClr val="F85149"/>
+            </a:solidFill>
+            <a:prstDash val="solid"/>
+          </a:ln>
+        </p:spPr>
+      </p:sp>
+      <p:sp>
+        <p:nvSpPr>
+          <p:cNvPr id="11" name="Text 9"/>
+          <p:cNvSpPr/>
+          <p:nvPr/>
+        </p:nvSpPr>
+        <p:spPr>
+          <a:xfrm>
+            <a:off x="1280160" y="2560320"/>
+            <a:ext cx="3840480" cy="310896"/>
+          </a:xfrm>
+          <a:prstGeom prst="rect">
+            <a:avLst/>
+          </a:prstGeom>
+          <a:noFill/>
+          <a:ln/>
+        </p:spPr>
+        <p:txBody>
+          <a:bodyPr wrap="square" lIns="0" tIns="0" rIns="0" bIns="0" rtlCol="0" anchor="ctr"/>
+          <a:lstStyle/>
+          <a:p>
+            <a:pPr indent="0" marL="0">
+              <a:buNone/>
+            </a:pPr>
+            <a:r>
+              <a:rPr lang="en-US" sz="1350" b="1" dirty="0">
+                <a:solidFill>
+                  <a:srgbClr val="F85149"/>
+                </a:solidFill>
+                <a:latin typeface="Arial" pitchFamily="34" charset="0"/>
+                <a:ea typeface="Arial" pitchFamily="34" charset="-122"/>
+                <a:cs typeface="Arial" pitchFamily="34" charset="-120"/>
+              </a:rPr>
+              <a:t>SharePoint denied access</a:t>
+            </a:r>
+            <a:endParaRPr lang="en-US" sz="1350" dirty="0"/>
+          </a:p>
+        </p:txBody>
+      </p:sp>
+      <p:sp>
+        <p:nvSpPr>
+          <p:cNvPr id="12" name="Text 10"/>
+          <p:cNvSpPr/>
+          <p:nvPr/>
+        </p:nvSpPr>
+        <p:spPr>
+          <a:xfrm>
+            <a:off x="1280160" y="2889504"/>
+            <a:ext cx="4663440" cy="402336"/>
+          </a:xfrm>
+          <a:prstGeom prst="rect">
+            <a:avLst/>
+          </a:prstGeom>
+          <a:noFill/>
+          <a:ln/>
+        </p:spPr>
+        <p:txBody>
+          <a:bodyPr wrap="square" lIns="0" tIns="0" rIns="0" bIns="0" rtlCol="0" anchor="ctr"/>
+          <a:lstStyle/>
+          <a:p>
+            <a:pPr indent="0" marL="0">
+              <a:lnSpc>
+                <a:spcPts val="1400"/>
+              </a:lnSpc>
+              <a:buNone/>
+            </a:pPr>
+            <a:r>
+              <a:rPr lang="en-US" sz="1100" dirty="0">
+                <a:solidFill>
+                  <a:srgbClr val="9AA4AF"/>
+                </a:solidFill>
+                <a:latin typeface="Calibri" pitchFamily="34" charset="0"/>
+                <a:ea typeface="Calibri" pitchFamily="34" charset="-122"/>
+                <a:cs typeface="Calibri" pitchFamily="34" charset="-120"/>
+              </a:rPr>
+              <a:t>Your account cannot use one of the lists, so changes are not reaching the team.</a:t>
+            </a:r>
+            <a:endParaRPr lang="en-US" sz="1100" dirty="0"/>
+          </a:p>
+        </p:txBody>
+      </p:sp>
+      <p:sp>
+        <p:nvSpPr>
+          <p:cNvPr id="13" name="Text 11"/>
+          <p:cNvSpPr/>
+          <p:nvPr/>
+        </p:nvSpPr>
+        <p:spPr>
+          <a:xfrm>
+            <a:off x="6236208" y="2560320"/>
+            <a:ext cx="5120640" cy="731520"/>
+          </a:xfrm>
+          <a:prstGeom prst="rect">
+            <a:avLst/>
+          </a:prstGeom>
+          <a:noFill/>
+          <a:ln/>
+        </p:spPr>
+        <p:txBody>
+          <a:bodyPr wrap="square" lIns="0" tIns="0" rIns="0" bIns="0" rtlCol="0" anchor="ctr"/>
+          <a:lstStyle/>
+          <a:p>
+            <a:pPr indent="0" marL="0">
+              <a:lnSpc>
+                <a:spcPts val="1500"/>
+              </a:lnSpc>
+              <a:buNone/>
+            </a:pPr>
+            <a:r>
+              <a:rPr lang="en-US" sz="1150" dirty="0">
+                <a:solidFill>
+                  <a:srgbClr val="E6EDF3"/>
+                </a:solidFill>
+                <a:latin typeface="Calibri" pitchFamily="34" charset="0"/>
+                <a:ea typeface="Calibri" pitchFamily="34" charset="-122"/>
+                <a:cs typeface="Calibri" pitchFamily="34" charset="-120"/>
+              </a:rPr>
+              <a:t>Signing in again will NOT help. Send the message to your admin — they must grant access.</a:t>
+            </a:r>
+            <a:endParaRPr lang="en-US" sz="1150" dirty="0"/>
+          </a:p>
+        </p:txBody>
+      </p:sp>
+      <p:sp>
+        <p:nvSpPr>
+          <p:cNvPr id="14" name="Shape 12"/>
+          <p:cNvSpPr/>
+          <p:nvPr/>
+        </p:nvSpPr>
+        <p:spPr>
+          <a:xfrm>
+            <a:off x="566928" y="3493008"/>
+            <a:ext cx="11055096" cy="914400"/>
+          </a:xfrm>
+          <a:prstGeom prst="roundRect">
+            <a:avLst>
+              <a:gd name="adj" fmla="val 8000"/>
+            </a:avLst>
+          </a:prstGeom>
+          <a:solidFill>
+            <a:srgbClr val="161B22"/>
+          </a:solidFill>
+          <a:ln w="12700">
+            <a:solidFill>
+              <a:srgbClr val="30363D"/>
+            </a:solidFill>
+            <a:prstDash val="solid"/>
+          </a:ln>
+          <a:effectLst>
+            <a:outerShdw sx="100000" sy="100000" kx="0" ky="0" algn="bl" rotWithShape="0" blurRad="152400" dist="38100" dir="5400000">
+              <a:srgbClr val="000000">
+                <a:alpha val="45000"/>
+              </a:srgbClr>
+            </a:outerShdw>
+          </a:effectLst>
+        </p:spPr>
+      </p:sp>
+      <p:sp>
+        <p:nvSpPr>
+          <p:cNvPr id="15" name="Shape 13"/>
+          <p:cNvSpPr/>
+          <p:nvPr/>
+        </p:nvSpPr>
+        <p:spPr>
+          <a:xfrm>
+            <a:off x="822960" y="3785616"/>
+            <a:ext cx="310896" cy="310896"/>
+          </a:xfrm>
+          <a:prstGeom prst="ellipse">
+            <a:avLst/>
+          </a:prstGeom>
+          <a:solidFill>
+            <a:srgbClr val="F85149"/>
+          </a:solidFill>
+          <a:ln w="12700">
+            <a:solidFill>
+              <a:srgbClr val="F85149"/>
+            </a:solidFill>
+            <a:prstDash val="solid"/>
+          </a:ln>
+        </p:spPr>
+      </p:sp>
+      <p:sp>
+        <p:nvSpPr>
+          <p:cNvPr id="16" name="Text 14"/>
+          <p:cNvSpPr/>
+          <p:nvPr/>
+        </p:nvSpPr>
+        <p:spPr>
+          <a:xfrm>
+            <a:off x="1280160" y="3602736"/>
+            <a:ext cx="3840480" cy="310896"/>
+          </a:xfrm>
+          <a:prstGeom prst="rect">
+            <a:avLst/>
+          </a:prstGeom>
+          <a:noFill/>
+          <a:ln/>
+        </p:spPr>
+        <p:txBody>
+          <a:bodyPr wrap="square" lIns="0" tIns="0" rIns="0" bIns="0" rtlCol="0" anchor="ctr"/>
+          <a:lstStyle/>
+          <a:p>
+            <a:pPr indent="0" marL="0">
+              <a:buNone/>
+            </a:pPr>
+            <a:r>
+              <a:rPr lang="en-US" sz="1350" b="1" dirty="0">
+                <a:solidFill>
+                  <a:srgbClr val="F85149"/>
+                </a:solidFill>
+                <a:latin typeface="Arial" pitchFamily="34" charset="0"/>
+                <a:ea typeface="Arial" pitchFamily="34" charset="-122"/>
+                <a:cs typeface="Arial" pitchFamily="34" charset="-120"/>
+              </a:rPr>
+              <a:t>⚠ Bulk upload mode</a:t>
+            </a:r>
+            <a:endParaRPr lang="en-US" sz="1350" dirty="0"/>
+          </a:p>
+        </p:txBody>
+      </p:sp>
+      <p:sp>
+        <p:nvSpPr>
+          <p:cNvPr id="17" name="Text 15"/>
+          <p:cNvSpPr/>
+          <p:nvPr/>
+        </p:nvSpPr>
+        <p:spPr>
+          <a:xfrm>
+            <a:off x="1280160" y="3931920"/>
+            <a:ext cx="4663440" cy="402336"/>
+          </a:xfrm>
+          <a:prstGeom prst="rect">
+            <a:avLst/>
+          </a:prstGeom>
+          <a:noFill/>
+          <a:ln/>
+        </p:spPr>
+        <p:txBody>
+          <a:bodyPr wrap="square" lIns="0" tIns="0" rIns="0" bIns="0" rtlCol="0" anchor="ctr"/>
+          <a:lstStyle/>
+          <a:p>
+            <a:pPr indent="0" marL="0">
+              <a:lnSpc>
+                <a:spcPts val="1400"/>
+              </a:lnSpc>
+              <a:buNone/>
+            </a:pPr>
+            <a:r>
+              <a:rPr lang="en-US" sz="1100" dirty="0">
+                <a:solidFill>
+                  <a:srgbClr val="9AA4AF"/>
+                </a:solidFill>
+                <a:latin typeface="Calibri" pitchFamily="34" charset="0"/>
+                <a:ea typeface="Calibri" pitchFamily="34" charset="-122"/>
+                <a:cs typeface="Calibri" pitchFamily="34" charset="-120"/>
+              </a:rPr>
+              <a:t>An admin switched off duplicate-number protection to load old CEs.</a:t>
+            </a:r>
+            <a:endParaRPr lang="en-US" sz="1100" dirty="0"/>
+          </a:p>
+        </p:txBody>
+      </p:sp>
+      <p:sp>
+        <p:nvSpPr>
+          <p:cNvPr id="18" name="Text 16"/>
+          <p:cNvSpPr/>
+          <p:nvPr/>
+        </p:nvSpPr>
+        <p:spPr>
+          <a:xfrm>
+            <a:off x="6236208" y="3602736"/>
+            <a:ext cx="5120640" cy="731520"/>
+          </a:xfrm>
+          <a:prstGeom prst="rect">
+            <a:avLst/>
+          </a:prstGeom>
+          <a:noFill/>
+          <a:ln/>
+        </p:spPr>
+        <p:txBody>
+          <a:bodyPr wrap="square" lIns="0" tIns="0" rIns="0" bIns="0" rtlCol="0" anchor="ctr"/>
+          <a:lstStyle/>
+          <a:p>
+            <a:pPr indent="0" marL="0">
+              <a:lnSpc>
+                <a:spcPts val="1500"/>
+              </a:lnSpc>
+              <a:buNone/>
+            </a:pPr>
+            <a:r>
+              <a:rPr lang="en-US" sz="1150" dirty="0">
+                <a:solidFill>
+                  <a:srgbClr val="E6EDF3"/>
+                </a:solidFill>
+                <a:latin typeface="Calibri" pitchFamily="34" charset="0"/>
+                <a:ea typeface="Calibri" pitchFamily="34" charset="-122"/>
+                <a:cs typeface="Calibri" pitchFamily="34" charset="-120"/>
+              </a:rPr>
+              <a:t>While it shows, saving an existing CE Number overwrites that CE. Take care.</a:t>
+            </a:r>
+            <a:endParaRPr lang="en-US" sz="1150" dirty="0"/>
+          </a:p>
+        </p:txBody>
+      </p:sp>
+      <p:sp>
+        <p:nvSpPr>
+          <p:cNvPr id="19" name="Shape 17"/>
+          <p:cNvSpPr/>
+          <p:nvPr/>
+        </p:nvSpPr>
+        <p:spPr>
+          <a:xfrm>
+            <a:off x="566928" y="4535424"/>
+            <a:ext cx="11055096" cy="914400"/>
+          </a:xfrm>
+          <a:prstGeom prst="roundRect">
+            <a:avLst>
+              <a:gd name="adj" fmla="val 8000"/>
+            </a:avLst>
+          </a:prstGeom>
+          <a:solidFill>
+            <a:srgbClr val="161B22"/>
+          </a:solidFill>
+          <a:ln w="12700">
+            <a:solidFill>
+              <a:srgbClr val="30363D"/>
+            </a:solidFill>
+            <a:prstDash val="solid"/>
+          </a:ln>
+          <a:effectLst>
+            <a:outerShdw sx="100000" sy="100000" kx="0" ky="0" algn="bl" rotWithShape="0" blurRad="152400" dist="38100" dir="5400000">
+              <a:srgbClr val="000000">
+                <a:alpha val="45000"/>
+              </a:srgbClr>
+            </a:outerShdw>
+          </a:effectLst>
+        </p:spPr>
+      </p:sp>
+      <p:sp>
+        <p:nvSpPr>
+          <p:cNvPr id="20" name="Shape 18"/>
+          <p:cNvSpPr/>
+          <p:nvPr/>
+        </p:nvSpPr>
+        <p:spPr>
+          <a:xfrm>
+            <a:off x="822960" y="4828032"/>
+            <a:ext cx="310896" cy="310896"/>
+          </a:xfrm>
+          <a:prstGeom prst="ellipse">
+            <a:avLst/>
+          </a:prstGeom>
+          <a:solidFill>
+            <a:srgbClr val="58A6FF"/>
+          </a:solidFill>
+          <a:ln w="12700">
+            <a:solidFill>
+              <a:srgbClr val="58A6FF"/>
+            </a:solidFill>
+            <a:prstDash val="solid"/>
+          </a:ln>
+        </p:spPr>
+      </p:sp>
+      <p:sp>
+        <p:nvSpPr>
+          <p:cNvPr id="21" name="Text 19"/>
+          <p:cNvSpPr/>
+          <p:nvPr/>
+        </p:nvSpPr>
+        <p:spPr>
+          <a:xfrm>
+            <a:off x="1280160" y="4645152"/>
+            <a:ext cx="3840480" cy="310896"/>
+          </a:xfrm>
+          <a:prstGeom prst="rect">
+            <a:avLst/>
+          </a:prstGeom>
+          <a:noFill/>
+          <a:ln/>
+        </p:spPr>
+        <p:txBody>
+          <a:bodyPr wrap="square" lIns="0" tIns="0" rIns="0" bIns="0" rtlCol="0" anchor="ctr"/>
+          <a:lstStyle/>
+          <a:p>
+            <a:pPr indent="0" marL="0">
+              <a:buNone/>
+            </a:pPr>
+            <a:r>
+              <a:rPr lang="en-US" sz="1350" b="1" dirty="0">
+                <a:solidFill>
+                  <a:srgbClr val="58A6FF"/>
+                </a:solidFill>
+                <a:latin typeface="Arial" pitchFamily="34" charset="0"/>
+                <a:ea typeface="Arial" pitchFamily="34" charset="-122"/>
+                <a:cs typeface="Arial" pitchFamily="34" charset="-120"/>
+              </a:rPr>
+              <a:t>⚠ Saved to THIS BROWSER only</a:t>
+            </a:r>
+            <a:endParaRPr lang="en-US" sz="1350" dirty="0"/>
+          </a:p>
+        </p:txBody>
+      </p:sp>
+      <p:sp>
+        <p:nvSpPr>
+          <p:cNvPr id="22" name="Text 20"/>
+          <p:cNvSpPr/>
+          <p:nvPr/>
+        </p:nvSpPr>
+        <p:spPr>
+          <a:xfrm>
+            <a:off x="1280160" y="4974336"/>
+            <a:ext cx="4663440" cy="402336"/>
+          </a:xfrm>
+          <a:prstGeom prst="rect">
+            <a:avLst/>
+          </a:prstGeom>
+          <a:noFill/>
+          <a:ln/>
+        </p:spPr>
+        <p:txBody>
+          <a:bodyPr wrap="square" lIns="0" tIns="0" rIns="0" bIns="0" rtlCol="0" anchor="ctr"/>
+          <a:lstStyle/>
+          <a:p>
+            <a:pPr indent="0" marL="0">
+              <a:lnSpc>
+                <a:spcPts val="1400"/>
+              </a:lnSpc>
+              <a:buNone/>
+            </a:pPr>
+            <a:r>
+              <a:rPr lang="en-US" sz="1100" dirty="0">
+                <a:solidFill>
+                  <a:srgbClr val="9AA4AF"/>
+                </a:solidFill>
+                <a:latin typeface="Calibri" pitchFamily="34" charset="0"/>
+                <a:ea typeface="Calibri" pitchFamily="34" charset="-122"/>
+                <a:cs typeface="Calibri" pitchFamily="34" charset="-120"/>
+              </a:rPr>
+              <a:t>The CE is safe here but has not reached SharePoint, so nobody else can open it.</a:t>
+            </a:r>
+            <a:endParaRPr lang="en-US" sz="1100" dirty="0"/>
+          </a:p>
+        </p:txBody>
+      </p:sp>
+      <p:sp>
+        <p:nvSpPr>
+          <p:cNvPr id="23" name="Text 21"/>
+          <p:cNvSpPr/>
+          <p:nvPr/>
+        </p:nvSpPr>
+        <p:spPr>
+          <a:xfrm>
+            <a:off x="6236208" y="4645152"/>
+            <a:ext cx="5120640" cy="731520"/>
+          </a:xfrm>
+          <a:prstGeom prst="rect">
+            <a:avLst/>
+          </a:prstGeom>
+          <a:noFill/>
+          <a:ln/>
+        </p:spPr>
+        <p:txBody>
+          <a:bodyPr wrap="square" lIns="0" tIns="0" rIns="0" bIns="0" rtlCol="0" anchor="ctr"/>
+          <a:lstStyle/>
+          <a:p>
+            <a:pPr indent="0" marL="0">
+              <a:lnSpc>
+                <a:spcPts val="1500"/>
+              </a:lnSpc>
+              <a:buNone/>
+            </a:pPr>
+            <a:r>
+              <a:rPr lang="en-US" sz="1150" dirty="0">
+                <a:solidFill>
+                  <a:srgbClr val="E6EDF3"/>
+                </a:solidFill>
+                <a:latin typeface="Calibri" pitchFamily="34" charset="0"/>
+                <a:ea typeface="Calibri" pitchFamily="34" charset="-122"/>
+                <a:cs typeface="Calibri" pitchFamily="34" charset="-120"/>
+              </a:rPr>
+              <a:t>Run Push All Local Data to SharePoint from the Users tab.</a:t>
+            </a:r>
+            <a:endParaRPr lang="en-US" sz="1150" dirty="0"/>
+          </a:p>
+        </p:txBody>
+      </p:sp>
+      <p:sp>
+        <p:nvSpPr>
+          <p:cNvPr id="24" name="Shape 22"/>
+          <p:cNvSpPr/>
+          <p:nvPr/>
+        </p:nvSpPr>
+        <p:spPr>
+          <a:xfrm>
+            <a:off x="566928" y="5632704"/>
+            <a:ext cx="11055096" cy="914400"/>
+          </a:xfrm>
+          <a:prstGeom prst="roundRect">
+            <a:avLst>
+              <a:gd name="adj" fmla="val 8000"/>
+            </a:avLst>
+          </a:prstGeom>
+          <a:solidFill>
+            <a:srgbClr val="1C2128"/>
+          </a:solidFill>
+          <a:ln w="12700">
+            <a:solidFill>
+              <a:srgbClr val="30363D"/>
+            </a:solidFill>
+            <a:prstDash val="solid"/>
+          </a:ln>
+          <a:effectLst>
+            <a:outerShdw sx="100000" sy="100000" kx="0" ky="0" algn="bl" rotWithShape="0" blurRad="152400" dist="38100" dir="5400000">
+              <a:srgbClr val="000000">
+                <a:alpha val="45000"/>
+              </a:srgbClr>
+            </a:outerShdw>
+          </a:effectLst>
+        </p:spPr>
+      </p:sp>
+      <p:sp>
+        <p:nvSpPr>
+          <p:cNvPr id="25" name="Text 23"/>
+          <p:cNvSpPr/>
+          <p:nvPr/>
+        </p:nvSpPr>
+        <p:spPr>
+          <a:xfrm>
+            <a:off x="1280160" y="5742432"/>
+            <a:ext cx="3840480" cy="274320"/>
+          </a:xfrm>
+          <a:prstGeom prst="rect">
+            <a:avLst/>
+          </a:prstGeom>
+          <a:noFill/>
+          <a:ln/>
+        </p:spPr>
+        <p:txBody>
+          <a:bodyPr wrap="square" lIns="0" tIns="0" rIns="0" bIns="0" rtlCol="0" anchor="ctr"/>
+          <a:lstStyle/>
+          <a:p>
+            <a:pPr indent="0" marL="0">
+              <a:buNone/>
+            </a:pPr>
+            <a:r>
+              <a:rPr lang="en-US" sz="1350" b="1" dirty="0">
+                <a:solidFill>
+                  <a:srgbClr val="E6EDF3"/>
+                </a:solidFill>
+                <a:latin typeface="Arial" pitchFamily="34" charset="0"/>
+                <a:ea typeface="Arial" pitchFamily="34" charset="-122"/>
+                <a:cs typeface="Arial" pitchFamily="34" charset="-120"/>
+              </a:rPr>
+              <a:t>Toasts</a:t>
+            </a:r>
+            <a:endParaRPr lang="en-US" sz="1350" dirty="0"/>
+          </a:p>
+        </p:txBody>
+      </p:sp>
+      <p:sp>
+        <p:nvSpPr>
+          <p:cNvPr id="26" name="Shape 24"/>
+          <p:cNvSpPr/>
+          <p:nvPr/>
+        </p:nvSpPr>
+        <p:spPr>
+          <a:xfrm>
+            <a:off x="822960" y="5925312"/>
+            <a:ext cx="310896" cy="310896"/>
+          </a:xfrm>
+          <a:prstGeom prst="ellipse">
+            <a:avLst/>
+          </a:prstGeom>
+          <a:solidFill>
+            <a:srgbClr val="9AA4AF"/>
+          </a:solidFill>
+          <a:ln w="12700">
+            <a:solidFill>
+              <a:srgbClr val="9AA4AF"/>
+            </a:solidFill>
+            <a:prstDash val="solid"/>
+          </a:ln>
+        </p:spPr>
+      </p:sp>
+      <p:sp>
+        <p:nvSpPr>
+          <p:cNvPr id="27" name="Text 25"/>
+          <p:cNvSpPr/>
+          <p:nvPr/>
+        </p:nvSpPr>
+        <p:spPr>
+          <a:xfrm>
+            <a:off x="1280160" y="6053328"/>
+            <a:ext cx="4663440" cy="402336"/>
+          </a:xfrm>
+          <a:prstGeom prst="rect">
+            <a:avLst/>
+          </a:prstGeom>
+          <a:noFill/>
+          <a:ln/>
+        </p:spPr>
+        <p:txBody>
+          <a:bodyPr wrap="square" lIns="0" tIns="0" rIns="0" bIns="0" rtlCol="0" anchor="ctr"/>
+          <a:lstStyle/>
+          <a:p>
+            <a:pPr indent="0" marL="0">
+              <a:lnSpc>
+                <a:spcPts val="1400"/>
+              </a:lnSpc>
+              <a:buNone/>
+            </a:pPr>
+            <a:r>
+              <a:rPr lang="en-US" sz="1100" dirty="0">
+                <a:solidFill>
+                  <a:srgbClr val="9AA4AF"/>
+                </a:solidFill>
+                <a:latin typeface="Calibri" pitchFamily="34" charset="0"/>
+                <a:ea typeface="Calibri" pitchFamily="34" charset="-122"/>
+                <a:cs typeface="Calibri" pitchFamily="34" charset="-120"/>
+              </a:rPr>
+              <a:t>Brief pop-ups at the bottom of the screen.</a:t>
+            </a:r>
+            <a:endParaRPr lang="en-US" sz="1100" dirty="0"/>
+          </a:p>
+        </p:txBody>
+      </p:sp>
+      <p:sp>
+        <p:nvSpPr>
+          <p:cNvPr id="28" name="Text 26"/>
+          <p:cNvSpPr/>
+          <p:nvPr/>
+        </p:nvSpPr>
+        <p:spPr>
+          <a:xfrm>
+            <a:off x="6236208" y="5742432"/>
+            <a:ext cx="5120640" cy="731520"/>
+          </a:xfrm>
+          <a:prstGeom prst="rect">
+            <a:avLst/>
+          </a:prstGeom>
+          <a:noFill/>
+          <a:ln/>
+        </p:spPr>
+        <p:txBody>
+          <a:bodyPr wrap="square" lIns="0" tIns="0" rIns="0" bIns="0" rtlCol="0" anchor="ctr"/>
+          <a:lstStyle/>
+          <a:p>
+            <a:pPr indent="0" marL="0">
+              <a:lnSpc>
+                <a:spcPts val="1500"/>
+              </a:lnSpc>
+              <a:buNone/>
+            </a:pPr>
+            <a:r>
+              <a:rPr lang="en-US" sz="1150" dirty="0">
+                <a:solidFill>
+                  <a:srgbClr val="E6EDF3"/>
+                </a:solidFill>
+                <a:latin typeface="Calibri" pitchFamily="34" charset="0"/>
+                <a:ea typeface="Calibri" pitchFamily="34" charset="-122"/>
+                <a:cs typeface="Calibri" pitchFamily="34" charset="-120"/>
+              </a:rPr>
+              <a:t>They confirm a save or explain a refusal, then fade. "SharePoint is throttling this site" means too many requests at once — it clears itself; wait a minute and retry rather than pressing again.</a:t>
+            </a:r>
+            <a:endParaRPr lang="en-US" sz="1150" dirty="0"/>
+          </a:p>
+        </p:txBody>
+      </p:sp>
+      <p:sp>
+        <p:nvSpPr>
+          <p:cNvPr id="29" name="Text 27"/>
+          <p:cNvSpPr/>
+          <p:nvPr/>
+        </p:nvSpPr>
+        <p:spPr>
+          <a:xfrm>
+            <a:off x="566928" y="6437376"/>
+            <a:ext cx="5486400" cy="237744"/>
+          </a:xfrm>
+          <a:prstGeom prst="rect">
+            <a:avLst/>
+          </a:prstGeom>
+          <a:noFill/>
+          <a:ln/>
+        </p:spPr>
+        <p:txBody>
+          <a:bodyPr wrap="square" lIns="0" tIns="0" rIns="0" bIns="0" rtlCol="0" anchor="ctr"/>
+          <a:lstStyle/>
+          <a:p>
+            <a:pPr indent="0" marL="0">
+              <a:buNone/>
+            </a:pPr>
+            <a:r>
+              <a:rPr lang="en-US" sz="900" dirty="0">
+                <a:solidFill>
+                  <a:srgbClr val="6E7681"/>
+                </a:solidFill>
+                <a:latin typeface="Calibri" pitchFamily="34" charset="0"/>
+                <a:ea typeface="Calibri" pitchFamily="34" charset="-122"/>
+                <a:cs typeface="Calibri" pitchFamily="34" charset="-120"/>
+              </a:rPr>
+              <a:t>SHIC Cost Estimator — End-User Manual</a:t>
+            </a:r>
+            <a:endParaRPr lang="en-US" sz="900" dirty="0"/>
+          </a:p>
+        </p:txBody>
+      </p:sp>
+      <p:sp>
+        <p:nvSpPr>
+          <p:cNvPr id="30" name="Text 28"/>
+          <p:cNvSpPr/>
+          <p:nvPr/>
+        </p:nvSpPr>
+        <p:spPr>
+          <a:xfrm>
+            <a:off x="10981944" y="6437376"/>
+            <a:ext cx="640080" cy="237744"/>
+          </a:xfrm>
+          <a:prstGeom prst="rect">
+            <a:avLst/>
+          </a:prstGeom>
+          <a:noFill/>
+          <a:ln/>
+        </p:spPr>
+        <p:txBody>
+          <a:bodyPr wrap="square" lIns="0" tIns="0" rIns="0" bIns="0" rtlCol="0" anchor="ctr"/>
+          <a:lstStyle/>
+          <a:p>
+            <a:pPr algn="r" indent="0" marL="0">
+              <a:buNone/>
+            </a:pPr>
+            <a:r>
+              <a:rPr lang="en-US" sz="900" dirty="0">
+                <a:solidFill>
+                  <a:srgbClr val="6E7681"/>
+                </a:solidFill>
+                <a:latin typeface="Calibri" pitchFamily="34" charset="0"/>
+                <a:ea typeface="Calibri" pitchFamily="34" charset="-122"/>
+                <a:cs typeface="Calibri" pitchFamily="34" charset="-120"/>
+              </a:rPr>
+              <a:t>20</a:t>
+            </a:r>
+            <a:endParaRPr lang="en-US" sz="900" dirty="0"/>
+          </a:p>
+        </p:txBody>
+      </p:sp>
+    </p:spTree>
+  </p:cSld>
+  <p:clrMapOvr>
+    <a:masterClrMapping/>
+  </p:clrMapOvr>
+</p:sld>
+</file>
+
+<file path=ppt/slides/slide21.xml><?xml version="1.0" encoding="utf-8"?>
+<p:sld xmlns:a="http://schemas.openxmlformats.org/drawingml/2006/main" xmlns:r="http://schemas.openxmlformats.org/officeDocument/2006/relationships" xmlns:p="http://schemas.openxmlformats.org/presentationml/2006/main">
   <p:cSld name="Slide 20">
     <p:bg>
       <p:bgPr>
@@ -17288,7 +18743,7 @@
                 <a:ea typeface="Calibri" pitchFamily="34" charset="-122"/>
                 <a:cs typeface="Calibri" pitchFamily="34" charset="-120"/>
               </a:rPr>
-              <a:t>Every rate you pick in a CE comes from here</a:t>
+              <a:t>Tools also carry unit price, service life, projects per year and maintenance — press 💲 on a row to work all three tier prices out from them</a:t>
             </a:r>
             <a:endParaRPr lang="en-US" sz="1200" dirty="0"/>
           </a:p>
@@ -17312,7 +18767,7 @@
                 <a:ea typeface="Calibri" pitchFamily="34" charset="-122"/>
                 <a:cs typeface="Calibri" pitchFamily="34" charset="-120"/>
               </a:rPr>
-              <a:t>Update a rate once and use ↺ Sync Rates on an older CE to bring it up to date</a:t>
+              <a:t>Download the template to bulk-upload rates. The tools sheet takes the four tier figures, and reads the maintained workbook's own headings</a:t>
             </a:r>
             <a:endParaRPr lang="en-US" sz="1200" dirty="0"/>
           </a:p>
@@ -17336,7 +18791,7 @@
                 <a:ea typeface="Calibri" pitchFamily="34" charset="-122"/>
                 <a:cs typeface="Calibri" pitchFamily="34" charset="-120"/>
               </a:rPr>
-              <a:t>Changing a rate does not alter CEs already saved</a:t>
+              <a:t>Changing a rate NEVER alters a CE already saved. Use ↺ Sync Rates on the CE you are requoting</a:t>
             </a:r>
             <a:endParaRPr lang="en-US" sz="1200" dirty="0"/>
           </a:p>
@@ -17414,7 +18869,7 @@
                 <a:ea typeface="Calibri" pitchFamily="34" charset="-122"/>
                 <a:cs typeface="Calibri" pitchFamily="34" charset="-120"/>
               </a:rPr>
-              <a:t>20</a:t>
+              <a:t>21</a:t>
             </a:r>
             <a:endParaRPr lang="en-US" sz="900" dirty="0"/>
           </a:p>
@@ -17428,7 +18883,7 @@
 </p:sld>
 </file>
 
-<file path=ppt/slides/slide21.xml><?xml version="1.0" encoding="utf-8"?>
+<file path=ppt/slides/slide22.xml><?xml version="1.0" encoding="utf-8"?>
 <p:sld xmlns:a="http://schemas.openxmlformats.org/drawingml/2006/main" xmlns:r="http://schemas.openxmlformats.org/officeDocument/2006/relationships" xmlns:p="http://schemas.openxmlformats.org/presentationml/2006/main">
   <p:cSld name="Slide 21">
     <p:bg>
@@ -17739,7 +19194,7 @@
                 <a:ea typeface="Calibri" pitchFamily="34" charset="-122"/>
                 <a:cs typeface="Calibri" pitchFamily="34" charset="-120"/>
               </a:rPr>
-              <a:t>Consolidate the crew before you generate</a:t>
+              <a:t>Tools are Tier 2 (per day) unless you say otherwise</a:t>
             </a:r>
             <a:endParaRPr lang="en-US" sz="1150" dirty="0"/>
           </a:p>
@@ -18242,7 +19697,7 @@
                 <a:ea typeface="Calibri" pitchFamily="34" charset="-122"/>
                 <a:cs typeface="Calibri" pitchFamily="34" charset="-120"/>
               </a:rPr>
-              <a:t>Check the Summary tab first — Check CE names most problems and takes you straight to them. If a total looks impossible, look at Quantity on Project Info and the Days on your manpower rows. If your work is not reaching the team, read the banner at the top of the screen before anything else.</a:t>
+              <a:t>Check the Summary tab first — Check CE names most problems and takes you straight to them. If a total looks impossible, look at Quantity on Project Info, the Days on your manpower rows, and the Tier on your tools. If your work is not reaching the team, read the banner at the top of the screen before anything else.</a:t>
             </a:r>
             <a:endParaRPr lang="en-US" sz="1150" dirty="0"/>
           </a:p>
@@ -18359,7 +19814,7 @@
                 <a:ea typeface="Calibri" pitchFamily="34" charset="-122"/>
                 <a:cs typeface="Calibri" pitchFamily="34" charset="-120"/>
               </a:rPr>
-              <a:t>21</a:t>
+              <a:t>22</a:t>
             </a:r>
             <a:endParaRPr lang="en-US" sz="900" dirty="0"/>
           </a:p>

--- a/docs/SHIC-Cost-Estimator-User-Manual.pptx
+++ b/docs/SHIC-Cost-Estimator-User-Manual.pptx
@@ -17,12 +17,14 @@
     <p:sldId id="265" r:id="rId11"/>
     <p:sldId id="266" r:id="rId12"/>
     <p:sldId id="277" r:id="rId28"/>
+    <p:sldId id="278" r:id="rId29"/>
     <p:sldId id="267" r:id="rId13"/>
     <p:sldId id="268" r:id="rId14"/>
     <p:sldId id="269" r:id="rId15"/>
     <p:sldId id="270" r:id="rId16"/>
     <p:sldId id="271" r:id="rId17"/>
     <p:sldId id="272" r:id="rId18"/>
+    <p:sldId id="279" r:id="rId30"/>
     <p:sldId id="273" r:id="rId19"/>
     <p:sldId id="274" r:id="rId20"/>
     <p:sldId id="275" r:id="rId21"/>
@@ -5596,7 +5598,7 @@
                 <a:ea typeface="Calibri" pitchFamily="34" charset="-122"/>
                 <a:cs typeface="Calibri" pitchFamily="34" charset="-120"/>
               </a:rPr>
-              <a:t>Charged on a tier: per project, per day, or per hour used. Tier 2 — per day — is the default and what every CE so far uses. Next slide.</a:t>
+              <a:t>Charged on a tier: per project, per day, or per hour used. Tier 2 — per day — is the default. On a Shopworks CE each row also carries the power it draws.</a:t>
             </a:r>
             <a:endParaRPr lang="en-US" sz="1150" dirty="0"/>
           </a:p>
@@ -9160,7 +9162,7 @@
                 <a:ea typeface="Calibri" pitchFamily="34" charset="-122"/>
                 <a:cs typeface="Calibri" pitchFamily="34" charset="-120"/>
               </a:rPr>
-              <a:t>13</a:t>
+              <a:t>14</a:t>
             </a:r>
             <a:endParaRPr lang="en-US" sz="900" dirty="0"/>
           </a:p>
@@ -11046,6 +11048,30 @@
             </a:r>
             <a:endParaRPr lang="en-US" sz="1150" dirty="0"/>
           </a:p>
+          <a:p>
+            <a:pPr marL="342900" indent="-342900">
+              <a:lnSpc>
+                <a:spcPts val="1450"/>
+              </a:lnSpc>
+              <a:spcAft>
+                <a:spcPts val="400"/>
+              </a:spcAft>
+              <a:buSzPct val="100000"/>
+              <a:buChar char="●"/>
+            </a:pPr>
+            <a:r>
+              <a:rPr lang="en-US" sz="1150" dirty="0">
+                <a:solidFill>
+                  <a:srgbClr val="9AA4AF"/>
+                </a:solidFill>
+                <a:latin typeface="Calibri" pitchFamily="34" charset="0"/>
+                <a:ea typeface="Calibri" pitchFamily="34" charset="-122"/>
+                <a:cs typeface="Calibri" pitchFamily="34" charset="-120"/>
+              </a:rPr>
+              <a:t>Internal Verification Notes — your own note against each cost group; typed, never generated</a:t>
+            </a:r>
+            <a:endParaRPr lang="en-US" sz="1150" dirty="0"/>
+          </a:p>
         </p:txBody>
       </p:sp>
       <p:sp>
@@ -11120,7 +11146,7 @@
                 <a:ea typeface="Calibri" pitchFamily="34" charset="-122"/>
                 <a:cs typeface="Calibri" pitchFamily="34" charset="-120"/>
               </a:rPr>
-              <a:t>14</a:t>
+              <a:t>15</a:t>
             </a:r>
             <a:endParaRPr lang="en-US" sz="900" dirty="0"/>
           </a:p>
@@ -11847,7 +11873,7 @@
                 <a:ea typeface="Calibri" pitchFamily="34" charset="-122"/>
                 <a:cs typeface="Calibri" pitchFamily="34" charset="-120"/>
               </a:rPr>
-              <a:t>15</a:t>
+              <a:t>16</a:t>
             </a:r>
             <a:endParaRPr lang="en-US" sz="900" dirty="0"/>
           </a:p>
@@ -13053,7 +13079,7 @@
                 <a:ea typeface="Calibri" pitchFamily="34" charset="-122"/>
                 <a:cs typeface="Calibri" pitchFamily="34" charset="-120"/>
               </a:rPr>
-              <a:t>16</a:t>
+              <a:t>17</a:t>
             </a:r>
             <a:endParaRPr lang="en-US" sz="900" dirty="0"/>
           </a:p>
@@ -13777,7 +13803,7 @@
                 <a:ea typeface="Calibri" pitchFamily="34" charset="-122"/>
                 <a:cs typeface="Calibri" pitchFamily="34" charset="-120"/>
               </a:rPr>
-              <a:t>17</a:t>
+              <a:t>18</a:t>
             </a:r>
             <a:endParaRPr lang="en-US" sz="900" dirty="0"/>
           </a:p>
@@ -15128,7 +15154,7 @@
                 <a:ea typeface="Calibri" pitchFamily="34" charset="-122"/>
                 <a:cs typeface="Calibri" pitchFamily="34" charset="-120"/>
               </a:rPr>
-              <a:t>Days-left is calculated and turns red when a deadline passes. The list opens newest first, by CE number — year, then sequence, then revision.</a:t>
+              <a:t>Days-left turns red when a deadline passes, and stops counting once the CE is submitted. The list opens newest first by CE number — year, then sequence — not by when the row was typed.</a:t>
             </a:r>
             <a:endParaRPr lang="en-US" sz="1100" dirty="0"/>
           </a:p>
@@ -15436,7 +15462,7 @@
                 <a:ea typeface="Calibri" pitchFamily="34" charset="-122"/>
                 <a:cs typeface="Calibri" pitchFamily="34" charset="-120"/>
               </a:rPr>
-              <a:t>18</a:t>
+              <a:t>19</a:t>
             </a:r>
             <a:endParaRPr lang="en-US" sz="900" dirty="0"/>
           </a:p>
@@ -16318,7 +16344,7 @@
                 <a:ea typeface="Calibri" pitchFamily="34" charset="-122"/>
                 <a:cs typeface="Calibri" pitchFamily="34" charset="-120"/>
               </a:rPr>
-              <a:t>19</a:t>
+              <a:t>21</a:t>
             </a:r>
             <a:endParaRPr lang="en-US" sz="900" dirty="0"/>
           </a:p>
@@ -18257,7 +18283,7 @@
                 <a:ea typeface="Calibri" pitchFamily="34" charset="-122"/>
                 <a:cs typeface="Calibri" pitchFamily="34" charset="-120"/>
               </a:rPr>
-              <a:t>20</a:t>
+              <a:t>22</a:t>
             </a:r>
             <a:endParaRPr lang="en-US" sz="900" dirty="0"/>
           </a:p>
@@ -18743,7 +18769,7 @@
                 <a:ea typeface="Calibri" pitchFamily="34" charset="-122"/>
                 <a:cs typeface="Calibri" pitchFamily="34" charset="-120"/>
               </a:rPr>
-              <a:t>Tools also carry unit price, service life, projects per year and maintenance — press 💲 on a row to work all three tier prices out from them</a:t>
+              <a:t>Tools also carry unit price, service life, projects per year, maintenance and a power rating in kW — press 💲 on a row to work all three tier prices out from them</a:t>
             </a:r>
             <a:endParaRPr lang="en-US" sz="1200" dirty="0"/>
           </a:p>
@@ -18767,7 +18793,7 @@
                 <a:ea typeface="Calibri" pitchFamily="34" charset="-122"/>
                 <a:cs typeface="Calibri" pitchFamily="34" charset="-120"/>
               </a:rPr>
-              <a:t>Download the template to bulk-upload rates. The tools sheet takes the four tier figures, and reads the maintained workbook's own headings</a:t>
+              <a:t>Download the template to bulk-upload rates. The tools sheet takes the four tier figures and Power (kW), and reads the maintained workbook's own headings</a:t>
             </a:r>
             <a:endParaRPr lang="en-US" sz="1200" dirty="0"/>
           </a:p>
@@ -18795,6 +18821,30 @@
             </a:r>
             <a:endParaRPr lang="en-US" sz="1200" dirty="0"/>
           </a:p>
+          <a:p>
+            <a:pPr marL="342900" indent="-342900">
+              <a:lnSpc>
+                <a:spcPts val="1600"/>
+              </a:lnSpc>
+              <a:spcAft>
+                <a:spcPts val="900"/>
+              </a:spcAft>
+              <a:buSzPct val="100000"/>
+              <a:buChar char="●"/>
+            </a:pPr>
+            <a:r>
+              <a:rPr lang="en-US" sz="1200" dirty="0">
+                <a:solidFill>
+                  <a:srgbClr val="E6EDF3"/>
+                </a:solidFill>
+                <a:latin typeface="Calibri" pitchFamily="34" charset="0"/>
+                <a:ea typeface="Calibri" pitchFamily="34" charset="-122"/>
+                <a:cs typeface="Calibri" pitchFamily="34" charset="-120"/>
+              </a:rPr>
+              <a:t>Every rate row shows what you charged for it before — click a past figure to adopt it</a:t>
+            </a:r>
+            <a:endParaRPr lang="en-US" sz="1200" dirty="0"/>
+          </a:p>
         </p:txBody>
       </p:sp>
       <p:sp>
@@ -18869,7 +18919,7 @@
                 <a:ea typeface="Calibri" pitchFamily="34" charset="-122"/>
                 <a:cs typeface="Calibri" pitchFamily="34" charset="-120"/>
               </a:rPr>
-              <a:t>21</a:t>
+              <a:t>23</a:t>
             </a:r>
             <a:endParaRPr lang="en-US" sz="900" dirty="0"/>
           </a:p>
@@ -18994,7 +19044,7 @@
         <p:spPr>
           <a:xfrm>
             <a:off x="566928" y="1408176"/>
-            <a:ext cx="5532120" cy="2011680"/>
+            <a:ext cx="5532120" cy="2531680"/>
           </a:xfrm>
           <a:prstGeom prst="roundRect">
             <a:avLst>
@@ -19067,7 +19117,7 @@
         <p:spPr>
           <a:xfrm>
             <a:off x="841248" y="1975104"/>
-            <a:ext cx="4983480" cy="1371600"/>
+            <a:ext cx="4983480" cy="1891600"/>
           </a:xfrm>
           <a:prstGeom prst="rect">
             <a:avLst/>
@@ -19198,6 +19248,54 @@
             </a:r>
             <a:endParaRPr lang="en-US" sz="1150" dirty="0"/>
           </a:p>
+          <a:p>
+            <a:pPr marL="342900" indent="-342900">
+              <a:lnSpc>
+                <a:spcPts val="1450"/>
+              </a:lnSpc>
+              <a:spcAft>
+                <a:spcPts val="500"/>
+              </a:spcAft>
+              <a:buSzPct val="100000"/>
+              <a:buChar char="●"/>
+            </a:pPr>
+            <a:r>
+              <a:rPr lang="en-US" sz="1150" dirty="0">
+                <a:solidFill>
+                  <a:srgbClr val="E6EDF3"/>
+                </a:solidFill>
+                <a:latin typeface="Calibri" pitchFamily="34" charset="0"/>
+                <a:ea typeface="Calibri" pitchFamily="34" charset="-122"/>
+                <a:cs typeface="Calibri" pitchFamily="34" charset="-120"/>
+              </a:rPr>
+              <a:t>Tool power is charged on Shopworks only, and never on a row with no kW</a:t>
+            </a:r>
+            <a:endParaRPr lang="en-US" sz="1150" dirty="0"/>
+          </a:p>
+          <a:p>
+            <a:pPr marL="342900" indent="-342900">
+              <a:lnSpc>
+                <a:spcPts val="1450"/>
+              </a:lnSpc>
+              <a:spcAft>
+                <a:spcPts val="500"/>
+              </a:spcAft>
+              <a:buSzPct val="100000"/>
+              <a:buChar char="●"/>
+            </a:pPr>
+            <a:r>
+              <a:rPr lang="en-US" sz="1150" dirty="0">
+                <a:solidFill>
+                  <a:srgbClr val="E6EDF3"/>
+                </a:solidFill>
+                <a:latin typeface="Calibri" pitchFamily="34" charset="0"/>
+                <a:ea typeface="Calibri" pitchFamily="34" charset="-122"/>
+                <a:cs typeface="Calibri" pitchFamily="34" charset="-120"/>
+              </a:rPr>
+              <a:t>Only an admin or the owner can delete a CE or its attachments</a:t>
+            </a:r>
+            <a:endParaRPr lang="en-US" sz="1150" dirty="0"/>
+          </a:p>
         </p:txBody>
       </p:sp>
       <p:sp>
@@ -19209,7 +19307,7 @@
         <p:spPr>
           <a:xfrm>
             <a:off x="6400800" y="1408176"/>
-            <a:ext cx="5221224" cy="2011680"/>
+            <a:ext cx="5221224" cy="2531680"/>
           </a:xfrm>
           <a:prstGeom prst="roundRect">
             <a:avLst>
@@ -19596,7 +19694,7 @@
         </p:nvSpPr>
         <p:spPr>
           <a:xfrm>
-            <a:off x="566928" y="3621024"/>
+            <a:off x="566928" y="4141024"/>
             <a:ext cx="11055096" cy="1234440"/>
           </a:xfrm>
           <a:prstGeom prst="roundRect">
@@ -19630,7 +19728,7 @@
         </p:nvSpPr>
         <p:spPr>
           <a:xfrm>
-            <a:off x="841248" y="3785616"/>
+            <a:off x="841248" y="4305616"/>
             <a:ext cx="5486400" cy="274320"/>
           </a:xfrm>
           <a:prstGeom prst="rect">
@@ -19669,7 +19767,7 @@
         </p:nvSpPr>
         <p:spPr>
           <a:xfrm>
-            <a:off x="841248" y="4096512"/>
+            <a:off x="841248" y="4616512"/>
             <a:ext cx="10515600" cy="658368"/>
           </a:xfrm>
           <a:prstGeom prst="rect">
@@ -19711,7 +19809,7 @@
         </p:nvSpPr>
         <p:spPr>
           <a:xfrm>
-            <a:off x="566928" y="5065776"/>
+            <a:off x="566928" y="5585776"/>
             <a:ext cx="11055096" cy="365760"/>
           </a:xfrm>
           <a:prstGeom prst="rect">
@@ -19814,7 +19912,2017 @@
                 <a:ea typeface="Calibri" pitchFamily="34" charset="-122"/>
                 <a:cs typeface="Calibri" pitchFamily="34" charset="-120"/>
               </a:rPr>
-              <a:t>22</a:t>
+              <a:t>24</a:t>
+            </a:r>
+            <a:endParaRPr lang="en-US" sz="900" dirty="0"/>
+          </a:p>
+        </p:txBody>
+      </p:sp>
+    </p:spTree>
+  </p:cSld>
+  <p:clrMapOvr>
+    <a:masterClrMapping/>
+  </p:clrMapOvr>
+</p:sld>
+</file>
+
+<file path=ppt/slides/slide23.xml><?xml version="1.0" encoding="utf-8"?>
+<p:sld xmlns:a="http://schemas.openxmlformats.org/drawingml/2006/main" xmlns:r="http://schemas.openxmlformats.org/officeDocument/2006/relationships" xmlns:p="http://schemas.openxmlformats.org/presentationml/2006/main">
+  <p:cSld name="Slide 11">
+    <p:bg>
+      <p:bgPr>
+        <a:solidFill>
+          <a:srgbClr val="161B22"/>
+        </a:solidFill>
+      </p:bgPr>
+    </p:bg>
+    <p:spTree>
+      <p:nvGrpSpPr>
+        <p:cNvPr id="1" name=""/>
+        <p:cNvGrpSpPr/>
+        <p:nvPr/>
+      </p:nvGrpSpPr>
+      <p:grpSpPr>
+        <a:xfrm>
+          <a:off x="0" y="0"/>
+          <a:ext cx="0" cy="0"/>
+          <a:chOff x="0" y="0"/>
+          <a:chExt cx="0" cy="0"/>
+        </a:xfrm>
+      </p:grpSpPr>
+      <p:sp>
+        <p:nvSpPr>
+          <p:cNvPr id="2" name="Text 0"/>
+          <p:cNvSpPr/>
+          <p:nvPr/>
+        </p:nvSpPr>
+        <p:spPr>
+          <a:xfrm>
+            <a:off x="566928" y="384048"/>
+            <a:ext cx="8229600" cy="256032"/>
+          </a:xfrm>
+          <a:prstGeom prst="rect">
+            <a:avLst/>
+          </a:prstGeom>
+          <a:noFill/>
+          <a:ln/>
+        </p:spPr>
+        <p:txBody>
+          <a:bodyPr wrap="square" lIns="0" tIns="0" rIns="0" bIns="0" rtlCol="0" anchor="ctr"/>
+          <a:lstStyle/>
+          <a:p>
+            <a:pPr indent="0" marL="0">
+              <a:buNone/>
+            </a:pPr>
+            <a:r>
+              <a:rPr lang="en-US" sz="1100" b="1" spc="200" kern="0" dirty="0">
+                <a:solidFill>
+                  <a:srgbClr val="F0A429"/>
+                </a:solidFill>
+                <a:latin typeface="Arial" pitchFamily="34" charset="0"/>
+                <a:ea typeface="Arial" pitchFamily="34" charset="-122"/>
+                <a:cs typeface="Arial" pitchFamily="34" charset="-120"/>
+              </a:rPr>
+              <a:t>STEP 5 · POWER USAGE</a:t>
+            </a:r>
+            <a:endParaRPr lang="en-US" sz="1100" dirty="0"/>
+          </a:p>
+        </p:txBody>
+      </p:sp>
+      <p:sp>
+        <p:nvSpPr>
+          <p:cNvPr id="3" name="Text 1"/>
+          <p:cNvSpPr/>
+          <p:nvPr/>
+        </p:nvSpPr>
+        <p:spPr>
+          <a:xfrm>
+            <a:off x="566928" y="694944"/>
+            <a:ext cx="11055096" cy="566928"/>
+          </a:xfrm>
+          <a:prstGeom prst="rect">
+            <a:avLst/>
+          </a:prstGeom>
+          <a:noFill/>
+          <a:ln/>
+        </p:spPr>
+        <p:txBody>
+          <a:bodyPr wrap="square" lIns="0" tIns="0" rIns="0" bIns="0" rtlCol="0" anchor="ctr"/>
+          <a:lstStyle/>
+          <a:p>
+            <a:pPr indent="0" marL="0">
+              <a:buNone/>
+            </a:pPr>
+            <a:r>
+              <a:rPr lang="en-US" sz="3200" b="1" dirty="0">
+                <a:solidFill>
+                  <a:srgbClr val="E6EDF3"/>
+                </a:solidFill>
+                <a:latin typeface="Arial" pitchFamily="34" charset="0"/>
+                <a:ea typeface="Arial" pitchFamily="34" charset="-122"/>
+                <a:cs typeface="Arial" pitchFamily="34" charset="-120"/>
+              </a:rPr>
+              <a:t>Electricity the shop pays for</a:t>
+            </a:r>
+            <a:endParaRPr lang="en-US" sz="3200" dirty="0"/>
+          </a:p>
+        </p:txBody>
+      </p:sp>
+      <p:sp>
+        <p:nvSpPr>
+          <p:cNvPr id="4" name="Shape 2"/>
+          <p:cNvSpPr/>
+          <p:nvPr/>
+        </p:nvSpPr>
+        <p:spPr>
+          <a:xfrm>
+            <a:off x="566928" y="1362456"/>
+            <a:ext cx="11055096" cy="420624"/>
+          </a:xfrm>
+          <a:prstGeom prst="roundRect">
+            <a:avLst>
+              <a:gd name="adj" fmla="val 13043"/>
+            </a:avLst>
+          </a:prstGeom>
+          <a:solidFill>
+            <a:srgbClr val="161B22"/>
+          </a:solidFill>
+          <a:ln w="12700">
+            <a:solidFill>
+              <a:srgbClr val="30363D"/>
+            </a:solidFill>
+            <a:prstDash val="solid"/>
+          </a:ln>
+        </p:spPr>
+      </p:sp>
+      <p:sp>
+        <p:nvSpPr>
+          <p:cNvPr id="5" name="Text 3"/>
+          <p:cNvSpPr/>
+          <p:nvPr/>
+        </p:nvSpPr>
+        <p:spPr>
+          <a:xfrm>
+            <a:off x="566928" y="1408176"/>
+            <a:ext cx="1228344" cy="329184"/>
+          </a:xfrm>
+          <a:prstGeom prst="rect">
+            <a:avLst/>
+          </a:prstGeom>
+          <a:noFill/>
+          <a:ln/>
+        </p:spPr>
+        <p:txBody>
+          <a:bodyPr wrap="square" lIns="0" tIns="0" rIns="0" bIns="0" rtlCol="0" anchor="ctr"/>
+          <a:lstStyle/>
+          <a:p>
+            <a:pPr algn="ctr" indent="0" marL="0">
+              <a:buNone/>
+            </a:pPr>
+            <a:r>
+              <a:rPr lang="en-US" sz="900" dirty="0">
+                <a:solidFill>
+                  <a:srgbClr val="9AA4AF"/>
+                </a:solidFill>
+                <a:latin typeface="Calibri" pitchFamily="34" charset="0"/>
+                <a:ea typeface="Calibri" pitchFamily="34" charset="-122"/>
+                <a:cs typeface="Calibri" pitchFamily="34" charset="-120"/>
+              </a:rPr>
+              <a:t>Project Info</a:t>
+            </a:r>
+            <a:endParaRPr lang="en-US" sz="900" dirty="0"/>
+          </a:p>
+        </p:txBody>
+      </p:sp>
+      <p:sp>
+        <p:nvSpPr>
+          <p:cNvPr id="6" name="Text 4"/>
+          <p:cNvSpPr/>
+          <p:nvPr/>
+        </p:nvSpPr>
+        <p:spPr>
+          <a:xfrm>
+            <a:off x="1795272" y="1408176"/>
+            <a:ext cx="1228344" cy="329184"/>
+          </a:xfrm>
+          <a:prstGeom prst="rect">
+            <a:avLst/>
+          </a:prstGeom>
+          <a:noFill/>
+          <a:ln/>
+        </p:spPr>
+        <p:txBody>
+          <a:bodyPr wrap="square" lIns="0" tIns="0" rIns="0" bIns="0" rtlCol="0" anchor="ctr"/>
+          <a:lstStyle/>
+          <a:p>
+            <a:pPr algn="ctr" indent="0" marL="0">
+              <a:buNone/>
+            </a:pPr>
+            <a:r>
+              <a:rPr lang="en-US" sz="900" dirty="0">
+                <a:solidFill>
+                  <a:srgbClr val="9AA4AF"/>
+                </a:solidFill>
+                <a:latin typeface="Calibri" pitchFamily="34" charset="0"/>
+                <a:ea typeface="Calibri" pitchFamily="34" charset="-122"/>
+                <a:cs typeface="Calibri" pitchFamily="34" charset="-120"/>
+              </a:rPr>
+              <a:t>Scope of Work</a:t>
+            </a:r>
+            <a:endParaRPr lang="en-US" sz="900" dirty="0"/>
+          </a:p>
+        </p:txBody>
+      </p:sp>
+      <p:sp>
+        <p:nvSpPr>
+          <p:cNvPr id="7" name="Text 5"/>
+          <p:cNvSpPr/>
+          <p:nvPr/>
+        </p:nvSpPr>
+        <p:spPr>
+          <a:xfrm>
+            <a:off x="3023616" y="1408176"/>
+            <a:ext cx="1228344" cy="329184"/>
+          </a:xfrm>
+          <a:prstGeom prst="rect">
+            <a:avLst/>
+          </a:prstGeom>
+          <a:noFill/>
+          <a:ln/>
+        </p:spPr>
+        <p:txBody>
+          <a:bodyPr wrap="square" lIns="0" tIns="0" rIns="0" bIns="0" rtlCol="0" anchor="ctr"/>
+          <a:lstStyle/>
+          <a:p>
+            <a:pPr algn="ctr" indent="0" marL="0">
+              <a:buNone/>
+            </a:pPr>
+            <a:r>
+              <a:rPr lang="en-US" sz="900" dirty="0">
+                <a:solidFill>
+                  <a:srgbClr val="9AA4AF"/>
+                </a:solidFill>
+                <a:latin typeface="Calibri" pitchFamily="34" charset="0"/>
+                <a:ea typeface="Calibri" pitchFamily="34" charset="-122"/>
+                <a:cs typeface="Calibri" pitchFamily="34" charset="-120"/>
+              </a:rPr>
+              <a:t>SOW Breakdown</a:t>
+            </a:r>
+            <a:endParaRPr lang="en-US" sz="900" dirty="0"/>
+          </a:p>
+        </p:txBody>
+      </p:sp>
+      <p:sp>
+        <p:nvSpPr>
+          <p:cNvPr id="8" name="Text 6"/>
+          <p:cNvSpPr/>
+          <p:nvPr/>
+        </p:nvSpPr>
+        <p:spPr>
+          <a:xfrm>
+            <a:off x="4251960" y="1408176"/>
+            <a:ext cx="1228344" cy="329184"/>
+          </a:xfrm>
+          <a:prstGeom prst="rect">
+            <a:avLst/>
+          </a:prstGeom>
+          <a:noFill/>
+          <a:ln/>
+        </p:spPr>
+        <p:txBody>
+          <a:bodyPr wrap="square" lIns="0" tIns="0" rIns="0" bIns="0" rtlCol="0" anchor="ctr"/>
+          <a:lstStyle/>
+          <a:p>
+            <a:pPr algn="ctr" indent="0" marL="0">
+              <a:buNone/>
+            </a:pPr>
+            <a:r>
+              <a:rPr lang="en-US" sz="900" dirty="0">
+                <a:solidFill>
+                  <a:srgbClr val="9AA4AF"/>
+                </a:solidFill>
+                <a:latin typeface="Calibri" pitchFamily="34" charset="0"/>
+                <a:ea typeface="Calibri" pitchFamily="34" charset="-122"/>
+                <a:cs typeface="Calibri" pitchFamily="34" charset="-120"/>
+              </a:rPr>
+              <a:t>Manpower</a:t>
+            </a:r>
+            <a:endParaRPr lang="en-US" sz="900" dirty="0"/>
+          </a:p>
+        </p:txBody>
+      </p:sp>
+      <p:sp>
+        <p:nvSpPr>
+          <p:cNvPr id="9" name="Shape 7"/>
+          <p:cNvSpPr/>
+          <p:nvPr/>
+        </p:nvSpPr>
+        <p:spPr>
+          <a:xfrm>
+            <a:off x="5507736" y="1408176"/>
+            <a:ext cx="1173480" cy="329184"/>
+          </a:xfrm>
+          <a:prstGeom prst="roundRect">
+            <a:avLst>
+              <a:gd name="adj" fmla="val 13889"/>
+            </a:avLst>
+          </a:prstGeom>
+          <a:solidFill>
+            <a:srgbClr val="F0A429"/>
+          </a:solidFill>
+          <a:ln w="12700">
+            <a:solidFill>
+              <a:srgbClr val="F0A429"/>
+            </a:solidFill>
+            <a:prstDash val="solid"/>
+          </a:ln>
+        </p:spPr>
+      </p:sp>
+      <p:sp>
+        <p:nvSpPr>
+          <p:cNvPr id="10" name="Text 8"/>
+          <p:cNvSpPr/>
+          <p:nvPr/>
+        </p:nvSpPr>
+        <p:spPr>
+          <a:xfrm>
+            <a:off x="5480304" y="1408176"/>
+            <a:ext cx="1228344" cy="329184"/>
+          </a:xfrm>
+          <a:prstGeom prst="rect">
+            <a:avLst/>
+          </a:prstGeom>
+          <a:noFill/>
+          <a:ln/>
+        </p:spPr>
+        <p:txBody>
+          <a:bodyPr wrap="square" lIns="0" tIns="0" rIns="0" bIns="0" rtlCol="0" anchor="ctr"/>
+          <a:lstStyle/>
+          <a:p>
+            <a:pPr algn="ctr" indent="0" marL="0">
+              <a:buNone/>
+            </a:pPr>
+            <a:r>
+              <a:rPr lang="en-US" sz="900" b="1" dirty="0">
+                <a:solidFill>
+                  <a:srgbClr val="000000"/>
+                </a:solidFill>
+                <a:latin typeface="Calibri" pitchFamily="34" charset="0"/>
+                <a:ea typeface="Calibri" pitchFamily="34" charset="-122"/>
+                <a:cs typeface="Calibri" pitchFamily="34" charset="-120"/>
+              </a:rPr>
+              <a:t>Tools</a:t>
+            </a:r>
+            <a:endParaRPr lang="en-US" sz="900" dirty="0"/>
+          </a:p>
+        </p:txBody>
+      </p:sp>
+      <p:sp>
+        <p:nvSpPr>
+          <p:cNvPr id="11" name="Text 9"/>
+          <p:cNvSpPr/>
+          <p:nvPr/>
+        </p:nvSpPr>
+        <p:spPr>
+          <a:xfrm>
+            <a:off x="6708648" y="1408176"/>
+            <a:ext cx="1228344" cy="329184"/>
+          </a:xfrm>
+          <a:prstGeom prst="rect">
+            <a:avLst/>
+          </a:prstGeom>
+          <a:noFill/>
+          <a:ln/>
+        </p:spPr>
+        <p:txBody>
+          <a:bodyPr wrap="square" lIns="0" tIns="0" rIns="0" bIns="0" rtlCol="0" anchor="ctr"/>
+          <a:lstStyle/>
+          <a:p>
+            <a:pPr algn="ctr" indent="0" marL="0">
+              <a:buNone/>
+            </a:pPr>
+            <a:r>
+              <a:rPr lang="en-US" sz="900" dirty="0">
+                <a:solidFill>
+                  <a:srgbClr val="9AA4AF"/>
+                </a:solidFill>
+                <a:latin typeface="Calibri" pitchFamily="34" charset="0"/>
+                <a:ea typeface="Calibri" pitchFamily="34" charset="-122"/>
+                <a:cs typeface="Calibri" pitchFamily="34" charset="-120"/>
+              </a:rPr>
+              <a:t>Materials</a:t>
+            </a:r>
+            <a:endParaRPr lang="en-US" sz="900" dirty="0"/>
+          </a:p>
+        </p:txBody>
+      </p:sp>
+      <p:sp>
+        <p:nvSpPr>
+          <p:cNvPr id="12" name="Text 10"/>
+          <p:cNvSpPr/>
+          <p:nvPr/>
+        </p:nvSpPr>
+        <p:spPr>
+          <a:xfrm>
+            <a:off x="7936992" y="1408176"/>
+            <a:ext cx="1228344" cy="329184"/>
+          </a:xfrm>
+          <a:prstGeom prst="rect">
+            <a:avLst/>
+          </a:prstGeom>
+          <a:noFill/>
+          <a:ln/>
+        </p:spPr>
+        <p:txBody>
+          <a:bodyPr wrap="square" lIns="0" tIns="0" rIns="0" bIns="0" rtlCol="0" anchor="ctr"/>
+          <a:lstStyle/>
+          <a:p>
+            <a:pPr algn="ctr" indent="0" marL="0">
+              <a:buNone/>
+            </a:pPr>
+            <a:r>
+              <a:rPr lang="en-US" sz="900" dirty="0">
+                <a:solidFill>
+                  <a:srgbClr val="9AA4AF"/>
+                </a:solidFill>
+                <a:latin typeface="Calibri" pitchFamily="34" charset="0"/>
+                <a:ea typeface="Calibri" pitchFamily="34" charset="-122"/>
+                <a:cs typeface="Calibri" pitchFamily="34" charset="-120"/>
+              </a:rPr>
+              <a:t>PPE</a:t>
+            </a:r>
+            <a:endParaRPr lang="en-US" sz="900" dirty="0"/>
+          </a:p>
+        </p:txBody>
+      </p:sp>
+      <p:sp>
+        <p:nvSpPr>
+          <p:cNvPr id="13" name="Text 11"/>
+          <p:cNvSpPr/>
+          <p:nvPr/>
+        </p:nvSpPr>
+        <p:spPr>
+          <a:xfrm>
+            <a:off x="9165336" y="1408176"/>
+            <a:ext cx="1228344" cy="329184"/>
+          </a:xfrm>
+          <a:prstGeom prst="rect">
+            <a:avLst/>
+          </a:prstGeom>
+          <a:noFill/>
+          <a:ln/>
+        </p:spPr>
+        <p:txBody>
+          <a:bodyPr wrap="square" lIns="0" tIns="0" rIns="0" bIns="0" rtlCol="0" anchor="ctr"/>
+          <a:lstStyle/>
+          <a:p>
+            <a:pPr algn="ctr" indent="0" marL="0">
+              <a:buNone/>
+            </a:pPr>
+            <a:r>
+              <a:rPr lang="en-US" sz="900" dirty="0">
+                <a:solidFill>
+                  <a:srgbClr val="9AA4AF"/>
+                </a:solidFill>
+                <a:latin typeface="Calibri" pitchFamily="34" charset="0"/>
+                <a:ea typeface="Calibri" pitchFamily="34" charset="-122"/>
+                <a:cs typeface="Calibri" pitchFamily="34" charset="-120"/>
+              </a:rPr>
+              <a:t>Misc.</a:t>
+            </a:r>
+            <a:endParaRPr lang="en-US" sz="900" dirty="0"/>
+          </a:p>
+        </p:txBody>
+      </p:sp>
+      <p:sp>
+        <p:nvSpPr>
+          <p:cNvPr id="14" name="Text 12"/>
+          <p:cNvSpPr/>
+          <p:nvPr/>
+        </p:nvSpPr>
+        <p:spPr>
+          <a:xfrm>
+            <a:off x="10393680" y="1408176"/>
+            <a:ext cx="1228344" cy="329184"/>
+          </a:xfrm>
+          <a:prstGeom prst="rect">
+            <a:avLst/>
+          </a:prstGeom>
+          <a:noFill/>
+          <a:ln/>
+        </p:spPr>
+        <p:txBody>
+          <a:bodyPr wrap="square" lIns="0" tIns="0" rIns="0" bIns="0" rtlCol="0" anchor="ctr"/>
+          <a:lstStyle/>
+          <a:p>
+            <a:pPr algn="ctr" indent="0" marL="0">
+              <a:buNone/>
+            </a:pPr>
+            <a:r>
+              <a:rPr lang="en-US" sz="900" dirty="0">
+                <a:solidFill>
+                  <a:srgbClr val="9AA4AF"/>
+                </a:solidFill>
+                <a:latin typeface="Calibri" pitchFamily="34" charset="0"/>
+                <a:ea typeface="Calibri" pitchFamily="34" charset="-122"/>
+                <a:cs typeface="Calibri" pitchFamily="34" charset="-120"/>
+              </a:rPr>
+              <a:t>Summary</a:t>
+            </a:r>
+            <a:endParaRPr lang="en-US" sz="900" dirty="0"/>
+          </a:p>
+        </p:txBody>
+      </p:sp>
+      <p:sp>
+        <p:nvSpPr>
+          <p:cNvPr id="15" name="Shape 13"/>
+          <p:cNvSpPr/>
+          <p:nvPr/>
+        </p:nvSpPr>
+        <p:spPr>
+          <a:xfrm>
+            <a:off x="566928" y="2002536"/>
+            <a:ext cx="3566160" cy="1463040"/>
+          </a:xfrm>
+          <a:prstGeom prst="roundRect">
+            <a:avLst>
+              <a:gd name="adj" fmla="val 5000"/>
+            </a:avLst>
+          </a:prstGeom>
+          <a:solidFill>
+            <a:srgbClr val="1C2128"/>
+          </a:solidFill>
+          <a:ln w="12700">
+            <a:solidFill>
+              <a:srgbClr val="30363D"/>
+            </a:solidFill>
+            <a:prstDash val="solid"/>
+          </a:ln>
+          <a:effectLst>
+            <a:outerShdw sx="100000" sy="100000" kx="0" ky="0" algn="bl" rotWithShape="0" blurRad="152400" dist="38100" dir="5400000">
+              <a:srgbClr val="000000">
+                <a:alpha val="45000"/>
+              </a:srgbClr>
+            </a:outerShdw>
+          </a:effectLst>
+        </p:spPr>
+      </p:sp>
+      <p:sp>
+        <p:nvSpPr>
+          <p:cNvPr id="16" name="Text 14"/>
+          <p:cNvSpPr/>
+          <p:nvPr/>
+        </p:nvSpPr>
+        <p:spPr>
+          <a:xfrm>
+            <a:off x="804672" y="2185416"/>
+            <a:ext cx="3108960" cy="310896"/>
+          </a:xfrm>
+          <a:prstGeom prst="rect">
+            <a:avLst/>
+          </a:prstGeom>
+          <a:noFill/>
+          <a:ln/>
+        </p:spPr>
+        <p:txBody>
+          <a:bodyPr wrap="square" lIns="0" tIns="0" rIns="0" bIns="0" rtlCol="0" anchor="ctr"/>
+          <a:lstStyle/>
+          <a:p>
+            <a:pPr indent="0" marL="0">
+              <a:buNone/>
+            </a:pPr>
+            <a:r>
+              <a:rPr lang="en-US" sz="1450" b="1" dirty="0">
+                <a:solidFill>
+                  <a:srgbClr val="F0A429"/>
+                </a:solidFill>
+                <a:latin typeface="Arial" pitchFamily="34" charset="0"/>
+                <a:ea typeface="Arial" pitchFamily="34" charset="-122"/>
+                <a:cs typeface="Arial" pitchFamily="34" charset="-120"/>
+              </a:rPr>
+              <a:t>Shopworks only</a:t>
+            </a:r>
+            <a:endParaRPr lang="en-US" sz="1450" dirty="0"/>
+          </a:p>
+        </p:txBody>
+      </p:sp>
+      <p:sp>
+        <p:nvSpPr>
+          <p:cNvPr id="17" name="Text 15"/>
+          <p:cNvSpPr/>
+          <p:nvPr/>
+        </p:nvSpPr>
+        <p:spPr>
+          <a:xfrm>
+            <a:off x="804672" y="2542032"/>
+            <a:ext cx="3108960" cy="822960"/>
+          </a:xfrm>
+          <a:prstGeom prst="rect">
+            <a:avLst/>
+          </a:prstGeom>
+          <a:noFill/>
+          <a:ln/>
+        </p:spPr>
+        <p:txBody>
+          <a:bodyPr wrap="square" lIns="0" tIns="0" rIns="0" bIns="0" rtlCol="0" anchor="ctr"/>
+          <a:lstStyle/>
+          <a:p>
+            <a:pPr indent="0" marL="0">
+              <a:lnSpc>
+                <a:spcPts val="1500"/>
+              </a:lnSpc>
+              <a:buNone/>
+            </a:pPr>
+            <a:r>
+              <a:rPr lang="en-US" sz="1150" dirty="0">
+                <a:solidFill>
+                  <a:srgbClr val="9AA4AF"/>
+                </a:solidFill>
+                <a:latin typeface="Calibri" pitchFamily="34" charset="0"/>
+                <a:ea typeface="Calibri" pitchFamily="34" charset="-122"/>
+                <a:cs typeface="Calibri" pitchFamily="34" charset="-120"/>
+              </a:rPr>
+              <a:t>An onsite job runs on the client’s supply, so nothing is charged for power there. The three power columns appear on a Shopworks CE and nowhere else.</a:t>
+            </a:r>
+            <a:endParaRPr lang="en-US" sz="1150" dirty="0"/>
+          </a:p>
+        </p:txBody>
+      </p:sp>
+      <p:sp>
+        <p:nvSpPr>
+          <p:cNvPr id="18" name="Shape 16"/>
+          <p:cNvSpPr/>
+          <p:nvPr/>
+        </p:nvSpPr>
+        <p:spPr>
+          <a:xfrm>
+            <a:off x="4352544" y="2002536"/>
+            <a:ext cx="3566160" cy="1463040"/>
+          </a:xfrm>
+          <a:prstGeom prst="roundRect">
+            <a:avLst>
+              <a:gd name="adj" fmla="val 5000"/>
+            </a:avLst>
+          </a:prstGeom>
+          <a:solidFill>
+            <a:srgbClr val="1C2128"/>
+          </a:solidFill>
+          <a:ln w="12700">
+            <a:solidFill>
+              <a:srgbClr val="30363D"/>
+            </a:solidFill>
+            <a:prstDash val="solid"/>
+          </a:ln>
+          <a:effectLst>
+            <a:outerShdw sx="100000" sy="100000" kx="0" ky="0" algn="bl" rotWithShape="0" blurRad="152400" dist="38100" dir="5400000">
+              <a:srgbClr val="000000">
+                <a:alpha val="45000"/>
+              </a:srgbClr>
+            </a:outerShdw>
+          </a:effectLst>
+        </p:spPr>
+      </p:sp>
+      <p:sp>
+        <p:nvSpPr>
+          <p:cNvPr id="19" name="Text 17"/>
+          <p:cNvSpPr/>
+          <p:nvPr/>
+        </p:nvSpPr>
+        <p:spPr>
+          <a:xfrm>
+            <a:off x="4590288" y="2185416"/>
+            <a:ext cx="3108960" cy="310896"/>
+          </a:xfrm>
+          <a:prstGeom prst="rect">
+            <a:avLst/>
+          </a:prstGeom>
+          <a:noFill/>
+          <a:ln/>
+        </p:spPr>
+        <p:txBody>
+          <a:bodyPr wrap="square" lIns="0" tIns="0" rIns="0" bIns="0" rtlCol="0" anchor="ctr"/>
+          <a:lstStyle/>
+          <a:p>
+            <a:pPr indent="0" marL="0">
+              <a:buNone/>
+            </a:pPr>
+            <a:r>
+              <a:rPr lang="en-US" sz="1450" b="1" dirty="0">
+                <a:solidFill>
+                  <a:srgbClr val="58A6FF"/>
+                </a:solidFill>
+                <a:latin typeface="Arial" pitchFamily="34" charset="0"/>
+                <a:ea typeface="Arial" pitchFamily="34" charset="-122"/>
+                <a:cs typeface="Arial" pitchFamily="34" charset="-120"/>
+              </a:rPr>
+              <a:t>kW comes from the Masterlist</a:t>
+            </a:r>
+            <a:endParaRPr lang="en-US" sz="1450" dirty="0"/>
+          </a:p>
+        </p:txBody>
+      </p:sp>
+      <p:sp>
+        <p:nvSpPr>
+          <p:cNvPr id="20" name="Text 18"/>
+          <p:cNvSpPr/>
+          <p:nvPr/>
+        </p:nvSpPr>
+        <p:spPr>
+          <a:xfrm>
+            <a:off x="4590288" y="2542032"/>
+            <a:ext cx="3108960" cy="822960"/>
+          </a:xfrm>
+          <a:prstGeom prst="rect">
+            <a:avLst/>
+          </a:prstGeom>
+          <a:noFill/>
+          <a:ln/>
+        </p:spPr>
+        <p:txBody>
+          <a:bodyPr wrap="square" lIns="0" tIns="0" rIns="0" bIns="0" rtlCol="0" anchor="ctr"/>
+          <a:lstStyle/>
+          <a:p>
+            <a:pPr indent="0" marL="0">
+              <a:lnSpc>
+                <a:spcPts val="1500"/>
+              </a:lnSpc>
+              <a:buNone/>
+            </a:pPr>
+            <a:r>
+              <a:rPr lang="en-US" sz="1150" dirty="0">
+                <a:solidFill>
+                  <a:srgbClr val="9AA4AF"/>
+                </a:solidFill>
+                <a:latin typeface="Calibri" pitchFamily="34" charset="0"/>
+                <a:ea typeface="Calibri" pitchFamily="34" charset="-122"/>
+                <a:cs typeface="Calibri" pitchFamily="34" charset="-120"/>
+              </a:rPr>
+              <a:t>Every tool can carry a power rating. Pick the item from the Masterlist and the rating arrives with the rate. Type it on the row for anything not in the list.</a:t>
+            </a:r>
+            <a:endParaRPr lang="en-US" sz="1150" dirty="0"/>
+          </a:p>
+        </p:txBody>
+      </p:sp>
+      <p:sp>
+        <p:nvSpPr>
+          <p:cNvPr id="21" name="Shape 19"/>
+          <p:cNvSpPr/>
+          <p:nvPr/>
+        </p:nvSpPr>
+        <p:spPr>
+          <a:xfrm>
+            <a:off x="8138160" y="2002536"/>
+            <a:ext cx="3566160" cy="1463040"/>
+          </a:xfrm>
+          <a:prstGeom prst="roundRect">
+            <a:avLst>
+              <a:gd name="adj" fmla="val 5000"/>
+            </a:avLst>
+          </a:prstGeom>
+          <a:solidFill>
+            <a:srgbClr val="1C2128"/>
+          </a:solidFill>
+          <a:ln w="12700">
+            <a:solidFill>
+              <a:srgbClr val="30363D"/>
+            </a:solidFill>
+            <a:prstDash val="solid"/>
+          </a:ln>
+          <a:effectLst>
+            <a:outerShdw sx="100000" sy="100000" kx="0" ky="0" algn="bl" rotWithShape="0" blurRad="152400" dist="38100" dir="5400000">
+              <a:srgbClr val="000000">
+                <a:alpha val="45000"/>
+              </a:srgbClr>
+            </a:outerShdw>
+          </a:effectLst>
+        </p:spPr>
+      </p:sp>
+      <p:sp>
+        <p:nvSpPr>
+          <p:cNvPr id="22" name="Text 20"/>
+          <p:cNvSpPr/>
+          <p:nvPr/>
+        </p:nvSpPr>
+        <p:spPr>
+          <a:xfrm>
+            <a:off x="8375904" y="2185416"/>
+            <a:ext cx="3108960" cy="310896"/>
+          </a:xfrm>
+          <a:prstGeom prst="rect">
+            <a:avLst/>
+          </a:prstGeom>
+          <a:noFill/>
+          <a:ln/>
+        </p:spPr>
+        <p:txBody>
+          <a:bodyPr wrap="square" lIns="0" tIns="0" rIns="0" bIns="0" rtlCol="0" anchor="ctr"/>
+          <a:lstStyle/>
+          <a:p>
+            <a:pPr indent="0" marL="0">
+              <a:buNone/>
+            </a:pPr>
+            <a:r>
+              <a:rPr lang="en-US" sz="1450" b="1" dirty="0">
+                <a:solidFill>
+                  <a:srgbClr val="3FB950"/>
+                </a:solidFill>
+                <a:latin typeface="Arial" pitchFamily="34" charset="0"/>
+                <a:ea typeface="Arial" pitchFamily="34" charset="-122"/>
+                <a:cs typeface="Arial" pitchFamily="34" charset="-120"/>
+              </a:rPr>
+              <a:t>Running hrs — what it actually draws</a:t>
+            </a:r>
+            <a:endParaRPr lang="en-US" sz="1450" dirty="0"/>
+          </a:p>
+        </p:txBody>
+      </p:sp>
+      <p:sp>
+        <p:nvSpPr>
+          <p:cNvPr id="23" name="Text 21"/>
+          <p:cNvSpPr/>
+          <p:nvPr/>
+        </p:nvSpPr>
+        <p:spPr>
+          <a:xfrm>
+            <a:off x="8375904" y="2542032"/>
+            <a:ext cx="3108960" cy="822960"/>
+          </a:xfrm>
+          <a:prstGeom prst="rect">
+            <a:avLst/>
+          </a:prstGeom>
+          <a:noFill/>
+          <a:ln/>
+        </p:spPr>
+        <p:txBody>
+          <a:bodyPr wrap="square" lIns="0" tIns="0" rIns="0" bIns="0" rtlCol="0" anchor="ctr"/>
+          <a:lstStyle/>
+          <a:p>
+            <a:pPr indent="0" marL="0">
+              <a:lnSpc>
+                <a:spcPts val="1500"/>
+              </a:lnSpc>
+              <a:buNone/>
+            </a:pPr>
+            <a:r>
+              <a:rPr lang="en-US" sz="1150" dirty="0">
+                <a:solidFill>
+                  <a:srgbClr val="9AA4AF"/>
+                </a:solidFill>
+                <a:latin typeface="Calibri" pitchFamily="34" charset="0"/>
+                <a:ea typeface="Calibri" pitchFamily="34" charset="-122"/>
+                <a:cs typeface="Calibri" pitchFamily="34" charset="-120"/>
+              </a:rPr>
+              <a:t>Hours the tool is really running, not how long it is on the floor. A grinder on site for five days does not draw for 120 hours. Independent of the tier.</a:t>
+            </a:r>
+            <a:endParaRPr lang="en-US" sz="1150" dirty="0"/>
+          </a:p>
+        </p:txBody>
+      </p:sp>
+      <p:sp>
+        <p:nvSpPr>
+          <p:cNvPr id="24" name="Shape 22"/>
+          <p:cNvSpPr/>
+          <p:nvPr/>
+        </p:nvSpPr>
+        <p:spPr>
+          <a:xfrm>
+            <a:off x="566928" y="3648456"/>
+            <a:ext cx="5532120" cy="1042416"/>
+          </a:xfrm>
+          <a:prstGeom prst="roundRect">
+            <a:avLst>
+              <a:gd name="adj" fmla="val 7018"/>
+            </a:avLst>
+          </a:prstGeom>
+          <a:solidFill>
+            <a:srgbClr val="161B22"/>
+          </a:solidFill>
+          <a:ln w="12700">
+            <a:solidFill>
+              <a:srgbClr val="30363D"/>
+            </a:solidFill>
+            <a:prstDash val="solid"/>
+          </a:ln>
+          <a:effectLst>
+            <a:outerShdw sx="100000" sy="100000" kx="0" ky="0" algn="bl" rotWithShape="0" blurRad="152400" dist="38100" dir="5400000">
+              <a:srgbClr val="000000">
+                <a:alpha val="45000"/>
+              </a:srgbClr>
+            </a:outerShdw>
+          </a:effectLst>
+        </p:spPr>
+      </p:sp>
+      <p:sp>
+        <p:nvSpPr>
+          <p:cNvPr id="25" name="Text 23"/>
+          <p:cNvSpPr/>
+          <p:nvPr/>
+        </p:nvSpPr>
+        <p:spPr>
+          <a:xfrm>
+            <a:off x="804672" y="3767328"/>
+            <a:ext cx="5029200" cy="274320"/>
+          </a:xfrm>
+          <a:prstGeom prst="rect">
+            <a:avLst/>
+          </a:prstGeom>
+          <a:noFill/>
+          <a:ln/>
+        </p:spPr>
+        <p:txBody>
+          <a:bodyPr wrap="square" lIns="0" tIns="0" rIns="0" bIns="0" rtlCol="0" anchor="ctr"/>
+          <a:lstStyle/>
+          <a:p>
+            <a:pPr indent="0" marL="0">
+              <a:buNone/>
+            </a:pPr>
+            <a:r>
+              <a:rPr lang="en-US" sz="1350" b="1" dirty="0">
+                <a:solidFill>
+                  <a:srgbClr val="E6EDF3"/>
+                </a:solidFill>
+                <a:latin typeface="Arial" pitchFamily="34" charset="0"/>
+                <a:ea typeface="Arial" pitchFamily="34" charset="-122"/>
+                <a:cs typeface="Arial" pitchFamily="34" charset="-120"/>
+              </a:rPr>
+              <a:t>The electricity rate</a:t>
+            </a:r>
+            <a:endParaRPr lang="en-US" sz="1350" dirty="0"/>
+          </a:p>
+        </p:txBody>
+      </p:sp>
+      <p:sp>
+        <p:nvSpPr>
+          <p:cNvPr id="26" name="Text 24"/>
+          <p:cNvSpPr/>
+          <p:nvPr/>
+        </p:nvSpPr>
+        <p:spPr>
+          <a:xfrm>
+            <a:off x="804672" y="4069080"/>
+            <a:ext cx="5074920" cy="566928"/>
+          </a:xfrm>
+          <a:prstGeom prst="rect">
+            <a:avLst/>
+          </a:prstGeom>
+          <a:noFill/>
+          <a:ln/>
+        </p:spPr>
+        <p:txBody>
+          <a:bodyPr wrap="square" lIns="0" tIns="0" rIns="0" bIns="0" rtlCol="0" anchor="ctr"/>
+          <a:lstStyle/>
+          <a:p>
+            <a:pPr indent="0" marL="0">
+              <a:lnSpc>
+                <a:spcPts val="1400"/>
+              </a:lnSpc>
+              <a:buNone/>
+            </a:pPr>
+            <a:r>
+              <a:rPr lang="en-US" sz="1100" dirty="0">
+                <a:solidFill>
+                  <a:srgbClr val="9AA4AF"/>
+                </a:solidFill>
+                <a:latin typeface="Calibri" pitchFamily="34" charset="0"/>
+                <a:ea typeface="Calibri" pitchFamily="34" charset="-122"/>
+                <a:cs typeface="Calibri" pitchFamily="34" charset="-120"/>
+              </a:rPr>
+              <a:t>Pesos per kWh, in the Tools &amp; Equipment header. Starts at ₱12.00. It belongs to THIS CE, so a utility increase never reprices an estimate already sent out.</a:t>
+            </a:r>
+            <a:endParaRPr lang="en-US" sz="1100" dirty="0"/>
+          </a:p>
+        </p:txBody>
+      </p:sp>
+      <p:sp>
+        <p:nvSpPr>
+          <p:cNvPr id="27" name="Shape 25"/>
+          <p:cNvSpPr/>
+          <p:nvPr/>
+        </p:nvSpPr>
+        <p:spPr>
+          <a:xfrm>
+            <a:off x="6309360" y="3648456"/>
+            <a:ext cx="5532120" cy="1042416"/>
+          </a:xfrm>
+          <a:prstGeom prst="roundRect">
+            <a:avLst>
+              <a:gd name="adj" fmla="val 7018"/>
+            </a:avLst>
+          </a:prstGeom>
+          <a:solidFill>
+            <a:srgbClr val="161B22"/>
+          </a:solidFill>
+          <a:ln w="12700">
+            <a:solidFill>
+              <a:srgbClr val="30363D"/>
+            </a:solidFill>
+            <a:prstDash val="solid"/>
+          </a:ln>
+          <a:effectLst>
+            <a:outerShdw sx="100000" sy="100000" kx="0" ky="0" algn="bl" rotWithShape="0" blurRad="152400" dist="38100" dir="5400000">
+              <a:srgbClr val="000000">
+                <a:alpha val="45000"/>
+              </a:srgbClr>
+            </a:outerShdw>
+          </a:effectLst>
+        </p:spPr>
+      </p:sp>
+      <p:sp>
+        <p:nvSpPr>
+          <p:cNvPr id="28" name="Text 26"/>
+          <p:cNvSpPr/>
+          <p:nvPr/>
+        </p:nvSpPr>
+        <p:spPr>
+          <a:xfrm>
+            <a:off x="6547104" y="3767328"/>
+            <a:ext cx="5029200" cy="274320"/>
+          </a:xfrm>
+          <a:prstGeom prst="rect">
+            <a:avLst/>
+          </a:prstGeom>
+          <a:noFill/>
+          <a:ln/>
+        </p:spPr>
+        <p:txBody>
+          <a:bodyPr wrap="square" lIns="0" tIns="0" rIns="0" bIns="0" rtlCol="0" anchor="ctr"/>
+          <a:lstStyle/>
+          <a:p>
+            <a:pPr indent="0" marL="0">
+              <a:buNone/>
+            </a:pPr>
+            <a:r>
+              <a:rPr lang="en-US" sz="1350" b="1" dirty="0">
+                <a:solidFill>
+                  <a:srgbClr val="E6EDF3"/>
+                </a:solidFill>
+                <a:latin typeface="Arial" pitchFamily="34" charset="0"/>
+                <a:ea typeface="Arial" pitchFamily="34" charset="-122"/>
+                <a:cs typeface="Arial" pitchFamily="34" charset="-120"/>
+              </a:rPr>
+              <a:t>What it costs</a:t>
+            </a:r>
+            <a:endParaRPr lang="en-US" sz="1350" dirty="0"/>
+          </a:p>
+        </p:txBody>
+      </p:sp>
+      <p:sp>
+        <p:nvSpPr>
+          <p:cNvPr id="29" name="Text 27"/>
+          <p:cNvSpPr/>
+          <p:nvPr/>
+        </p:nvSpPr>
+        <p:spPr>
+          <a:xfrm>
+            <a:off x="6547104" y="4069080"/>
+            <a:ext cx="5074920" cy="566928"/>
+          </a:xfrm>
+          <a:prstGeom prst="rect">
+            <a:avLst/>
+          </a:prstGeom>
+          <a:noFill/>
+          <a:ln/>
+        </p:spPr>
+        <p:txBody>
+          <a:bodyPr wrap="square" lIns="0" tIns="0" rIns="0" bIns="0" rtlCol="0" anchor="ctr"/>
+          <a:lstStyle/>
+          <a:p>
+            <a:pPr indent="0" marL="0">
+              <a:lnSpc>
+                <a:spcPts val="1400"/>
+              </a:lnSpc>
+              <a:buNone/>
+            </a:pPr>
+            <a:r>
+              <a:rPr lang="en-US" sz="1100" dirty="0">
+                <a:solidFill>
+                  <a:srgbClr val="9AA4AF"/>
+                </a:solidFill>
+                <a:latin typeface="Calibri" pitchFamily="34" charset="0"/>
+                <a:ea typeface="Calibri" pitchFamily="34" charset="-122"/>
+                <a:cs typeface="Calibri" pitchFamily="34" charset="-120"/>
+              </a:rPr>
+              <a:t>Qty × kW × running hrs × ₱/kWh. It shows in its own Power column and is added to the row total on top of the rental.</a:t>
+            </a:r>
+            <a:endParaRPr lang="en-US" sz="1100" dirty="0"/>
+          </a:p>
+        </p:txBody>
+      </p:sp>
+      <p:sp>
+        <p:nvSpPr>
+          <p:cNvPr id="30" name="Shape 28"/>
+          <p:cNvSpPr/>
+          <p:nvPr/>
+        </p:nvSpPr>
+        <p:spPr>
+          <a:xfrm>
+            <a:off x="566928" y="4818888"/>
+            <a:ext cx="5532120" cy="1042416"/>
+          </a:xfrm>
+          <a:prstGeom prst="roundRect">
+            <a:avLst>
+              <a:gd name="adj" fmla="val 7018"/>
+            </a:avLst>
+          </a:prstGeom>
+          <a:solidFill>
+            <a:srgbClr val="161B22"/>
+          </a:solidFill>
+          <a:ln w="12700">
+            <a:solidFill>
+              <a:srgbClr val="30363D"/>
+            </a:solidFill>
+            <a:prstDash val="solid"/>
+          </a:ln>
+          <a:effectLst>
+            <a:outerShdw sx="100000" sy="100000" kx="0" ky="0" algn="bl" rotWithShape="0" blurRad="152400" dist="38100" dir="5400000">
+              <a:srgbClr val="000000">
+                <a:alpha val="45000"/>
+              </a:srgbClr>
+            </a:outerShdw>
+          </a:effectLst>
+        </p:spPr>
+      </p:sp>
+      <p:sp>
+        <p:nvSpPr>
+          <p:cNvPr id="31" name="Text 29"/>
+          <p:cNvSpPr/>
+          <p:nvPr/>
+        </p:nvSpPr>
+        <p:spPr>
+          <a:xfrm>
+            <a:off x="804672" y="4937760"/>
+            <a:ext cx="5029200" cy="274320"/>
+          </a:xfrm>
+          <a:prstGeom prst="rect">
+            <a:avLst/>
+          </a:prstGeom>
+          <a:noFill/>
+          <a:ln/>
+        </p:spPr>
+        <p:txBody>
+          <a:bodyPr wrap="square" lIns="0" tIns="0" rIns="0" bIns="0" rtlCol="0" anchor="ctr"/>
+          <a:lstStyle/>
+          <a:p>
+            <a:pPr indent="0" marL="0">
+              <a:buNone/>
+            </a:pPr>
+            <a:r>
+              <a:rPr lang="en-US" sz="1350" b="1" dirty="0">
+                <a:solidFill>
+                  <a:srgbClr val="E6EDF3"/>
+                </a:solidFill>
+                <a:latin typeface="Arial" pitchFamily="34" charset="0"/>
+                <a:ea typeface="Arial" pitchFamily="34" charset="-122"/>
+                <a:cs typeface="Arial" pitchFamily="34" charset="-120"/>
+              </a:rPr>
+              <a:t>Charging no power at all</a:t>
+            </a:r>
+            <a:endParaRPr lang="en-US" sz="1350" dirty="0"/>
+          </a:p>
+        </p:txBody>
+      </p:sp>
+      <p:sp>
+        <p:nvSpPr>
+          <p:cNvPr id="32" name="Text 30"/>
+          <p:cNvSpPr/>
+          <p:nvPr/>
+        </p:nvSpPr>
+        <p:spPr>
+          <a:xfrm>
+            <a:off x="804672" y="5239512"/>
+            <a:ext cx="5074920" cy="566928"/>
+          </a:xfrm>
+          <a:prstGeom prst="rect">
+            <a:avLst/>
+          </a:prstGeom>
+          <a:noFill/>
+          <a:ln/>
+        </p:spPr>
+        <p:txBody>
+          <a:bodyPr wrap="square" lIns="0" tIns="0" rIns="0" bIns="0" rtlCol="0" anchor="ctr"/>
+          <a:lstStyle/>
+          <a:p>
+            <a:pPr indent="0" marL="0">
+              <a:lnSpc>
+                <a:spcPts val="1400"/>
+              </a:lnSpc>
+              <a:buNone/>
+            </a:pPr>
+            <a:r>
+              <a:rPr lang="en-US" sz="1100" dirty="0">
+                <a:solidFill>
+                  <a:srgbClr val="9AA4AF"/>
+                </a:solidFill>
+                <a:latin typeface="Calibri" pitchFamily="34" charset="0"/>
+                <a:ea typeface="Calibri" pitchFamily="34" charset="-122"/>
+                <a:cs typeface="Calibri" pitchFamily="34" charset="-120"/>
+              </a:rPr>
+              <a:t>Set the rate to 0. The kW and running hours stay on the rows and nothing is billed — useful when power is inside an agreed shop rate.</a:t>
+            </a:r>
+            <a:endParaRPr lang="en-US" sz="1100" dirty="0"/>
+          </a:p>
+        </p:txBody>
+      </p:sp>
+      <p:sp>
+        <p:nvSpPr>
+          <p:cNvPr id="33" name="Shape 31"/>
+          <p:cNvSpPr/>
+          <p:nvPr/>
+        </p:nvSpPr>
+        <p:spPr>
+          <a:xfrm>
+            <a:off x="6309360" y="4818888"/>
+            <a:ext cx="5532120" cy="1042416"/>
+          </a:xfrm>
+          <a:prstGeom prst="roundRect">
+            <a:avLst>
+              <a:gd name="adj" fmla="val 7018"/>
+            </a:avLst>
+          </a:prstGeom>
+          <a:solidFill>
+            <a:srgbClr val="161B22"/>
+          </a:solidFill>
+          <a:ln w="12700">
+            <a:solidFill>
+              <a:srgbClr val="30363D"/>
+            </a:solidFill>
+            <a:prstDash val="solid"/>
+          </a:ln>
+          <a:effectLst>
+            <a:outerShdw sx="100000" sy="100000" kx="0" ky="0" algn="bl" rotWithShape="0" blurRad="152400" dist="38100" dir="5400000">
+              <a:srgbClr val="000000">
+                <a:alpha val="45000"/>
+              </a:srgbClr>
+            </a:outerShdw>
+          </a:effectLst>
+        </p:spPr>
+      </p:sp>
+      <p:sp>
+        <p:nvSpPr>
+          <p:cNvPr id="34" name="Text 32"/>
+          <p:cNvSpPr/>
+          <p:nvPr/>
+        </p:nvSpPr>
+        <p:spPr>
+          <a:xfrm>
+            <a:off x="6547104" y="4937760"/>
+            <a:ext cx="5029200" cy="274320"/>
+          </a:xfrm>
+          <a:prstGeom prst="rect">
+            <a:avLst/>
+          </a:prstGeom>
+          <a:noFill/>
+          <a:ln/>
+        </p:spPr>
+        <p:txBody>
+          <a:bodyPr wrap="square" lIns="0" tIns="0" rIns="0" bIns="0" rtlCol="0" anchor="ctr"/>
+          <a:lstStyle/>
+          <a:p>
+            <a:pPr indent="0" marL="0">
+              <a:buNone/>
+            </a:pPr>
+            <a:r>
+              <a:rPr lang="en-US" sz="1350" b="1" dirty="0">
+                <a:solidFill>
+                  <a:srgbClr val="E6EDF3"/>
+                </a:solidFill>
+                <a:latin typeface="Arial" pitchFamily="34" charset="0"/>
+                <a:ea typeface="Arial" pitchFamily="34" charset="-122"/>
+                <a:cs typeface="Arial" pitchFamily="34" charset="-120"/>
+              </a:rPr>
+              <a:t>On the printed CE</a:t>
+            </a:r>
+            <a:endParaRPr lang="en-US" sz="1350" dirty="0"/>
+          </a:p>
+        </p:txBody>
+      </p:sp>
+      <p:sp>
+        <p:nvSpPr>
+          <p:cNvPr id="35" name="Text 33"/>
+          <p:cNvSpPr/>
+          <p:nvPr/>
+        </p:nvSpPr>
+        <p:spPr>
+          <a:xfrm>
+            <a:off x="6547104" y="5239512"/>
+            <a:ext cx="5074920" cy="566928"/>
+          </a:xfrm>
+          <a:prstGeom prst="rect">
+            <a:avLst/>
+          </a:prstGeom>
+          <a:noFill/>
+          <a:ln/>
+        </p:spPr>
+        <p:txBody>
+          <a:bodyPr wrap="square" lIns="0" tIns="0" rIns="0" bIns="0" rtlCol="0" anchor="ctr"/>
+          <a:lstStyle/>
+          <a:p>
+            <a:pPr indent="0" marL="0">
+              <a:lnSpc>
+                <a:spcPts val="1400"/>
+              </a:lnSpc>
+              <a:buNone/>
+            </a:pPr>
+            <a:r>
+              <a:rPr lang="en-US" sz="1100" dirty="0">
+                <a:solidFill>
+                  <a:srgbClr val="9AA4AF"/>
+                </a:solidFill>
+                <a:latin typeface="Calibri" pitchFamily="34" charset="0"/>
+                <a:ea typeface="Calibri" pitchFamily="34" charset="-122"/>
+                <a:cs typeface="Calibri" pitchFamily="34" charset="-120"/>
+              </a:rPr>
+              <a:t>A POWER column sits beside BASIS, so the client can see why a machine costs what it does. A row with no rating shows a dash.</a:t>
+            </a:r>
+            <a:endParaRPr lang="en-US" sz="1100" dirty="0"/>
+          </a:p>
+        </p:txBody>
+      </p:sp>
+      <p:sp>
+        <p:nvSpPr>
+          <p:cNvPr id="36" name="Text 34"/>
+          <p:cNvSpPr/>
+          <p:nvPr/>
+        </p:nvSpPr>
+        <p:spPr>
+          <a:xfrm>
+            <a:off x="566928" y="6437376"/>
+            <a:ext cx="5486400" cy="237744"/>
+          </a:xfrm>
+          <a:prstGeom prst="rect">
+            <a:avLst/>
+          </a:prstGeom>
+          <a:noFill/>
+          <a:ln/>
+        </p:spPr>
+        <p:txBody>
+          <a:bodyPr wrap="square" lIns="0" tIns="0" rIns="0" bIns="0" rtlCol="0" anchor="ctr"/>
+          <a:lstStyle/>
+          <a:p>
+            <a:pPr indent="0" marL="0">
+              <a:buNone/>
+            </a:pPr>
+            <a:r>
+              <a:rPr lang="en-US" sz="900" dirty="0">
+                <a:solidFill>
+                  <a:srgbClr val="6E7681"/>
+                </a:solidFill>
+                <a:latin typeface="Calibri" pitchFamily="34" charset="0"/>
+                <a:ea typeface="Calibri" pitchFamily="34" charset="-122"/>
+                <a:cs typeface="Calibri" pitchFamily="34" charset="-120"/>
+              </a:rPr>
+              <a:t>SHIC Cost Estimator — End-User Manual</a:t>
+            </a:r>
+            <a:endParaRPr lang="en-US" sz="900" dirty="0"/>
+          </a:p>
+        </p:txBody>
+      </p:sp>
+      <p:sp>
+        <p:nvSpPr>
+          <p:cNvPr id="37" name="Text 35"/>
+          <p:cNvSpPr/>
+          <p:nvPr/>
+        </p:nvSpPr>
+        <p:spPr>
+          <a:xfrm>
+            <a:off x="10981944" y="6437376"/>
+            <a:ext cx="640080" cy="237744"/>
+          </a:xfrm>
+          <a:prstGeom prst="rect">
+            <a:avLst/>
+          </a:prstGeom>
+          <a:noFill/>
+          <a:ln/>
+        </p:spPr>
+        <p:txBody>
+          <a:bodyPr wrap="square" lIns="0" tIns="0" rIns="0" bIns="0" rtlCol="0" anchor="ctr"/>
+          <a:lstStyle/>
+          <a:p>
+            <a:pPr algn="r" indent="0" marL="0">
+              <a:buNone/>
+            </a:pPr>
+            <a:r>
+              <a:rPr lang="en-US" sz="900" dirty="0">
+                <a:solidFill>
+                  <a:srgbClr val="6E7681"/>
+                </a:solidFill>
+                <a:latin typeface="Calibri" pitchFamily="34" charset="0"/>
+                <a:ea typeface="Calibri" pitchFamily="34" charset="-122"/>
+                <a:cs typeface="Calibri" pitchFamily="34" charset="-120"/>
+              </a:rPr>
+              <a:t>13</a:t>
+            </a:r>
+            <a:endParaRPr lang="en-US" sz="900" dirty="0"/>
+          </a:p>
+        </p:txBody>
+      </p:sp>
+    </p:spTree>
+  </p:cSld>
+  <p:clrMapOvr>
+    <a:masterClrMapping/>
+  </p:clrMapOvr>
+</p:sld>
+</file>
+
+<file path=ppt/slides/slide24.xml><?xml version="1.0" encoding="utf-8"?>
+<p:sld xmlns:a="http://schemas.openxmlformats.org/drawingml/2006/main" xmlns:r="http://schemas.openxmlformats.org/officeDocument/2006/relationships" xmlns:p="http://schemas.openxmlformats.org/presentationml/2006/main">
+  <p:cSld name="Slide 20">
+    <p:bg>
+      <p:bgPr>
+        <a:solidFill>
+          <a:srgbClr val="0D1117"/>
+        </a:solidFill>
+      </p:bgPr>
+    </p:bg>
+    <p:spTree>
+      <p:nvGrpSpPr>
+        <p:cNvPr id="1" name=""/>
+        <p:cNvGrpSpPr/>
+        <p:nvPr/>
+      </p:nvGrpSpPr>
+      <p:grpSpPr>
+        <a:xfrm>
+          <a:off x="0" y="0"/>
+          <a:ext cx="0" cy="0"/>
+          <a:chOff x="0" y="0"/>
+          <a:chExt cx="0" cy="0"/>
+        </a:xfrm>
+      </p:grpSpPr>
+      <p:sp>
+        <p:nvSpPr>
+          <p:cNvPr id="2" name="Text 0"/>
+          <p:cNvSpPr/>
+          <p:nvPr/>
+        </p:nvSpPr>
+        <p:spPr>
+          <a:xfrm>
+            <a:off x="566928" y="384048"/>
+            <a:ext cx="8229600" cy="256032"/>
+          </a:xfrm>
+          <a:prstGeom prst="rect">
+            <a:avLst/>
+          </a:prstGeom>
+          <a:noFill/>
+          <a:ln/>
+        </p:spPr>
+        <p:txBody>
+          <a:bodyPr wrap="square" lIns="0" tIns="0" rIns="0" bIns="0" rtlCol="0" anchor="ctr"/>
+          <a:lstStyle/>
+          <a:p>
+            <a:pPr indent="0" marL="0">
+              <a:buNone/>
+            </a:pPr>
+            <a:r>
+              <a:rPr lang="en-US" sz="1100" b="1" spc="200" kern="0" dirty="0">
+                <a:solidFill>
+                  <a:srgbClr val="F0A429"/>
+                </a:solidFill>
+                <a:latin typeface="Arial" pitchFamily="34" charset="0"/>
+                <a:ea typeface="Arial" pitchFamily="34" charset="-122"/>
+                <a:cs typeface="Arial" pitchFamily="34" charset="-120"/>
+              </a:rPr>
+              <a:t>CE MONITORING · PART 2</a:t>
+            </a:r>
+            <a:endParaRPr lang="en-US" sz="1100" dirty="0"/>
+          </a:p>
+        </p:txBody>
+      </p:sp>
+      <p:sp>
+        <p:nvSpPr>
+          <p:cNvPr id="3" name="Text 1"/>
+          <p:cNvSpPr/>
+          <p:nvPr/>
+        </p:nvSpPr>
+        <p:spPr>
+          <a:xfrm>
+            <a:off x="566928" y="694944"/>
+            <a:ext cx="11055096" cy="566928"/>
+          </a:xfrm>
+          <a:prstGeom prst="rect">
+            <a:avLst/>
+          </a:prstGeom>
+          <a:noFill/>
+          <a:ln/>
+        </p:spPr>
+        <p:txBody>
+          <a:bodyPr wrap="square" lIns="0" tIns="0" rIns="0" bIns="0" rtlCol="0" anchor="ctr"/>
+          <a:lstStyle/>
+          <a:p>
+            <a:pPr indent="0" marL="0">
+              <a:buNone/>
+            </a:pPr>
+            <a:r>
+              <a:rPr lang="en-US" sz="3200" b="1" dirty="0">
+                <a:solidFill>
+                  <a:srgbClr val="E6EDF3"/>
+                </a:solidFill>
+                <a:latin typeface="Arial" pitchFamily="34" charset="0"/>
+                <a:ea typeface="Arial" pitchFamily="34" charset="-122"/>
+                <a:cs typeface="Arial" pitchFamily="34" charset="-120"/>
+              </a:rPr>
+              <a:t>Finding work, and the files on it</a:t>
+            </a:r>
+            <a:endParaRPr lang="en-US" sz="3200" dirty="0"/>
+          </a:p>
+        </p:txBody>
+      </p:sp>
+      <p:sp>
+        <p:nvSpPr>
+          <p:cNvPr id="4" name="Text 2"/>
+          <p:cNvSpPr/>
+          <p:nvPr/>
+        </p:nvSpPr>
+        <p:spPr>
+          <a:xfrm>
+            <a:off x="566928" y="1298448"/>
+            <a:ext cx="10972800" cy="365760"/>
+          </a:xfrm>
+          <a:prstGeom prst="rect">
+            <a:avLst/>
+          </a:prstGeom>
+          <a:noFill/>
+          <a:ln/>
+        </p:spPr>
+        <p:txBody>
+          <a:bodyPr wrap="square" lIns="0" tIns="0" rIns="0" bIns="0" rtlCol="0" anchor="t"/>
+          <a:lstStyle/>
+          <a:p>
+            <a:pPr algn="l" indent="0" marL="0">
+              <a:lnSpc>
+                <a:spcPts val="2000"/>
+              </a:lnSpc>
+              <a:buNone/>
+            </a:pPr>
+            <a:r>
+              <a:rPr lang="en-US" sz="1400" dirty="0">
+                <a:solidFill>
+                  <a:srgbClr val="9AA4AF"/>
+                </a:solidFill>
+                <a:latin typeface="Calibri" pitchFamily="34" charset="0"/>
+                <a:ea typeface="Calibri" pitchFamily="34" charset="-122"/>
+                <a:cs typeface="Calibri" pitchFamily="34" charset="-120"/>
+              </a:rPr>
+              <a:t>The list has grown filters, and the attachments on a CE now open. Who may delete has been tightened.</a:t>
+            </a:r>
+            <a:endParaRPr lang="en-US" sz="1400" dirty="0"/>
+          </a:p>
+        </p:txBody>
+      </p:sp>
+      <p:sp>
+        <p:nvSpPr>
+          <p:cNvPr id="5" name="Shape 3"/>
+          <p:cNvSpPr/>
+          <p:nvPr/>
+        </p:nvSpPr>
+        <p:spPr>
+          <a:xfrm>
+            <a:off x="566928" y="1911096"/>
+            <a:ext cx="5532120" cy="3566160"/>
+          </a:xfrm>
+          <a:prstGeom prst="roundRect">
+            <a:avLst>
+              <a:gd name="adj" fmla="val 2051"/>
+            </a:avLst>
+          </a:prstGeom>
+          <a:solidFill>
+            <a:srgbClr val="1C2128"/>
+          </a:solidFill>
+          <a:ln w="12700">
+            <a:solidFill>
+              <a:srgbClr val="30363D"/>
+            </a:solidFill>
+            <a:prstDash val="solid"/>
+          </a:ln>
+          <a:effectLst>
+            <a:outerShdw sx="100000" sy="100000" kx="0" ky="0" algn="bl" rotWithShape="0" blurRad="152400" dist="38100" dir="5400000">
+              <a:srgbClr val="000000">
+                <a:alpha val="45000"/>
+              </a:srgbClr>
+            </a:outerShdw>
+          </a:effectLst>
+        </p:spPr>
+      </p:sp>
+      <p:sp>
+        <p:nvSpPr>
+          <p:cNvPr id="6" name="Text 4"/>
+          <p:cNvSpPr/>
+          <p:nvPr/>
+        </p:nvSpPr>
+        <p:spPr>
+          <a:xfrm>
+            <a:off x="841248" y="2121408"/>
+            <a:ext cx="4937760" cy="329184"/>
+          </a:xfrm>
+          <a:prstGeom prst="rect">
+            <a:avLst/>
+          </a:prstGeom>
+          <a:noFill/>
+          <a:ln/>
+        </p:spPr>
+        <p:txBody>
+          <a:bodyPr wrap="square" lIns="0" tIns="0" rIns="0" bIns="0" rtlCol="0" anchor="ctr"/>
+          <a:lstStyle/>
+          <a:p>
+            <a:pPr indent="0" marL="0">
+              <a:buNone/>
+            </a:pPr>
+            <a:r>
+              <a:rPr lang="en-US" sz="1700" b="1" dirty="0">
+                <a:solidFill>
+                  <a:srgbClr val="A78BFA"/>
+                </a:solidFill>
+                <a:latin typeface="Arial" pitchFamily="34" charset="0"/>
+                <a:ea typeface="Arial" pitchFamily="34" charset="-122"/>
+                <a:cs typeface="Arial" pitchFamily="34" charset="-120"/>
+              </a:rPr>
+              <a:t>Finding a CE</a:t>
+            </a:r>
+            <a:endParaRPr lang="en-US" sz="1700" dirty="0"/>
+          </a:p>
+        </p:txBody>
+      </p:sp>
+      <p:sp>
+        <p:nvSpPr>
+          <p:cNvPr id="7" name="Text 5"/>
+          <p:cNvSpPr/>
+          <p:nvPr/>
+        </p:nvSpPr>
+        <p:spPr>
+          <a:xfrm>
+            <a:off x="841248" y="2578608"/>
+            <a:ext cx="4983480" cy="2651760"/>
+          </a:xfrm>
+          <a:prstGeom prst="rect">
+            <a:avLst/>
+          </a:prstGeom>
+          <a:noFill/>
+          <a:ln/>
+        </p:spPr>
+        <p:txBody>
+          <a:bodyPr wrap="square" lIns="0" tIns="0" rIns="0" bIns="0" rtlCol="0" anchor="t"/>
+          <a:lstStyle/>
+          <a:p>
+            <a:pPr marL="342900" indent="-342900">
+              <a:lnSpc>
+                <a:spcPts val="1600"/>
+              </a:lnSpc>
+              <a:spcAft>
+                <a:spcPts val="900"/>
+              </a:spcAft>
+              <a:buSzPct val="100000"/>
+              <a:buChar char="●"/>
+            </a:pPr>
+            <a:r>
+              <a:rPr lang="en-US" sz="1200" dirty="0">
+                <a:solidFill>
+                  <a:srgbClr val="E6EDF3"/>
+                </a:solidFill>
+                <a:latin typeface="Calibri" pitchFamily="34" charset="0"/>
+                <a:ea typeface="Calibri" pitchFamily="34" charset="-122"/>
+                <a:cs typeface="Calibri" pitchFamily="34" charset="-120"/>
+              </a:rPr>
+              <a:t>Search matches CE number, customer and job title — filter by Discipline and by Customer beside it</a:t>
+            </a:r>
+            <a:endParaRPr lang="en-US" sz="1200" dirty="0"/>
+          </a:p>
+          <a:p>
+            <a:pPr marL="342900" indent="-342900">
+              <a:lnSpc>
+                <a:spcPts val="1600"/>
+              </a:lnSpc>
+              <a:spcAft>
+                <a:spcPts val="900"/>
+              </a:spcAft>
+              <a:buSzPct val="100000"/>
+              <a:buChar char="●"/>
+            </a:pPr>
+            <a:r>
+              <a:rPr lang="en-US" sz="1200" dirty="0">
+                <a:solidFill>
+                  <a:srgbClr val="E6EDF3"/>
+                </a:solidFill>
+                <a:latin typeface="Calibri" pitchFamily="34" charset="0"/>
+                <a:ea typeface="Calibri" pitchFamily="34" charset="-122"/>
+                <a:cs typeface="Calibri" pitchFamily="34" charset="-120"/>
+              </a:rPr>
+              <a:t>Open work means work still in play: Approved, Submitted, No Quote and Cancelled count as closed, not open</a:t>
+            </a:r>
+            <a:endParaRPr lang="en-US" sz="1200" dirty="0"/>
+          </a:p>
+          <a:p>
+            <a:pPr marL="342900" indent="-342900">
+              <a:lnSpc>
+                <a:spcPts val="1600"/>
+              </a:lnSpc>
+              <a:spcAft>
+                <a:spcPts val="900"/>
+              </a:spcAft>
+              <a:buSzPct val="100000"/>
+              <a:buChar char="●"/>
+            </a:pPr>
+            <a:r>
+              <a:rPr lang="en-US" sz="1200" dirty="0">
+                <a:solidFill>
+                  <a:srgbClr val="E6EDF3"/>
+                </a:solidFill>
+                <a:latin typeface="Calibri" pitchFamily="34" charset="0"/>
+                <a:ea typeface="Calibri" pitchFamily="34" charset="-122"/>
+                <a:cs typeface="Calibri" pitchFamily="34" charset="-120"/>
+              </a:rPr>
+              <a:t>Days left stops counting the moment a CE is submitted, so work you have already sent no longer turns red</a:t>
+            </a:r>
+            <a:endParaRPr lang="en-US" sz="1200" dirty="0"/>
+          </a:p>
+          <a:p>
+            <a:pPr marL="342900" indent="-342900">
+              <a:lnSpc>
+                <a:spcPts val="1600"/>
+              </a:lnSpc>
+              <a:spcAft>
+                <a:spcPts val="900"/>
+              </a:spcAft>
+              <a:buSzPct val="100000"/>
+              <a:buChar char="●"/>
+            </a:pPr>
+            <a:r>
+              <a:rPr lang="en-US" sz="1200" dirty="0">
+                <a:solidFill>
+                  <a:srgbClr val="E6EDF3"/>
+                </a:solidFill>
+                <a:latin typeface="Calibri" pitchFamily="34" charset="0"/>
+                <a:ea typeface="Calibri" pitchFamily="34" charset="-122"/>
+                <a:cs typeface="Calibri" pitchFamily="34" charset="-120"/>
+              </a:rPr>
+              <a:t>Co. is the issuing company from Project Info — it is not the costing engineer’s initials</a:t>
+            </a:r>
+            <a:endParaRPr lang="en-US" sz="1200" dirty="0"/>
+          </a:p>
+        </p:txBody>
+      </p:sp>
+      <p:sp>
+        <p:nvSpPr>
+          <p:cNvPr id="8" name="Shape 6"/>
+          <p:cNvSpPr/>
+          <p:nvPr/>
+        </p:nvSpPr>
+        <p:spPr>
+          <a:xfrm>
+            <a:off x="6400800" y="1911096"/>
+            <a:ext cx="5221224" cy="3566160"/>
+          </a:xfrm>
+          <a:prstGeom prst="roundRect">
+            <a:avLst>
+              <a:gd name="adj" fmla="val 2051"/>
+            </a:avLst>
+          </a:prstGeom>
+          <a:solidFill>
+            <a:srgbClr val="1C2128"/>
+          </a:solidFill>
+          <a:ln w="12700">
+            <a:solidFill>
+              <a:srgbClr val="30363D"/>
+            </a:solidFill>
+            <a:prstDash val="solid"/>
+          </a:ln>
+          <a:effectLst>
+            <a:outerShdw sx="100000" sy="100000" kx="0" ky="0" algn="bl" rotWithShape="0" blurRad="152400" dist="38100" dir="5400000">
+              <a:srgbClr val="000000">
+                <a:alpha val="45000"/>
+              </a:srgbClr>
+            </a:outerShdw>
+          </a:effectLst>
+        </p:spPr>
+      </p:sp>
+      <p:sp>
+        <p:nvSpPr>
+          <p:cNvPr id="9" name="Text 7"/>
+          <p:cNvSpPr/>
+          <p:nvPr/>
+        </p:nvSpPr>
+        <p:spPr>
+          <a:xfrm>
+            <a:off x="6675120" y="2121408"/>
+            <a:ext cx="4663440" cy="329184"/>
+          </a:xfrm>
+          <a:prstGeom prst="rect">
+            <a:avLst/>
+          </a:prstGeom>
+          <a:noFill/>
+          <a:ln/>
+        </p:spPr>
+        <p:txBody>
+          <a:bodyPr wrap="square" lIns="0" tIns="0" rIns="0" bIns="0" rtlCol="0" anchor="ctr"/>
+          <a:lstStyle/>
+          <a:p>
+            <a:pPr indent="0" marL="0">
+              <a:buNone/>
+            </a:pPr>
+            <a:r>
+              <a:rPr lang="en-US" sz="1700" b="1" dirty="0">
+                <a:solidFill>
+                  <a:srgbClr val="F0A429"/>
+                </a:solidFill>
+                <a:latin typeface="Arial" pitchFamily="34" charset="0"/>
+                <a:ea typeface="Arial" pitchFamily="34" charset="-122"/>
+                <a:cs typeface="Arial" pitchFamily="34" charset="-120"/>
+              </a:rPr>
+              <a:t>Attachments · who can delete</a:t>
+            </a:r>
+            <a:endParaRPr lang="en-US" sz="1700" dirty="0"/>
+          </a:p>
+        </p:txBody>
+      </p:sp>
+      <p:sp>
+        <p:nvSpPr>
+          <p:cNvPr id="10" name="Text 8"/>
+          <p:cNvSpPr/>
+          <p:nvPr/>
+        </p:nvSpPr>
+        <p:spPr>
+          <a:xfrm>
+            <a:off x="6675120" y="2578608"/>
+            <a:ext cx="4709160" cy="2651760"/>
+          </a:xfrm>
+          <a:prstGeom prst="rect">
+            <a:avLst/>
+          </a:prstGeom>
+          <a:noFill/>
+          <a:ln/>
+        </p:spPr>
+        <p:txBody>
+          <a:bodyPr wrap="square" lIns="0" tIns="0" rIns="0" bIns="0" rtlCol="0" anchor="t"/>
+          <a:lstStyle/>
+          <a:p>
+            <a:pPr marL="342900" indent="-342900">
+              <a:lnSpc>
+                <a:spcPts val="1600"/>
+              </a:lnSpc>
+              <a:spcAft>
+                <a:spcPts val="900"/>
+              </a:spcAft>
+              <a:buSzPct val="100000"/>
+              <a:buChar char="●"/>
+            </a:pPr>
+            <a:r>
+              <a:rPr lang="en-US" sz="1200" dirty="0">
+                <a:solidFill>
+                  <a:srgbClr val="E6EDF3"/>
+                </a:solidFill>
+                <a:latin typeface="Calibri" pitchFamily="34" charset="0"/>
+                <a:ea typeface="Calibri" pitchFamily="34" charset="-122"/>
+                <a:cs typeface="Calibri" pitchFamily="34" charset="-120"/>
+              </a:rPr>
+              <a:t>📎 on a row holds drawings, the TOR and client enquiries. They are stored on SharePoint, not in your browser</a:t>
+            </a:r>
+            <a:endParaRPr lang="en-US" sz="1200" dirty="0"/>
+          </a:p>
+          <a:p>
+            <a:pPr marL="342900" indent="-342900">
+              <a:lnSpc>
+                <a:spcPts val="1600"/>
+              </a:lnSpc>
+              <a:spcAft>
+                <a:spcPts val="900"/>
+              </a:spcAft>
+              <a:buSzPct val="100000"/>
+              <a:buChar char="●"/>
+            </a:pPr>
+            <a:r>
+              <a:rPr lang="en-US" sz="1200" dirty="0">
+                <a:solidFill>
+                  <a:srgbClr val="E6EDF3"/>
+                </a:solidFill>
+                <a:latin typeface="Calibri" pitchFamily="34" charset="0"/>
+                <a:ea typeface="Calibri" pitchFamily="34" charset="-122"/>
+                <a:cs typeface="Calibri" pitchFamily="34" charset="-120"/>
+              </a:rPr>
+              <a:t>Anyone who can see the CE can open its files. Links that used to fail now open the document in SharePoint</a:t>
+            </a:r>
+            <a:endParaRPr lang="en-US" sz="1200" dirty="0"/>
+          </a:p>
+          <a:p>
+            <a:pPr marL="342900" indent="-342900">
+              <a:lnSpc>
+                <a:spcPts val="1600"/>
+              </a:lnSpc>
+              <a:spcAft>
+                <a:spcPts val="900"/>
+              </a:spcAft>
+              <a:buSzPct val="100000"/>
+              <a:buChar char="●"/>
+            </a:pPr>
+            <a:r>
+              <a:rPr lang="en-US" sz="1200" dirty="0">
+                <a:solidFill>
+                  <a:srgbClr val="E6EDF3"/>
+                </a:solidFill>
+                <a:latin typeface="Calibri" pitchFamily="34" charset="0"/>
+                <a:ea typeface="Calibri" pitchFamily="34" charset="-122"/>
+                <a:cs typeface="Calibri" pitchFamily="34" charset="-120"/>
+              </a:rPr>
+              <a:t>Only an admin or the owner can delete a CE, or one of its attachments. Your own unsaved draft is still yours to discard</a:t>
+            </a:r>
+            <a:endParaRPr lang="en-US" sz="1200" dirty="0"/>
+          </a:p>
+          <a:p>
+            <a:pPr marL="342900" indent="-342900">
+              <a:lnSpc>
+                <a:spcPts val="1600"/>
+              </a:lnSpc>
+              <a:spcAft>
+                <a:spcPts val="900"/>
+              </a:spcAft>
+              <a:buSzPct val="100000"/>
+              <a:buChar char="●"/>
+            </a:pPr>
+            <a:r>
+              <a:rPr lang="en-US" sz="1200" dirty="0">
+                <a:solidFill>
+                  <a:srgbClr val="E6EDF3"/>
+                </a:solidFill>
+                <a:latin typeface="Calibri" pitchFamily="34" charset="0"/>
+                <a:ea typeface="Calibri" pitchFamily="34" charset="-122"/>
+                <a:cs typeface="Calibri" pitchFamily="34" charset="-120"/>
+              </a:rPr>
+              <a:t>If the panel cannot read the list it says so. It no longer reports "no attachments" when the real problem is a dropped sign-in</a:t>
+            </a:r>
+            <a:endParaRPr lang="en-US" sz="1200" dirty="0"/>
+          </a:p>
+        </p:txBody>
+      </p:sp>
+      <p:sp>
+        <p:nvSpPr>
+          <p:cNvPr id="11" name="Text 9"/>
+          <p:cNvSpPr/>
+          <p:nvPr/>
+        </p:nvSpPr>
+        <p:spPr>
+          <a:xfrm>
+            <a:off x="566928" y="6437376"/>
+            <a:ext cx="5486400" cy="237744"/>
+          </a:xfrm>
+          <a:prstGeom prst="rect">
+            <a:avLst/>
+          </a:prstGeom>
+          <a:noFill/>
+          <a:ln/>
+        </p:spPr>
+        <p:txBody>
+          <a:bodyPr wrap="square" lIns="0" tIns="0" rIns="0" bIns="0" rtlCol="0" anchor="ctr"/>
+          <a:lstStyle/>
+          <a:p>
+            <a:pPr indent="0" marL="0">
+              <a:buNone/>
+            </a:pPr>
+            <a:r>
+              <a:rPr lang="en-US" sz="900" dirty="0">
+                <a:solidFill>
+                  <a:srgbClr val="6E7681"/>
+                </a:solidFill>
+                <a:latin typeface="Calibri" pitchFamily="34" charset="0"/>
+                <a:ea typeface="Calibri" pitchFamily="34" charset="-122"/>
+                <a:cs typeface="Calibri" pitchFamily="34" charset="-120"/>
+              </a:rPr>
+              <a:t>SHIC Cost Estimator — End-User Manual</a:t>
+            </a:r>
+            <a:endParaRPr lang="en-US" sz="900" dirty="0"/>
+          </a:p>
+        </p:txBody>
+      </p:sp>
+      <p:sp>
+        <p:nvSpPr>
+          <p:cNvPr id="12" name="Text 10"/>
+          <p:cNvSpPr/>
+          <p:nvPr/>
+        </p:nvSpPr>
+        <p:spPr>
+          <a:xfrm>
+            <a:off x="10981944" y="6437376"/>
+            <a:ext cx="640080" cy="237744"/>
+          </a:xfrm>
+          <a:prstGeom prst="rect">
+            <a:avLst/>
+          </a:prstGeom>
+          <a:noFill/>
+          <a:ln/>
+        </p:spPr>
+        <p:txBody>
+          <a:bodyPr wrap="square" lIns="0" tIns="0" rIns="0" bIns="0" rtlCol="0" anchor="ctr"/>
+          <a:lstStyle/>
+          <a:p>
+            <a:pPr algn="r" indent="0" marL="0">
+              <a:buNone/>
+            </a:pPr>
+            <a:r>
+              <a:rPr lang="en-US" sz="900" dirty="0">
+                <a:solidFill>
+                  <a:srgbClr val="6E7681"/>
+                </a:solidFill>
+                <a:latin typeface="Calibri" pitchFamily="34" charset="0"/>
+                <a:ea typeface="Calibri" pitchFamily="34" charset="-122"/>
+                <a:cs typeface="Calibri" pitchFamily="34" charset="-120"/>
+              </a:rPr>
+              <a:t>20</a:t>
             </a:r>
             <a:endParaRPr lang="en-US" sz="900" dirty="0"/>
           </a:p>
@@ -30156,7 +32264,7 @@
                 <a:ea typeface="Calibri" pitchFamily="34" charset="-122"/>
                 <a:cs typeface="Calibri" pitchFamily="34" charset="-120"/>
               </a:rPr>
-              <a:t>3 hours over 10 days is charged as 30 hours, matching the OT HRS column on our own manpower loading sheet. Overtime is paid at 1.25 × the hourly rate (day rate ÷ 8).</a:t>
+              <a:t>3 hours over 10 days is charged as 30 hours, matching the OT HRS column on our own manpower loading sheet. Overtime is paid at 1.25 × the hourly rate (day rate ÷ 8) unless you change the OT rate on this CE.</a:t>
             </a:r>
             <a:endParaRPr lang="en-US" sz="1200" dirty="0"/>
           </a:p>
@@ -30344,7 +32452,7 @@
                 <a:ea typeface="Arial" pitchFamily="34" charset="-122"/>
                 <a:cs typeface="Arial" pitchFamily="34" charset="-120"/>
               </a:rPr>
-              <a:t>Shifts</a:t>
+              <a:t>Shifts — and their multipliers</a:t>
             </a:r>
             <a:endParaRPr lang="en-US" sz="1400" dirty="0"/>
           </a:p>
@@ -30386,7 +32494,7 @@
                 <a:ea typeface="Calibri" pitchFamily="34" charset="-122"/>
                 <a:cs typeface="Calibri" pitchFamily="34" charset="-120"/>
               </a:rPr>
-              <a:t>Regular, night, Sunday and holiday each carry their own multiplier. Group rows under the right shift heading.</a:t>
+              <a:t>Regular, night, Sunday and holiday each carry their own multiplier. Both it and the OT rate are boxes you can edit — a changed one is marked ●. Edits apply to this CE only.</a:t>
             </a:r>
             <a:endParaRPr lang="en-US" sz="1100" dirty="0"/>
           </a:p>
